--- a/unit6-lesson21-wukong.pptx
+++ b/unit6-lesson21-wukong.pptx
@@ -11,6 +11,8 @@
     <p:sldId id="259" r:id="rId10"/>
     <p:sldId id="260" r:id="rId11"/>
     <p:sldId id="261" r:id="rId12"/>
+    <p:sldId id="262" r:id="rId13"/>
+    <p:sldId id="263" r:id="rId14"/>
   </p:sldIdLst>
   <p:sldSz cx="12191695" cy="6858000" type="screen4x3"/>
   <p:notesSz cx="6858000" cy="9144000"/>
@@ -3095,7 +3097,7 @@
       <p:grpSpPr/>
       <p:pic>
         <p:nvPicPr>
-          <p:cNvPr id="2" name="Picture 1" descr="bg_lunyu.png"/>
+          <p:cNvPr id="2" name="Picture 1" descr="bg_wukong.png"/>
           <p:cNvPicPr>
             <a:picLocks noChangeAspect="1"/>
           </p:cNvPicPr>
@@ -3125,17 +3127,17 @@
         </p:nvSpPr>
         <p:spPr>
           <a:xfrm>
-            <a:off x="0" y="0"/>
-            <a:ext cx="12191695" cy="164592"/>
-          </a:xfrm>
-          <a:prstGeom prst="rect">
-            <a:avLst/>
-          </a:prstGeom>
-          <a:solidFill>
-            <a:srgbClr val="3C2D1E"/>
-          </a:solidFill>
-          <a:ln>
-            <a:noFill/>
+            <a:off x="292608" y="274320"/>
+            <a:ext cx="11594592" cy="6300216"/>
+          </a:xfrm>
+          <a:prstGeom prst="rect">
+            <a:avLst/>
+          </a:prstGeom>
+          <a:noFill/>
+          <a:ln w="31750">
+            <a:solidFill>
+              <a:srgbClr val="C85A32"/>
+            </a:solidFill>
           </a:ln>
         </p:spPr>
         <p:style>
@@ -3160,25 +3162,73 @@
           </a:p>
         </p:txBody>
       </p:sp>
-      <p:sp>
-        <p:nvSpPr>
-          <p:cNvPr id="4" name="Rectangle 3"/>
+      <p:pic>
+        <p:nvPicPr>
+          <p:cNvPr id="4" name="Picture 3" descr="corner_wukong_tl.png"/>
+          <p:cNvPicPr>
+            <a:picLocks noChangeAspect="1"/>
+          </p:cNvPicPr>
+          <p:nvPr/>
+        </p:nvPicPr>
+        <p:blipFill>
+          <a:blip r:embed="rId3"/>
+          <a:stretch>
+            <a:fillRect/>
+          </a:stretch>
+        </p:blipFill>
+        <p:spPr>
+          <a:xfrm>
+            <a:off x="-45720" y="-45720"/>
+            <a:ext cx="2011680" cy="2011680"/>
+          </a:xfrm>
+          <a:prstGeom prst="rect">
+            <a:avLst/>
+          </a:prstGeom>
+        </p:spPr>
+      </p:pic>
+      <p:pic>
+        <p:nvPicPr>
+          <p:cNvPr id="5" name="Picture 4" descr="corner_wukong_tr.png"/>
+          <p:cNvPicPr>
+            <a:picLocks noChangeAspect="1"/>
+          </p:cNvPicPr>
+          <p:nvPr/>
+        </p:nvPicPr>
+        <p:blipFill>
+          <a:blip r:embed="rId4"/>
+          <a:stretch>
+            <a:fillRect/>
+          </a:stretch>
+        </p:blipFill>
+        <p:spPr>
+          <a:xfrm>
+            <a:off x="9875520" y="-45720"/>
+            <a:ext cx="2011680" cy="2011680"/>
+          </a:xfrm>
+          <a:prstGeom prst="rect">
+            <a:avLst/>
+          </a:prstGeom>
+        </p:spPr>
+      </p:pic>
+      <p:sp>
+        <p:nvSpPr>
+          <p:cNvPr id="6" name="Rectangle 5"/>
           <p:cNvSpPr/>
           <p:nvPr/>
         </p:nvSpPr>
         <p:spPr>
           <a:xfrm>
-            <a:off x="9601200" y="0"/>
-            <a:ext cx="2560320" cy="6858000"/>
-          </a:xfrm>
-          <a:prstGeom prst="rect">
-            <a:avLst/>
-          </a:prstGeom>
-          <a:solidFill>
-            <a:srgbClr val="8C3C28"/>
-          </a:solidFill>
-          <a:ln>
-            <a:noFill/>
+            <a:off x="292608" y="274320"/>
+            <a:ext cx="11594592" cy="6300216"/>
+          </a:xfrm>
+          <a:prstGeom prst="rect">
+            <a:avLst/>
+          </a:prstGeom>
+          <a:noFill/>
+          <a:ln w="31750">
+            <a:solidFill>
+              <a:srgbClr val="C85A32"/>
+            </a:solidFill>
           </a:ln>
         </p:spPr>
         <p:style>
@@ -3205,14 +3255,57 @@
       </p:sp>
       <p:sp>
         <p:nvSpPr>
-          <p:cNvPr id="5" name="TextBox 4"/>
+          <p:cNvPr id="7" name="Rectangle 6"/>
+          <p:cNvSpPr/>
+          <p:nvPr/>
+        </p:nvSpPr>
+        <p:spPr>
+          <a:xfrm>
+            <a:off x="347472" y="329184"/>
+            <a:ext cx="11484864" cy="6190488"/>
+          </a:xfrm>
+          <a:prstGeom prst="rect">
+            <a:avLst/>
+          </a:prstGeom>
+          <a:noFill/>
+          <a:ln w="12700">
+            <a:solidFill>
+              <a:srgbClr val="FFB464"/>
+            </a:solidFill>
+          </a:ln>
+        </p:spPr>
+        <p:style>
+          <a:lnRef idx="1">
+            <a:schemeClr val="accent1"/>
+          </a:lnRef>
+          <a:fillRef idx="3">
+            <a:schemeClr val="accent1"/>
+          </a:fillRef>
+          <a:effectRef idx="2">
+            <a:schemeClr val="accent1"/>
+          </a:effectRef>
+          <a:fontRef idx="minor">
+            <a:schemeClr val="lt1"/>
+          </a:fontRef>
+        </p:style>
+        <p:txBody>
+          <a:bodyPr rtlCol="0" anchor="ctr"/>
+          <a:lstStyle/>
+          <a:p>
+            <a:pPr algn="ctr"/>
+          </a:p>
+        </p:txBody>
+      </p:sp>
+      <p:sp>
+        <p:nvSpPr>
+          <p:cNvPr id="8" name="TextBox 7"/>
           <p:cNvSpPr txBox="1"/>
           <p:nvPr/>
         </p:nvSpPr>
         <p:spPr>
           <a:xfrm>
-            <a:off x="1097280" y="1828800"/>
-            <a:ext cx="7772400" cy="2286000"/>
+            <a:off x="1371600" y="1828800"/>
+            <a:ext cx="9418320" cy="1828800"/>
           </a:xfrm>
           <a:prstGeom prst="rect">
             <a:avLst/>
@@ -3225,15 +3318,15 @@
           </a:bodyPr>
           <a:lstStyle/>
           <a:p>
-            <a:pPr algn="l">
+            <a:pPr algn="ctr">
               <a:spcAft>
-                <a:spcPts val="800"/>
+                <a:spcPts val="1000"/>
               </a:spcAft>
             </a:pPr>
             <a:r>
-              <a:rPr sz="5600" b="1">
-                <a:solidFill>
-                  <a:srgbClr val="3C2D1E"/>
+              <a:rPr sz="5200" b="1">
+                <a:solidFill>
+                  <a:srgbClr val="DC5028"/>
                 </a:solidFill>
                 <a:latin typeface="Microsoft YaHei"/>
               </a:rPr>
@@ -3241,60 +3334,42 @@
             </a:r>
           </a:p>
           <a:p>
-            <a:pPr algn="l">
+            <a:pPr algn="ctr">
               <a:spcAft>
-                <a:spcPts val="1400"/>
+                <a:spcPts val="1000"/>
               </a:spcAft>
             </a:pPr>
             <a:r>
-              <a:rPr sz="2800" b="0">
-                <a:solidFill>
-                  <a:srgbClr val="8C3C28"/>
+              <a:rPr sz="2600" b="0">
+                <a:solidFill>
+                  <a:srgbClr val="502814"/>
                 </a:solidFill>
                 <a:latin typeface="Microsoft YaHei"/>
               </a:rPr>
-              <a:t>第21课 · 吴承恩《西游记》</a:t>
-            </a:r>
-          </a:p>
-          <a:p>
-            <a:pPr algn="l">
-              <a:spcAft>
-                <a:spcPts val="1400"/>
-              </a:spcAft>
-            </a:pPr>
-            <a:r>
-              <a:rPr sz="2200" b="0">
-                <a:solidFill>
-                  <a:srgbClr val="B4823C"/>
-                </a:solidFill>
-                <a:latin typeface="Microsoft YaHei"/>
-              </a:rPr>
-              <a:t>母题：自由与规则</a:t>
-            </a:r>
-          </a:p>
-        </p:txBody>
-      </p:sp>
-      <p:sp>
-        <p:nvSpPr>
-          <p:cNvPr id="6" name="Oval 5"/>
+              <a:t>第21课 · 第二、三课时 · 自由与规则</a:t>
+            </a:r>
+          </a:p>
+        </p:txBody>
+      </p:sp>
+      <p:sp>
+        <p:nvSpPr>
+          <p:cNvPr id="9" name="Rectangle 8"/>
           <p:cNvSpPr/>
           <p:nvPr/>
         </p:nvSpPr>
         <p:spPr>
           <a:xfrm>
-            <a:off x="10058400" y="2286000"/>
-            <a:ext cx="1645920" cy="1645920"/>
-          </a:xfrm>
-          <a:prstGeom prst="ellipse">
+            <a:off x="3200400" y="5029200"/>
+            <a:ext cx="5760720" cy="27432"/>
+          </a:xfrm>
+          <a:prstGeom prst="rect">
             <a:avLst/>
           </a:prstGeom>
           <a:solidFill>
-            <a:srgbClr val="B4823C"/>
+            <a:srgbClr val="FFB464"/>
           </a:solidFill>
           <a:ln>
-            <a:solidFill>
-              <a:srgbClr val="3C2D1E"/>
-            </a:solidFill>
+            <a:noFill/>
           </a:ln>
         </p:spPr>
         <p:style>
@@ -3339,7 +3414,7 @@
       <p:grpSpPr/>
       <p:pic>
         <p:nvPicPr>
-          <p:cNvPr id="2" name="Picture 1" descr="bg_lunyu.png"/>
+          <p:cNvPr id="2" name="Picture 1" descr="bg_wukong.png"/>
           <p:cNvPicPr>
             <a:picLocks noChangeAspect="1"/>
           </p:cNvPicPr>
@@ -3369,17 +3444,17 @@
         </p:nvSpPr>
         <p:spPr>
           <a:xfrm>
-            <a:off x="0" y="0"/>
-            <a:ext cx="12191695" cy="164592"/>
-          </a:xfrm>
-          <a:prstGeom prst="rect">
-            <a:avLst/>
-          </a:prstGeom>
-          <a:solidFill>
-            <a:srgbClr val="3C2D1E"/>
-          </a:solidFill>
-          <a:ln>
-            <a:noFill/>
+            <a:off x="292608" y="274320"/>
+            <a:ext cx="11594592" cy="6300216"/>
+          </a:xfrm>
+          <a:prstGeom prst="rect">
+            <a:avLst/>
+          </a:prstGeom>
+          <a:noFill/>
+          <a:ln w="31750">
+            <a:solidFill>
+              <a:srgbClr val="C85A32"/>
+            </a:solidFill>
           </a:ln>
         </p:spPr>
         <p:style>
@@ -3404,61 +3479,70 @@
           </a:p>
         </p:txBody>
       </p:sp>
-      <p:sp>
-        <p:nvSpPr>
-          <p:cNvPr id="4" name="TextBox 3"/>
-          <p:cNvSpPr txBox="1"/>
-          <p:nvPr/>
-        </p:nvSpPr>
-        <p:spPr>
-          <a:xfrm>
-            <a:off x="1371600" y="640080"/>
-            <a:ext cx="4572000" cy="731520"/>
-          </a:xfrm>
-          <a:prstGeom prst="rect">
-            <a:avLst/>
-          </a:prstGeom>
-          <a:noFill/>
-        </p:spPr>
-        <p:txBody>
-          <a:bodyPr wrap="none">
-            <a:spAutoFit/>
-          </a:bodyPr>
-          <a:lstStyle/>
-          <a:p>
-            <a:pPr algn="l">
-              <a:spcAft>
-                <a:spcPts val="800"/>
-              </a:spcAft>
-            </a:pPr>
-            <a:r>
-              <a:rPr sz="4400" b="1">
-                <a:solidFill>
-                  <a:srgbClr val="3C2D1E"/>
-                </a:solidFill>
-                <a:latin typeface="Microsoft YaHei"/>
-              </a:rPr>
-              <a:t>文学常识</a:t>
-            </a:r>
-          </a:p>
-        </p:txBody>
-      </p:sp>
-      <p:sp>
-        <p:nvSpPr>
-          <p:cNvPr id="5" name="Rectangle 4"/>
+      <p:pic>
+        <p:nvPicPr>
+          <p:cNvPr id="4" name="Picture 3" descr="corner_wukong_tl.png"/>
+          <p:cNvPicPr>
+            <a:picLocks noChangeAspect="1"/>
+          </p:cNvPicPr>
+          <p:nvPr/>
+        </p:nvPicPr>
+        <p:blipFill>
+          <a:blip r:embed="rId3"/>
+          <a:stretch>
+            <a:fillRect/>
+          </a:stretch>
+        </p:blipFill>
+        <p:spPr>
+          <a:xfrm>
+            <a:off x="-45720" y="-45720"/>
+            <a:ext cx="2011680" cy="2011680"/>
+          </a:xfrm>
+          <a:prstGeom prst="rect">
+            <a:avLst/>
+          </a:prstGeom>
+        </p:spPr>
+      </p:pic>
+      <p:pic>
+        <p:nvPicPr>
+          <p:cNvPr id="5" name="Picture 4" descr="corner_wukong_tr.png"/>
+          <p:cNvPicPr>
+            <a:picLocks noChangeAspect="1"/>
+          </p:cNvPicPr>
+          <p:nvPr/>
+        </p:nvPicPr>
+        <p:blipFill>
+          <a:blip r:embed="rId4"/>
+          <a:stretch>
+            <a:fillRect/>
+          </a:stretch>
+        </p:blipFill>
+        <p:spPr>
+          <a:xfrm>
+            <a:off x="9875520" y="-45720"/>
+            <a:ext cx="2011680" cy="2011680"/>
+          </a:xfrm>
+          <a:prstGeom prst="rect">
+            <a:avLst/>
+          </a:prstGeom>
+        </p:spPr>
+      </p:pic>
+      <p:sp>
+        <p:nvSpPr>
+          <p:cNvPr id="6" name="Rounded Rectangle 5"/>
           <p:cNvSpPr/>
           <p:nvPr/>
         </p:nvSpPr>
         <p:spPr>
           <a:xfrm>
-            <a:off x="1371600" y="1325880"/>
-            <a:ext cx="3657600" cy="36576"/>
-          </a:xfrm>
-          <a:prstGeom prst="rect">
+            <a:off x="4953304" y="502920"/>
+            <a:ext cx="2286000" cy="411480"/>
+          </a:xfrm>
+          <a:prstGeom prst="roundRect">
             <a:avLst/>
           </a:prstGeom>
           <a:solidFill>
-            <a:srgbClr val="8C3C28"/>
+            <a:srgbClr val="FFB464"/>
           </a:solidFill>
           <a:ln>
             <a:noFill/>
@@ -3488,14 +3572,14 @@
       </p:sp>
       <p:sp>
         <p:nvSpPr>
-          <p:cNvPr id="6" name="TextBox 5"/>
+          <p:cNvPr id="7" name="TextBox 6"/>
           <p:cNvSpPr txBox="1"/>
           <p:nvPr/>
         </p:nvSpPr>
         <p:spPr>
           <a:xfrm>
-            <a:off x="1371600" y="1417320"/>
-            <a:ext cx="5486400" cy="457200"/>
+            <a:off x="4953304" y="521208"/>
+            <a:ext cx="2286000" cy="384048"/>
           </a:xfrm>
           <a:prstGeom prst="rect">
             <a:avLst/>
@@ -3508,44 +3592,81 @@
           </a:bodyPr>
           <a:lstStyle/>
           <a:p>
-            <a:pPr algn="l">
+            <a:pPr algn="ctr">
               <a:spcAft>
-                <a:spcPts val="800"/>
+                <a:spcPts val="1000"/>
               </a:spcAft>
             </a:pPr>
             <a:r>
-              <a:rPr sz="2400" b="0">
-                <a:solidFill>
-                  <a:srgbClr val="8C3C28"/>
+              <a:rPr sz="1800" b="1">
+                <a:solidFill>
+                  <a:srgbClr val="502814"/>
                 </a:solidFill>
                 <a:latin typeface="Microsoft YaHei"/>
               </a:rPr>
-              <a:t>选文背景</a:t>
-            </a:r>
-          </a:p>
-        </p:txBody>
-      </p:sp>
-      <p:sp>
-        <p:nvSpPr>
-          <p:cNvPr id="7" name="Rectangle 6"/>
+              <a:t>课堂笔记</a:t>
+            </a:r>
+          </a:p>
+        </p:txBody>
+      </p:sp>
+      <p:sp>
+        <p:nvSpPr>
+          <p:cNvPr id="8" name="TextBox 7"/>
+          <p:cNvSpPr txBox="1"/>
+          <p:nvPr/>
+        </p:nvSpPr>
+        <p:spPr>
+          <a:xfrm>
+            <a:off x="1371600" y="1051560"/>
+            <a:ext cx="9418320" cy="822960"/>
+          </a:xfrm>
+          <a:prstGeom prst="rect">
+            <a:avLst/>
+          </a:prstGeom>
+          <a:noFill/>
+        </p:spPr>
+        <p:txBody>
+          <a:bodyPr wrap="square">
+            <a:spAutoFit/>
+          </a:bodyPr>
+          <a:lstStyle/>
+          <a:p>
+            <a:pPr algn="ctr">
+              <a:spcAft>
+                <a:spcPts val="1000"/>
+              </a:spcAft>
+            </a:pPr>
+            <a:r>
+              <a:rPr sz="3600" b="1">
+                <a:solidFill>
+                  <a:srgbClr val="DC5028"/>
+                </a:solidFill>
+                <a:latin typeface="Microsoft YaHei"/>
+              </a:rPr>
+              <a:t>文学常识</a:t>
+            </a:r>
+          </a:p>
+        </p:txBody>
+      </p:sp>
+      <p:sp>
+        <p:nvSpPr>
+          <p:cNvPr id="9" name="Rectangle 8"/>
           <p:cNvSpPr/>
           <p:nvPr/>
         </p:nvSpPr>
         <p:spPr>
           <a:xfrm>
-            <a:off x="1188720" y="2011680"/>
-            <a:ext cx="7132320" cy="4114800"/>
+            <a:off x="3200400" y="1691640"/>
+            <a:ext cx="5760720" cy="27432"/>
           </a:xfrm>
           <a:prstGeom prst="rect">
             <a:avLst/>
           </a:prstGeom>
           <a:solidFill>
-            <a:srgbClr val="FFFCF5"/>
+            <a:srgbClr val="FFB464"/>
           </a:solidFill>
-          <a:ln w="19050">
-            <a:solidFill>
-              <a:srgbClr val="B4823C"/>
-            </a:solidFill>
+          <a:ln>
+            <a:noFill/>
           </a:ln>
         </p:spPr>
         <p:style>
@@ -3572,336 +3693,24 @@
       </p:sp>
       <p:sp>
         <p:nvSpPr>
-          <p:cNvPr id="8" name="TextBox 7"/>
-          <p:cNvSpPr txBox="1"/>
-          <p:nvPr/>
-        </p:nvSpPr>
-        <p:spPr>
-          <a:xfrm>
-            <a:off x="1463040" y="2194560"/>
-            <a:ext cx="2011680" cy="411480"/>
-          </a:xfrm>
-          <a:prstGeom prst="rect">
-            <a:avLst/>
-          </a:prstGeom>
-          <a:noFill/>
-        </p:spPr>
-        <p:txBody>
-          <a:bodyPr wrap="none">
-            <a:spAutoFit/>
-          </a:bodyPr>
-          <a:lstStyle/>
-          <a:p>
-            <a:pPr algn="l">
-              <a:spcAft>
-                <a:spcPts val="800"/>
-              </a:spcAft>
-            </a:pPr>
-            <a:r>
-              <a:rPr sz="2200" b="1">
-                <a:solidFill>
-                  <a:srgbClr val="8C3C28"/>
-                </a:solidFill>
-                <a:latin typeface="Microsoft YaHei"/>
-              </a:rPr>
-              <a:t>【作者】</a:t>
-            </a:r>
-          </a:p>
-        </p:txBody>
-      </p:sp>
-      <p:sp>
-        <p:nvSpPr>
-          <p:cNvPr id="9" name="TextBox 8"/>
-          <p:cNvSpPr txBox="1"/>
-          <p:nvPr/>
-        </p:nvSpPr>
-        <p:spPr>
-          <a:xfrm>
-            <a:off x="3474720" y="2194560"/>
-            <a:ext cx="4572000" cy="640080"/>
-          </a:xfrm>
-          <a:prstGeom prst="rect">
-            <a:avLst/>
-          </a:prstGeom>
-          <a:noFill/>
-        </p:spPr>
-        <p:txBody>
-          <a:bodyPr wrap="none">
-            <a:spAutoFit/>
-          </a:bodyPr>
-          <a:lstStyle/>
-          <a:p>
-            <a:pPr algn="l">
-              <a:spcAft>
-                <a:spcPts val="800"/>
-              </a:spcAft>
-            </a:pPr>
-            <a:r>
-              <a:rPr sz="2200" b="0">
-                <a:solidFill>
-                  <a:srgbClr val="3C2D1E"/>
-                </a:solidFill>
-                <a:latin typeface="Microsoft YaHei"/>
-              </a:rPr>
-              <a:t>吴承恩，明代小说家</a:t>
-            </a:r>
-          </a:p>
-        </p:txBody>
-      </p:sp>
-      <p:sp>
-        <p:nvSpPr>
-          <p:cNvPr id="10" name="TextBox 9"/>
-          <p:cNvSpPr txBox="1"/>
-          <p:nvPr/>
-        </p:nvSpPr>
-        <p:spPr>
-          <a:xfrm>
-            <a:off x="1463040" y="2788920"/>
-            <a:ext cx="2011680" cy="411480"/>
-          </a:xfrm>
-          <a:prstGeom prst="rect">
-            <a:avLst/>
-          </a:prstGeom>
-          <a:noFill/>
-        </p:spPr>
-        <p:txBody>
-          <a:bodyPr wrap="none">
-            <a:spAutoFit/>
-          </a:bodyPr>
-          <a:lstStyle/>
-          <a:p>
-            <a:pPr algn="l">
-              <a:spcAft>
-                <a:spcPts val="800"/>
-              </a:spcAft>
-            </a:pPr>
-            <a:r>
-              <a:rPr sz="2200" b="1">
-                <a:solidFill>
-                  <a:srgbClr val="8C3C28"/>
-                </a:solidFill>
-                <a:latin typeface="Microsoft YaHei"/>
-              </a:rPr>
-              <a:t>【出处】</a:t>
-            </a:r>
-          </a:p>
-        </p:txBody>
-      </p:sp>
-      <p:sp>
-        <p:nvSpPr>
-          <p:cNvPr id="11" name="TextBox 10"/>
-          <p:cNvSpPr txBox="1"/>
-          <p:nvPr/>
-        </p:nvSpPr>
-        <p:spPr>
-          <a:xfrm>
-            <a:off x="3474720" y="2788920"/>
-            <a:ext cx="4572000" cy="640080"/>
-          </a:xfrm>
-          <a:prstGeom prst="rect">
-            <a:avLst/>
-          </a:prstGeom>
-          <a:noFill/>
-        </p:spPr>
-        <p:txBody>
-          <a:bodyPr wrap="none">
-            <a:spAutoFit/>
-          </a:bodyPr>
-          <a:lstStyle/>
-          <a:p>
-            <a:pPr algn="l">
-              <a:spcAft>
-                <a:spcPts val="800"/>
-              </a:spcAft>
-            </a:pPr>
-            <a:r>
-              <a:rPr sz="2200" b="0">
-                <a:solidFill>
-                  <a:srgbClr val="3C2D1E"/>
-                </a:solidFill>
-                <a:latin typeface="Microsoft YaHei"/>
-              </a:rPr>
-              <a:t>章回体长篇小说《西游记》</a:t>
-            </a:r>
-          </a:p>
-        </p:txBody>
-      </p:sp>
-      <p:sp>
-        <p:nvSpPr>
-          <p:cNvPr id="12" name="TextBox 11"/>
-          <p:cNvSpPr txBox="1"/>
-          <p:nvPr/>
-        </p:nvSpPr>
-        <p:spPr>
-          <a:xfrm>
-            <a:off x="1463040" y="3383279"/>
-            <a:ext cx="2011680" cy="411480"/>
-          </a:xfrm>
-          <a:prstGeom prst="rect">
-            <a:avLst/>
-          </a:prstGeom>
-          <a:noFill/>
-        </p:spPr>
-        <p:txBody>
-          <a:bodyPr wrap="none">
-            <a:spAutoFit/>
-          </a:bodyPr>
-          <a:lstStyle/>
-          <a:p>
-            <a:pPr algn="l">
-              <a:spcAft>
-                <a:spcPts val="800"/>
-              </a:spcAft>
-            </a:pPr>
-            <a:r>
-              <a:rPr sz="2200" b="1">
-                <a:solidFill>
-                  <a:srgbClr val="8C3C28"/>
-                </a:solidFill>
-                <a:latin typeface="Microsoft YaHei"/>
-              </a:rPr>
-              <a:t>【文体】</a:t>
-            </a:r>
-          </a:p>
-        </p:txBody>
-      </p:sp>
-      <p:sp>
-        <p:nvSpPr>
-          <p:cNvPr id="13" name="TextBox 12"/>
-          <p:cNvSpPr txBox="1"/>
-          <p:nvPr/>
-        </p:nvSpPr>
-        <p:spPr>
-          <a:xfrm>
-            <a:off x="3474720" y="3383279"/>
-            <a:ext cx="4572000" cy="640080"/>
-          </a:xfrm>
-          <a:prstGeom prst="rect">
-            <a:avLst/>
-          </a:prstGeom>
-          <a:noFill/>
-        </p:spPr>
-        <p:txBody>
-          <a:bodyPr wrap="none">
-            <a:spAutoFit/>
-          </a:bodyPr>
-          <a:lstStyle/>
-          <a:p>
-            <a:pPr algn="l">
-              <a:spcAft>
-                <a:spcPts val="800"/>
-              </a:spcAft>
-            </a:pPr>
-            <a:r>
-              <a:rPr sz="2200" b="0">
-                <a:solidFill>
-                  <a:srgbClr val="3C2D1E"/>
-                </a:solidFill>
-                <a:latin typeface="Microsoft YaHei"/>
-              </a:rPr>
-              <a:t>神魔小说——以神魔斗法写人情世故</a:t>
-            </a:r>
-          </a:p>
-        </p:txBody>
-      </p:sp>
-      <p:sp>
-        <p:nvSpPr>
-          <p:cNvPr id="14" name="TextBox 13"/>
-          <p:cNvSpPr txBox="1"/>
-          <p:nvPr/>
-        </p:nvSpPr>
-        <p:spPr>
-          <a:xfrm>
-            <a:off x="1463040" y="3977639"/>
-            <a:ext cx="2011680" cy="411480"/>
-          </a:xfrm>
-          <a:prstGeom prst="rect">
-            <a:avLst/>
-          </a:prstGeom>
-          <a:noFill/>
-        </p:spPr>
-        <p:txBody>
-          <a:bodyPr wrap="none">
-            <a:spAutoFit/>
-          </a:bodyPr>
-          <a:lstStyle/>
-          <a:p>
-            <a:pPr algn="l">
-              <a:spcAft>
-                <a:spcPts val="800"/>
-              </a:spcAft>
-            </a:pPr>
-            <a:r>
-              <a:rPr sz="2200" b="1">
-                <a:solidFill>
-                  <a:srgbClr val="8C3C28"/>
-                </a:solidFill>
-                <a:latin typeface="Microsoft YaHei"/>
-              </a:rPr>
-              <a:t>【情节】</a:t>
-            </a:r>
-          </a:p>
-        </p:txBody>
-      </p:sp>
-      <p:sp>
-        <p:nvSpPr>
-          <p:cNvPr id="15" name="TextBox 14"/>
-          <p:cNvSpPr txBox="1"/>
-          <p:nvPr/>
-        </p:nvSpPr>
-        <p:spPr>
-          <a:xfrm>
-            <a:off x="3474720" y="3977639"/>
-            <a:ext cx="4572000" cy="640080"/>
-          </a:xfrm>
-          <a:prstGeom prst="rect">
-            <a:avLst/>
-          </a:prstGeom>
-          <a:noFill/>
-        </p:spPr>
-        <p:txBody>
-          <a:bodyPr wrap="none">
-            <a:spAutoFit/>
-          </a:bodyPr>
-          <a:lstStyle/>
-          <a:p>
-            <a:pPr algn="l">
-              <a:spcAft>
-                <a:spcPts val="800"/>
-              </a:spcAft>
-            </a:pPr>
-            <a:r>
-              <a:rPr sz="2200" b="0">
-                <a:solidFill>
-                  <a:srgbClr val="3C2D1E"/>
-                </a:solidFill>
-                <a:latin typeface="Microsoft YaHei"/>
-              </a:rPr>
-              <a:t>悟空大闹天宫后，二郎神奉旨捉拿，二人变化斗法</a:t>
-            </a:r>
-          </a:p>
-        </p:txBody>
-      </p:sp>
-      <p:sp>
-        <p:nvSpPr>
-          <p:cNvPr id="16" name="Rectangle 15"/>
+          <p:cNvPr id="10" name="Rounded Rectangle 9"/>
           <p:cNvSpPr/>
           <p:nvPr/>
         </p:nvSpPr>
         <p:spPr>
           <a:xfrm>
-            <a:off x="8686800" y="2011680"/>
-            <a:ext cx="2926080" cy="4114800"/>
-          </a:xfrm>
-          <a:prstGeom prst="rect">
+            <a:off x="1249984" y="1810512"/>
+            <a:ext cx="9692640" cy="3319272"/>
+          </a:xfrm>
+          <a:prstGeom prst="roundRect">
             <a:avLst/>
           </a:prstGeom>
           <a:solidFill>
-            <a:srgbClr val="8C3C28"/>
+            <a:srgbClr val="FFF8F0"/>
           </a:solidFill>
-          <a:ln>
+          <a:ln w="19050">
             <a:solidFill>
-              <a:srgbClr val="8C3C28"/>
+              <a:srgbClr val="FFB464"/>
             </a:solidFill>
           </a:ln>
         </p:spPr>
@@ -3929,14 +3738,14 @@
       </p:sp>
       <p:sp>
         <p:nvSpPr>
-          <p:cNvPr id="17" name="TextBox 16"/>
+          <p:cNvPr id="11" name="TextBox 10"/>
           <p:cNvSpPr txBox="1"/>
           <p:nvPr/>
         </p:nvSpPr>
         <p:spPr>
           <a:xfrm>
-            <a:off x="8869680" y="3200400"/>
-            <a:ext cx="2560320" cy="1828800"/>
+            <a:off x="1463040" y="1920240"/>
+            <a:ext cx="2103120" cy="502920"/>
           </a:xfrm>
           <a:prstGeom prst="rect">
             <a:avLst/>
@@ -3949,20 +3758,292 @@
           </a:bodyPr>
           <a:lstStyle/>
           <a:p>
-            <a:pPr algn="ctr">
+            <a:pPr algn="r">
               <a:spcAft>
-                <a:spcPts val="800"/>
+                <a:spcPts val="1000"/>
               </a:spcAft>
             </a:pPr>
             <a:r>
-              <a:rPr sz="4800" b="1">
-                <a:solidFill>
-                  <a:srgbClr val="8C3C28"/>
+              <a:rPr sz="2200" b="1">
+                <a:solidFill>
+                  <a:srgbClr val="DC5028"/>
                 </a:solidFill>
                 <a:latin typeface="Microsoft YaHei"/>
               </a:rPr>
-              <a:t>笔
-记</a:t>
+              <a:t>作者</a:t>
+            </a:r>
+          </a:p>
+        </p:txBody>
+      </p:sp>
+      <p:sp>
+        <p:nvSpPr>
+          <p:cNvPr id="12" name="TextBox 11"/>
+          <p:cNvSpPr txBox="1"/>
+          <p:nvPr/>
+        </p:nvSpPr>
+        <p:spPr>
+          <a:xfrm>
+            <a:off x="3749039" y="1920240"/>
+            <a:ext cx="7132320" cy="685800"/>
+          </a:xfrm>
+          <a:prstGeom prst="rect">
+            <a:avLst/>
+          </a:prstGeom>
+          <a:noFill/>
+        </p:spPr>
+        <p:txBody>
+          <a:bodyPr wrap="none">
+            <a:spAutoFit/>
+          </a:bodyPr>
+          <a:lstStyle/>
+          <a:p>
+            <a:pPr algn="l">
+              <a:spcAft>
+                <a:spcPts val="1000"/>
+              </a:spcAft>
+            </a:pPr>
+            <a:r>
+              <a:rPr sz="2200" b="0">
+                <a:solidFill>
+                  <a:srgbClr val="502814"/>
+                </a:solidFill>
+                <a:latin typeface="Microsoft YaHei"/>
+              </a:rPr>
+              <a:t>吴承恩，明代小说家</a:t>
+            </a:r>
+          </a:p>
+        </p:txBody>
+      </p:sp>
+      <p:sp>
+        <p:nvSpPr>
+          <p:cNvPr id="13" name="TextBox 12"/>
+          <p:cNvSpPr txBox="1"/>
+          <p:nvPr/>
+        </p:nvSpPr>
+        <p:spPr>
+          <a:xfrm>
+            <a:off x="1463040" y="2670048"/>
+            <a:ext cx="2103120" cy="502920"/>
+          </a:xfrm>
+          <a:prstGeom prst="rect">
+            <a:avLst/>
+          </a:prstGeom>
+          <a:noFill/>
+        </p:spPr>
+        <p:txBody>
+          <a:bodyPr wrap="none">
+            <a:spAutoFit/>
+          </a:bodyPr>
+          <a:lstStyle/>
+          <a:p>
+            <a:pPr algn="r">
+              <a:spcAft>
+                <a:spcPts val="1000"/>
+              </a:spcAft>
+            </a:pPr>
+            <a:r>
+              <a:rPr sz="2200" b="1">
+                <a:solidFill>
+                  <a:srgbClr val="DC5028"/>
+                </a:solidFill>
+                <a:latin typeface="Microsoft YaHei"/>
+              </a:rPr>
+              <a:t>出处</a:t>
+            </a:r>
+          </a:p>
+        </p:txBody>
+      </p:sp>
+      <p:sp>
+        <p:nvSpPr>
+          <p:cNvPr id="14" name="TextBox 13"/>
+          <p:cNvSpPr txBox="1"/>
+          <p:nvPr/>
+        </p:nvSpPr>
+        <p:spPr>
+          <a:xfrm>
+            <a:off x="3749039" y="2670048"/>
+            <a:ext cx="7132320" cy="685800"/>
+          </a:xfrm>
+          <a:prstGeom prst="rect">
+            <a:avLst/>
+          </a:prstGeom>
+          <a:noFill/>
+        </p:spPr>
+        <p:txBody>
+          <a:bodyPr wrap="none">
+            <a:spAutoFit/>
+          </a:bodyPr>
+          <a:lstStyle/>
+          <a:p>
+            <a:pPr algn="l">
+              <a:spcAft>
+                <a:spcPts val="1000"/>
+              </a:spcAft>
+            </a:pPr>
+            <a:r>
+              <a:rPr sz="2200" b="0">
+                <a:solidFill>
+                  <a:srgbClr val="502814"/>
+                </a:solidFill>
+                <a:latin typeface="Microsoft YaHei"/>
+              </a:rPr>
+              <a:t>章回体长篇小说《西游记》节选</a:t>
+            </a:r>
+          </a:p>
+        </p:txBody>
+      </p:sp>
+      <p:sp>
+        <p:nvSpPr>
+          <p:cNvPr id="15" name="TextBox 14"/>
+          <p:cNvSpPr txBox="1"/>
+          <p:nvPr/>
+        </p:nvSpPr>
+        <p:spPr>
+          <a:xfrm>
+            <a:off x="1463040" y="3419856"/>
+            <a:ext cx="2103120" cy="502920"/>
+          </a:xfrm>
+          <a:prstGeom prst="rect">
+            <a:avLst/>
+          </a:prstGeom>
+          <a:noFill/>
+        </p:spPr>
+        <p:txBody>
+          <a:bodyPr wrap="none">
+            <a:spAutoFit/>
+          </a:bodyPr>
+          <a:lstStyle/>
+          <a:p>
+            <a:pPr algn="r">
+              <a:spcAft>
+                <a:spcPts val="1000"/>
+              </a:spcAft>
+            </a:pPr>
+            <a:r>
+              <a:rPr sz="2200" b="1">
+                <a:solidFill>
+                  <a:srgbClr val="DC5028"/>
+                </a:solidFill>
+                <a:latin typeface="Microsoft YaHei"/>
+              </a:rPr>
+              <a:t>文体</a:t>
+            </a:r>
+          </a:p>
+        </p:txBody>
+      </p:sp>
+      <p:sp>
+        <p:nvSpPr>
+          <p:cNvPr id="16" name="TextBox 15"/>
+          <p:cNvSpPr txBox="1"/>
+          <p:nvPr/>
+        </p:nvSpPr>
+        <p:spPr>
+          <a:xfrm>
+            <a:off x="3749039" y="3419856"/>
+            <a:ext cx="7132320" cy="685800"/>
+          </a:xfrm>
+          <a:prstGeom prst="rect">
+            <a:avLst/>
+          </a:prstGeom>
+          <a:noFill/>
+        </p:spPr>
+        <p:txBody>
+          <a:bodyPr wrap="none">
+            <a:spAutoFit/>
+          </a:bodyPr>
+          <a:lstStyle/>
+          <a:p>
+            <a:pPr algn="l">
+              <a:spcAft>
+                <a:spcPts val="1000"/>
+              </a:spcAft>
+            </a:pPr>
+            <a:r>
+              <a:rPr sz="2200" b="0">
+                <a:solidFill>
+                  <a:srgbClr val="502814"/>
+                </a:solidFill>
+                <a:latin typeface="Microsoft YaHei"/>
+              </a:rPr>
+              <a:t>神魔小说——以神魔斗法写人情世故</a:t>
+            </a:r>
+          </a:p>
+        </p:txBody>
+      </p:sp>
+      <p:sp>
+        <p:nvSpPr>
+          <p:cNvPr id="17" name="TextBox 16"/>
+          <p:cNvSpPr txBox="1"/>
+          <p:nvPr/>
+        </p:nvSpPr>
+        <p:spPr>
+          <a:xfrm>
+            <a:off x="1463040" y="4169664"/>
+            <a:ext cx="2103120" cy="502920"/>
+          </a:xfrm>
+          <a:prstGeom prst="rect">
+            <a:avLst/>
+          </a:prstGeom>
+          <a:noFill/>
+        </p:spPr>
+        <p:txBody>
+          <a:bodyPr wrap="none">
+            <a:spAutoFit/>
+          </a:bodyPr>
+          <a:lstStyle/>
+          <a:p>
+            <a:pPr algn="r">
+              <a:spcAft>
+                <a:spcPts val="1000"/>
+              </a:spcAft>
+            </a:pPr>
+            <a:r>
+              <a:rPr sz="2200" b="1">
+                <a:solidFill>
+                  <a:srgbClr val="DC5028"/>
+                </a:solidFill>
+                <a:latin typeface="Microsoft YaHei"/>
+              </a:rPr>
+              <a:t>本文情节</a:t>
+            </a:r>
+          </a:p>
+        </p:txBody>
+      </p:sp>
+      <p:sp>
+        <p:nvSpPr>
+          <p:cNvPr id="18" name="TextBox 17"/>
+          <p:cNvSpPr txBox="1"/>
+          <p:nvPr/>
+        </p:nvSpPr>
+        <p:spPr>
+          <a:xfrm>
+            <a:off x="3749039" y="4169664"/>
+            <a:ext cx="7132320" cy="685800"/>
+          </a:xfrm>
+          <a:prstGeom prst="rect">
+            <a:avLst/>
+          </a:prstGeom>
+          <a:noFill/>
+        </p:spPr>
+        <p:txBody>
+          <a:bodyPr wrap="none">
+            <a:spAutoFit/>
+          </a:bodyPr>
+          <a:lstStyle/>
+          <a:p>
+            <a:pPr algn="l">
+              <a:spcAft>
+                <a:spcPts val="1000"/>
+              </a:spcAft>
+            </a:pPr>
+            <a:r>
+              <a:rPr sz="2200" b="0">
+                <a:solidFill>
+                  <a:srgbClr val="502814"/>
+                </a:solidFill>
+                <a:latin typeface="Microsoft YaHei"/>
+              </a:rPr>
+              <a:t>孙悟空大闹天宫后，二郎神奉旨捉拿，二人变化斗法</a:t>
             </a:r>
           </a:p>
         </p:txBody>
@@ -3987,7 +4068,7 @@
       <p:grpSpPr/>
       <p:pic>
         <p:nvPicPr>
-          <p:cNvPr id="2" name="Picture 1" descr="bg_lunyu.png"/>
+          <p:cNvPr id="2" name="Picture 1" descr="bg_wukong.png"/>
           <p:cNvPicPr>
             <a:picLocks noChangeAspect="1"/>
           </p:cNvPicPr>
@@ -4017,17 +4098,17 @@
         </p:nvSpPr>
         <p:spPr>
           <a:xfrm>
-            <a:off x="0" y="0"/>
-            <a:ext cx="12191695" cy="164592"/>
-          </a:xfrm>
-          <a:prstGeom prst="rect">
-            <a:avLst/>
-          </a:prstGeom>
-          <a:solidFill>
-            <a:srgbClr val="3C2D1E"/>
-          </a:solidFill>
-          <a:ln>
-            <a:noFill/>
+            <a:off x="292608" y="274320"/>
+            <a:ext cx="11594592" cy="6300216"/>
+          </a:xfrm>
+          <a:prstGeom prst="rect">
+            <a:avLst/>
+          </a:prstGeom>
+          <a:noFill/>
+          <a:ln w="31750">
+            <a:solidFill>
+              <a:srgbClr val="C85A32"/>
+            </a:solidFill>
           </a:ln>
         </p:spPr>
         <p:style>
@@ -4052,61 +4133,70 @@
           </a:p>
         </p:txBody>
       </p:sp>
-      <p:sp>
-        <p:nvSpPr>
-          <p:cNvPr id="4" name="TextBox 3"/>
-          <p:cNvSpPr txBox="1"/>
-          <p:nvPr/>
-        </p:nvSpPr>
-        <p:spPr>
-          <a:xfrm>
-            <a:off x="1371600" y="640080"/>
-            <a:ext cx="4572000" cy="731520"/>
-          </a:xfrm>
-          <a:prstGeom prst="rect">
-            <a:avLst/>
-          </a:prstGeom>
-          <a:noFill/>
-        </p:spPr>
-        <p:txBody>
-          <a:bodyPr wrap="none">
-            <a:spAutoFit/>
-          </a:bodyPr>
-          <a:lstStyle/>
-          <a:p>
-            <a:pPr algn="l">
-              <a:spcAft>
-                <a:spcPts val="800"/>
-              </a:spcAft>
-            </a:pPr>
-            <a:r>
-              <a:rPr sz="4400" b="1">
-                <a:solidFill>
-                  <a:srgbClr val="3C2D1E"/>
-                </a:solidFill>
-                <a:latin typeface="Microsoft YaHei"/>
-              </a:rPr>
-              <a:t>情节梳理</a:t>
-            </a:r>
-          </a:p>
-        </p:txBody>
-      </p:sp>
-      <p:sp>
-        <p:nvSpPr>
-          <p:cNvPr id="5" name="Rectangle 4"/>
+      <p:pic>
+        <p:nvPicPr>
+          <p:cNvPr id="4" name="Picture 3" descr="corner_wukong_tl.png"/>
+          <p:cNvPicPr>
+            <a:picLocks noChangeAspect="1"/>
+          </p:cNvPicPr>
+          <p:nvPr/>
+        </p:nvPicPr>
+        <p:blipFill>
+          <a:blip r:embed="rId3"/>
+          <a:stretch>
+            <a:fillRect/>
+          </a:stretch>
+        </p:blipFill>
+        <p:spPr>
+          <a:xfrm>
+            <a:off x="-45720" y="-45720"/>
+            <a:ext cx="2011680" cy="2011680"/>
+          </a:xfrm>
+          <a:prstGeom prst="rect">
+            <a:avLst/>
+          </a:prstGeom>
+        </p:spPr>
+      </p:pic>
+      <p:pic>
+        <p:nvPicPr>
+          <p:cNvPr id="5" name="Picture 4" descr="corner_wukong_tr.png"/>
+          <p:cNvPicPr>
+            <a:picLocks noChangeAspect="1"/>
+          </p:cNvPicPr>
+          <p:nvPr/>
+        </p:nvPicPr>
+        <p:blipFill>
+          <a:blip r:embed="rId4"/>
+          <a:stretch>
+            <a:fillRect/>
+          </a:stretch>
+        </p:blipFill>
+        <p:spPr>
+          <a:xfrm>
+            <a:off x="9875520" y="-45720"/>
+            <a:ext cx="2011680" cy="2011680"/>
+          </a:xfrm>
+          <a:prstGeom prst="rect">
+            <a:avLst/>
+          </a:prstGeom>
+        </p:spPr>
+      </p:pic>
+      <p:sp>
+        <p:nvSpPr>
+          <p:cNvPr id="6" name="Rounded Rectangle 5"/>
           <p:cNvSpPr/>
           <p:nvPr/>
         </p:nvSpPr>
         <p:spPr>
           <a:xfrm>
-            <a:off x="1371600" y="1325880"/>
-            <a:ext cx="3657600" cy="36576"/>
-          </a:xfrm>
-          <a:prstGeom prst="rect">
+            <a:off x="4953304" y="502920"/>
+            <a:ext cx="2286000" cy="411480"/>
+          </a:xfrm>
+          <a:prstGeom prst="roundRect">
             <a:avLst/>
           </a:prstGeom>
           <a:solidFill>
-            <a:srgbClr val="8C3C28"/>
+            <a:srgbClr val="FFB464"/>
           </a:solidFill>
           <a:ln>
             <a:noFill/>
@@ -4136,14 +4226,14 @@
       </p:sp>
       <p:sp>
         <p:nvSpPr>
-          <p:cNvPr id="6" name="TextBox 5"/>
+          <p:cNvPr id="7" name="TextBox 6"/>
           <p:cNvSpPr txBox="1"/>
           <p:nvPr/>
         </p:nvSpPr>
         <p:spPr>
           <a:xfrm>
-            <a:off x="1371600" y="1417320"/>
-            <a:ext cx="5486400" cy="457200"/>
+            <a:off x="4953304" y="521208"/>
+            <a:ext cx="2286000" cy="384048"/>
           </a:xfrm>
           <a:prstGeom prst="rect">
             <a:avLst/>
@@ -4156,44 +4246,81 @@
           </a:bodyPr>
           <a:lstStyle/>
           <a:p>
-            <a:pPr algn="l">
+            <a:pPr algn="ctr">
               <a:spcAft>
-                <a:spcPts val="800"/>
+                <a:spcPts val="1000"/>
               </a:spcAft>
             </a:pPr>
             <a:r>
-              <a:rPr sz="2400" b="0">
-                <a:solidFill>
-                  <a:srgbClr val="8C3C28"/>
+              <a:rPr sz="1800" b="1">
+                <a:solidFill>
+                  <a:srgbClr val="502814"/>
                 </a:solidFill>
                 <a:latin typeface="Microsoft YaHei"/>
               </a:rPr>
-              <a:t>变化相克</a:t>
-            </a:r>
-          </a:p>
-        </p:txBody>
-      </p:sp>
-      <p:sp>
-        <p:nvSpPr>
-          <p:cNvPr id="7" name="Rectangle 6"/>
+              <a:t>情节笔记</a:t>
+            </a:r>
+          </a:p>
+        </p:txBody>
+      </p:sp>
+      <p:sp>
+        <p:nvSpPr>
+          <p:cNvPr id="8" name="TextBox 7"/>
+          <p:cNvSpPr txBox="1"/>
+          <p:nvPr/>
+        </p:nvSpPr>
+        <p:spPr>
+          <a:xfrm>
+            <a:off x="1371600" y="1051560"/>
+            <a:ext cx="9418320" cy="822960"/>
+          </a:xfrm>
+          <a:prstGeom prst="rect">
+            <a:avLst/>
+          </a:prstGeom>
+          <a:noFill/>
+        </p:spPr>
+        <p:txBody>
+          <a:bodyPr wrap="square">
+            <a:spAutoFit/>
+          </a:bodyPr>
+          <a:lstStyle/>
+          <a:p>
+            <a:pPr algn="ctr">
+              <a:spcAft>
+                <a:spcPts val="1000"/>
+              </a:spcAft>
+            </a:pPr>
+            <a:r>
+              <a:rPr sz="3600" b="1">
+                <a:solidFill>
+                  <a:srgbClr val="DC5028"/>
+                </a:solidFill>
+                <a:latin typeface="Microsoft YaHei"/>
+              </a:rPr>
+              <a:t>变化链梳理</a:t>
+            </a:r>
+          </a:p>
+        </p:txBody>
+      </p:sp>
+      <p:sp>
+        <p:nvSpPr>
+          <p:cNvPr id="9" name="Rectangle 8"/>
           <p:cNvSpPr/>
           <p:nvPr/>
         </p:nvSpPr>
         <p:spPr>
           <a:xfrm>
-            <a:off x="1188720" y="2011680"/>
-            <a:ext cx="7132320" cy="4114800"/>
+            <a:off x="3200400" y="1691640"/>
+            <a:ext cx="5760720" cy="27432"/>
           </a:xfrm>
           <a:prstGeom prst="rect">
             <a:avLst/>
           </a:prstGeom>
           <a:solidFill>
-            <a:srgbClr val="FFFCF5"/>
+            <a:srgbClr val="FFB464"/>
           </a:solidFill>
-          <a:ln w="19050">
-            <a:solidFill>
-              <a:srgbClr val="B4823C"/>
-            </a:solidFill>
+          <a:ln>
+            <a:noFill/>
           </a:ln>
         </p:spPr>
         <p:style>
@@ -4220,336 +4347,24 @@
       </p:sp>
       <p:sp>
         <p:nvSpPr>
-          <p:cNvPr id="8" name="TextBox 7"/>
-          <p:cNvSpPr txBox="1"/>
-          <p:nvPr/>
-        </p:nvSpPr>
-        <p:spPr>
-          <a:xfrm>
-            <a:off x="1463040" y="2194560"/>
-            <a:ext cx="2011680" cy="411480"/>
-          </a:xfrm>
-          <a:prstGeom prst="rect">
-            <a:avLst/>
-          </a:prstGeom>
-          <a:noFill/>
-        </p:spPr>
-        <p:txBody>
-          <a:bodyPr wrap="none">
-            <a:spAutoFit/>
-          </a:bodyPr>
-          <a:lstStyle/>
-          <a:p>
-            <a:pPr algn="l">
-              <a:spcAft>
-                <a:spcPts val="800"/>
-              </a:spcAft>
-            </a:pPr>
-            <a:r>
-              <a:rPr sz="2200" b="1">
-                <a:solidFill>
-                  <a:srgbClr val="8C3C28"/>
-                </a:solidFill>
-                <a:latin typeface="Microsoft YaHei"/>
-              </a:rPr>
-              <a:t>【第1轮】</a:t>
-            </a:r>
-          </a:p>
-        </p:txBody>
-      </p:sp>
-      <p:sp>
-        <p:nvSpPr>
-          <p:cNvPr id="9" name="TextBox 8"/>
-          <p:cNvSpPr txBox="1"/>
-          <p:nvPr/>
-        </p:nvSpPr>
-        <p:spPr>
-          <a:xfrm>
-            <a:off x="3474720" y="2194560"/>
-            <a:ext cx="4572000" cy="640080"/>
-          </a:xfrm>
-          <a:prstGeom prst="rect">
-            <a:avLst/>
-          </a:prstGeom>
-          <a:noFill/>
-        </p:spPr>
-        <p:txBody>
-          <a:bodyPr wrap="none">
-            <a:spAutoFit/>
-          </a:bodyPr>
-          <a:lstStyle/>
-          <a:p>
-            <a:pPr algn="l">
-              <a:spcAft>
-                <a:spcPts val="800"/>
-              </a:spcAft>
-            </a:pPr>
-            <a:r>
-              <a:rPr sz="2200" b="0">
-                <a:solidFill>
-                  <a:srgbClr val="3C2D1E"/>
-                </a:solidFill>
-                <a:latin typeface="Microsoft YaHei"/>
-              </a:rPr>
-              <a:t>悟空变鸟→二郎变鹰；悟空变鱼→二郎变鱼鹰</a:t>
-            </a:r>
-          </a:p>
-        </p:txBody>
-      </p:sp>
-      <p:sp>
-        <p:nvSpPr>
-          <p:cNvPr id="10" name="TextBox 9"/>
-          <p:cNvSpPr txBox="1"/>
-          <p:nvPr/>
-        </p:nvSpPr>
-        <p:spPr>
-          <a:xfrm>
-            <a:off x="1463040" y="2788920"/>
-            <a:ext cx="2011680" cy="411480"/>
-          </a:xfrm>
-          <a:prstGeom prst="rect">
-            <a:avLst/>
-          </a:prstGeom>
-          <a:noFill/>
-        </p:spPr>
-        <p:txBody>
-          <a:bodyPr wrap="none">
-            <a:spAutoFit/>
-          </a:bodyPr>
-          <a:lstStyle/>
-          <a:p>
-            <a:pPr algn="l">
-              <a:spcAft>
-                <a:spcPts val="800"/>
-              </a:spcAft>
-            </a:pPr>
-            <a:r>
-              <a:rPr sz="2200" b="1">
-                <a:solidFill>
-                  <a:srgbClr val="8C3C28"/>
-                </a:solidFill>
-                <a:latin typeface="Microsoft YaHei"/>
-              </a:rPr>
-              <a:t>【第2轮】</a:t>
-            </a:r>
-          </a:p>
-        </p:txBody>
-      </p:sp>
-      <p:sp>
-        <p:nvSpPr>
-          <p:cNvPr id="11" name="TextBox 10"/>
-          <p:cNvSpPr txBox="1"/>
-          <p:nvPr/>
-        </p:nvSpPr>
-        <p:spPr>
-          <a:xfrm>
-            <a:off x="3474720" y="2788920"/>
-            <a:ext cx="4572000" cy="640080"/>
-          </a:xfrm>
-          <a:prstGeom prst="rect">
-            <a:avLst/>
-          </a:prstGeom>
-          <a:noFill/>
-        </p:spPr>
-        <p:txBody>
-          <a:bodyPr wrap="none">
-            <a:spAutoFit/>
-          </a:bodyPr>
-          <a:lstStyle/>
-          <a:p>
-            <a:pPr algn="l">
-              <a:spcAft>
-                <a:spcPts val="800"/>
-              </a:spcAft>
-            </a:pPr>
-            <a:r>
-              <a:rPr sz="2200" b="0">
-                <a:solidFill>
-                  <a:srgbClr val="3C2D1E"/>
-                </a:solidFill>
-                <a:latin typeface="Microsoft YaHei"/>
-              </a:rPr>
-              <a:t>悟空变水蛇→二郎变灰鹤；悟空变花鸨→二郎现原身</a:t>
-            </a:r>
-          </a:p>
-        </p:txBody>
-      </p:sp>
-      <p:sp>
-        <p:nvSpPr>
-          <p:cNvPr id="12" name="TextBox 11"/>
-          <p:cNvSpPr txBox="1"/>
-          <p:nvPr/>
-        </p:nvSpPr>
-        <p:spPr>
-          <a:xfrm>
-            <a:off x="1463040" y="3383279"/>
-            <a:ext cx="2011680" cy="411480"/>
-          </a:xfrm>
-          <a:prstGeom prst="rect">
-            <a:avLst/>
-          </a:prstGeom>
-          <a:noFill/>
-        </p:spPr>
-        <p:txBody>
-          <a:bodyPr wrap="none">
-            <a:spAutoFit/>
-          </a:bodyPr>
-          <a:lstStyle/>
-          <a:p>
-            <a:pPr algn="l">
-              <a:spcAft>
-                <a:spcPts val="800"/>
-              </a:spcAft>
-            </a:pPr>
-            <a:r>
-              <a:rPr sz="2200" b="1">
-                <a:solidFill>
-                  <a:srgbClr val="8C3C28"/>
-                </a:solidFill>
-                <a:latin typeface="Microsoft YaHei"/>
-              </a:rPr>
-              <a:t>【第3轮】</a:t>
-            </a:r>
-          </a:p>
-        </p:txBody>
-      </p:sp>
-      <p:sp>
-        <p:nvSpPr>
-          <p:cNvPr id="13" name="TextBox 12"/>
-          <p:cNvSpPr txBox="1"/>
-          <p:nvPr/>
-        </p:nvSpPr>
-        <p:spPr>
-          <a:xfrm>
-            <a:off x="3474720" y="3383279"/>
-            <a:ext cx="4572000" cy="640080"/>
-          </a:xfrm>
-          <a:prstGeom prst="rect">
-            <a:avLst/>
-          </a:prstGeom>
-          <a:noFill/>
-        </p:spPr>
-        <p:txBody>
-          <a:bodyPr wrap="none">
-            <a:spAutoFit/>
-          </a:bodyPr>
-          <a:lstStyle/>
-          <a:p>
-            <a:pPr algn="l">
-              <a:spcAft>
-                <a:spcPts val="800"/>
-              </a:spcAft>
-            </a:pPr>
-            <a:r>
-              <a:rPr sz="2200" b="0">
-                <a:solidFill>
-                  <a:srgbClr val="3C2D1E"/>
-                </a:solidFill>
-                <a:latin typeface="Microsoft YaHei"/>
-              </a:rPr>
-              <a:t>悟空变庙宇（尾巴变旗竿）→二郎识破</a:t>
-            </a:r>
-          </a:p>
-        </p:txBody>
-      </p:sp>
-      <p:sp>
-        <p:nvSpPr>
-          <p:cNvPr id="14" name="TextBox 13"/>
-          <p:cNvSpPr txBox="1"/>
-          <p:nvPr/>
-        </p:nvSpPr>
-        <p:spPr>
-          <a:xfrm>
-            <a:off x="1463040" y="3977639"/>
-            <a:ext cx="2011680" cy="411480"/>
-          </a:xfrm>
-          <a:prstGeom prst="rect">
-            <a:avLst/>
-          </a:prstGeom>
-          <a:noFill/>
-        </p:spPr>
-        <p:txBody>
-          <a:bodyPr wrap="none">
-            <a:spAutoFit/>
-          </a:bodyPr>
-          <a:lstStyle/>
-          <a:p>
-            <a:pPr algn="l">
-              <a:spcAft>
-                <a:spcPts val="800"/>
-              </a:spcAft>
-            </a:pPr>
-            <a:r>
-              <a:rPr sz="2200" b="1">
-                <a:solidFill>
-                  <a:srgbClr val="8C3C28"/>
-                </a:solidFill>
-                <a:latin typeface="Microsoft YaHei"/>
-              </a:rPr>
-              <a:t>【规律】</a:t>
-            </a:r>
-          </a:p>
-        </p:txBody>
-      </p:sp>
-      <p:sp>
-        <p:nvSpPr>
-          <p:cNvPr id="15" name="TextBox 14"/>
-          <p:cNvSpPr txBox="1"/>
-          <p:nvPr/>
-        </p:nvSpPr>
-        <p:spPr>
-          <a:xfrm>
-            <a:off x="3474720" y="3977639"/>
-            <a:ext cx="4572000" cy="640080"/>
-          </a:xfrm>
-          <a:prstGeom prst="rect">
-            <a:avLst/>
-          </a:prstGeom>
-          <a:noFill/>
-        </p:spPr>
-        <p:txBody>
-          <a:bodyPr wrap="none">
-            <a:spAutoFit/>
-          </a:bodyPr>
-          <a:lstStyle/>
-          <a:p>
-            <a:pPr algn="l">
-              <a:spcAft>
-                <a:spcPts val="800"/>
-              </a:spcAft>
-            </a:pPr>
-            <a:r>
-              <a:rPr sz="2200" b="0">
-                <a:solidFill>
-                  <a:srgbClr val="3C2D1E"/>
-                </a:solidFill>
-                <a:latin typeface="Microsoft YaHei"/>
-              </a:rPr>
-              <a:t>孙悟空先变，二郎神以相克之物随即相对</a:t>
-            </a:r>
-          </a:p>
-        </p:txBody>
-      </p:sp>
-      <p:sp>
-        <p:nvSpPr>
-          <p:cNvPr id="16" name="Rectangle 15"/>
+          <p:cNvPr id="10" name="Rounded Rectangle 9"/>
           <p:cNvSpPr/>
           <p:nvPr/>
         </p:nvSpPr>
         <p:spPr>
           <a:xfrm>
-            <a:off x="8686800" y="2011680"/>
-            <a:ext cx="2926080" cy="4114800"/>
-          </a:xfrm>
-          <a:prstGeom prst="rect">
+            <a:off x="1249984" y="1810512"/>
+            <a:ext cx="9692640" cy="3319272"/>
+          </a:xfrm>
+          <a:prstGeom prst="roundRect">
             <a:avLst/>
           </a:prstGeom>
           <a:solidFill>
-            <a:srgbClr val="8C3C28"/>
+            <a:srgbClr val="FFF8F0"/>
           </a:solidFill>
-          <a:ln>
+          <a:ln w="19050">
             <a:solidFill>
-              <a:srgbClr val="8C3C28"/>
+              <a:srgbClr val="FFB464"/>
             </a:solidFill>
           </a:ln>
         </p:spPr>
@@ -4577,14 +4392,14 @@
       </p:sp>
       <p:sp>
         <p:nvSpPr>
-          <p:cNvPr id="17" name="TextBox 16"/>
+          <p:cNvPr id="11" name="TextBox 10"/>
           <p:cNvSpPr txBox="1"/>
           <p:nvPr/>
         </p:nvSpPr>
         <p:spPr>
           <a:xfrm>
-            <a:off x="8869680" y="3200400"/>
-            <a:ext cx="2560320" cy="1828800"/>
+            <a:off x="1463040" y="1920240"/>
+            <a:ext cx="2103120" cy="502920"/>
           </a:xfrm>
           <a:prstGeom prst="rect">
             <a:avLst/>
@@ -4597,20 +4412,292 @@
           </a:bodyPr>
           <a:lstStyle/>
           <a:p>
-            <a:pPr algn="ctr">
+            <a:pPr algn="r">
               <a:spcAft>
-                <a:spcPts val="800"/>
+                <a:spcPts val="1000"/>
               </a:spcAft>
             </a:pPr>
             <a:r>
-              <a:rPr sz="4800" b="1">
-                <a:solidFill>
-                  <a:srgbClr val="8C3C28"/>
+              <a:rPr sz="2200" b="1">
+                <a:solidFill>
+                  <a:srgbClr val="DC5028"/>
                 </a:solidFill>
                 <a:latin typeface="Microsoft YaHei"/>
               </a:rPr>
-              <a:t>笔
-记</a:t>
+              <a:t>第1轮</a:t>
+            </a:r>
+          </a:p>
+        </p:txBody>
+      </p:sp>
+      <p:sp>
+        <p:nvSpPr>
+          <p:cNvPr id="12" name="TextBox 11"/>
+          <p:cNvSpPr txBox="1"/>
+          <p:nvPr/>
+        </p:nvSpPr>
+        <p:spPr>
+          <a:xfrm>
+            <a:off x="3749039" y="1920240"/>
+            <a:ext cx="7132320" cy="685800"/>
+          </a:xfrm>
+          <a:prstGeom prst="rect">
+            <a:avLst/>
+          </a:prstGeom>
+          <a:noFill/>
+        </p:spPr>
+        <p:txBody>
+          <a:bodyPr wrap="none">
+            <a:spAutoFit/>
+          </a:bodyPr>
+          <a:lstStyle/>
+          <a:p>
+            <a:pPr algn="l">
+              <a:spcAft>
+                <a:spcPts val="1000"/>
+              </a:spcAft>
+            </a:pPr>
+            <a:r>
+              <a:rPr sz="2200" b="0">
+                <a:solidFill>
+                  <a:srgbClr val="502814"/>
+                </a:solidFill>
+                <a:latin typeface="Microsoft YaHei"/>
+              </a:rPr>
+              <a:t>悟空变鸟→二郎变鹰；悟空变鱼→二郎变鱼鹰</a:t>
+            </a:r>
+          </a:p>
+        </p:txBody>
+      </p:sp>
+      <p:sp>
+        <p:nvSpPr>
+          <p:cNvPr id="13" name="TextBox 12"/>
+          <p:cNvSpPr txBox="1"/>
+          <p:nvPr/>
+        </p:nvSpPr>
+        <p:spPr>
+          <a:xfrm>
+            <a:off x="1463040" y="2670048"/>
+            <a:ext cx="2103120" cy="502920"/>
+          </a:xfrm>
+          <a:prstGeom prst="rect">
+            <a:avLst/>
+          </a:prstGeom>
+          <a:noFill/>
+        </p:spPr>
+        <p:txBody>
+          <a:bodyPr wrap="none">
+            <a:spAutoFit/>
+          </a:bodyPr>
+          <a:lstStyle/>
+          <a:p>
+            <a:pPr algn="r">
+              <a:spcAft>
+                <a:spcPts val="1000"/>
+              </a:spcAft>
+            </a:pPr>
+            <a:r>
+              <a:rPr sz="2200" b="1">
+                <a:solidFill>
+                  <a:srgbClr val="DC5028"/>
+                </a:solidFill>
+                <a:latin typeface="Microsoft YaHei"/>
+              </a:rPr>
+              <a:t>第2轮</a:t>
+            </a:r>
+          </a:p>
+        </p:txBody>
+      </p:sp>
+      <p:sp>
+        <p:nvSpPr>
+          <p:cNvPr id="14" name="TextBox 13"/>
+          <p:cNvSpPr txBox="1"/>
+          <p:nvPr/>
+        </p:nvSpPr>
+        <p:spPr>
+          <a:xfrm>
+            <a:off x="3749039" y="2670048"/>
+            <a:ext cx="7132320" cy="685800"/>
+          </a:xfrm>
+          <a:prstGeom prst="rect">
+            <a:avLst/>
+          </a:prstGeom>
+          <a:noFill/>
+        </p:spPr>
+        <p:txBody>
+          <a:bodyPr wrap="none">
+            <a:spAutoFit/>
+          </a:bodyPr>
+          <a:lstStyle/>
+          <a:p>
+            <a:pPr algn="l">
+              <a:spcAft>
+                <a:spcPts val="1000"/>
+              </a:spcAft>
+            </a:pPr>
+            <a:r>
+              <a:rPr sz="2200" b="0">
+                <a:solidFill>
+                  <a:srgbClr val="502814"/>
+                </a:solidFill>
+                <a:latin typeface="Microsoft YaHei"/>
+              </a:rPr>
+              <a:t>悟空变水蛇→二郎变灰鹤；悟空变花鸨→二郎现原身</a:t>
+            </a:r>
+          </a:p>
+        </p:txBody>
+      </p:sp>
+      <p:sp>
+        <p:nvSpPr>
+          <p:cNvPr id="15" name="TextBox 14"/>
+          <p:cNvSpPr txBox="1"/>
+          <p:nvPr/>
+        </p:nvSpPr>
+        <p:spPr>
+          <a:xfrm>
+            <a:off x="1463040" y="3419856"/>
+            <a:ext cx="2103120" cy="502920"/>
+          </a:xfrm>
+          <a:prstGeom prst="rect">
+            <a:avLst/>
+          </a:prstGeom>
+          <a:noFill/>
+        </p:spPr>
+        <p:txBody>
+          <a:bodyPr wrap="none">
+            <a:spAutoFit/>
+          </a:bodyPr>
+          <a:lstStyle/>
+          <a:p>
+            <a:pPr algn="r">
+              <a:spcAft>
+                <a:spcPts val="1000"/>
+              </a:spcAft>
+            </a:pPr>
+            <a:r>
+              <a:rPr sz="2200" b="1">
+                <a:solidFill>
+                  <a:srgbClr val="DC5028"/>
+                </a:solidFill>
+                <a:latin typeface="Microsoft YaHei"/>
+              </a:rPr>
+              <a:t>第3轮</a:t>
+            </a:r>
+          </a:p>
+        </p:txBody>
+      </p:sp>
+      <p:sp>
+        <p:nvSpPr>
+          <p:cNvPr id="16" name="TextBox 15"/>
+          <p:cNvSpPr txBox="1"/>
+          <p:nvPr/>
+        </p:nvSpPr>
+        <p:spPr>
+          <a:xfrm>
+            <a:off x="3749039" y="3419856"/>
+            <a:ext cx="7132320" cy="685800"/>
+          </a:xfrm>
+          <a:prstGeom prst="rect">
+            <a:avLst/>
+          </a:prstGeom>
+          <a:noFill/>
+        </p:spPr>
+        <p:txBody>
+          <a:bodyPr wrap="none">
+            <a:spAutoFit/>
+          </a:bodyPr>
+          <a:lstStyle/>
+          <a:p>
+            <a:pPr algn="l">
+              <a:spcAft>
+                <a:spcPts val="1000"/>
+              </a:spcAft>
+            </a:pPr>
+            <a:r>
+              <a:rPr sz="2200" b="0">
+                <a:solidFill>
+                  <a:srgbClr val="502814"/>
+                </a:solidFill>
+                <a:latin typeface="Microsoft YaHei"/>
+              </a:rPr>
+              <a:t>悟空变庙宇，尾巴变旗竿→二郎识破</a:t>
+            </a:r>
+          </a:p>
+        </p:txBody>
+      </p:sp>
+      <p:sp>
+        <p:nvSpPr>
+          <p:cNvPr id="17" name="TextBox 16"/>
+          <p:cNvSpPr txBox="1"/>
+          <p:nvPr/>
+        </p:nvSpPr>
+        <p:spPr>
+          <a:xfrm>
+            <a:off x="1463040" y="4169664"/>
+            <a:ext cx="2103120" cy="502920"/>
+          </a:xfrm>
+          <a:prstGeom prst="rect">
+            <a:avLst/>
+          </a:prstGeom>
+          <a:noFill/>
+        </p:spPr>
+        <p:txBody>
+          <a:bodyPr wrap="none">
+            <a:spAutoFit/>
+          </a:bodyPr>
+          <a:lstStyle/>
+          <a:p>
+            <a:pPr algn="r">
+              <a:spcAft>
+                <a:spcPts val="1000"/>
+              </a:spcAft>
+            </a:pPr>
+            <a:r>
+              <a:rPr sz="2200" b="1">
+                <a:solidFill>
+                  <a:srgbClr val="DC5028"/>
+                </a:solidFill>
+                <a:latin typeface="Microsoft YaHei"/>
+              </a:rPr>
+              <a:t>规律</a:t>
+            </a:r>
+          </a:p>
+        </p:txBody>
+      </p:sp>
+      <p:sp>
+        <p:nvSpPr>
+          <p:cNvPr id="18" name="TextBox 17"/>
+          <p:cNvSpPr txBox="1"/>
+          <p:nvPr/>
+        </p:nvSpPr>
+        <p:spPr>
+          <a:xfrm>
+            <a:off x="3749039" y="4169664"/>
+            <a:ext cx="7132320" cy="685800"/>
+          </a:xfrm>
+          <a:prstGeom prst="rect">
+            <a:avLst/>
+          </a:prstGeom>
+          <a:noFill/>
+        </p:spPr>
+        <p:txBody>
+          <a:bodyPr wrap="none">
+            <a:spAutoFit/>
+          </a:bodyPr>
+          <a:lstStyle/>
+          <a:p>
+            <a:pPr algn="l">
+              <a:spcAft>
+                <a:spcPts val="1000"/>
+              </a:spcAft>
+            </a:pPr>
+            <a:r>
+              <a:rPr sz="2200" b="0">
+                <a:solidFill>
+                  <a:srgbClr val="502814"/>
+                </a:solidFill>
+                <a:latin typeface="Microsoft YaHei"/>
+              </a:rPr>
+              <a:t>孙悟空先变，二郎神随即以相克之物相对</a:t>
             </a:r>
           </a:p>
         </p:txBody>
@@ -4635,7 +4722,7 @@
       <p:grpSpPr/>
       <p:pic>
         <p:nvPicPr>
-          <p:cNvPr id="2" name="Picture 1" descr="bg_lunyu.png"/>
+          <p:cNvPr id="2" name="Picture 1" descr="bg_wukong.png"/>
           <p:cNvPicPr>
             <a:picLocks noChangeAspect="1"/>
           </p:cNvPicPr>
@@ -4665,17 +4752,17 @@
         </p:nvSpPr>
         <p:spPr>
           <a:xfrm>
-            <a:off x="0" y="0"/>
-            <a:ext cx="12191695" cy="164592"/>
-          </a:xfrm>
-          <a:prstGeom prst="rect">
-            <a:avLst/>
-          </a:prstGeom>
-          <a:solidFill>
-            <a:srgbClr val="3C2D1E"/>
-          </a:solidFill>
-          <a:ln>
-            <a:noFill/>
+            <a:off x="292608" y="274320"/>
+            <a:ext cx="11594592" cy="6300216"/>
+          </a:xfrm>
+          <a:prstGeom prst="rect">
+            <a:avLst/>
+          </a:prstGeom>
+          <a:noFill/>
+          <a:ln w="31750">
+            <a:solidFill>
+              <a:srgbClr val="C85A32"/>
+            </a:solidFill>
           </a:ln>
         </p:spPr>
         <p:style>
@@ -4700,66 +4787,73 @@
           </a:p>
         </p:txBody>
       </p:sp>
-      <p:sp>
-        <p:nvSpPr>
-          <p:cNvPr id="4" name="TextBox 3"/>
-          <p:cNvSpPr txBox="1"/>
-          <p:nvPr/>
-        </p:nvSpPr>
-        <p:spPr>
-          <a:xfrm>
-            <a:off x="1371600" y="502920"/>
-            <a:ext cx="9144000" cy="640080"/>
-          </a:xfrm>
-          <a:prstGeom prst="rect">
-            <a:avLst/>
-          </a:prstGeom>
-          <a:noFill/>
-        </p:spPr>
-        <p:txBody>
-          <a:bodyPr wrap="none">
-            <a:spAutoFit/>
-          </a:bodyPr>
-          <a:lstStyle/>
-          <a:p>
-            <a:pPr algn="ctr">
-              <a:spcAft>
-                <a:spcPts val="800"/>
-              </a:spcAft>
-            </a:pPr>
-            <a:r>
-              <a:rPr sz="3600" b="1">
-                <a:solidFill>
-                  <a:srgbClr val="3C2D1E"/>
-                </a:solidFill>
-                <a:latin typeface="Microsoft YaHei"/>
-              </a:rPr>
-              <a:t>人物赏析</a:t>
-            </a:r>
-          </a:p>
-        </p:txBody>
-      </p:sp>
-      <p:sp>
-        <p:nvSpPr>
-          <p:cNvPr id="5" name="Rectangle 4"/>
+      <p:pic>
+        <p:nvPicPr>
+          <p:cNvPr id="4" name="Picture 3" descr="corner_wukong_tl.png"/>
+          <p:cNvPicPr>
+            <a:picLocks noChangeAspect="1"/>
+          </p:cNvPicPr>
+          <p:nvPr/>
+        </p:nvPicPr>
+        <p:blipFill>
+          <a:blip r:embed="rId3"/>
+          <a:stretch>
+            <a:fillRect/>
+          </a:stretch>
+        </p:blipFill>
+        <p:spPr>
+          <a:xfrm>
+            <a:off x="-45720" y="-45720"/>
+            <a:ext cx="2011680" cy="2011680"/>
+          </a:xfrm>
+          <a:prstGeom prst="rect">
+            <a:avLst/>
+          </a:prstGeom>
+        </p:spPr>
+      </p:pic>
+      <p:pic>
+        <p:nvPicPr>
+          <p:cNvPr id="5" name="Picture 4" descr="corner_wukong_tr.png"/>
+          <p:cNvPicPr>
+            <a:picLocks noChangeAspect="1"/>
+          </p:cNvPicPr>
+          <p:nvPr/>
+        </p:nvPicPr>
+        <p:blipFill>
+          <a:blip r:embed="rId4"/>
+          <a:stretch>
+            <a:fillRect/>
+          </a:stretch>
+        </p:blipFill>
+        <p:spPr>
+          <a:xfrm>
+            <a:off x="9875520" y="-45720"/>
+            <a:ext cx="2011680" cy="2011680"/>
+          </a:xfrm>
+          <a:prstGeom prst="rect">
+            <a:avLst/>
+          </a:prstGeom>
+        </p:spPr>
+      </p:pic>
+      <p:sp>
+        <p:nvSpPr>
+          <p:cNvPr id="6" name="Rounded Rectangle 5"/>
           <p:cNvSpPr/>
           <p:nvPr/>
         </p:nvSpPr>
         <p:spPr>
           <a:xfrm>
-            <a:off x="731520" y="1371600"/>
-            <a:ext cx="5303520" cy="4754880"/>
-          </a:xfrm>
-          <a:prstGeom prst="rect">
+            <a:off x="4953304" y="502920"/>
+            <a:ext cx="2286000" cy="411480"/>
+          </a:xfrm>
+          <a:prstGeom prst="roundRect">
             <a:avLst/>
           </a:prstGeom>
           <a:solidFill>
-            <a:srgbClr val="FFFCF5"/>
+            <a:srgbClr val="FFB464"/>
           </a:solidFill>
           <a:ln>
-            <a:solidFill>
-              <a:srgbClr val="B4823C"/>
-            </a:solidFill>
+            <a:noFill/>
           </a:ln>
         </p:spPr>
         <p:style>
@@ -4786,14 +4880,14 @@
       </p:sp>
       <p:sp>
         <p:nvSpPr>
-          <p:cNvPr id="6" name="TextBox 5"/>
+          <p:cNvPr id="7" name="TextBox 6"/>
           <p:cNvSpPr txBox="1"/>
           <p:nvPr/>
         </p:nvSpPr>
         <p:spPr>
           <a:xfrm>
-            <a:off x="914400" y="1508760"/>
-            <a:ext cx="4937760" cy="457200"/>
+            <a:off x="4953304" y="521208"/>
+            <a:ext cx="2286000" cy="384048"/>
           </a:xfrm>
           <a:prstGeom prst="rect">
             <a:avLst/>
@@ -4808,31 +4902,31 @@
           <a:p>
             <a:pPr algn="ctr">
               <a:spcAft>
-                <a:spcPts val="800"/>
+                <a:spcPts val="1000"/>
               </a:spcAft>
             </a:pPr>
             <a:r>
-              <a:rPr sz="2800" b="1">
-                <a:solidFill>
-                  <a:srgbClr val="8C3C28"/>
+              <a:rPr sz="1800" b="1">
+                <a:solidFill>
+                  <a:srgbClr val="502814"/>
                 </a:solidFill>
                 <a:latin typeface="Microsoft YaHei"/>
               </a:rPr>
-              <a:t>孙悟空</a:t>
-            </a:r>
-          </a:p>
-        </p:txBody>
-      </p:sp>
-      <p:sp>
-        <p:nvSpPr>
-          <p:cNvPr id="7" name="TextBox 6"/>
+              <a:t>人物笔记</a:t>
+            </a:r>
+          </a:p>
+        </p:txBody>
+      </p:sp>
+      <p:sp>
+        <p:nvSpPr>
+          <p:cNvPr id="8" name="TextBox 7"/>
           <p:cNvSpPr txBox="1"/>
           <p:nvPr/>
         </p:nvSpPr>
         <p:spPr>
           <a:xfrm>
-            <a:off x="1005840" y="2103120"/>
-            <a:ext cx="4754880" cy="822960"/>
+            <a:off x="1371600" y="1051560"/>
+            <a:ext cx="9418320" cy="822960"/>
           </a:xfrm>
           <a:prstGeom prst="rect">
             <a:avLst/>
@@ -4840,154 +4934,47 @@
           <a:noFill/>
         </p:spPr>
         <p:txBody>
-          <a:bodyPr wrap="none">
+          <a:bodyPr wrap="square">
             <a:spAutoFit/>
           </a:bodyPr>
           <a:lstStyle/>
           <a:p>
-            <a:pPr algn="l">
+            <a:pPr algn="ctr">
               <a:spcAft>
-                <a:spcPts val="800"/>
+                <a:spcPts val="1000"/>
               </a:spcAft>
             </a:pPr>
             <a:r>
-              <a:rPr sz="2000" b="1">
-                <a:solidFill>
-                  <a:srgbClr val="8C3C28"/>
+              <a:rPr sz="3600" b="1">
+                <a:solidFill>
+                  <a:srgbClr val="DC5028"/>
                 </a:solidFill>
                 <a:latin typeface="Microsoft YaHei"/>
               </a:rPr>
-              <a:t>特点：</a:t>
-            </a:r>
-            <a:r>
-              <a:rPr sz="2000" b="0">
-                <a:solidFill>
-                  <a:srgbClr val="3C2D1E"/>
-                </a:solidFill>
-                <a:latin typeface="Microsoft YaHei"/>
-              </a:rPr>
-              <a:t>机敏善变、好胜不屈</a:t>
-            </a:r>
-          </a:p>
-        </p:txBody>
-      </p:sp>
-      <p:sp>
-        <p:nvSpPr>
-          <p:cNvPr id="8" name="TextBox 7"/>
-          <p:cNvSpPr txBox="1"/>
-          <p:nvPr/>
-        </p:nvSpPr>
-        <p:spPr>
-          <a:xfrm>
-            <a:off x="1005840" y="2971800"/>
-            <a:ext cx="4754880" cy="822960"/>
-          </a:xfrm>
-          <a:prstGeom prst="rect">
-            <a:avLst/>
-          </a:prstGeom>
-          <a:noFill/>
-        </p:spPr>
-        <p:txBody>
-          <a:bodyPr wrap="none">
-            <a:spAutoFit/>
-          </a:bodyPr>
-          <a:lstStyle/>
-          <a:p>
-            <a:pPr algn="l">
-              <a:spcAft>
-                <a:spcPts val="800"/>
-              </a:spcAft>
-            </a:pPr>
-            <a:r>
-              <a:rPr sz="2000" b="1">
-                <a:solidFill>
-                  <a:srgbClr val="8C3C28"/>
-                </a:solidFill>
-                <a:latin typeface="Microsoft YaHei"/>
-              </a:rPr>
-              <a:t>证据：</a:t>
-            </a:r>
-            <a:r>
-              <a:rPr sz="2000" b="0">
-                <a:solidFill>
-                  <a:srgbClr val="3C2D1E"/>
-                </a:solidFill>
-                <a:latin typeface="Microsoft YaHei"/>
-              </a:rPr>
-              <a:t>连续变化、不肯认输</a:t>
-            </a:r>
-          </a:p>
-        </p:txBody>
-      </p:sp>
-      <p:sp>
-        <p:nvSpPr>
-          <p:cNvPr id="9" name="TextBox 8"/>
-          <p:cNvSpPr txBox="1"/>
-          <p:nvPr/>
-        </p:nvSpPr>
-        <p:spPr>
-          <a:xfrm>
-            <a:off x="1005840" y="3840480"/>
-            <a:ext cx="4754880" cy="822960"/>
-          </a:xfrm>
-          <a:prstGeom prst="rect">
-            <a:avLst/>
-          </a:prstGeom>
-          <a:noFill/>
-        </p:spPr>
-        <p:txBody>
-          <a:bodyPr wrap="none">
-            <a:spAutoFit/>
-          </a:bodyPr>
-          <a:lstStyle/>
-          <a:p>
-            <a:pPr algn="l">
-              <a:spcAft>
-                <a:spcPts val="800"/>
-              </a:spcAft>
-            </a:pPr>
-            <a:r>
-              <a:rPr sz="2000" b="1">
-                <a:solidFill>
-                  <a:srgbClr val="8C3C28"/>
-                </a:solidFill>
-                <a:latin typeface="Microsoft YaHei"/>
-              </a:rPr>
-              <a:t>作用：</a:t>
-            </a:r>
-            <a:r>
-              <a:rPr sz="2000" b="0">
-                <a:solidFill>
-                  <a:srgbClr val="3C2D1E"/>
-                </a:solidFill>
-                <a:latin typeface="Microsoft YaHei"/>
-              </a:rPr>
-              <a:t>体现对自由的追求</a:t>
-            </a:r>
-          </a:p>
-        </p:txBody>
-      </p:sp>
-      <p:sp>
-        <p:nvSpPr>
-          <p:cNvPr id="10" name="Rectangle 9"/>
+              <a:t>人物赏析</a:t>
+            </a:r>
+          </a:p>
+        </p:txBody>
+      </p:sp>
+      <p:sp>
+        <p:nvSpPr>
+          <p:cNvPr id="9" name="Rectangle 8"/>
           <p:cNvSpPr/>
           <p:nvPr/>
         </p:nvSpPr>
         <p:spPr>
           <a:xfrm>
-            <a:off x="6217920" y="1371600"/>
-            <a:ext cx="5303520" cy="4754880"/>
+            <a:off x="3200400" y="1691640"/>
+            <a:ext cx="5760720" cy="27432"/>
           </a:xfrm>
           <a:prstGeom prst="rect">
             <a:avLst/>
           </a:prstGeom>
           <a:solidFill>
-            <a:srgbClr val="FFFCF5"/>
+            <a:srgbClr val="FFB464"/>
           </a:solidFill>
           <a:ln>
-            <a:solidFill>
-              <a:srgbClr val="B4823C"/>
-            </a:solidFill>
+            <a:noFill/>
           </a:ln>
         </p:spPr>
         <p:style>
@@ -5014,14 +5001,59 @@
       </p:sp>
       <p:sp>
         <p:nvSpPr>
+          <p:cNvPr id="10" name="Rounded Rectangle 9"/>
+          <p:cNvSpPr/>
+          <p:nvPr/>
+        </p:nvSpPr>
+        <p:spPr>
+          <a:xfrm>
+            <a:off x="1249984" y="1810512"/>
+            <a:ext cx="9692640" cy="3319272"/>
+          </a:xfrm>
+          <a:prstGeom prst="roundRect">
+            <a:avLst/>
+          </a:prstGeom>
+          <a:solidFill>
+            <a:srgbClr val="FFF8F0"/>
+          </a:solidFill>
+          <a:ln w="19050">
+            <a:solidFill>
+              <a:srgbClr val="FFB464"/>
+            </a:solidFill>
+          </a:ln>
+        </p:spPr>
+        <p:style>
+          <a:lnRef idx="1">
+            <a:schemeClr val="accent1"/>
+          </a:lnRef>
+          <a:fillRef idx="3">
+            <a:schemeClr val="accent1"/>
+          </a:fillRef>
+          <a:effectRef idx="2">
+            <a:schemeClr val="accent1"/>
+          </a:effectRef>
+          <a:fontRef idx="minor">
+            <a:schemeClr val="lt1"/>
+          </a:fontRef>
+        </p:style>
+        <p:txBody>
+          <a:bodyPr rtlCol="0" anchor="ctr"/>
+          <a:lstStyle/>
+          <a:p>
+            <a:pPr algn="ctr"/>
+          </a:p>
+        </p:txBody>
+      </p:sp>
+      <p:sp>
+        <p:nvSpPr>
           <p:cNvPr id="11" name="TextBox 10"/>
           <p:cNvSpPr txBox="1"/>
           <p:nvPr/>
         </p:nvSpPr>
         <p:spPr>
           <a:xfrm>
-            <a:off x="6400800" y="1508760"/>
-            <a:ext cx="4937760" cy="457200"/>
+            <a:off x="1463040" y="1920240"/>
+            <a:ext cx="2103120" cy="502920"/>
           </a:xfrm>
           <a:prstGeom prst="rect">
             <a:avLst/>
@@ -5034,15 +5066,93 @@
           </a:bodyPr>
           <a:lstStyle/>
           <a:p>
-            <a:pPr algn="ctr">
+            <a:pPr algn="r">
               <a:spcAft>
-                <a:spcPts val="800"/>
+                <a:spcPts val="1000"/>
               </a:spcAft>
             </a:pPr>
             <a:r>
-              <a:rPr sz="2800" b="1">
-                <a:solidFill>
-                  <a:srgbClr val="8C3C28"/>
+              <a:rPr sz="2200" b="1">
+                <a:solidFill>
+                  <a:srgbClr val="DC5028"/>
+                </a:solidFill>
+                <a:latin typeface="Microsoft YaHei"/>
+              </a:rPr>
+              <a:t>孙悟空</a:t>
+            </a:r>
+          </a:p>
+        </p:txBody>
+      </p:sp>
+      <p:sp>
+        <p:nvSpPr>
+          <p:cNvPr id="12" name="TextBox 11"/>
+          <p:cNvSpPr txBox="1"/>
+          <p:nvPr/>
+        </p:nvSpPr>
+        <p:spPr>
+          <a:xfrm>
+            <a:off x="3749039" y="1920240"/>
+            <a:ext cx="7132320" cy="685800"/>
+          </a:xfrm>
+          <a:prstGeom prst="rect">
+            <a:avLst/>
+          </a:prstGeom>
+          <a:noFill/>
+        </p:spPr>
+        <p:txBody>
+          <a:bodyPr wrap="none">
+            <a:spAutoFit/>
+          </a:bodyPr>
+          <a:lstStyle/>
+          <a:p>
+            <a:pPr algn="l">
+              <a:spcAft>
+                <a:spcPts val="1000"/>
+              </a:spcAft>
+            </a:pPr>
+            <a:r>
+              <a:rPr sz="2200" b="0">
+                <a:solidFill>
+                  <a:srgbClr val="502814"/>
+                </a:solidFill>
+                <a:latin typeface="Microsoft YaHei"/>
+              </a:rPr>
+              <a:t>机敏善变、好胜不屈，追求自由（证据：连续变化、不肯认输）</a:t>
+            </a:r>
+          </a:p>
+        </p:txBody>
+      </p:sp>
+      <p:sp>
+        <p:nvSpPr>
+          <p:cNvPr id="13" name="TextBox 12"/>
+          <p:cNvSpPr txBox="1"/>
+          <p:nvPr/>
+        </p:nvSpPr>
+        <p:spPr>
+          <a:xfrm>
+            <a:off x="1463040" y="2670048"/>
+            <a:ext cx="2103120" cy="502920"/>
+          </a:xfrm>
+          <a:prstGeom prst="rect">
+            <a:avLst/>
+          </a:prstGeom>
+          <a:noFill/>
+        </p:spPr>
+        <p:txBody>
+          <a:bodyPr wrap="none">
+            <a:spAutoFit/>
+          </a:bodyPr>
+          <a:lstStyle/>
+          <a:p>
+            <a:pPr algn="r">
+              <a:spcAft>
+                <a:spcPts val="1000"/>
+              </a:spcAft>
+            </a:pPr>
+            <a:r>
+              <a:rPr sz="2200" b="1">
+                <a:solidFill>
+                  <a:srgbClr val="DC5028"/>
                 </a:solidFill>
                 <a:latin typeface="Microsoft YaHei"/>
               </a:rPr>
@@ -5053,14 +5163,14 @@
       </p:sp>
       <p:sp>
         <p:nvSpPr>
-          <p:cNvPr id="12" name="TextBox 11"/>
+          <p:cNvPr id="14" name="TextBox 13"/>
           <p:cNvSpPr txBox="1"/>
           <p:nvPr/>
         </p:nvSpPr>
         <p:spPr>
           <a:xfrm>
-            <a:off x="6492240" y="2103120"/>
-            <a:ext cx="4754880" cy="822960"/>
+            <a:off x="3749039" y="2670048"/>
+            <a:ext cx="7132320" cy="685800"/>
           </a:xfrm>
           <a:prstGeom prst="rect">
             <a:avLst/>
@@ -5075,40 +5185,31 @@
           <a:p>
             <a:pPr algn="l">
               <a:spcAft>
-                <a:spcPts val="800"/>
+                <a:spcPts val="1000"/>
               </a:spcAft>
             </a:pPr>
             <a:r>
-              <a:rPr sz="2000" b="1">
-                <a:solidFill>
-                  <a:srgbClr val="8C3C28"/>
+              <a:rPr sz="2200" b="0">
+                <a:solidFill>
+                  <a:srgbClr val="502814"/>
                 </a:solidFill>
                 <a:latin typeface="Microsoft YaHei"/>
               </a:rPr>
-              <a:t>特点：</a:t>
-            </a:r>
-            <a:r>
-              <a:rPr sz="2000" b="0">
-                <a:solidFill>
-                  <a:srgbClr val="3C2D1E"/>
-                </a:solidFill>
-                <a:latin typeface="Microsoft YaHei"/>
-              </a:rPr>
-              <a:t>沉着冷静、维护秩序</a:t>
-            </a:r>
-          </a:p>
-        </p:txBody>
-      </p:sp>
-      <p:sp>
-        <p:nvSpPr>
-          <p:cNvPr id="13" name="TextBox 12"/>
+              <a:t>沉着冷静、法力高强，维护天庭秩序（证据：紧追不舍、识破破绽）</a:t>
+            </a:r>
+          </a:p>
+        </p:txBody>
+      </p:sp>
+      <p:sp>
+        <p:nvSpPr>
+          <p:cNvPr id="15" name="TextBox 14"/>
           <p:cNvSpPr txBox="1"/>
           <p:nvPr/>
         </p:nvSpPr>
         <p:spPr>
           <a:xfrm>
-            <a:off x="6492240" y="2971800"/>
-            <a:ext cx="4754880" cy="822960"/>
+            <a:off x="1463040" y="3419856"/>
+            <a:ext cx="2103120" cy="502920"/>
           </a:xfrm>
           <a:prstGeom prst="rect">
             <a:avLst/>
@@ -5121,42 +5222,33 @@
           </a:bodyPr>
           <a:lstStyle/>
           <a:p>
-            <a:pPr algn="l">
+            <a:pPr algn="r">
               <a:spcAft>
-                <a:spcPts val="800"/>
+                <a:spcPts val="1000"/>
               </a:spcAft>
             </a:pPr>
             <a:r>
-              <a:rPr sz="2000" b="1">
-                <a:solidFill>
-                  <a:srgbClr val="8C3C28"/>
+              <a:rPr sz="2200" b="1">
+                <a:solidFill>
+                  <a:srgbClr val="DC5028"/>
                 </a:solidFill>
                 <a:latin typeface="Microsoft YaHei"/>
               </a:rPr>
-              <a:t>证据：</a:t>
-            </a:r>
-            <a:r>
-              <a:rPr sz="2000" b="0">
-                <a:solidFill>
-                  <a:srgbClr val="3C2D1E"/>
-                </a:solidFill>
-                <a:latin typeface="Microsoft YaHei"/>
-              </a:rPr>
-              <a:t>紧追不舍、识破破绽</a:t>
-            </a:r>
-          </a:p>
-        </p:txBody>
-      </p:sp>
-      <p:sp>
-        <p:nvSpPr>
-          <p:cNvPr id="14" name="TextBox 13"/>
+              <a:t>分析方法</a:t>
+            </a:r>
+          </a:p>
+        </p:txBody>
+      </p:sp>
+      <p:sp>
+        <p:nvSpPr>
+          <p:cNvPr id="16" name="TextBox 15"/>
           <p:cNvSpPr txBox="1"/>
           <p:nvPr/>
         </p:nvSpPr>
         <p:spPr>
           <a:xfrm>
-            <a:off x="6492240" y="3840480"/>
-            <a:ext cx="4754880" cy="822960"/>
+            <a:off x="3749039" y="3419856"/>
+            <a:ext cx="7132320" cy="685800"/>
           </a:xfrm>
           <a:prstGeom prst="rect">
             <a:avLst/>
@@ -5171,26 +5263,95 @@
           <a:p>
             <a:pPr algn="l">
               <a:spcAft>
-                <a:spcPts val="800"/>
+                <a:spcPts val="1000"/>
               </a:spcAft>
             </a:pPr>
             <a:r>
-              <a:rPr sz="2000" b="1">
-                <a:solidFill>
-                  <a:srgbClr val="8C3C28"/>
+              <a:rPr sz="2200" b="0">
+                <a:solidFill>
+                  <a:srgbClr val="502814"/>
                 </a:solidFill>
                 <a:latin typeface="Microsoft YaHei"/>
               </a:rPr>
-              <a:t>作用：</a:t>
-            </a:r>
-            <a:r>
-              <a:rPr sz="2000" b="0">
-                <a:solidFill>
-                  <a:srgbClr val="3C2D1E"/>
+              <a:t>证据—特点—作用：找细节→概括性格→联系主题</a:t>
+            </a:r>
+          </a:p>
+        </p:txBody>
+      </p:sp>
+      <p:sp>
+        <p:nvSpPr>
+          <p:cNvPr id="17" name="TextBox 16"/>
+          <p:cNvSpPr txBox="1"/>
+          <p:nvPr/>
+        </p:nvSpPr>
+        <p:spPr>
+          <a:xfrm>
+            <a:off x="1463040" y="4169664"/>
+            <a:ext cx="2103120" cy="502920"/>
+          </a:xfrm>
+          <a:prstGeom prst="rect">
+            <a:avLst/>
+          </a:prstGeom>
+          <a:noFill/>
+        </p:spPr>
+        <p:txBody>
+          <a:bodyPr wrap="none">
+            <a:spAutoFit/>
+          </a:bodyPr>
+          <a:lstStyle/>
+          <a:p>
+            <a:pPr algn="r">
+              <a:spcAft>
+                <a:spcPts val="1000"/>
+              </a:spcAft>
+            </a:pPr>
+            <a:r>
+              <a:rPr sz="2200" b="1">
+                <a:solidFill>
+                  <a:srgbClr val="DC5028"/>
                 </a:solidFill>
                 <a:latin typeface="Microsoft YaHei"/>
               </a:rPr>
-              <a:t>体现规则的力量</a:t>
+              <a:t>变旗竿</a:t>
+            </a:r>
+          </a:p>
+        </p:txBody>
+      </p:sp>
+      <p:sp>
+        <p:nvSpPr>
+          <p:cNvPr id="18" name="TextBox 17"/>
+          <p:cNvSpPr txBox="1"/>
+          <p:nvPr/>
+        </p:nvSpPr>
+        <p:spPr>
+          <a:xfrm>
+            <a:off x="3749039" y="4169664"/>
+            <a:ext cx="7132320" cy="685800"/>
+          </a:xfrm>
+          <a:prstGeom prst="rect">
+            <a:avLst/>
+          </a:prstGeom>
+          <a:noFill/>
+        </p:spPr>
+        <p:txBody>
+          <a:bodyPr wrap="none">
+            <a:spAutoFit/>
+          </a:bodyPr>
+          <a:lstStyle/>
+          <a:p>
+            <a:pPr algn="l">
+              <a:spcAft>
+                <a:spcPts val="1000"/>
+              </a:spcAft>
+            </a:pPr>
+            <a:r>
+              <a:rPr sz="2200" b="0">
+                <a:solidFill>
+                  <a:srgbClr val="502814"/>
+                </a:solidFill>
+                <a:latin typeface="Microsoft YaHei"/>
+              </a:rPr>
+              <a:t>紧张又好笑——神通广大也有露馅之时</a:t>
             </a:r>
           </a:p>
         </p:txBody>
@@ -5215,7 +5376,7 @@
       <p:grpSpPr/>
       <p:pic>
         <p:nvPicPr>
-          <p:cNvPr id="2" name="Picture 1" descr="bg_lunyu.png"/>
+          <p:cNvPr id="2" name="Picture 1" descr="bg_wukong.png"/>
           <p:cNvPicPr>
             <a:picLocks noChangeAspect="1"/>
           </p:cNvPicPr>
@@ -5245,17 +5406,17 @@
         </p:nvSpPr>
         <p:spPr>
           <a:xfrm>
-            <a:off x="0" y="0"/>
-            <a:ext cx="12191695" cy="164592"/>
-          </a:xfrm>
-          <a:prstGeom prst="rect">
-            <a:avLst/>
-          </a:prstGeom>
-          <a:solidFill>
-            <a:srgbClr val="3C2D1E"/>
-          </a:solidFill>
-          <a:ln>
-            <a:noFill/>
+            <a:off x="292608" y="274320"/>
+            <a:ext cx="11594592" cy="6300216"/>
+          </a:xfrm>
+          <a:prstGeom prst="rect">
+            <a:avLst/>
+          </a:prstGeom>
+          <a:noFill/>
+          <a:ln w="31750">
+            <a:solidFill>
+              <a:srgbClr val="C85A32"/>
+            </a:solidFill>
           </a:ln>
         </p:spPr>
         <p:style>
@@ -5280,61 +5441,70 @@
           </a:p>
         </p:txBody>
       </p:sp>
-      <p:sp>
-        <p:nvSpPr>
-          <p:cNvPr id="4" name="TextBox 3"/>
-          <p:cNvSpPr txBox="1"/>
-          <p:nvPr/>
-        </p:nvSpPr>
-        <p:spPr>
-          <a:xfrm>
-            <a:off x="1371600" y="640080"/>
-            <a:ext cx="4572000" cy="731520"/>
-          </a:xfrm>
-          <a:prstGeom prst="rect">
-            <a:avLst/>
-          </a:prstGeom>
-          <a:noFill/>
-        </p:spPr>
-        <p:txBody>
-          <a:bodyPr wrap="none">
-            <a:spAutoFit/>
-          </a:bodyPr>
-          <a:lstStyle/>
-          <a:p>
-            <a:pPr algn="l">
-              <a:spcAft>
-                <a:spcPts val="800"/>
-              </a:spcAft>
-            </a:pPr>
-            <a:r>
-              <a:rPr sz="4400" b="1">
-                <a:solidFill>
-                  <a:srgbClr val="3C2D1E"/>
-                </a:solidFill>
-                <a:latin typeface="Microsoft YaHei"/>
-              </a:rPr>
-              <a:t>主题探究</a:t>
-            </a:r>
-          </a:p>
-        </p:txBody>
-      </p:sp>
-      <p:sp>
-        <p:nvSpPr>
-          <p:cNvPr id="5" name="Rectangle 4"/>
+      <p:pic>
+        <p:nvPicPr>
+          <p:cNvPr id="4" name="Picture 3" descr="corner_wukong_tl.png"/>
+          <p:cNvPicPr>
+            <a:picLocks noChangeAspect="1"/>
+          </p:cNvPicPr>
+          <p:nvPr/>
+        </p:nvPicPr>
+        <p:blipFill>
+          <a:blip r:embed="rId3"/>
+          <a:stretch>
+            <a:fillRect/>
+          </a:stretch>
+        </p:blipFill>
+        <p:spPr>
+          <a:xfrm>
+            <a:off x="-45720" y="-45720"/>
+            <a:ext cx="2011680" cy="2011680"/>
+          </a:xfrm>
+          <a:prstGeom prst="rect">
+            <a:avLst/>
+          </a:prstGeom>
+        </p:spPr>
+      </p:pic>
+      <p:pic>
+        <p:nvPicPr>
+          <p:cNvPr id="5" name="Picture 4" descr="corner_wukong_tr.png"/>
+          <p:cNvPicPr>
+            <a:picLocks noChangeAspect="1"/>
+          </p:cNvPicPr>
+          <p:nvPr/>
+        </p:nvPicPr>
+        <p:blipFill>
+          <a:blip r:embed="rId4"/>
+          <a:stretch>
+            <a:fillRect/>
+          </a:stretch>
+        </p:blipFill>
+        <p:spPr>
+          <a:xfrm>
+            <a:off x="9875520" y="-45720"/>
+            <a:ext cx="2011680" cy="2011680"/>
+          </a:xfrm>
+          <a:prstGeom prst="rect">
+            <a:avLst/>
+          </a:prstGeom>
+        </p:spPr>
+      </p:pic>
+      <p:sp>
+        <p:nvSpPr>
+          <p:cNvPr id="6" name="Rounded Rectangle 5"/>
           <p:cNvSpPr/>
           <p:nvPr/>
         </p:nvSpPr>
         <p:spPr>
           <a:xfrm>
-            <a:off x="1371600" y="1325880"/>
-            <a:ext cx="3657600" cy="36576"/>
-          </a:xfrm>
-          <a:prstGeom prst="rect">
+            <a:off x="4953304" y="502920"/>
+            <a:ext cx="2286000" cy="411480"/>
+          </a:xfrm>
+          <a:prstGeom prst="roundRect">
             <a:avLst/>
           </a:prstGeom>
           <a:solidFill>
-            <a:srgbClr val="8C3C28"/>
+            <a:srgbClr val="FFB464"/>
           </a:solidFill>
           <a:ln>
             <a:noFill/>
@@ -5364,14 +5534,14 @@
       </p:sp>
       <p:sp>
         <p:nvSpPr>
-          <p:cNvPr id="6" name="TextBox 5"/>
+          <p:cNvPr id="7" name="TextBox 6"/>
           <p:cNvSpPr txBox="1"/>
           <p:nvPr/>
         </p:nvSpPr>
         <p:spPr>
           <a:xfrm>
-            <a:off x="1371600" y="1417320"/>
-            <a:ext cx="5486400" cy="457200"/>
+            <a:off x="4953304" y="521208"/>
+            <a:ext cx="2286000" cy="384048"/>
           </a:xfrm>
           <a:prstGeom prst="rect">
             <a:avLst/>
@@ -5384,15 +5554,54 @@
           </a:bodyPr>
           <a:lstStyle/>
           <a:p>
-            <a:pPr algn="l">
+            <a:pPr algn="ctr">
               <a:spcAft>
-                <a:spcPts val="800"/>
+                <a:spcPts val="1000"/>
               </a:spcAft>
             </a:pPr>
             <a:r>
-              <a:rPr sz="2400" b="0">
-                <a:solidFill>
-                  <a:srgbClr val="8C3C28"/>
+              <a:rPr sz="1800" b="1">
+                <a:solidFill>
+                  <a:srgbClr val="502814"/>
+                </a:solidFill>
+                <a:latin typeface="Microsoft YaHei"/>
+              </a:rPr>
+              <a:t>主题笔记</a:t>
+            </a:r>
+          </a:p>
+        </p:txBody>
+      </p:sp>
+      <p:sp>
+        <p:nvSpPr>
+          <p:cNvPr id="8" name="TextBox 7"/>
+          <p:cNvSpPr txBox="1"/>
+          <p:nvPr/>
+        </p:nvSpPr>
+        <p:spPr>
+          <a:xfrm>
+            <a:off x="1371600" y="1051560"/>
+            <a:ext cx="9418320" cy="822960"/>
+          </a:xfrm>
+          <a:prstGeom prst="rect">
+            <a:avLst/>
+          </a:prstGeom>
+          <a:noFill/>
+        </p:spPr>
+        <p:txBody>
+          <a:bodyPr wrap="square">
+            <a:spAutoFit/>
+          </a:bodyPr>
+          <a:lstStyle/>
+          <a:p>
+            <a:pPr algn="ctr">
+              <a:spcAft>
+                <a:spcPts val="1000"/>
+              </a:spcAft>
+            </a:pPr>
+            <a:r>
+              <a:rPr sz="3600" b="1">
+                <a:solidFill>
+                  <a:srgbClr val="DC5028"/>
                 </a:solidFill>
                 <a:latin typeface="Microsoft YaHei"/>
               </a:rPr>
@@ -5403,25 +5612,23 @@
       </p:sp>
       <p:sp>
         <p:nvSpPr>
-          <p:cNvPr id="7" name="Rectangle 6"/>
+          <p:cNvPr id="9" name="Rectangle 8"/>
           <p:cNvSpPr/>
           <p:nvPr/>
         </p:nvSpPr>
         <p:spPr>
           <a:xfrm>
-            <a:off x="1188720" y="2011680"/>
-            <a:ext cx="7132320" cy="4114800"/>
+            <a:off x="3200400" y="1691640"/>
+            <a:ext cx="5760720" cy="27432"/>
           </a:xfrm>
           <a:prstGeom prst="rect">
             <a:avLst/>
           </a:prstGeom>
           <a:solidFill>
-            <a:srgbClr val="FFFCF5"/>
+            <a:srgbClr val="FFB464"/>
           </a:solidFill>
-          <a:ln w="19050">
-            <a:solidFill>
-              <a:srgbClr val="B4823C"/>
-            </a:solidFill>
+          <a:ln>
+            <a:noFill/>
           </a:ln>
         </p:spPr>
         <p:style>
@@ -5448,336 +5655,24 @@
       </p:sp>
       <p:sp>
         <p:nvSpPr>
-          <p:cNvPr id="8" name="TextBox 7"/>
-          <p:cNvSpPr txBox="1"/>
-          <p:nvPr/>
-        </p:nvSpPr>
-        <p:spPr>
-          <a:xfrm>
-            <a:off x="1463040" y="2194560"/>
-            <a:ext cx="2011680" cy="411480"/>
-          </a:xfrm>
-          <a:prstGeom prst="rect">
-            <a:avLst/>
-          </a:prstGeom>
-          <a:noFill/>
-        </p:spPr>
-        <p:txBody>
-          <a:bodyPr wrap="none">
-            <a:spAutoFit/>
-          </a:bodyPr>
-          <a:lstStyle/>
-          <a:p>
-            <a:pPr algn="l">
-              <a:spcAft>
-                <a:spcPts val="800"/>
-              </a:spcAft>
-            </a:pPr>
-            <a:r>
-              <a:rPr sz="2200" b="1">
-                <a:solidFill>
-                  <a:srgbClr val="8C3C28"/>
-                </a:solidFill>
-                <a:latin typeface="Microsoft YaHei"/>
-              </a:rPr>
-              <a:t>【鲁迅】</a:t>
-            </a:r>
-          </a:p>
-        </p:txBody>
-      </p:sp>
-      <p:sp>
-        <p:nvSpPr>
-          <p:cNvPr id="9" name="TextBox 8"/>
-          <p:cNvSpPr txBox="1"/>
-          <p:nvPr/>
-        </p:nvSpPr>
-        <p:spPr>
-          <a:xfrm>
-            <a:off x="3474720" y="2194560"/>
-            <a:ext cx="4572000" cy="640080"/>
-          </a:xfrm>
-          <a:prstGeom prst="rect">
-            <a:avLst/>
-          </a:prstGeom>
-          <a:noFill/>
-        </p:spPr>
-        <p:txBody>
-          <a:bodyPr wrap="none">
-            <a:spAutoFit/>
-          </a:bodyPr>
-          <a:lstStyle/>
-          <a:p>
-            <a:pPr algn="l">
-              <a:spcAft>
-                <a:spcPts val="800"/>
-              </a:spcAft>
-            </a:pPr>
-            <a:r>
-              <a:rPr sz="2200" b="0">
-                <a:solidFill>
-                  <a:srgbClr val="3C2D1E"/>
-                </a:solidFill>
-                <a:latin typeface="Microsoft YaHei"/>
-              </a:rPr>
-              <a:t>「使神魔皆有人情，精魅亦通世故」</a:t>
-            </a:r>
-          </a:p>
-        </p:txBody>
-      </p:sp>
-      <p:sp>
-        <p:nvSpPr>
-          <p:cNvPr id="10" name="TextBox 9"/>
-          <p:cNvSpPr txBox="1"/>
-          <p:nvPr/>
-        </p:nvSpPr>
-        <p:spPr>
-          <a:xfrm>
-            <a:off x="1463040" y="2788920"/>
-            <a:ext cx="2011680" cy="411480"/>
-          </a:xfrm>
-          <a:prstGeom prst="rect">
-            <a:avLst/>
-          </a:prstGeom>
-          <a:noFill/>
-        </p:spPr>
-        <p:txBody>
-          <a:bodyPr wrap="none">
-            <a:spAutoFit/>
-          </a:bodyPr>
-          <a:lstStyle/>
-          <a:p>
-            <a:pPr algn="l">
-              <a:spcAft>
-                <a:spcPts val="800"/>
-              </a:spcAft>
-            </a:pPr>
-            <a:r>
-              <a:rPr sz="2200" b="1">
-                <a:solidFill>
-                  <a:srgbClr val="8C3C28"/>
-                </a:solidFill>
-                <a:latin typeface="Microsoft YaHei"/>
-              </a:rPr>
-              <a:t>【林庚】</a:t>
-            </a:r>
-          </a:p>
-        </p:txBody>
-      </p:sp>
-      <p:sp>
-        <p:nvSpPr>
-          <p:cNvPr id="11" name="TextBox 10"/>
-          <p:cNvSpPr txBox="1"/>
-          <p:nvPr/>
-        </p:nvSpPr>
-        <p:spPr>
-          <a:xfrm>
-            <a:off x="3474720" y="2788920"/>
-            <a:ext cx="4572000" cy="640080"/>
-          </a:xfrm>
-          <a:prstGeom prst="rect">
-            <a:avLst/>
-          </a:prstGeom>
-          <a:noFill/>
-        </p:spPr>
-        <p:txBody>
-          <a:bodyPr wrap="none">
-            <a:spAutoFit/>
-          </a:bodyPr>
-          <a:lstStyle/>
-          <a:p>
-            <a:pPr algn="l">
-              <a:spcAft>
-                <a:spcPts val="800"/>
-              </a:spcAft>
-            </a:pPr>
-            <a:r>
-              <a:rPr sz="2200" b="0">
-                <a:solidFill>
-                  <a:srgbClr val="3C2D1E"/>
-                </a:solidFill>
-                <a:latin typeface="Microsoft YaHei"/>
-              </a:rPr>
-              <a:t>不宜看得过于认真，应看到儿童的心理与行为</a:t>
-            </a:r>
-          </a:p>
-        </p:txBody>
-      </p:sp>
-      <p:sp>
-        <p:nvSpPr>
-          <p:cNvPr id="12" name="TextBox 11"/>
-          <p:cNvSpPr txBox="1"/>
-          <p:nvPr/>
-        </p:nvSpPr>
-        <p:spPr>
-          <a:xfrm>
-            <a:off x="1463040" y="3383279"/>
-            <a:ext cx="2011680" cy="411480"/>
-          </a:xfrm>
-          <a:prstGeom prst="rect">
-            <a:avLst/>
-          </a:prstGeom>
-          <a:noFill/>
-        </p:spPr>
-        <p:txBody>
-          <a:bodyPr wrap="none">
-            <a:spAutoFit/>
-          </a:bodyPr>
-          <a:lstStyle/>
-          <a:p>
-            <a:pPr algn="l">
-              <a:spcAft>
-                <a:spcPts val="800"/>
-              </a:spcAft>
-            </a:pPr>
-            <a:r>
-              <a:rPr sz="2200" b="1">
-                <a:solidFill>
-                  <a:srgbClr val="8C3C28"/>
-                </a:solidFill>
-                <a:latin typeface="Microsoft YaHei"/>
-              </a:rPr>
-              <a:t>【方法】</a:t>
-            </a:r>
-          </a:p>
-        </p:txBody>
-      </p:sp>
-      <p:sp>
-        <p:nvSpPr>
-          <p:cNvPr id="13" name="TextBox 12"/>
-          <p:cNvSpPr txBox="1"/>
-          <p:nvPr/>
-        </p:nvSpPr>
-        <p:spPr>
-          <a:xfrm>
-            <a:off x="3474720" y="3383279"/>
-            <a:ext cx="4572000" cy="640080"/>
-          </a:xfrm>
-          <a:prstGeom prst="rect">
-            <a:avLst/>
-          </a:prstGeom>
-          <a:noFill/>
-        </p:spPr>
-        <p:txBody>
-          <a:bodyPr wrap="none">
-            <a:spAutoFit/>
-          </a:bodyPr>
-          <a:lstStyle/>
-          <a:p>
-            <a:pPr algn="l">
-              <a:spcAft>
-                <a:spcPts val="800"/>
-              </a:spcAft>
-            </a:pPr>
-            <a:r>
-              <a:rPr sz="2200" b="0">
-                <a:solidFill>
-                  <a:srgbClr val="3C2D1E"/>
-                </a:solidFill>
-                <a:latin typeface="Microsoft YaHei"/>
-              </a:rPr>
-              <a:t>证据—特点—作用</a:t>
-            </a:r>
-          </a:p>
-        </p:txBody>
-      </p:sp>
-      <p:sp>
-        <p:nvSpPr>
-          <p:cNvPr id="14" name="TextBox 13"/>
-          <p:cNvSpPr txBox="1"/>
-          <p:nvPr/>
-        </p:nvSpPr>
-        <p:spPr>
-          <a:xfrm>
-            <a:off x="1463040" y="3977639"/>
-            <a:ext cx="2011680" cy="411480"/>
-          </a:xfrm>
-          <a:prstGeom prst="rect">
-            <a:avLst/>
-          </a:prstGeom>
-          <a:noFill/>
-        </p:spPr>
-        <p:txBody>
-          <a:bodyPr wrap="none">
-            <a:spAutoFit/>
-          </a:bodyPr>
-          <a:lstStyle/>
-          <a:p>
-            <a:pPr algn="l">
-              <a:spcAft>
-                <a:spcPts val="800"/>
-              </a:spcAft>
-            </a:pPr>
-            <a:r>
-              <a:rPr sz="2200" b="1">
-                <a:solidFill>
-                  <a:srgbClr val="8C3C28"/>
-                </a:solidFill>
-                <a:latin typeface="Microsoft YaHei"/>
-              </a:rPr>
-              <a:t>【策展主题】</a:t>
-            </a:r>
-          </a:p>
-        </p:txBody>
-      </p:sp>
-      <p:sp>
-        <p:nvSpPr>
-          <p:cNvPr id="15" name="TextBox 14"/>
-          <p:cNvSpPr txBox="1"/>
-          <p:nvPr/>
-        </p:nvSpPr>
-        <p:spPr>
-          <a:xfrm>
-            <a:off x="3474720" y="3977639"/>
-            <a:ext cx="4572000" cy="640080"/>
-          </a:xfrm>
-          <a:prstGeom prst="rect">
-            <a:avLst/>
-          </a:prstGeom>
-          <a:noFill/>
-        </p:spPr>
-        <p:txBody>
-          <a:bodyPr wrap="none">
-            <a:spAutoFit/>
-          </a:bodyPr>
-          <a:lstStyle/>
-          <a:p>
-            <a:pPr algn="l">
-              <a:spcAft>
-                <a:spcPts val="800"/>
-              </a:spcAft>
-            </a:pPr>
-            <a:r>
-              <a:rPr sz="2200" b="0">
-                <a:solidFill>
-                  <a:srgbClr val="3C2D1E"/>
-                </a:solidFill>
-                <a:latin typeface="Microsoft YaHei"/>
-              </a:rPr>
-              <a:t>自由可贵，但不可无视规则</a:t>
-            </a:r>
-          </a:p>
-        </p:txBody>
-      </p:sp>
-      <p:sp>
-        <p:nvSpPr>
-          <p:cNvPr id="16" name="Rectangle 15"/>
+          <p:cNvPr id="10" name="Rounded Rectangle 9"/>
           <p:cNvSpPr/>
           <p:nvPr/>
         </p:nvSpPr>
         <p:spPr>
           <a:xfrm>
-            <a:off x="8686800" y="2011680"/>
-            <a:ext cx="2926080" cy="4114800"/>
-          </a:xfrm>
-          <a:prstGeom prst="rect">
+            <a:off x="1249984" y="1810512"/>
+            <a:ext cx="9692640" cy="3319272"/>
+          </a:xfrm>
+          <a:prstGeom prst="roundRect">
             <a:avLst/>
           </a:prstGeom>
           <a:solidFill>
-            <a:srgbClr val="8C3C28"/>
+            <a:srgbClr val="FFF8F0"/>
           </a:solidFill>
-          <a:ln>
+          <a:ln w="19050">
             <a:solidFill>
-              <a:srgbClr val="8C3C28"/>
+              <a:srgbClr val="FFB464"/>
             </a:solidFill>
           </a:ln>
         </p:spPr>
@@ -5805,14 +5700,14 @@
       </p:sp>
       <p:sp>
         <p:nvSpPr>
-          <p:cNvPr id="17" name="TextBox 16"/>
+          <p:cNvPr id="11" name="TextBox 10"/>
           <p:cNvSpPr txBox="1"/>
           <p:nvPr/>
         </p:nvSpPr>
         <p:spPr>
           <a:xfrm>
-            <a:off x="8869680" y="3200400"/>
-            <a:ext cx="2560320" cy="1828800"/>
+            <a:off x="1463040" y="1920240"/>
+            <a:ext cx="2103120" cy="502920"/>
           </a:xfrm>
           <a:prstGeom prst="rect">
             <a:avLst/>
@@ -5825,20 +5720,292 @@
           </a:bodyPr>
           <a:lstStyle/>
           <a:p>
-            <a:pPr algn="ctr">
+            <a:pPr algn="r">
               <a:spcAft>
-                <a:spcPts val="800"/>
+                <a:spcPts val="1000"/>
               </a:spcAft>
             </a:pPr>
             <a:r>
-              <a:rPr sz="4800" b="1">
-                <a:solidFill>
-                  <a:srgbClr val="8C3C28"/>
+              <a:rPr sz="2200" b="1">
+                <a:solidFill>
+                  <a:srgbClr val="DC5028"/>
                 </a:solidFill>
                 <a:latin typeface="Microsoft YaHei"/>
               </a:rPr>
-              <a:t>笔
-记</a:t>
+              <a:t>鲁迅</a:t>
+            </a:r>
+          </a:p>
+        </p:txBody>
+      </p:sp>
+      <p:sp>
+        <p:nvSpPr>
+          <p:cNvPr id="12" name="TextBox 11"/>
+          <p:cNvSpPr txBox="1"/>
+          <p:nvPr/>
+        </p:nvSpPr>
+        <p:spPr>
+          <a:xfrm>
+            <a:off x="3749039" y="1920240"/>
+            <a:ext cx="7132320" cy="685800"/>
+          </a:xfrm>
+          <a:prstGeom prst="rect">
+            <a:avLst/>
+          </a:prstGeom>
+          <a:noFill/>
+        </p:spPr>
+        <p:txBody>
+          <a:bodyPr wrap="none">
+            <a:spAutoFit/>
+          </a:bodyPr>
+          <a:lstStyle/>
+          <a:p>
+            <a:pPr algn="l">
+              <a:spcAft>
+                <a:spcPts val="1000"/>
+              </a:spcAft>
+            </a:pPr>
+            <a:r>
+              <a:rPr sz="2200" b="0">
+                <a:solidFill>
+                  <a:srgbClr val="502814"/>
+                </a:solidFill>
+                <a:latin typeface="Microsoft YaHei"/>
+              </a:rPr>
+              <a:t>「使神魔皆有人情，精魅亦通世故」——神魔也有人的情感</a:t>
+            </a:r>
+          </a:p>
+        </p:txBody>
+      </p:sp>
+      <p:sp>
+        <p:nvSpPr>
+          <p:cNvPr id="13" name="TextBox 12"/>
+          <p:cNvSpPr txBox="1"/>
+          <p:nvPr/>
+        </p:nvSpPr>
+        <p:spPr>
+          <a:xfrm>
+            <a:off x="1463040" y="2670048"/>
+            <a:ext cx="2103120" cy="502920"/>
+          </a:xfrm>
+          <a:prstGeom prst="rect">
+            <a:avLst/>
+          </a:prstGeom>
+          <a:noFill/>
+        </p:spPr>
+        <p:txBody>
+          <a:bodyPr wrap="none">
+            <a:spAutoFit/>
+          </a:bodyPr>
+          <a:lstStyle/>
+          <a:p>
+            <a:pPr algn="r">
+              <a:spcAft>
+                <a:spcPts val="1000"/>
+              </a:spcAft>
+            </a:pPr>
+            <a:r>
+              <a:rPr sz="2200" b="1">
+                <a:solidFill>
+                  <a:srgbClr val="DC5028"/>
+                </a:solidFill>
+                <a:latin typeface="Microsoft YaHei"/>
+              </a:rPr>
+              <a:t>林庚</a:t>
+            </a:r>
+          </a:p>
+        </p:txBody>
+      </p:sp>
+      <p:sp>
+        <p:nvSpPr>
+          <p:cNvPr id="14" name="TextBox 13"/>
+          <p:cNvSpPr txBox="1"/>
+          <p:nvPr/>
+        </p:nvSpPr>
+        <p:spPr>
+          <a:xfrm>
+            <a:off x="3749039" y="2670048"/>
+            <a:ext cx="7132320" cy="685800"/>
+          </a:xfrm>
+          <a:prstGeom prst="rect">
+            <a:avLst/>
+          </a:prstGeom>
+          <a:noFill/>
+        </p:spPr>
+        <p:txBody>
+          <a:bodyPr wrap="none">
+            <a:spAutoFit/>
+          </a:bodyPr>
+          <a:lstStyle/>
+          <a:p>
+            <a:pPr algn="l">
+              <a:spcAft>
+                <a:spcPts val="1000"/>
+              </a:spcAft>
+            </a:pPr>
+            <a:r>
+              <a:rPr sz="2200" b="0">
+                <a:solidFill>
+                  <a:srgbClr val="502814"/>
+                </a:solidFill>
+                <a:latin typeface="Microsoft YaHei"/>
+              </a:rPr>
+              <a:t>不宜看得过于认真，应看到儿童的心理与行为</a:t>
+            </a:r>
+          </a:p>
+        </p:txBody>
+      </p:sp>
+      <p:sp>
+        <p:nvSpPr>
+          <p:cNvPr id="15" name="TextBox 14"/>
+          <p:cNvSpPr txBox="1"/>
+          <p:nvPr/>
+        </p:nvSpPr>
+        <p:spPr>
+          <a:xfrm>
+            <a:off x="1463040" y="3419856"/>
+            <a:ext cx="2103120" cy="502920"/>
+          </a:xfrm>
+          <a:prstGeom prst="rect">
+            <a:avLst/>
+          </a:prstGeom>
+          <a:noFill/>
+        </p:spPr>
+        <p:txBody>
+          <a:bodyPr wrap="none">
+            <a:spAutoFit/>
+          </a:bodyPr>
+          <a:lstStyle/>
+          <a:p>
+            <a:pPr algn="r">
+              <a:spcAft>
+                <a:spcPts val="1000"/>
+              </a:spcAft>
+            </a:pPr>
+            <a:r>
+              <a:rPr sz="2200" b="1">
+                <a:solidFill>
+                  <a:srgbClr val="DC5028"/>
+                </a:solidFill>
+                <a:latin typeface="Microsoft YaHei"/>
+              </a:rPr>
+              <a:t>艺术特色</a:t>
+            </a:r>
+          </a:p>
+        </p:txBody>
+      </p:sp>
+      <p:sp>
+        <p:nvSpPr>
+          <p:cNvPr id="16" name="TextBox 15"/>
+          <p:cNvSpPr txBox="1"/>
+          <p:nvPr/>
+        </p:nvSpPr>
+        <p:spPr>
+          <a:xfrm>
+            <a:off x="3749039" y="3419856"/>
+            <a:ext cx="7132320" cy="685800"/>
+          </a:xfrm>
+          <a:prstGeom prst="rect">
+            <a:avLst/>
+          </a:prstGeom>
+          <a:noFill/>
+        </p:spPr>
+        <p:txBody>
+          <a:bodyPr wrap="none">
+            <a:spAutoFit/>
+          </a:bodyPr>
+          <a:lstStyle/>
+          <a:p>
+            <a:pPr algn="l">
+              <a:spcAft>
+                <a:spcPts val="1000"/>
+              </a:spcAft>
+            </a:pPr>
+            <a:r>
+              <a:rPr sz="2200" b="0">
+                <a:solidFill>
+                  <a:srgbClr val="502814"/>
+                </a:solidFill>
+                <a:latin typeface="Microsoft YaHei"/>
+              </a:rPr>
+              <a:t>想象基于「相克」逻辑，变化链环环相扣</a:t>
+            </a:r>
+          </a:p>
+        </p:txBody>
+      </p:sp>
+      <p:sp>
+        <p:nvSpPr>
+          <p:cNvPr id="17" name="TextBox 16"/>
+          <p:cNvSpPr txBox="1"/>
+          <p:nvPr/>
+        </p:nvSpPr>
+        <p:spPr>
+          <a:xfrm>
+            <a:off x="1463040" y="4169664"/>
+            <a:ext cx="2103120" cy="502920"/>
+          </a:xfrm>
+          <a:prstGeom prst="rect">
+            <a:avLst/>
+          </a:prstGeom>
+          <a:noFill/>
+        </p:spPr>
+        <p:txBody>
+          <a:bodyPr wrap="none">
+            <a:spAutoFit/>
+          </a:bodyPr>
+          <a:lstStyle/>
+          <a:p>
+            <a:pPr algn="r">
+              <a:spcAft>
+                <a:spcPts val="1000"/>
+              </a:spcAft>
+            </a:pPr>
+            <a:r>
+              <a:rPr sz="2200" b="1">
+                <a:solidFill>
+                  <a:srgbClr val="DC5028"/>
+                </a:solidFill>
+                <a:latin typeface="Microsoft YaHei"/>
+              </a:rPr>
+              <a:t>策展主题</a:t>
+            </a:r>
+          </a:p>
+        </p:txBody>
+      </p:sp>
+      <p:sp>
+        <p:nvSpPr>
+          <p:cNvPr id="18" name="TextBox 17"/>
+          <p:cNvSpPr txBox="1"/>
+          <p:nvPr/>
+        </p:nvSpPr>
+        <p:spPr>
+          <a:xfrm>
+            <a:off x="3749039" y="4169664"/>
+            <a:ext cx="7132320" cy="685800"/>
+          </a:xfrm>
+          <a:prstGeom prst="rect">
+            <a:avLst/>
+          </a:prstGeom>
+          <a:noFill/>
+        </p:spPr>
+        <p:txBody>
+          <a:bodyPr wrap="none">
+            <a:spAutoFit/>
+          </a:bodyPr>
+          <a:lstStyle/>
+          <a:p>
+            <a:pPr algn="l">
+              <a:spcAft>
+                <a:spcPts val="1000"/>
+              </a:spcAft>
+            </a:pPr>
+            <a:r>
+              <a:rPr sz="2200" b="0">
+                <a:solidFill>
+                  <a:srgbClr val="502814"/>
+                </a:solidFill>
+                <a:latin typeface="Microsoft YaHei"/>
+              </a:rPr>
+              <a:t>自由可贵，但不可无视规则（自由与规则）</a:t>
             </a:r>
           </a:p>
         </p:txBody>
@@ -5863,7 +6030,7 @@
       <p:grpSpPr/>
       <p:pic>
         <p:nvPicPr>
-          <p:cNvPr id="2" name="Picture 1" descr="bg_lunyu.png"/>
+          <p:cNvPr id="2" name="Picture 1" descr="bg_wukong.png"/>
           <p:cNvPicPr>
             <a:picLocks noChangeAspect="1"/>
           </p:cNvPicPr>
@@ -5893,17 +6060,17 @@
         </p:nvSpPr>
         <p:spPr>
           <a:xfrm>
-            <a:off x="0" y="0"/>
-            <a:ext cx="12191695" cy="164592"/>
-          </a:xfrm>
-          <a:prstGeom prst="rect">
-            <a:avLst/>
-          </a:prstGeom>
-          <a:solidFill>
-            <a:srgbClr val="3C2D1E"/>
-          </a:solidFill>
-          <a:ln>
-            <a:noFill/>
+            <a:off x="292608" y="274320"/>
+            <a:ext cx="11594592" cy="6300216"/>
+          </a:xfrm>
+          <a:prstGeom prst="rect">
+            <a:avLst/>
+          </a:prstGeom>
+          <a:noFill/>
+          <a:ln w="31750">
+            <a:solidFill>
+              <a:srgbClr val="C85A32"/>
+            </a:solidFill>
           </a:ln>
         </p:spPr>
         <p:style>
@@ -5928,61 +6095,70 @@
           </a:p>
         </p:txBody>
       </p:sp>
-      <p:sp>
-        <p:nvSpPr>
-          <p:cNvPr id="4" name="TextBox 3"/>
-          <p:cNvSpPr txBox="1"/>
-          <p:nvPr/>
-        </p:nvSpPr>
-        <p:spPr>
-          <a:xfrm>
-            <a:off x="1371600" y="548640"/>
-            <a:ext cx="9144000" cy="640080"/>
-          </a:xfrm>
-          <a:prstGeom prst="rect">
-            <a:avLst/>
-          </a:prstGeom>
-          <a:noFill/>
-        </p:spPr>
-        <p:txBody>
-          <a:bodyPr wrap="none">
-            <a:spAutoFit/>
-          </a:bodyPr>
-          <a:lstStyle/>
-          <a:p>
-            <a:pPr algn="l">
-              <a:spcAft>
-                <a:spcPts val="800"/>
-              </a:spcAft>
-            </a:pPr>
-            <a:r>
-              <a:rPr sz="3200" b="1">
-                <a:solidFill>
-                  <a:srgbClr val="8C3C28"/>
-                </a:solidFill>
-                <a:latin typeface="Microsoft YaHei"/>
-              </a:rPr>
-              <a:t>▶ 学习任务</a:t>
-            </a:r>
-          </a:p>
-        </p:txBody>
-      </p:sp>
-      <p:sp>
-        <p:nvSpPr>
-          <p:cNvPr id="5" name="Oval 4"/>
+      <p:pic>
+        <p:nvPicPr>
+          <p:cNvPr id="4" name="Picture 3" descr="corner_wukong_tl.png"/>
+          <p:cNvPicPr>
+            <a:picLocks noChangeAspect="1"/>
+          </p:cNvPicPr>
+          <p:nvPr/>
+        </p:nvPicPr>
+        <p:blipFill>
+          <a:blip r:embed="rId3"/>
+          <a:stretch>
+            <a:fillRect/>
+          </a:stretch>
+        </p:blipFill>
+        <p:spPr>
+          <a:xfrm>
+            <a:off x="-45720" y="-45720"/>
+            <a:ext cx="2011680" cy="2011680"/>
+          </a:xfrm>
+          <a:prstGeom prst="rect">
+            <a:avLst/>
+          </a:prstGeom>
+        </p:spPr>
+      </p:pic>
+      <p:pic>
+        <p:nvPicPr>
+          <p:cNvPr id="5" name="Picture 4" descr="corner_wukong_tr.png"/>
+          <p:cNvPicPr>
+            <a:picLocks noChangeAspect="1"/>
+          </p:cNvPicPr>
+          <p:nvPr/>
+        </p:nvPicPr>
+        <p:blipFill>
+          <a:blip r:embed="rId4"/>
+          <a:stretch>
+            <a:fillRect/>
+          </a:stretch>
+        </p:blipFill>
+        <p:spPr>
+          <a:xfrm>
+            <a:off x="9875520" y="-45720"/>
+            <a:ext cx="2011680" cy="2011680"/>
+          </a:xfrm>
+          <a:prstGeom prst="rect">
+            <a:avLst/>
+          </a:prstGeom>
+        </p:spPr>
+      </p:pic>
+      <p:sp>
+        <p:nvSpPr>
+          <p:cNvPr id="6" name="Rounded Rectangle 5"/>
           <p:cNvSpPr/>
           <p:nvPr/>
         </p:nvSpPr>
         <p:spPr>
           <a:xfrm>
-            <a:off x="1371600" y="1463040"/>
-            <a:ext cx="365760" cy="365760"/>
-          </a:xfrm>
-          <a:prstGeom prst="ellipse">
+            <a:off x="4953304" y="502920"/>
+            <a:ext cx="2286000" cy="411480"/>
+          </a:xfrm>
+          <a:prstGeom prst="roundRect">
             <a:avLst/>
           </a:prstGeom>
           <a:solidFill>
-            <a:srgbClr val="8C3C28"/>
+            <a:srgbClr val="FFB464"/>
           </a:solidFill>
           <a:ln>
             <a:noFill/>
@@ -6012,14 +6188,14 @@
       </p:sp>
       <p:sp>
         <p:nvSpPr>
-          <p:cNvPr id="6" name="TextBox 5"/>
+          <p:cNvPr id="7" name="TextBox 6"/>
           <p:cNvSpPr txBox="1"/>
           <p:nvPr/>
         </p:nvSpPr>
         <p:spPr>
           <a:xfrm>
-            <a:off x="1371600" y="1481328"/>
-            <a:ext cx="365760" cy="347472"/>
+            <a:off x="4953304" y="521208"/>
+            <a:ext cx="2286000" cy="384048"/>
           </a:xfrm>
           <a:prstGeom prst="rect">
             <a:avLst/>
@@ -6034,31 +6210,31 @@
           <a:p>
             <a:pPr algn="ctr">
               <a:spcAft>
-                <a:spcPts val="800"/>
+                <a:spcPts val="1000"/>
               </a:spcAft>
             </a:pPr>
             <a:r>
-              <a:rPr sz="1400" b="1">
-                <a:solidFill>
-                  <a:srgbClr val="FFFFFF"/>
+              <a:rPr sz="1800" b="1">
+                <a:solidFill>
+                  <a:srgbClr val="502814"/>
                 </a:solidFill>
                 <a:latin typeface="Microsoft YaHei"/>
               </a:rPr>
-              <a:t>1</a:t>
-            </a:r>
-          </a:p>
-        </p:txBody>
-      </p:sp>
-      <p:sp>
-        <p:nvSpPr>
-          <p:cNvPr id="7" name="TextBox 6"/>
+              <a:t>课堂活动</a:t>
+            </a:r>
+          </a:p>
+        </p:txBody>
+      </p:sp>
+      <p:sp>
+        <p:nvSpPr>
+          <p:cNvPr id="8" name="TextBox 7"/>
           <p:cNvSpPr txBox="1"/>
           <p:nvPr/>
         </p:nvSpPr>
         <p:spPr>
           <a:xfrm>
-            <a:off x="1920240" y="1444752"/>
-            <a:ext cx="9144000" cy="502920"/>
+            <a:off x="1371600" y="1051560"/>
+            <a:ext cx="9418320" cy="822960"/>
           </a:xfrm>
           <a:prstGeom prst="rect">
             <a:avLst/>
@@ -6066,44 +6242,44 @@
           <a:noFill/>
         </p:spPr>
         <p:txBody>
-          <a:bodyPr wrap="none">
+          <a:bodyPr wrap="square">
             <a:spAutoFit/>
           </a:bodyPr>
           <a:lstStyle/>
           <a:p>
-            <a:pPr algn="l">
+            <a:pPr algn="ctr">
               <a:spcAft>
-                <a:spcPts val="800"/>
+                <a:spcPts val="1000"/>
               </a:spcAft>
             </a:pPr>
             <a:r>
-              <a:rPr sz="2400" b="0">
-                <a:solidFill>
-                  <a:srgbClr val="3C2D1E"/>
+              <a:rPr sz="3600" b="1">
+                <a:solidFill>
+                  <a:srgbClr val="DC5028"/>
                 </a:solidFill>
                 <a:latin typeface="Microsoft YaHei"/>
               </a:rPr>
-              <a:t>填写七十二变对照表，标出相克关系</a:t>
-            </a:r>
-          </a:p>
-        </p:txBody>
-      </p:sp>
-      <p:sp>
-        <p:nvSpPr>
-          <p:cNvPr id="8" name="Oval 7"/>
+              <a:t>学习任务</a:t>
+            </a:r>
+          </a:p>
+        </p:txBody>
+      </p:sp>
+      <p:sp>
+        <p:nvSpPr>
+          <p:cNvPr id="9" name="Rectangle 8"/>
           <p:cNvSpPr/>
           <p:nvPr/>
         </p:nvSpPr>
         <p:spPr>
           <a:xfrm>
-            <a:off x="1371600" y="2148840"/>
-            <a:ext cx="365760" cy="365760"/>
-          </a:xfrm>
-          <a:prstGeom prst="ellipse">
+            <a:off x="3200400" y="1691640"/>
+            <a:ext cx="5760720" cy="27432"/>
+          </a:xfrm>
+          <a:prstGeom prst="rect">
             <a:avLst/>
           </a:prstGeom>
           <a:solidFill>
-            <a:srgbClr val="8C3C28"/>
+            <a:srgbClr val="FFB464"/>
           </a:solidFill>
           <a:ln>
             <a:noFill/>
@@ -6133,101 +6309,25 @@
       </p:sp>
       <p:sp>
         <p:nvSpPr>
-          <p:cNvPr id="9" name="TextBox 8"/>
-          <p:cNvSpPr txBox="1"/>
-          <p:nvPr/>
-        </p:nvSpPr>
-        <p:spPr>
-          <a:xfrm>
-            <a:off x="1371600" y="2167128"/>
-            <a:ext cx="365760" cy="347472"/>
-          </a:xfrm>
-          <a:prstGeom prst="rect">
-            <a:avLst/>
-          </a:prstGeom>
-          <a:noFill/>
-        </p:spPr>
-        <p:txBody>
-          <a:bodyPr wrap="none">
-            <a:spAutoFit/>
-          </a:bodyPr>
-          <a:lstStyle/>
-          <a:p>
-            <a:pPr algn="ctr">
-              <a:spcAft>
-                <a:spcPts val="800"/>
-              </a:spcAft>
-            </a:pPr>
-            <a:r>
-              <a:rPr sz="1400" b="1">
-                <a:solidFill>
-                  <a:srgbClr val="FFFFFF"/>
-                </a:solidFill>
-                <a:latin typeface="Microsoft YaHei"/>
-              </a:rPr>
-              <a:t>2</a:t>
-            </a:r>
-          </a:p>
-        </p:txBody>
-      </p:sp>
-      <p:sp>
-        <p:nvSpPr>
-          <p:cNvPr id="10" name="TextBox 9"/>
-          <p:cNvSpPr txBox="1"/>
-          <p:nvPr/>
-        </p:nvSpPr>
-        <p:spPr>
-          <a:xfrm>
-            <a:off x="1920240" y="2130552"/>
-            <a:ext cx="9144000" cy="502920"/>
-          </a:xfrm>
-          <a:prstGeom prst="rect">
-            <a:avLst/>
-          </a:prstGeom>
-          <a:noFill/>
-        </p:spPr>
-        <p:txBody>
-          <a:bodyPr wrap="none">
-            <a:spAutoFit/>
-          </a:bodyPr>
-          <a:lstStyle/>
-          <a:p>
-            <a:pPr algn="l">
-              <a:spcAft>
-                <a:spcPts val="800"/>
-              </a:spcAft>
-            </a:pPr>
-            <a:r>
-              <a:rPr sz="2400" b="0">
-                <a:solidFill>
-                  <a:srgbClr val="3C2D1E"/>
-                </a:solidFill>
-                <a:latin typeface="Microsoft YaHei"/>
-              </a:rPr>
-              <a:t>完成人物档案卡（证据—特点—作用）</a:t>
-            </a:r>
-          </a:p>
-        </p:txBody>
-      </p:sp>
-      <p:sp>
-        <p:nvSpPr>
-          <p:cNvPr id="11" name="Oval 10"/>
+          <p:cNvPr id="10" name="Rounded Rectangle 9"/>
           <p:cNvSpPr/>
           <p:nvPr/>
         </p:nvSpPr>
         <p:spPr>
           <a:xfrm>
-            <a:off x="1371600" y="2834640"/>
-            <a:ext cx="365760" cy="365760"/>
-          </a:xfrm>
-          <a:prstGeom prst="ellipse">
+            <a:off x="1295704" y="1737360"/>
+            <a:ext cx="9601200" cy="2112264"/>
+          </a:xfrm>
+          <a:prstGeom prst="roundRect">
             <a:avLst/>
           </a:prstGeom>
           <a:solidFill>
-            <a:srgbClr val="8C3C28"/>
+            <a:srgbClr val="FFF8F0"/>
           </a:solidFill>
-          <a:ln>
-            <a:noFill/>
+          <a:ln w="19050">
+            <a:solidFill>
+              <a:srgbClr val="FFB464"/>
+            </a:solidFill>
           </a:ln>
         </p:spPr>
         <p:style>
@@ -6254,14 +6354,57 @@
       </p:sp>
       <p:sp>
         <p:nvSpPr>
+          <p:cNvPr id="11" name="Oval 10"/>
+          <p:cNvSpPr/>
+          <p:nvPr/>
+        </p:nvSpPr>
+        <p:spPr>
+          <a:xfrm>
+            <a:off x="2621584" y="1920240"/>
+            <a:ext cx="347472" cy="347472"/>
+          </a:xfrm>
+          <a:prstGeom prst="ellipse">
+            <a:avLst/>
+          </a:prstGeom>
+          <a:solidFill>
+            <a:srgbClr val="DC5028"/>
+          </a:solidFill>
+          <a:ln>
+            <a:noFill/>
+          </a:ln>
+        </p:spPr>
+        <p:style>
+          <a:lnRef idx="1">
+            <a:schemeClr val="accent1"/>
+          </a:lnRef>
+          <a:fillRef idx="3">
+            <a:schemeClr val="accent1"/>
+          </a:fillRef>
+          <a:effectRef idx="2">
+            <a:schemeClr val="accent1"/>
+          </a:effectRef>
+          <a:fontRef idx="minor">
+            <a:schemeClr val="lt1"/>
+          </a:fontRef>
+        </p:style>
+        <p:txBody>
+          <a:bodyPr rtlCol="0" anchor="ctr"/>
+          <a:lstStyle/>
+          <a:p>
+            <a:pPr algn="ctr"/>
+          </a:p>
+        </p:txBody>
+      </p:sp>
+      <p:sp>
+        <p:nvSpPr>
           <p:cNvPr id="12" name="TextBox 11"/>
           <p:cNvSpPr txBox="1"/>
           <p:nvPr/>
         </p:nvSpPr>
         <p:spPr>
           <a:xfrm>
-            <a:off x="1371600" y="2852928"/>
-            <a:ext cx="365760" cy="347472"/>
+            <a:off x="2621584" y="1938528"/>
+            <a:ext cx="347472" cy="329184"/>
           </a:xfrm>
           <a:prstGeom prst="rect">
             <a:avLst/>
@@ -6276,7 +6419,249 @@
           <a:p>
             <a:pPr algn="ctr">
               <a:spcAft>
-                <a:spcPts val="800"/>
+                <a:spcPts val="1000"/>
+              </a:spcAft>
+            </a:pPr>
+            <a:r>
+              <a:rPr sz="1400" b="1">
+                <a:solidFill>
+                  <a:srgbClr val="FFFFFF"/>
+                </a:solidFill>
+                <a:latin typeface="Microsoft YaHei"/>
+              </a:rPr>
+              <a:t>1</a:t>
+            </a:r>
+          </a:p>
+        </p:txBody>
+      </p:sp>
+      <p:sp>
+        <p:nvSpPr>
+          <p:cNvPr id="13" name="TextBox 12"/>
+          <p:cNvSpPr txBox="1"/>
+          <p:nvPr/>
+        </p:nvSpPr>
+        <p:spPr>
+          <a:xfrm>
+            <a:off x="3078784" y="1901952"/>
+            <a:ext cx="7863840" cy="457200"/>
+          </a:xfrm>
+          <a:prstGeom prst="rect">
+            <a:avLst/>
+          </a:prstGeom>
+          <a:noFill/>
+        </p:spPr>
+        <p:txBody>
+          <a:bodyPr wrap="none">
+            <a:spAutoFit/>
+          </a:bodyPr>
+          <a:lstStyle/>
+          <a:p>
+            <a:pPr algn="l">
+              <a:spcAft>
+                <a:spcPts val="1000"/>
+              </a:spcAft>
+            </a:pPr>
+            <a:r>
+              <a:rPr sz="2400" b="0">
+                <a:solidFill>
+                  <a:srgbClr val="502814"/>
+                </a:solidFill>
+                <a:latin typeface="Microsoft YaHei"/>
+              </a:rPr>
+              <a:t>填写七十二变对照表，标出相克关系</a:t>
+            </a:r>
+          </a:p>
+        </p:txBody>
+      </p:sp>
+      <p:sp>
+        <p:nvSpPr>
+          <p:cNvPr id="14" name="Oval 13"/>
+          <p:cNvSpPr/>
+          <p:nvPr/>
+        </p:nvSpPr>
+        <p:spPr>
+          <a:xfrm>
+            <a:off x="2621584" y="2487168"/>
+            <a:ext cx="347472" cy="347472"/>
+          </a:xfrm>
+          <a:prstGeom prst="ellipse">
+            <a:avLst/>
+          </a:prstGeom>
+          <a:solidFill>
+            <a:srgbClr val="DC5028"/>
+          </a:solidFill>
+          <a:ln>
+            <a:noFill/>
+          </a:ln>
+        </p:spPr>
+        <p:style>
+          <a:lnRef idx="1">
+            <a:schemeClr val="accent1"/>
+          </a:lnRef>
+          <a:fillRef idx="3">
+            <a:schemeClr val="accent1"/>
+          </a:fillRef>
+          <a:effectRef idx="2">
+            <a:schemeClr val="accent1"/>
+          </a:effectRef>
+          <a:fontRef idx="minor">
+            <a:schemeClr val="lt1"/>
+          </a:fontRef>
+        </p:style>
+        <p:txBody>
+          <a:bodyPr rtlCol="0" anchor="ctr"/>
+          <a:lstStyle/>
+          <a:p>
+            <a:pPr algn="ctr"/>
+          </a:p>
+        </p:txBody>
+      </p:sp>
+      <p:sp>
+        <p:nvSpPr>
+          <p:cNvPr id="15" name="TextBox 14"/>
+          <p:cNvSpPr txBox="1"/>
+          <p:nvPr/>
+        </p:nvSpPr>
+        <p:spPr>
+          <a:xfrm>
+            <a:off x="2621584" y="2505456"/>
+            <a:ext cx="347472" cy="329184"/>
+          </a:xfrm>
+          <a:prstGeom prst="rect">
+            <a:avLst/>
+          </a:prstGeom>
+          <a:noFill/>
+        </p:spPr>
+        <p:txBody>
+          <a:bodyPr wrap="none">
+            <a:spAutoFit/>
+          </a:bodyPr>
+          <a:lstStyle/>
+          <a:p>
+            <a:pPr algn="ctr">
+              <a:spcAft>
+                <a:spcPts val="1000"/>
+              </a:spcAft>
+            </a:pPr>
+            <a:r>
+              <a:rPr sz="1400" b="1">
+                <a:solidFill>
+                  <a:srgbClr val="FFFFFF"/>
+                </a:solidFill>
+                <a:latin typeface="Microsoft YaHei"/>
+              </a:rPr>
+              <a:t>2</a:t>
+            </a:r>
+          </a:p>
+        </p:txBody>
+      </p:sp>
+      <p:sp>
+        <p:nvSpPr>
+          <p:cNvPr id="16" name="TextBox 15"/>
+          <p:cNvSpPr txBox="1"/>
+          <p:nvPr/>
+        </p:nvSpPr>
+        <p:spPr>
+          <a:xfrm>
+            <a:off x="3078784" y="2468880"/>
+            <a:ext cx="7863840" cy="457200"/>
+          </a:xfrm>
+          <a:prstGeom prst="rect">
+            <a:avLst/>
+          </a:prstGeom>
+          <a:noFill/>
+        </p:spPr>
+        <p:txBody>
+          <a:bodyPr wrap="none">
+            <a:spAutoFit/>
+          </a:bodyPr>
+          <a:lstStyle/>
+          <a:p>
+            <a:pPr algn="l">
+              <a:spcAft>
+                <a:spcPts val="1000"/>
+              </a:spcAft>
+            </a:pPr>
+            <a:r>
+              <a:rPr sz="2400" b="0">
+                <a:solidFill>
+                  <a:srgbClr val="502814"/>
+                </a:solidFill>
+                <a:latin typeface="Microsoft YaHei"/>
+              </a:rPr>
+              <a:t>完成人物档案卡（证据—特点—作用）</a:t>
+            </a:r>
+          </a:p>
+        </p:txBody>
+      </p:sp>
+      <p:sp>
+        <p:nvSpPr>
+          <p:cNvPr id="17" name="Oval 16"/>
+          <p:cNvSpPr/>
+          <p:nvPr/>
+        </p:nvSpPr>
+        <p:spPr>
+          <a:xfrm>
+            <a:off x="2621584" y="3054096"/>
+            <a:ext cx="347472" cy="347472"/>
+          </a:xfrm>
+          <a:prstGeom prst="ellipse">
+            <a:avLst/>
+          </a:prstGeom>
+          <a:solidFill>
+            <a:srgbClr val="DC5028"/>
+          </a:solidFill>
+          <a:ln>
+            <a:noFill/>
+          </a:ln>
+        </p:spPr>
+        <p:style>
+          <a:lnRef idx="1">
+            <a:schemeClr val="accent1"/>
+          </a:lnRef>
+          <a:fillRef idx="3">
+            <a:schemeClr val="accent1"/>
+          </a:fillRef>
+          <a:effectRef idx="2">
+            <a:schemeClr val="accent1"/>
+          </a:effectRef>
+          <a:fontRef idx="minor">
+            <a:schemeClr val="lt1"/>
+          </a:fontRef>
+        </p:style>
+        <p:txBody>
+          <a:bodyPr rtlCol="0" anchor="ctr"/>
+          <a:lstStyle/>
+          <a:p>
+            <a:pPr algn="ctr"/>
+          </a:p>
+        </p:txBody>
+      </p:sp>
+      <p:sp>
+        <p:nvSpPr>
+          <p:cNvPr id="18" name="TextBox 17"/>
+          <p:cNvSpPr txBox="1"/>
+          <p:nvPr/>
+        </p:nvSpPr>
+        <p:spPr>
+          <a:xfrm>
+            <a:off x="2621584" y="3072384"/>
+            <a:ext cx="347472" cy="329184"/>
+          </a:xfrm>
+          <a:prstGeom prst="rect">
+            <a:avLst/>
+          </a:prstGeom>
+          <a:noFill/>
+        </p:spPr>
+        <p:txBody>
+          <a:bodyPr wrap="none">
+            <a:spAutoFit/>
+          </a:bodyPr>
+          <a:lstStyle/>
+          <a:p>
+            <a:pPr algn="ctr">
+              <a:spcAft>
+                <a:spcPts val="1000"/>
               </a:spcAft>
             </a:pPr>
             <a:r>
@@ -6293,14 +6678,14 @@
       </p:sp>
       <p:sp>
         <p:nvSpPr>
-          <p:cNvPr id="13" name="TextBox 12"/>
+          <p:cNvPr id="19" name="TextBox 18"/>
           <p:cNvSpPr txBox="1"/>
           <p:nvPr/>
         </p:nvSpPr>
         <p:spPr>
           <a:xfrm>
-            <a:off x="1920240" y="2816352"/>
-            <a:ext cx="9144000" cy="502920"/>
+            <a:off x="3078784" y="3035808"/>
+            <a:ext cx="7863840" cy="457200"/>
           </a:xfrm>
           <a:prstGeom prst="rect">
             <a:avLst/>
@@ -6315,17 +6700,1306 @@
           <a:p>
             <a:pPr algn="l">
               <a:spcAft>
-                <a:spcPts val="800"/>
+                <a:spcPts val="1000"/>
               </a:spcAft>
             </a:pPr>
             <a:r>
               <a:rPr sz="2400" b="0">
                 <a:solidFill>
-                  <a:srgbClr val="3C2D1E"/>
+                  <a:srgbClr val="502814"/>
                 </a:solidFill>
                 <a:latin typeface="Microsoft YaHei"/>
               </a:rPr>
-              <a:t>写80字「赛事快讯」，至少三次变化</a:t>
+              <a:t>用「孙悟空先……，二郎神便……」复述最精彩一轮</a:t>
+            </a:r>
+          </a:p>
+        </p:txBody>
+      </p:sp>
+    </p:spTree>
+  </p:cSld>
+  <p:clrMapOvr>
+    <a:masterClrMapping/>
+  </p:clrMapOvr>
+</p:sld>
+</file>
+
+<file path=ppt/slides/slide7.xml><?xml version="1.0" encoding="utf-8"?>
+<p:sld xmlns:a="http://schemas.openxmlformats.org/drawingml/2006/main" xmlns:p="http://schemas.openxmlformats.org/presentationml/2006/main" xmlns:r="http://schemas.openxmlformats.org/officeDocument/2006/relationships">
+  <p:cSld>
+    <p:spTree>
+      <p:nvGrpSpPr>
+        <p:cNvPr id="1" name=""/>
+        <p:cNvGrpSpPr/>
+        <p:nvPr/>
+      </p:nvGrpSpPr>
+      <p:grpSpPr/>
+      <p:pic>
+        <p:nvPicPr>
+          <p:cNvPr id="2" name="Picture 1" descr="bg_wukong.png"/>
+          <p:cNvPicPr>
+            <a:picLocks noChangeAspect="1"/>
+          </p:cNvPicPr>
+          <p:nvPr/>
+        </p:nvPicPr>
+        <p:blipFill>
+          <a:blip r:embed="rId2"/>
+          <a:stretch>
+            <a:fillRect/>
+          </a:stretch>
+        </p:blipFill>
+        <p:spPr>
+          <a:xfrm>
+            <a:off x="0" y="0"/>
+            <a:ext cx="12191695" cy="6858000"/>
+          </a:xfrm>
+          <a:prstGeom prst="rect">
+            <a:avLst/>
+          </a:prstGeom>
+        </p:spPr>
+      </p:pic>
+      <p:sp>
+        <p:nvSpPr>
+          <p:cNvPr id="3" name="Rectangle 2"/>
+          <p:cNvSpPr/>
+          <p:nvPr/>
+        </p:nvSpPr>
+        <p:spPr>
+          <a:xfrm>
+            <a:off x="292608" y="274320"/>
+            <a:ext cx="11594592" cy="6300216"/>
+          </a:xfrm>
+          <a:prstGeom prst="rect">
+            <a:avLst/>
+          </a:prstGeom>
+          <a:noFill/>
+          <a:ln w="31750">
+            <a:solidFill>
+              <a:srgbClr val="C85A32"/>
+            </a:solidFill>
+          </a:ln>
+        </p:spPr>
+        <p:style>
+          <a:lnRef idx="1">
+            <a:schemeClr val="accent1"/>
+          </a:lnRef>
+          <a:fillRef idx="3">
+            <a:schemeClr val="accent1"/>
+          </a:fillRef>
+          <a:effectRef idx="2">
+            <a:schemeClr val="accent1"/>
+          </a:effectRef>
+          <a:fontRef idx="minor">
+            <a:schemeClr val="lt1"/>
+          </a:fontRef>
+        </p:style>
+        <p:txBody>
+          <a:bodyPr rtlCol="0" anchor="ctr"/>
+          <a:lstStyle/>
+          <a:p>
+            <a:pPr algn="ctr"/>
+          </a:p>
+        </p:txBody>
+      </p:sp>
+      <p:pic>
+        <p:nvPicPr>
+          <p:cNvPr id="4" name="Picture 3" descr="corner_wukong_tl.png"/>
+          <p:cNvPicPr>
+            <a:picLocks noChangeAspect="1"/>
+          </p:cNvPicPr>
+          <p:nvPr/>
+        </p:nvPicPr>
+        <p:blipFill>
+          <a:blip r:embed="rId3"/>
+          <a:stretch>
+            <a:fillRect/>
+          </a:stretch>
+        </p:blipFill>
+        <p:spPr>
+          <a:xfrm>
+            <a:off x="-45720" y="-45720"/>
+            <a:ext cx="2011680" cy="2011680"/>
+          </a:xfrm>
+          <a:prstGeom prst="rect">
+            <a:avLst/>
+          </a:prstGeom>
+        </p:spPr>
+      </p:pic>
+      <p:pic>
+        <p:nvPicPr>
+          <p:cNvPr id="5" name="Picture 4" descr="corner_wukong_tr.png"/>
+          <p:cNvPicPr>
+            <a:picLocks noChangeAspect="1"/>
+          </p:cNvPicPr>
+          <p:nvPr/>
+        </p:nvPicPr>
+        <p:blipFill>
+          <a:blip r:embed="rId4"/>
+          <a:stretch>
+            <a:fillRect/>
+          </a:stretch>
+        </p:blipFill>
+        <p:spPr>
+          <a:xfrm>
+            <a:off x="9875520" y="-45720"/>
+            <a:ext cx="2011680" cy="2011680"/>
+          </a:xfrm>
+          <a:prstGeom prst="rect">
+            <a:avLst/>
+          </a:prstGeom>
+        </p:spPr>
+      </p:pic>
+      <p:sp>
+        <p:nvSpPr>
+          <p:cNvPr id="6" name="Rounded Rectangle 5"/>
+          <p:cNvSpPr/>
+          <p:nvPr/>
+        </p:nvSpPr>
+        <p:spPr>
+          <a:xfrm>
+            <a:off x="4953304" y="502920"/>
+            <a:ext cx="2286000" cy="411480"/>
+          </a:xfrm>
+          <a:prstGeom prst="roundRect">
+            <a:avLst/>
+          </a:prstGeom>
+          <a:solidFill>
+            <a:srgbClr val="FFB464"/>
+          </a:solidFill>
+          <a:ln>
+            <a:noFill/>
+          </a:ln>
+        </p:spPr>
+        <p:style>
+          <a:lnRef idx="1">
+            <a:schemeClr val="accent1"/>
+          </a:lnRef>
+          <a:fillRef idx="3">
+            <a:schemeClr val="accent1"/>
+          </a:fillRef>
+          <a:effectRef idx="2">
+            <a:schemeClr val="accent1"/>
+          </a:effectRef>
+          <a:fontRef idx="minor">
+            <a:schemeClr val="lt1"/>
+          </a:fontRef>
+        </p:style>
+        <p:txBody>
+          <a:bodyPr rtlCol="0" anchor="ctr"/>
+          <a:lstStyle/>
+          <a:p>
+            <a:pPr algn="ctr"/>
+          </a:p>
+        </p:txBody>
+      </p:sp>
+      <p:sp>
+        <p:nvSpPr>
+          <p:cNvPr id="7" name="TextBox 6"/>
+          <p:cNvSpPr txBox="1"/>
+          <p:nvPr/>
+        </p:nvSpPr>
+        <p:spPr>
+          <a:xfrm>
+            <a:off x="4953304" y="521208"/>
+            <a:ext cx="2286000" cy="384048"/>
+          </a:xfrm>
+          <a:prstGeom prst="rect">
+            <a:avLst/>
+          </a:prstGeom>
+          <a:noFill/>
+        </p:spPr>
+        <p:txBody>
+          <a:bodyPr wrap="none">
+            <a:spAutoFit/>
+          </a:bodyPr>
+          <a:lstStyle/>
+          <a:p>
+            <a:pPr algn="ctr">
+              <a:spcAft>
+                <a:spcPts val="1000"/>
+              </a:spcAft>
+            </a:pPr>
+            <a:r>
+              <a:rPr sz="1800" b="1">
+                <a:solidFill>
+                  <a:srgbClr val="502814"/>
+                </a:solidFill>
+                <a:latin typeface="Microsoft YaHei"/>
+              </a:rPr>
+              <a:t>回顾收获</a:t>
+            </a:r>
+          </a:p>
+        </p:txBody>
+      </p:sp>
+      <p:sp>
+        <p:nvSpPr>
+          <p:cNvPr id="8" name="TextBox 7"/>
+          <p:cNvSpPr txBox="1"/>
+          <p:nvPr/>
+        </p:nvSpPr>
+        <p:spPr>
+          <a:xfrm>
+            <a:off x="1371600" y="1051560"/>
+            <a:ext cx="9418320" cy="822960"/>
+          </a:xfrm>
+          <a:prstGeom prst="rect">
+            <a:avLst/>
+          </a:prstGeom>
+          <a:noFill/>
+        </p:spPr>
+        <p:txBody>
+          <a:bodyPr wrap="square">
+            <a:spAutoFit/>
+          </a:bodyPr>
+          <a:lstStyle/>
+          <a:p>
+            <a:pPr algn="ctr">
+              <a:spcAft>
+                <a:spcPts val="1000"/>
+              </a:spcAft>
+            </a:pPr>
+            <a:r>
+              <a:rPr sz="3600" b="1">
+                <a:solidFill>
+                  <a:srgbClr val="DC5028"/>
+                </a:solidFill>
+                <a:latin typeface="Microsoft YaHei"/>
+              </a:rPr>
+              <a:t>课堂小结</a:t>
+            </a:r>
+          </a:p>
+        </p:txBody>
+      </p:sp>
+      <p:sp>
+        <p:nvSpPr>
+          <p:cNvPr id="9" name="Rectangle 8"/>
+          <p:cNvSpPr/>
+          <p:nvPr/>
+        </p:nvSpPr>
+        <p:spPr>
+          <a:xfrm>
+            <a:off x="3200400" y="1691640"/>
+            <a:ext cx="5760720" cy="27432"/>
+          </a:xfrm>
+          <a:prstGeom prst="rect">
+            <a:avLst/>
+          </a:prstGeom>
+          <a:solidFill>
+            <a:srgbClr val="FFB464"/>
+          </a:solidFill>
+          <a:ln>
+            <a:noFill/>
+          </a:ln>
+        </p:spPr>
+        <p:style>
+          <a:lnRef idx="1">
+            <a:schemeClr val="accent1"/>
+          </a:lnRef>
+          <a:fillRef idx="3">
+            <a:schemeClr val="accent1"/>
+          </a:fillRef>
+          <a:effectRef idx="2">
+            <a:schemeClr val="accent1"/>
+          </a:effectRef>
+          <a:fontRef idx="minor">
+            <a:schemeClr val="lt1"/>
+          </a:fontRef>
+        </p:style>
+        <p:txBody>
+          <a:bodyPr rtlCol="0" anchor="ctr"/>
+          <a:lstStyle/>
+          <a:p>
+            <a:pPr algn="ctr"/>
+          </a:p>
+        </p:txBody>
+      </p:sp>
+      <p:sp>
+        <p:nvSpPr>
+          <p:cNvPr id="10" name="Rounded Rectangle 9"/>
+          <p:cNvSpPr/>
+          <p:nvPr/>
+        </p:nvSpPr>
+        <p:spPr>
+          <a:xfrm>
+            <a:off x="1295704" y="1737360"/>
+            <a:ext cx="9601200" cy="1837944"/>
+          </a:xfrm>
+          <a:prstGeom prst="roundRect">
+            <a:avLst/>
+          </a:prstGeom>
+          <a:solidFill>
+            <a:srgbClr val="FFF8F0"/>
+          </a:solidFill>
+          <a:ln w="19050">
+            <a:solidFill>
+              <a:srgbClr val="FFB464"/>
+            </a:solidFill>
+          </a:ln>
+        </p:spPr>
+        <p:style>
+          <a:lnRef idx="1">
+            <a:schemeClr val="accent1"/>
+          </a:lnRef>
+          <a:fillRef idx="3">
+            <a:schemeClr val="accent1"/>
+          </a:fillRef>
+          <a:effectRef idx="2">
+            <a:schemeClr val="accent1"/>
+          </a:effectRef>
+          <a:fontRef idx="minor">
+            <a:schemeClr val="lt1"/>
+          </a:fontRef>
+        </p:style>
+        <p:txBody>
+          <a:bodyPr rtlCol="0" anchor="ctr"/>
+          <a:lstStyle/>
+          <a:p>
+            <a:pPr algn="ctr"/>
+          </a:p>
+        </p:txBody>
+      </p:sp>
+      <p:sp>
+        <p:nvSpPr>
+          <p:cNvPr id="11" name="Oval 10"/>
+          <p:cNvSpPr/>
+          <p:nvPr/>
+        </p:nvSpPr>
+        <p:spPr>
+          <a:xfrm>
+            <a:off x="2621584" y="1920240"/>
+            <a:ext cx="347472" cy="347472"/>
+          </a:xfrm>
+          <a:prstGeom prst="ellipse">
+            <a:avLst/>
+          </a:prstGeom>
+          <a:solidFill>
+            <a:srgbClr val="DC5028"/>
+          </a:solidFill>
+          <a:ln>
+            <a:noFill/>
+          </a:ln>
+        </p:spPr>
+        <p:style>
+          <a:lnRef idx="1">
+            <a:schemeClr val="accent1"/>
+          </a:lnRef>
+          <a:fillRef idx="3">
+            <a:schemeClr val="accent1"/>
+          </a:fillRef>
+          <a:effectRef idx="2">
+            <a:schemeClr val="accent1"/>
+          </a:effectRef>
+          <a:fontRef idx="minor">
+            <a:schemeClr val="lt1"/>
+          </a:fontRef>
+        </p:style>
+        <p:txBody>
+          <a:bodyPr rtlCol="0" anchor="ctr"/>
+          <a:lstStyle/>
+          <a:p>
+            <a:pPr algn="ctr"/>
+          </a:p>
+        </p:txBody>
+      </p:sp>
+      <p:sp>
+        <p:nvSpPr>
+          <p:cNvPr id="12" name="TextBox 11"/>
+          <p:cNvSpPr txBox="1"/>
+          <p:nvPr/>
+        </p:nvSpPr>
+        <p:spPr>
+          <a:xfrm>
+            <a:off x="2621584" y="1938528"/>
+            <a:ext cx="347472" cy="329184"/>
+          </a:xfrm>
+          <a:prstGeom prst="rect">
+            <a:avLst/>
+          </a:prstGeom>
+          <a:noFill/>
+        </p:spPr>
+        <p:txBody>
+          <a:bodyPr wrap="none">
+            <a:spAutoFit/>
+          </a:bodyPr>
+          <a:lstStyle/>
+          <a:p>
+            <a:pPr algn="ctr">
+              <a:spcAft>
+                <a:spcPts val="1000"/>
+              </a:spcAft>
+            </a:pPr>
+            <a:r>
+              <a:rPr sz="1400" b="1">
+                <a:solidFill>
+                  <a:srgbClr val="FFFFFF"/>
+                </a:solidFill>
+                <a:latin typeface="Microsoft YaHei"/>
+              </a:rPr>
+              <a:t>1</a:t>
+            </a:r>
+          </a:p>
+        </p:txBody>
+      </p:sp>
+      <p:sp>
+        <p:nvSpPr>
+          <p:cNvPr id="13" name="TextBox 12"/>
+          <p:cNvSpPr txBox="1"/>
+          <p:nvPr/>
+        </p:nvSpPr>
+        <p:spPr>
+          <a:xfrm>
+            <a:off x="3078784" y="1901952"/>
+            <a:ext cx="7863840" cy="457200"/>
+          </a:xfrm>
+          <a:prstGeom prst="rect">
+            <a:avLst/>
+          </a:prstGeom>
+          <a:noFill/>
+        </p:spPr>
+        <p:txBody>
+          <a:bodyPr wrap="none">
+            <a:spAutoFit/>
+          </a:bodyPr>
+          <a:lstStyle/>
+          <a:p>
+            <a:pPr algn="l">
+              <a:spcAft>
+                <a:spcPts val="1000"/>
+              </a:spcAft>
+            </a:pPr>
+            <a:r>
+              <a:rPr sz="2200" b="0">
+                <a:solidFill>
+                  <a:srgbClr val="502814"/>
+                </a:solidFill>
+                <a:latin typeface="Microsoft YaHei"/>
+              </a:rPr>
+              <a:t>神魔小说：想象在「相克」中见趣味，在斗法中见人情</a:t>
+            </a:r>
+          </a:p>
+        </p:txBody>
+      </p:sp>
+      <p:sp>
+        <p:nvSpPr>
+          <p:cNvPr id="14" name="Oval 13"/>
+          <p:cNvSpPr/>
+          <p:nvPr/>
+        </p:nvSpPr>
+        <p:spPr>
+          <a:xfrm>
+            <a:off x="2621584" y="2395728"/>
+            <a:ext cx="347472" cy="347472"/>
+          </a:xfrm>
+          <a:prstGeom prst="ellipse">
+            <a:avLst/>
+          </a:prstGeom>
+          <a:solidFill>
+            <a:srgbClr val="DC5028"/>
+          </a:solidFill>
+          <a:ln>
+            <a:noFill/>
+          </a:ln>
+        </p:spPr>
+        <p:style>
+          <a:lnRef idx="1">
+            <a:schemeClr val="accent1"/>
+          </a:lnRef>
+          <a:fillRef idx="3">
+            <a:schemeClr val="accent1"/>
+          </a:fillRef>
+          <a:effectRef idx="2">
+            <a:schemeClr val="accent1"/>
+          </a:effectRef>
+          <a:fontRef idx="minor">
+            <a:schemeClr val="lt1"/>
+          </a:fontRef>
+        </p:style>
+        <p:txBody>
+          <a:bodyPr rtlCol="0" anchor="ctr"/>
+          <a:lstStyle/>
+          <a:p>
+            <a:pPr algn="ctr"/>
+          </a:p>
+        </p:txBody>
+      </p:sp>
+      <p:sp>
+        <p:nvSpPr>
+          <p:cNvPr id="15" name="TextBox 14"/>
+          <p:cNvSpPr txBox="1"/>
+          <p:nvPr/>
+        </p:nvSpPr>
+        <p:spPr>
+          <a:xfrm>
+            <a:off x="2621584" y="2414016"/>
+            <a:ext cx="347472" cy="329184"/>
+          </a:xfrm>
+          <a:prstGeom prst="rect">
+            <a:avLst/>
+          </a:prstGeom>
+          <a:noFill/>
+        </p:spPr>
+        <p:txBody>
+          <a:bodyPr wrap="none">
+            <a:spAutoFit/>
+          </a:bodyPr>
+          <a:lstStyle/>
+          <a:p>
+            <a:pPr algn="ctr">
+              <a:spcAft>
+                <a:spcPts val="1000"/>
+              </a:spcAft>
+            </a:pPr>
+            <a:r>
+              <a:rPr sz="1400" b="1">
+                <a:solidFill>
+                  <a:srgbClr val="FFFFFF"/>
+                </a:solidFill>
+                <a:latin typeface="Microsoft YaHei"/>
+              </a:rPr>
+              <a:t>2</a:t>
+            </a:r>
+          </a:p>
+        </p:txBody>
+      </p:sp>
+      <p:sp>
+        <p:nvSpPr>
+          <p:cNvPr id="16" name="TextBox 15"/>
+          <p:cNvSpPr txBox="1"/>
+          <p:nvPr/>
+        </p:nvSpPr>
+        <p:spPr>
+          <a:xfrm>
+            <a:off x="3078784" y="2377440"/>
+            <a:ext cx="7863840" cy="457200"/>
+          </a:xfrm>
+          <a:prstGeom prst="rect">
+            <a:avLst/>
+          </a:prstGeom>
+          <a:noFill/>
+        </p:spPr>
+        <p:txBody>
+          <a:bodyPr wrap="none">
+            <a:spAutoFit/>
+          </a:bodyPr>
+          <a:lstStyle/>
+          <a:p>
+            <a:pPr algn="l">
+              <a:spcAft>
+                <a:spcPts val="1000"/>
+              </a:spcAft>
+            </a:pPr>
+            <a:r>
+              <a:rPr sz="2200" b="0">
+                <a:solidFill>
+                  <a:srgbClr val="502814"/>
+                </a:solidFill>
+                <a:latin typeface="Microsoft YaHei"/>
+              </a:rPr>
+              <a:t>变化链是因果回应，不是随意编造</a:t>
+            </a:r>
+          </a:p>
+        </p:txBody>
+      </p:sp>
+      <p:sp>
+        <p:nvSpPr>
+          <p:cNvPr id="17" name="Oval 16"/>
+          <p:cNvSpPr/>
+          <p:nvPr/>
+        </p:nvSpPr>
+        <p:spPr>
+          <a:xfrm>
+            <a:off x="2621584" y="2871216"/>
+            <a:ext cx="347472" cy="347472"/>
+          </a:xfrm>
+          <a:prstGeom prst="ellipse">
+            <a:avLst/>
+          </a:prstGeom>
+          <a:solidFill>
+            <a:srgbClr val="DC5028"/>
+          </a:solidFill>
+          <a:ln>
+            <a:noFill/>
+          </a:ln>
+        </p:spPr>
+        <p:style>
+          <a:lnRef idx="1">
+            <a:schemeClr val="accent1"/>
+          </a:lnRef>
+          <a:fillRef idx="3">
+            <a:schemeClr val="accent1"/>
+          </a:fillRef>
+          <a:effectRef idx="2">
+            <a:schemeClr val="accent1"/>
+          </a:effectRef>
+          <a:fontRef idx="minor">
+            <a:schemeClr val="lt1"/>
+          </a:fontRef>
+        </p:style>
+        <p:txBody>
+          <a:bodyPr rtlCol="0" anchor="ctr"/>
+          <a:lstStyle/>
+          <a:p>
+            <a:pPr algn="ctr"/>
+          </a:p>
+        </p:txBody>
+      </p:sp>
+      <p:sp>
+        <p:nvSpPr>
+          <p:cNvPr id="18" name="TextBox 17"/>
+          <p:cNvSpPr txBox="1"/>
+          <p:nvPr/>
+        </p:nvSpPr>
+        <p:spPr>
+          <a:xfrm>
+            <a:off x="2621584" y="2889504"/>
+            <a:ext cx="347472" cy="329184"/>
+          </a:xfrm>
+          <a:prstGeom prst="rect">
+            <a:avLst/>
+          </a:prstGeom>
+          <a:noFill/>
+        </p:spPr>
+        <p:txBody>
+          <a:bodyPr wrap="none">
+            <a:spAutoFit/>
+          </a:bodyPr>
+          <a:lstStyle/>
+          <a:p>
+            <a:pPr algn="ctr">
+              <a:spcAft>
+                <a:spcPts val="1000"/>
+              </a:spcAft>
+            </a:pPr>
+            <a:r>
+              <a:rPr sz="1400" b="1">
+                <a:solidFill>
+                  <a:srgbClr val="FFFFFF"/>
+                </a:solidFill>
+                <a:latin typeface="Microsoft YaHei"/>
+              </a:rPr>
+              <a:t>3</a:t>
+            </a:r>
+          </a:p>
+        </p:txBody>
+      </p:sp>
+      <p:sp>
+        <p:nvSpPr>
+          <p:cNvPr id="19" name="TextBox 18"/>
+          <p:cNvSpPr txBox="1"/>
+          <p:nvPr/>
+        </p:nvSpPr>
+        <p:spPr>
+          <a:xfrm>
+            <a:off x="3078784" y="2852928"/>
+            <a:ext cx="7863840" cy="457200"/>
+          </a:xfrm>
+          <a:prstGeom prst="rect">
+            <a:avLst/>
+          </a:prstGeom>
+          <a:noFill/>
+        </p:spPr>
+        <p:txBody>
+          <a:bodyPr wrap="none">
+            <a:spAutoFit/>
+          </a:bodyPr>
+          <a:lstStyle/>
+          <a:p>
+            <a:pPr algn="l">
+              <a:spcAft>
+                <a:spcPts val="1000"/>
+              </a:spcAft>
+            </a:pPr>
+            <a:r>
+              <a:rPr sz="2200" b="0">
+                <a:solidFill>
+                  <a:srgbClr val="502814"/>
+                </a:solidFill>
+                <a:latin typeface="Microsoft YaHei"/>
+              </a:rPr>
+              <a:t>策展主题一：自由与规则</a:t>
+            </a:r>
+          </a:p>
+        </p:txBody>
+      </p:sp>
+    </p:spTree>
+  </p:cSld>
+  <p:clrMapOvr>
+    <a:masterClrMapping/>
+  </p:clrMapOvr>
+</p:sld>
+</file>
+
+<file path=ppt/slides/slide8.xml><?xml version="1.0" encoding="utf-8"?>
+<p:sld xmlns:a="http://schemas.openxmlformats.org/drawingml/2006/main" xmlns:p="http://schemas.openxmlformats.org/presentationml/2006/main" xmlns:r="http://schemas.openxmlformats.org/officeDocument/2006/relationships">
+  <p:cSld>
+    <p:spTree>
+      <p:nvGrpSpPr>
+        <p:cNvPr id="1" name=""/>
+        <p:cNvGrpSpPr/>
+        <p:nvPr/>
+      </p:nvGrpSpPr>
+      <p:grpSpPr/>
+      <p:pic>
+        <p:nvPicPr>
+          <p:cNvPr id="2" name="Picture 1" descr="bg_wukong.png"/>
+          <p:cNvPicPr>
+            <a:picLocks noChangeAspect="1"/>
+          </p:cNvPicPr>
+          <p:nvPr/>
+        </p:nvPicPr>
+        <p:blipFill>
+          <a:blip r:embed="rId2"/>
+          <a:stretch>
+            <a:fillRect/>
+          </a:stretch>
+        </p:blipFill>
+        <p:spPr>
+          <a:xfrm>
+            <a:off x="0" y="0"/>
+            <a:ext cx="12191695" cy="6858000"/>
+          </a:xfrm>
+          <a:prstGeom prst="rect">
+            <a:avLst/>
+          </a:prstGeom>
+        </p:spPr>
+      </p:pic>
+      <p:sp>
+        <p:nvSpPr>
+          <p:cNvPr id="3" name="Rectangle 2"/>
+          <p:cNvSpPr/>
+          <p:nvPr/>
+        </p:nvSpPr>
+        <p:spPr>
+          <a:xfrm>
+            <a:off x="292608" y="274320"/>
+            <a:ext cx="11594592" cy="6300216"/>
+          </a:xfrm>
+          <a:prstGeom prst="rect">
+            <a:avLst/>
+          </a:prstGeom>
+          <a:noFill/>
+          <a:ln w="31750">
+            <a:solidFill>
+              <a:srgbClr val="C85A32"/>
+            </a:solidFill>
+          </a:ln>
+        </p:spPr>
+        <p:style>
+          <a:lnRef idx="1">
+            <a:schemeClr val="accent1"/>
+          </a:lnRef>
+          <a:fillRef idx="3">
+            <a:schemeClr val="accent1"/>
+          </a:fillRef>
+          <a:effectRef idx="2">
+            <a:schemeClr val="accent1"/>
+          </a:effectRef>
+          <a:fontRef idx="minor">
+            <a:schemeClr val="lt1"/>
+          </a:fontRef>
+        </p:style>
+        <p:txBody>
+          <a:bodyPr rtlCol="0" anchor="ctr"/>
+          <a:lstStyle/>
+          <a:p>
+            <a:pPr algn="ctr"/>
+          </a:p>
+        </p:txBody>
+      </p:sp>
+      <p:pic>
+        <p:nvPicPr>
+          <p:cNvPr id="4" name="Picture 3" descr="corner_wukong_tl.png"/>
+          <p:cNvPicPr>
+            <a:picLocks noChangeAspect="1"/>
+          </p:cNvPicPr>
+          <p:nvPr/>
+        </p:nvPicPr>
+        <p:blipFill>
+          <a:blip r:embed="rId3"/>
+          <a:stretch>
+            <a:fillRect/>
+          </a:stretch>
+        </p:blipFill>
+        <p:spPr>
+          <a:xfrm>
+            <a:off x="-45720" y="-45720"/>
+            <a:ext cx="2011680" cy="2011680"/>
+          </a:xfrm>
+          <a:prstGeom prst="rect">
+            <a:avLst/>
+          </a:prstGeom>
+        </p:spPr>
+      </p:pic>
+      <p:pic>
+        <p:nvPicPr>
+          <p:cNvPr id="5" name="Picture 4" descr="corner_wukong_tr.png"/>
+          <p:cNvPicPr>
+            <a:picLocks noChangeAspect="1"/>
+          </p:cNvPicPr>
+          <p:nvPr/>
+        </p:nvPicPr>
+        <p:blipFill>
+          <a:blip r:embed="rId4"/>
+          <a:stretch>
+            <a:fillRect/>
+          </a:stretch>
+        </p:blipFill>
+        <p:spPr>
+          <a:xfrm>
+            <a:off x="9875520" y="-45720"/>
+            <a:ext cx="2011680" cy="2011680"/>
+          </a:xfrm>
+          <a:prstGeom prst="rect">
+            <a:avLst/>
+          </a:prstGeom>
+        </p:spPr>
+      </p:pic>
+      <p:sp>
+        <p:nvSpPr>
+          <p:cNvPr id="6" name="Rounded Rectangle 5"/>
+          <p:cNvSpPr/>
+          <p:nvPr/>
+        </p:nvSpPr>
+        <p:spPr>
+          <a:xfrm>
+            <a:off x="4953304" y="502920"/>
+            <a:ext cx="2286000" cy="411480"/>
+          </a:xfrm>
+          <a:prstGeom prst="roundRect">
+            <a:avLst/>
+          </a:prstGeom>
+          <a:solidFill>
+            <a:srgbClr val="FFB464"/>
+          </a:solidFill>
+          <a:ln>
+            <a:noFill/>
+          </a:ln>
+        </p:spPr>
+        <p:style>
+          <a:lnRef idx="1">
+            <a:schemeClr val="accent1"/>
+          </a:lnRef>
+          <a:fillRef idx="3">
+            <a:schemeClr val="accent1"/>
+          </a:fillRef>
+          <a:effectRef idx="2">
+            <a:schemeClr val="accent1"/>
+          </a:effectRef>
+          <a:fontRef idx="minor">
+            <a:schemeClr val="lt1"/>
+          </a:fontRef>
+        </p:style>
+        <p:txBody>
+          <a:bodyPr rtlCol="0" anchor="ctr"/>
+          <a:lstStyle/>
+          <a:p>
+            <a:pPr algn="ctr"/>
+          </a:p>
+        </p:txBody>
+      </p:sp>
+      <p:sp>
+        <p:nvSpPr>
+          <p:cNvPr id="7" name="TextBox 6"/>
+          <p:cNvSpPr txBox="1"/>
+          <p:nvPr/>
+        </p:nvSpPr>
+        <p:spPr>
+          <a:xfrm>
+            <a:off x="4953304" y="521208"/>
+            <a:ext cx="2286000" cy="384048"/>
+          </a:xfrm>
+          <a:prstGeom prst="rect">
+            <a:avLst/>
+          </a:prstGeom>
+          <a:noFill/>
+        </p:spPr>
+        <p:txBody>
+          <a:bodyPr wrap="none">
+            <a:spAutoFit/>
+          </a:bodyPr>
+          <a:lstStyle/>
+          <a:p>
+            <a:pPr algn="ctr">
+              <a:spcAft>
+                <a:spcPts val="1000"/>
+              </a:spcAft>
+            </a:pPr>
+            <a:r>
+              <a:rPr sz="1800" b="1">
+                <a:solidFill>
+                  <a:srgbClr val="502814"/>
+                </a:solidFill>
+                <a:latin typeface="Microsoft YaHei"/>
+              </a:rPr>
+              <a:t>课后延伸</a:t>
+            </a:r>
+          </a:p>
+        </p:txBody>
+      </p:sp>
+      <p:sp>
+        <p:nvSpPr>
+          <p:cNvPr id="8" name="TextBox 7"/>
+          <p:cNvSpPr txBox="1"/>
+          <p:nvPr/>
+        </p:nvSpPr>
+        <p:spPr>
+          <a:xfrm>
+            <a:off x="1371600" y="1051560"/>
+            <a:ext cx="9418320" cy="822960"/>
+          </a:xfrm>
+          <a:prstGeom prst="rect">
+            <a:avLst/>
+          </a:prstGeom>
+          <a:noFill/>
+        </p:spPr>
+        <p:txBody>
+          <a:bodyPr wrap="square">
+            <a:spAutoFit/>
+          </a:bodyPr>
+          <a:lstStyle/>
+          <a:p>
+            <a:pPr algn="ctr">
+              <a:spcAft>
+                <a:spcPts val="1000"/>
+              </a:spcAft>
+            </a:pPr>
+            <a:r>
+              <a:rPr sz="3600" b="1">
+                <a:solidFill>
+                  <a:srgbClr val="DC5028"/>
+                </a:solidFill>
+                <a:latin typeface="Microsoft YaHei"/>
+              </a:rPr>
+              <a:t>课后作业</a:t>
+            </a:r>
+          </a:p>
+        </p:txBody>
+      </p:sp>
+      <p:sp>
+        <p:nvSpPr>
+          <p:cNvPr id="9" name="Rectangle 8"/>
+          <p:cNvSpPr/>
+          <p:nvPr/>
+        </p:nvSpPr>
+        <p:spPr>
+          <a:xfrm>
+            <a:off x="3200400" y="1691640"/>
+            <a:ext cx="5760720" cy="27432"/>
+          </a:xfrm>
+          <a:prstGeom prst="rect">
+            <a:avLst/>
+          </a:prstGeom>
+          <a:solidFill>
+            <a:srgbClr val="FFB464"/>
+          </a:solidFill>
+          <a:ln>
+            <a:noFill/>
+          </a:ln>
+        </p:spPr>
+        <p:style>
+          <a:lnRef idx="1">
+            <a:schemeClr val="accent1"/>
+          </a:lnRef>
+          <a:fillRef idx="3">
+            <a:schemeClr val="accent1"/>
+          </a:fillRef>
+          <a:effectRef idx="2">
+            <a:schemeClr val="accent1"/>
+          </a:effectRef>
+          <a:fontRef idx="minor">
+            <a:schemeClr val="lt1"/>
+          </a:fontRef>
+        </p:style>
+        <p:txBody>
+          <a:bodyPr rtlCol="0" anchor="ctr"/>
+          <a:lstStyle/>
+          <a:p>
+            <a:pPr algn="ctr"/>
+          </a:p>
+        </p:txBody>
+      </p:sp>
+      <p:sp>
+        <p:nvSpPr>
+          <p:cNvPr id="10" name="Rounded Rectangle 9"/>
+          <p:cNvSpPr/>
+          <p:nvPr/>
+        </p:nvSpPr>
+        <p:spPr>
+          <a:xfrm>
+            <a:off x="1295704" y="1737360"/>
+            <a:ext cx="9601200" cy="1545336"/>
+          </a:xfrm>
+          <a:prstGeom prst="roundRect">
+            <a:avLst/>
+          </a:prstGeom>
+          <a:solidFill>
+            <a:srgbClr val="FFF8F0"/>
+          </a:solidFill>
+          <a:ln w="19050">
+            <a:solidFill>
+              <a:srgbClr val="FFB464"/>
+            </a:solidFill>
+          </a:ln>
+        </p:spPr>
+        <p:style>
+          <a:lnRef idx="1">
+            <a:schemeClr val="accent1"/>
+          </a:lnRef>
+          <a:fillRef idx="3">
+            <a:schemeClr val="accent1"/>
+          </a:fillRef>
+          <a:effectRef idx="2">
+            <a:schemeClr val="accent1"/>
+          </a:effectRef>
+          <a:fontRef idx="minor">
+            <a:schemeClr val="lt1"/>
+          </a:fontRef>
+        </p:style>
+        <p:txBody>
+          <a:bodyPr rtlCol="0" anchor="ctr"/>
+          <a:lstStyle/>
+          <a:p>
+            <a:pPr algn="ctr"/>
+          </a:p>
+        </p:txBody>
+      </p:sp>
+      <p:sp>
+        <p:nvSpPr>
+          <p:cNvPr id="11" name="Oval 10"/>
+          <p:cNvSpPr/>
+          <p:nvPr/>
+        </p:nvSpPr>
+        <p:spPr>
+          <a:xfrm>
+            <a:off x="2621584" y="1920240"/>
+            <a:ext cx="347472" cy="347472"/>
+          </a:xfrm>
+          <a:prstGeom prst="ellipse">
+            <a:avLst/>
+          </a:prstGeom>
+          <a:solidFill>
+            <a:srgbClr val="DC5028"/>
+          </a:solidFill>
+          <a:ln>
+            <a:noFill/>
+          </a:ln>
+        </p:spPr>
+        <p:style>
+          <a:lnRef idx="1">
+            <a:schemeClr val="accent1"/>
+          </a:lnRef>
+          <a:fillRef idx="3">
+            <a:schemeClr val="accent1"/>
+          </a:fillRef>
+          <a:effectRef idx="2">
+            <a:schemeClr val="accent1"/>
+          </a:effectRef>
+          <a:fontRef idx="minor">
+            <a:schemeClr val="lt1"/>
+          </a:fontRef>
+        </p:style>
+        <p:txBody>
+          <a:bodyPr rtlCol="0" anchor="ctr"/>
+          <a:lstStyle/>
+          <a:p>
+            <a:pPr algn="ctr"/>
+          </a:p>
+        </p:txBody>
+      </p:sp>
+      <p:sp>
+        <p:nvSpPr>
+          <p:cNvPr id="12" name="TextBox 11"/>
+          <p:cNvSpPr txBox="1"/>
+          <p:nvPr/>
+        </p:nvSpPr>
+        <p:spPr>
+          <a:xfrm>
+            <a:off x="2621584" y="1938528"/>
+            <a:ext cx="347472" cy="329184"/>
+          </a:xfrm>
+          <a:prstGeom prst="rect">
+            <a:avLst/>
+          </a:prstGeom>
+          <a:noFill/>
+        </p:spPr>
+        <p:txBody>
+          <a:bodyPr wrap="none">
+            <a:spAutoFit/>
+          </a:bodyPr>
+          <a:lstStyle/>
+          <a:p>
+            <a:pPr algn="ctr">
+              <a:spcAft>
+                <a:spcPts val="1000"/>
+              </a:spcAft>
+            </a:pPr>
+            <a:r>
+              <a:rPr sz="1400" b="1">
+                <a:solidFill>
+                  <a:srgbClr val="FFFFFF"/>
+                </a:solidFill>
+                <a:latin typeface="Microsoft YaHei"/>
+              </a:rPr>
+              <a:t>1</a:t>
+            </a:r>
+          </a:p>
+        </p:txBody>
+      </p:sp>
+      <p:sp>
+        <p:nvSpPr>
+          <p:cNvPr id="13" name="TextBox 12"/>
+          <p:cNvSpPr txBox="1"/>
+          <p:nvPr/>
+        </p:nvSpPr>
+        <p:spPr>
+          <a:xfrm>
+            <a:off x="3078784" y="1901952"/>
+            <a:ext cx="7863840" cy="457200"/>
+          </a:xfrm>
+          <a:prstGeom prst="rect">
+            <a:avLst/>
+          </a:prstGeom>
+          <a:noFill/>
+        </p:spPr>
+        <p:txBody>
+          <a:bodyPr wrap="none">
+            <a:spAutoFit/>
+          </a:bodyPr>
+          <a:lstStyle/>
+          <a:p>
+            <a:pPr algn="l">
+              <a:spcAft>
+                <a:spcPts val="1000"/>
+              </a:spcAft>
+            </a:pPr>
+            <a:r>
+              <a:rPr sz="2400" b="0">
+                <a:solidFill>
+                  <a:srgbClr val="502814"/>
+                </a:solidFill>
+                <a:latin typeface="Microsoft YaHei"/>
+              </a:rPr>
+              <a:t>必做：写80字「赛事快讯」（至少三次变化）</a:t>
+            </a:r>
+          </a:p>
+        </p:txBody>
+      </p:sp>
+      <p:sp>
+        <p:nvSpPr>
+          <p:cNvPr id="14" name="Oval 13"/>
+          <p:cNvSpPr/>
+          <p:nvPr/>
+        </p:nvSpPr>
+        <p:spPr>
+          <a:xfrm>
+            <a:off x="2621584" y="2487168"/>
+            <a:ext cx="347472" cy="347472"/>
+          </a:xfrm>
+          <a:prstGeom prst="ellipse">
+            <a:avLst/>
+          </a:prstGeom>
+          <a:solidFill>
+            <a:srgbClr val="DC5028"/>
+          </a:solidFill>
+          <a:ln>
+            <a:noFill/>
+          </a:ln>
+        </p:spPr>
+        <p:style>
+          <a:lnRef idx="1">
+            <a:schemeClr val="accent1"/>
+          </a:lnRef>
+          <a:fillRef idx="3">
+            <a:schemeClr val="accent1"/>
+          </a:fillRef>
+          <a:effectRef idx="2">
+            <a:schemeClr val="accent1"/>
+          </a:effectRef>
+          <a:fontRef idx="minor">
+            <a:schemeClr val="lt1"/>
+          </a:fontRef>
+        </p:style>
+        <p:txBody>
+          <a:bodyPr rtlCol="0" anchor="ctr"/>
+          <a:lstStyle/>
+          <a:p>
+            <a:pPr algn="ctr"/>
+          </a:p>
+        </p:txBody>
+      </p:sp>
+      <p:sp>
+        <p:nvSpPr>
+          <p:cNvPr id="15" name="TextBox 14"/>
+          <p:cNvSpPr txBox="1"/>
+          <p:nvPr/>
+        </p:nvSpPr>
+        <p:spPr>
+          <a:xfrm>
+            <a:off x="2621584" y="2505456"/>
+            <a:ext cx="347472" cy="329184"/>
+          </a:xfrm>
+          <a:prstGeom prst="rect">
+            <a:avLst/>
+          </a:prstGeom>
+          <a:noFill/>
+        </p:spPr>
+        <p:txBody>
+          <a:bodyPr wrap="none">
+            <a:spAutoFit/>
+          </a:bodyPr>
+          <a:lstStyle/>
+          <a:p>
+            <a:pPr algn="ctr">
+              <a:spcAft>
+                <a:spcPts val="1000"/>
+              </a:spcAft>
+            </a:pPr>
+            <a:r>
+              <a:rPr sz="1400" b="1">
+                <a:solidFill>
+                  <a:srgbClr val="FFFFFF"/>
+                </a:solidFill>
+                <a:latin typeface="Microsoft YaHei"/>
+              </a:rPr>
+              <a:t>2</a:t>
+            </a:r>
+          </a:p>
+        </p:txBody>
+      </p:sp>
+      <p:sp>
+        <p:nvSpPr>
+          <p:cNvPr id="16" name="TextBox 15"/>
+          <p:cNvSpPr txBox="1"/>
+          <p:nvPr/>
+        </p:nvSpPr>
+        <p:spPr>
+          <a:xfrm>
+            <a:off x="3078784" y="2468880"/>
+            <a:ext cx="7863840" cy="457200"/>
+          </a:xfrm>
+          <a:prstGeom prst="rect">
+            <a:avLst/>
+          </a:prstGeom>
+          <a:noFill/>
+        </p:spPr>
+        <p:txBody>
+          <a:bodyPr wrap="none">
+            <a:spAutoFit/>
+          </a:bodyPr>
+          <a:lstStyle/>
+          <a:p>
+            <a:pPr algn="l">
+              <a:spcAft>
+                <a:spcPts val="1000"/>
+              </a:spcAft>
+            </a:pPr>
+            <a:r>
+              <a:rPr sz="2400" b="0">
+                <a:solidFill>
+                  <a:srgbClr val="502814"/>
+                </a:solidFill>
+                <a:latin typeface="Microsoft YaHei"/>
+              </a:rPr>
+              <a:t>积累：《西游记》作者吴承恩，成书明代；再写一个孙悟空经典情节</a:t>
             </a:r>
           </a:p>
         </p:txBody>

--- a/unit6-lesson21-wukong.pptx
+++ b/unit6-lesson21-wukong.pptx
@@ -13,6 +13,7 @@
     <p:sldId id="261" r:id="rId12"/>
     <p:sldId id="262" r:id="rId13"/>
     <p:sldId id="263" r:id="rId14"/>
+    <p:sldId id="264" r:id="rId15"/>
   </p:sldIdLst>
   <p:sldSz cx="12191695" cy="6858000" type="screen4x3"/>
   <p:notesSz cx="6858000" cy="9144000"/>
@@ -3304,8 +3305,8 @@
         </p:nvSpPr>
         <p:spPr>
           <a:xfrm>
-            <a:off x="1371600" y="1828800"/>
-            <a:ext cx="9418320" cy="1828800"/>
+            <a:off x="1371600" y="2011680"/>
+            <a:ext cx="9418320" cy="1645920"/>
           </a:xfrm>
           <a:prstGeom prst="rect">
             <a:avLst/>
@@ -3604,7 +3605,7 @@
                 </a:solidFill>
                 <a:latin typeface="Microsoft YaHei"/>
               </a:rPr>
-              <a:t>课堂笔记</a:t>
+              <a:t>课时目标</a:t>
             </a:r>
           </a:p>
         </p:txBody>
@@ -3617,7 +3618,7 @@
         </p:nvSpPr>
         <p:spPr>
           <a:xfrm>
-            <a:off x="1371600" y="1051560"/>
+            <a:off x="1371600" y="960120"/>
             <a:ext cx="9418320" cy="822960"/>
           </a:xfrm>
           <a:prstGeom prst="rect">
@@ -3643,7 +3644,7 @@
                 </a:solidFill>
                 <a:latin typeface="Microsoft YaHei"/>
               </a:rPr>
-              <a:t>文学常识</a:t>
+              <a:t>本课目标</a:t>
             </a:r>
           </a:p>
         </p:txBody>
@@ -3656,7 +3657,7 @@
         </p:nvSpPr>
         <p:spPr>
           <a:xfrm>
-            <a:off x="3200400" y="1691640"/>
+            <a:off x="3200400" y="1600200"/>
             <a:ext cx="5760720" cy="27432"/>
           </a:xfrm>
           <a:prstGeom prst="rect">
@@ -3699,8 +3700,8 @@
         </p:nvSpPr>
         <p:spPr>
           <a:xfrm>
-            <a:off x="1249984" y="1810512"/>
-            <a:ext cx="9692640" cy="3319272"/>
+            <a:off x="1295704" y="1645920"/>
+            <a:ext cx="9601200" cy="2240280"/>
           </a:xfrm>
           <a:prstGeom prst="roundRect">
             <a:avLst/>
@@ -3738,14 +3739,57 @@
       </p:sp>
       <p:sp>
         <p:nvSpPr>
-          <p:cNvPr id="11" name="TextBox 10"/>
+          <p:cNvPr id="11" name="Oval 10"/>
+          <p:cNvSpPr/>
+          <p:nvPr/>
+        </p:nvSpPr>
+        <p:spPr>
+          <a:xfrm>
+            <a:off x="2255824" y="1828800"/>
+            <a:ext cx="384048" cy="384048"/>
+          </a:xfrm>
+          <a:prstGeom prst="ellipse">
+            <a:avLst/>
+          </a:prstGeom>
+          <a:solidFill>
+            <a:srgbClr val="DC5028"/>
+          </a:solidFill>
+          <a:ln>
+            <a:noFill/>
+          </a:ln>
+        </p:spPr>
+        <p:style>
+          <a:lnRef idx="1">
+            <a:schemeClr val="accent1"/>
+          </a:lnRef>
+          <a:fillRef idx="3">
+            <a:schemeClr val="accent1"/>
+          </a:fillRef>
+          <a:effectRef idx="2">
+            <a:schemeClr val="accent1"/>
+          </a:effectRef>
+          <a:fontRef idx="minor">
+            <a:schemeClr val="lt1"/>
+          </a:fontRef>
+        </p:style>
+        <p:txBody>
+          <a:bodyPr rtlCol="0" anchor="ctr"/>
+          <a:lstStyle/>
+          <a:p>
+            <a:pPr algn="ctr"/>
+          </a:p>
+        </p:txBody>
+      </p:sp>
+      <p:sp>
+        <p:nvSpPr>
+          <p:cNvPr id="12" name="TextBox 11"/>
           <p:cNvSpPr txBox="1"/>
           <p:nvPr/>
         </p:nvSpPr>
         <p:spPr>
           <a:xfrm>
-            <a:off x="1463040" y="1920240"/>
-            <a:ext cx="2103120" cy="502920"/>
+            <a:off x="2255824" y="1847088"/>
+            <a:ext cx="384048" cy="365760"/>
           </a:xfrm>
           <a:prstGeom prst="rect">
             <a:avLst/>
@@ -3758,33 +3802,33 @@
           </a:bodyPr>
           <a:lstStyle/>
           <a:p>
-            <a:pPr algn="r">
+            <a:pPr algn="ctr">
               <a:spcAft>
                 <a:spcPts val="1000"/>
               </a:spcAft>
             </a:pPr>
             <a:r>
-              <a:rPr sz="2200" b="1">
+              <a:rPr sz="1600" b="1">
                 <a:solidFill>
-                  <a:srgbClr val="DC5028"/>
+                  <a:srgbClr val="FFFFFF"/>
                 </a:solidFill>
                 <a:latin typeface="Microsoft YaHei"/>
               </a:rPr>
-              <a:t>作者</a:t>
-            </a:r>
-          </a:p>
-        </p:txBody>
-      </p:sp>
-      <p:sp>
-        <p:nvSpPr>
-          <p:cNvPr id="12" name="TextBox 11"/>
+              <a:t>1</a:t>
+            </a:r>
+          </a:p>
+        </p:txBody>
+      </p:sp>
+      <p:sp>
+        <p:nvSpPr>
+          <p:cNvPr id="13" name="TextBox 12"/>
           <p:cNvSpPr txBox="1"/>
           <p:nvPr/>
         </p:nvSpPr>
         <p:spPr>
           <a:xfrm>
-            <a:off x="3749039" y="1920240"/>
-            <a:ext cx="7132320" cy="685800"/>
+            <a:off x="2758744" y="1810512"/>
+            <a:ext cx="7772400" cy="502920"/>
           </a:xfrm>
           <a:prstGeom prst="rect">
             <a:avLst/>
@@ -3803,27 +3847,70 @@
               </a:spcAft>
             </a:pPr>
             <a:r>
-              <a:rPr sz="2200" b="0">
+              <a:rPr sz="2400" b="0">
                 <a:solidFill>
                   <a:srgbClr val="502814"/>
                 </a:solidFill>
                 <a:latin typeface="Microsoft YaHei"/>
               </a:rPr>
-              <a:t>吴承恩，明代小说家</a:t>
-            </a:r>
-          </a:p>
-        </p:txBody>
-      </p:sp>
-      <p:sp>
-        <p:nvSpPr>
-          <p:cNvPr id="13" name="TextBox 12"/>
+              <a:t>梳理孙悟空与二郎神的变化链，概括故事经过</a:t>
+            </a:r>
+          </a:p>
+        </p:txBody>
+      </p:sp>
+      <p:sp>
+        <p:nvSpPr>
+          <p:cNvPr id="14" name="Oval 13"/>
+          <p:cNvSpPr/>
+          <p:nvPr/>
+        </p:nvSpPr>
+        <p:spPr>
+          <a:xfrm>
+            <a:off x="2255824" y="2395728"/>
+            <a:ext cx="384048" cy="384048"/>
+          </a:xfrm>
+          <a:prstGeom prst="ellipse">
+            <a:avLst/>
+          </a:prstGeom>
+          <a:solidFill>
+            <a:srgbClr val="DC5028"/>
+          </a:solidFill>
+          <a:ln>
+            <a:noFill/>
+          </a:ln>
+        </p:spPr>
+        <p:style>
+          <a:lnRef idx="1">
+            <a:schemeClr val="accent1"/>
+          </a:lnRef>
+          <a:fillRef idx="3">
+            <a:schemeClr val="accent1"/>
+          </a:fillRef>
+          <a:effectRef idx="2">
+            <a:schemeClr val="accent1"/>
+          </a:effectRef>
+          <a:fontRef idx="minor">
+            <a:schemeClr val="lt1"/>
+          </a:fontRef>
+        </p:style>
+        <p:txBody>
+          <a:bodyPr rtlCol="0" anchor="ctr"/>
+          <a:lstStyle/>
+          <a:p>
+            <a:pPr algn="ctr"/>
+          </a:p>
+        </p:txBody>
+      </p:sp>
+      <p:sp>
+        <p:nvSpPr>
+          <p:cNvPr id="15" name="TextBox 14"/>
           <p:cNvSpPr txBox="1"/>
           <p:nvPr/>
         </p:nvSpPr>
         <p:spPr>
           <a:xfrm>
-            <a:off x="1463040" y="2670048"/>
-            <a:ext cx="2103120" cy="502920"/>
+            <a:off x="2255824" y="2414016"/>
+            <a:ext cx="384048" cy="365760"/>
           </a:xfrm>
           <a:prstGeom prst="rect">
             <a:avLst/>
@@ -3836,33 +3923,33 @@
           </a:bodyPr>
           <a:lstStyle/>
           <a:p>
-            <a:pPr algn="r">
+            <a:pPr algn="ctr">
               <a:spcAft>
                 <a:spcPts val="1000"/>
               </a:spcAft>
             </a:pPr>
             <a:r>
-              <a:rPr sz="2200" b="1">
+              <a:rPr sz="1600" b="1">
                 <a:solidFill>
-                  <a:srgbClr val="DC5028"/>
+                  <a:srgbClr val="FFFFFF"/>
                 </a:solidFill>
                 <a:latin typeface="Microsoft YaHei"/>
               </a:rPr>
-              <a:t>出处</a:t>
-            </a:r>
-          </a:p>
-        </p:txBody>
-      </p:sp>
-      <p:sp>
-        <p:nvSpPr>
-          <p:cNvPr id="14" name="TextBox 13"/>
+              <a:t>2</a:t>
+            </a:r>
+          </a:p>
+        </p:txBody>
+      </p:sp>
+      <p:sp>
+        <p:nvSpPr>
+          <p:cNvPr id="16" name="TextBox 15"/>
           <p:cNvSpPr txBox="1"/>
           <p:nvPr/>
         </p:nvSpPr>
         <p:spPr>
           <a:xfrm>
-            <a:off x="3749039" y="2670048"/>
-            <a:ext cx="7132320" cy="685800"/>
+            <a:off x="2758744" y="2377440"/>
+            <a:ext cx="7772400" cy="502920"/>
           </a:xfrm>
           <a:prstGeom prst="rect">
             <a:avLst/>
@@ -3881,27 +3968,70 @@
               </a:spcAft>
             </a:pPr>
             <a:r>
-              <a:rPr sz="2200" b="0">
+              <a:rPr sz="2400" b="0">
                 <a:solidFill>
                   <a:srgbClr val="502814"/>
                 </a:solidFill>
                 <a:latin typeface="Microsoft YaHei"/>
               </a:rPr>
-              <a:t>章回体长篇小说《西游记》节选</a:t>
-            </a:r>
-          </a:p>
-        </p:txBody>
-      </p:sp>
-      <p:sp>
-        <p:nvSpPr>
-          <p:cNvPr id="15" name="TextBox 14"/>
+              <a:t>分析神魔形象及小说想象的趣味</a:t>
+            </a:r>
+          </a:p>
+        </p:txBody>
+      </p:sp>
+      <p:sp>
+        <p:nvSpPr>
+          <p:cNvPr id="17" name="Oval 16"/>
+          <p:cNvSpPr/>
+          <p:nvPr/>
+        </p:nvSpPr>
+        <p:spPr>
+          <a:xfrm>
+            <a:off x="2255824" y="2962656"/>
+            <a:ext cx="384048" cy="384048"/>
+          </a:xfrm>
+          <a:prstGeom prst="ellipse">
+            <a:avLst/>
+          </a:prstGeom>
+          <a:solidFill>
+            <a:srgbClr val="DC5028"/>
+          </a:solidFill>
+          <a:ln>
+            <a:noFill/>
+          </a:ln>
+        </p:spPr>
+        <p:style>
+          <a:lnRef idx="1">
+            <a:schemeClr val="accent1"/>
+          </a:lnRef>
+          <a:fillRef idx="3">
+            <a:schemeClr val="accent1"/>
+          </a:fillRef>
+          <a:effectRef idx="2">
+            <a:schemeClr val="accent1"/>
+          </a:effectRef>
+          <a:fontRef idx="minor">
+            <a:schemeClr val="lt1"/>
+          </a:fontRef>
+        </p:style>
+        <p:txBody>
+          <a:bodyPr rtlCol="0" anchor="ctr"/>
+          <a:lstStyle/>
+          <a:p>
+            <a:pPr algn="ctr"/>
+          </a:p>
+        </p:txBody>
+      </p:sp>
+      <p:sp>
+        <p:nvSpPr>
+          <p:cNvPr id="18" name="TextBox 17"/>
           <p:cNvSpPr txBox="1"/>
           <p:nvPr/>
         </p:nvSpPr>
         <p:spPr>
           <a:xfrm>
-            <a:off x="1463040" y="3419856"/>
-            <a:ext cx="2103120" cy="502920"/>
+            <a:off x="2255824" y="2980944"/>
+            <a:ext cx="384048" cy="365760"/>
           </a:xfrm>
           <a:prstGeom prst="rect">
             <a:avLst/>
@@ -3914,33 +4044,33 @@
           </a:bodyPr>
           <a:lstStyle/>
           <a:p>
-            <a:pPr algn="r">
+            <a:pPr algn="ctr">
               <a:spcAft>
                 <a:spcPts val="1000"/>
               </a:spcAft>
             </a:pPr>
             <a:r>
-              <a:rPr sz="2200" b="1">
+              <a:rPr sz="1600" b="1">
                 <a:solidFill>
-                  <a:srgbClr val="DC5028"/>
+                  <a:srgbClr val="FFFFFF"/>
                 </a:solidFill>
                 <a:latin typeface="Microsoft YaHei"/>
               </a:rPr>
-              <a:t>文体</a:t>
-            </a:r>
-          </a:p>
-        </p:txBody>
-      </p:sp>
-      <p:sp>
-        <p:nvSpPr>
-          <p:cNvPr id="16" name="TextBox 15"/>
+              <a:t>3</a:t>
+            </a:r>
+          </a:p>
+        </p:txBody>
+      </p:sp>
+      <p:sp>
+        <p:nvSpPr>
+          <p:cNvPr id="19" name="TextBox 18"/>
           <p:cNvSpPr txBox="1"/>
           <p:nvPr/>
         </p:nvSpPr>
         <p:spPr>
           <a:xfrm>
-            <a:off x="3749039" y="3419856"/>
-            <a:ext cx="7132320" cy="685800"/>
+            <a:off x="2758744" y="2944368"/>
+            <a:ext cx="7772400" cy="502920"/>
           </a:xfrm>
           <a:prstGeom prst="rect">
             <a:avLst/>
@@ -3959,91 +4089,13 @@
               </a:spcAft>
             </a:pPr>
             <a:r>
-              <a:rPr sz="2200" b="0">
+              <a:rPr sz="2400" b="0">
                 <a:solidFill>
                   <a:srgbClr val="502814"/>
                 </a:solidFill>
                 <a:latin typeface="Microsoft YaHei"/>
               </a:rPr>
-              <a:t>神魔小说——以神魔斗法写人情世故</a:t>
-            </a:r>
-          </a:p>
-        </p:txBody>
-      </p:sp>
-      <p:sp>
-        <p:nvSpPr>
-          <p:cNvPr id="17" name="TextBox 16"/>
-          <p:cNvSpPr txBox="1"/>
-          <p:nvPr/>
-        </p:nvSpPr>
-        <p:spPr>
-          <a:xfrm>
-            <a:off x="1463040" y="4169664"/>
-            <a:ext cx="2103120" cy="502920"/>
-          </a:xfrm>
-          <a:prstGeom prst="rect">
-            <a:avLst/>
-          </a:prstGeom>
-          <a:noFill/>
-        </p:spPr>
-        <p:txBody>
-          <a:bodyPr wrap="none">
-            <a:spAutoFit/>
-          </a:bodyPr>
-          <a:lstStyle/>
-          <a:p>
-            <a:pPr algn="r">
-              <a:spcAft>
-                <a:spcPts val="1000"/>
-              </a:spcAft>
-            </a:pPr>
-            <a:r>
-              <a:rPr sz="2200" b="1">
-                <a:solidFill>
-                  <a:srgbClr val="DC5028"/>
-                </a:solidFill>
-                <a:latin typeface="Microsoft YaHei"/>
-              </a:rPr>
-              <a:t>本文情节</a:t>
-            </a:r>
-          </a:p>
-        </p:txBody>
-      </p:sp>
-      <p:sp>
-        <p:nvSpPr>
-          <p:cNvPr id="18" name="TextBox 17"/>
-          <p:cNvSpPr txBox="1"/>
-          <p:nvPr/>
-        </p:nvSpPr>
-        <p:spPr>
-          <a:xfrm>
-            <a:off x="3749039" y="4169664"/>
-            <a:ext cx="7132320" cy="685800"/>
-          </a:xfrm>
-          <a:prstGeom prst="rect">
-            <a:avLst/>
-          </a:prstGeom>
-          <a:noFill/>
-        </p:spPr>
-        <p:txBody>
-          <a:bodyPr wrap="none">
-            <a:spAutoFit/>
-          </a:bodyPr>
-          <a:lstStyle/>
-          <a:p>
-            <a:pPr algn="l">
-              <a:spcAft>
-                <a:spcPts val="1000"/>
-              </a:spcAft>
-            </a:pPr>
-            <a:r>
-              <a:rPr sz="2200" b="0">
-                <a:solidFill>
-                  <a:srgbClr val="502814"/>
-                </a:solidFill>
-                <a:latin typeface="Microsoft YaHei"/>
-              </a:rPr>
-              <a:t>孙悟空大闹天宫后，二郎神奉旨捉拿，二人变化斗法</a:t>
+              <a:t>探究「自由与规则」母题，提炼策展主题一</a:t>
             </a:r>
           </a:p>
         </p:txBody>
@@ -4189,7 +4241,7 @@
         </p:nvSpPr>
         <p:spPr>
           <a:xfrm>
-            <a:off x="4953304" y="502920"/>
+            <a:off x="4953304" y="1005840"/>
             <a:ext cx="2286000" cy="411480"/>
           </a:xfrm>
           <a:prstGeom prst="roundRect">
@@ -4232,7 +4284,7 @@
         </p:nvSpPr>
         <p:spPr>
           <a:xfrm>
-            <a:off x="4953304" y="521208"/>
+            <a:off x="4953304" y="1024128"/>
             <a:ext cx="2286000" cy="384048"/>
           </a:xfrm>
           <a:prstGeom prst="rect">
@@ -4258,7 +4310,7 @@
                 </a:solidFill>
                 <a:latin typeface="Microsoft YaHei"/>
               </a:rPr>
-              <a:t>情节笔记</a:t>
+              <a:t>想一想</a:t>
             </a:r>
           </a:p>
         </p:txBody>
@@ -4271,7 +4323,7 @@
         </p:nvSpPr>
         <p:spPr>
           <a:xfrm>
-            <a:off x="1371600" y="1051560"/>
+            <a:off x="1371600" y="1600200"/>
             <a:ext cx="9418320" cy="822960"/>
           </a:xfrm>
           <a:prstGeom prst="rect">
@@ -4291,13 +4343,13 @@
               </a:spcAft>
             </a:pPr>
             <a:r>
-              <a:rPr sz="3600" b="1">
+              <a:rPr sz="3200" b="1">
                 <a:solidFill>
                   <a:srgbClr val="DC5028"/>
                 </a:solidFill>
                 <a:latin typeface="Microsoft YaHei"/>
               </a:rPr>
-              <a:t>变化链梳理</a:t>
+              <a:t>高手过招，吸引人的不只是「谁赢了」</a:t>
             </a:r>
           </a:p>
         </p:txBody>
@@ -4310,7 +4362,7 @@
         </p:nvSpPr>
         <p:spPr>
           <a:xfrm>
-            <a:off x="3200400" y="1691640"/>
+            <a:off x="3200400" y="4389120"/>
             <a:ext cx="5760720" cy="27432"/>
           </a:xfrm>
           <a:prstGeom prst="rect">
@@ -4347,59 +4399,14 @@
       </p:sp>
       <p:sp>
         <p:nvSpPr>
-          <p:cNvPr id="10" name="Rounded Rectangle 9"/>
-          <p:cNvSpPr/>
-          <p:nvPr/>
-        </p:nvSpPr>
-        <p:spPr>
-          <a:xfrm>
-            <a:off x="1249984" y="1810512"/>
-            <a:ext cx="9692640" cy="3319272"/>
-          </a:xfrm>
-          <a:prstGeom prst="roundRect">
-            <a:avLst/>
-          </a:prstGeom>
-          <a:solidFill>
-            <a:srgbClr val="FFF8F0"/>
-          </a:solidFill>
-          <a:ln w="19050">
-            <a:solidFill>
-              <a:srgbClr val="FFB464"/>
-            </a:solidFill>
-          </a:ln>
-        </p:spPr>
-        <p:style>
-          <a:lnRef idx="1">
-            <a:schemeClr val="accent1"/>
-          </a:lnRef>
-          <a:fillRef idx="3">
-            <a:schemeClr val="accent1"/>
-          </a:fillRef>
-          <a:effectRef idx="2">
-            <a:schemeClr val="accent1"/>
-          </a:effectRef>
-          <a:fontRef idx="minor">
-            <a:schemeClr val="lt1"/>
-          </a:fontRef>
-        </p:style>
-        <p:txBody>
-          <a:bodyPr rtlCol="0" anchor="ctr"/>
-          <a:lstStyle/>
-          <a:p>
-            <a:pPr algn="ctr"/>
-          </a:p>
-        </p:txBody>
-      </p:sp>
-      <p:sp>
-        <p:nvSpPr>
-          <p:cNvPr id="11" name="TextBox 10"/>
+          <p:cNvPr id="10" name="TextBox 9"/>
           <p:cNvSpPr txBox="1"/>
           <p:nvPr/>
         </p:nvSpPr>
         <p:spPr>
           <a:xfrm>
-            <a:off x="1463040" y="1920240"/>
-            <a:ext cx="2103120" cy="502920"/>
+            <a:off x="1828800" y="4663440"/>
+            <a:ext cx="8503920" cy="914400"/>
           </a:xfrm>
           <a:prstGeom prst="rect">
             <a:avLst/>
@@ -4412,292 +4419,19 @@
           </a:bodyPr>
           <a:lstStyle/>
           <a:p>
-            <a:pPr algn="r">
+            <a:pPr algn="ctr">
               <a:spcAft>
                 <a:spcPts val="1000"/>
               </a:spcAft>
             </a:pPr>
             <a:r>
-              <a:rPr sz="2200" b="1">
+              <a:rPr sz="2200" b="0">
                 <a:solidFill>
                   <a:srgbClr val="DC5028"/>
                 </a:solidFill>
                 <a:latin typeface="Microsoft YaHei"/>
               </a:rPr>
-              <a:t>第1轮</a:t>
-            </a:r>
-          </a:p>
-        </p:txBody>
-      </p:sp>
-      <p:sp>
-        <p:nvSpPr>
-          <p:cNvPr id="12" name="TextBox 11"/>
-          <p:cNvSpPr txBox="1"/>
-          <p:nvPr/>
-        </p:nvSpPr>
-        <p:spPr>
-          <a:xfrm>
-            <a:off x="3749039" y="1920240"/>
-            <a:ext cx="7132320" cy="685800"/>
-          </a:xfrm>
-          <a:prstGeom prst="rect">
-            <a:avLst/>
-          </a:prstGeom>
-          <a:noFill/>
-        </p:spPr>
-        <p:txBody>
-          <a:bodyPr wrap="none">
-            <a:spAutoFit/>
-          </a:bodyPr>
-          <a:lstStyle/>
-          <a:p>
-            <a:pPr algn="l">
-              <a:spcAft>
-                <a:spcPts val="1000"/>
-              </a:spcAft>
-            </a:pPr>
-            <a:r>
-              <a:rPr sz="2200" b="0">
-                <a:solidFill>
-                  <a:srgbClr val="502814"/>
-                </a:solidFill>
-                <a:latin typeface="Microsoft YaHei"/>
-              </a:rPr>
-              <a:t>悟空变鸟→二郎变鹰；悟空变鱼→二郎变鱼鹰</a:t>
-            </a:r>
-          </a:p>
-        </p:txBody>
-      </p:sp>
-      <p:sp>
-        <p:nvSpPr>
-          <p:cNvPr id="13" name="TextBox 12"/>
-          <p:cNvSpPr txBox="1"/>
-          <p:nvPr/>
-        </p:nvSpPr>
-        <p:spPr>
-          <a:xfrm>
-            <a:off x="1463040" y="2670048"/>
-            <a:ext cx="2103120" cy="502920"/>
-          </a:xfrm>
-          <a:prstGeom prst="rect">
-            <a:avLst/>
-          </a:prstGeom>
-          <a:noFill/>
-        </p:spPr>
-        <p:txBody>
-          <a:bodyPr wrap="none">
-            <a:spAutoFit/>
-          </a:bodyPr>
-          <a:lstStyle/>
-          <a:p>
-            <a:pPr algn="r">
-              <a:spcAft>
-                <a:spcPts val="1000"/>
-              </a:spcAft>
-            </a:pPr>
-            <a:r>
-              <a:rPr sz="2200" b="1">
-                <a:solidFill>
-                  <a:srgbClr val="DC5028"/>
-                </a:solidFill>
-                <a:latin typeface="Microsoft YaHei"/>
-              </a:rPr>
-              <a:t>第2轮</a:t>
-            </a:r>
-          </a:p>
-        </p:txBody>
-      </p:sp>
-      <p:sp>
-        <p:nvSpPr>
-          <p:cNvPr id="14" name="TextBox 13"/>
-          <p:cNvSpPr txBox="1"/>
-          <p:nvPr/>
-        </p:nvSpPr>
-        <p:spPr>
-          <a:xfrm>
-            <a:off x="3749039" y="2670048"/>
-            <a:ext cx="7132320" cy="685800"/>
-          </a:xfrm>
-          <a:prstGeom prst="rect">
-            <a:avLst/>
-          </a:prstGeom>
-          <a:noFill/>
-        </p:spPr>
-        <p:txBody>
-          <a:bodyPr wrap="none">
-            <a:spAutoFit/>
-          </a:bodyPr>
-          <a:lstStyle/>
-          <a:p>
-            <a:pPr algn="l">
-              <a:spcAft>
-                <a:spcPts val="1000"/>
-              </a:spcAft>
-            </a:pPr>
-            <a:r>
-              <a:rPr sz="2200" b="0">
-                <a:solidFill>
-                  <a:srgbClr val="502814"/>
-                </a:solidFill>
-                <a:latin typeface="Microsoft YaHei"/>
-              </a:rPr>
-              <a:t>悟空变水蛇→二郎变灰鹤；悟空变花鸨→二郎现原身</a:t>
-            </a:r>
-          </a:p>
-        </p:txBody>
-      </p:sp>
-      <p:sp>
-        <p:nvSpPr>
-          <p:cNvPr id="15" name="TextBox 14"/>
-          <p:cNvSpPr txBox="1"/>
-          <p:nvPr/>
-        </p:nvSpPr>
-        <p:spPr>
-          <a:xfrm>
-            <a:off x="1463040" y="3419856"/>
-            <a:ext cx="2103120" cy="502920"/>
-          </a:xfrm>
-          <a:prstGeom prst="rect">
-            <a:avLst/>
-          </a:prstGeom>
-          <a:noFill/>
-        </p:spPr>
-        <p:txBody>
-          <a:bodyPr wrap="none">
-            <a:spAutoFit/>
-          </a:bodyPr>
-          <a:lstStyle/>
-          <a:p>
-            <a:pPr algn="r">
-              <a:spcAft>
-                <a:spcPts val="1000"/>
-              </a:spcAft>
-            </a:pPr>
-            <a:r>
-              <a:rPr sz="2200" b="1">
-                <a:solidFill>
-                  <a:srgbClr val="DC5028"/>
-                </a:solidFill>
-                <a:latin typeface="Microsoft YaHei"/>
-              </a:rPr>
-              <a:t>第3轮</a:t>
-            </a:r>
-          </a:p>
-        </p:txBody>
-      </p:sp>
-      <p:sp>
-        <p:nvSpPr>
-          <p:cNvPr id="16" name="TextBox 15"/>
-          <p:cNvSpPr txBox="1"/>
-          <p:nvPr/>
-        </p:nvSpPr>
-        <p:spPr>
-          <a:xfrm>
-            <a:off x="3749039" y="3419856"/>
-            <a:ext cx="7132320" cy="685800"/>
-          </a:xfrm>
-          <a:prstGeom prst="rect">
-            <a:avLst/>
-          </a:prstGeom>
-          <a:noFill/>
-        </p:spPr>
-        <p:txBody>
-          <a:bodyPr wrap="none">
-            <a:spAutoFit/>
-          </a:bodyPr>
-          <a:lstStyle/>
-          <a:p>
-            <a:pPr algn="l">
-              <a:spcAft>
-                <a:spcPts val="1000"/>
-              </a:spcAft>
-            </a:pPr>
-            <a:r>
-              <a:rPr sz="2200" b="0">
-                <a:solidFill>
-                  <a:srgbClr val="502814"/>
-                </a:solidFill>
-                <a:latin typeface="Microsoft YaHei"/>
-              </a:rPr>
-              <a:t>悟空变庙宇，尾巴变旗竿→二郎识破</a:t>
-            </a:r>
-          </a:p>
-        </p:txBody>
-      </p:sp>
-      <p:sp>
-        <p:nvSpPr>
-          <p:cNvPr id="17" name="TextBox 16"/>
-          <p:cNvSpPr txBox="1"/>
-          <p:nvPr/>
-        </p:nvSpPr>
-        <p:spPr>
-          <a:xfrm>
-            <a:off x="1463040" y="4169664"/>
-            <a:ext cx="2103120" cy="502920"/>
-          </a:xfrm>
-          <a:prstGeom prst="rect">
-            <a:avLst/>
-          </a:prstGeom>
-          <a:noFill/>
-        </p:spPr>
-        <p:txBody>
-          <a:bodyPr wrap="none">
-            <a:spAutoFit/>
-          </a:bodyPr>
-          <a:lstStyle/>
-          <a:p>
-            <a:pPr algn="r">
-              <a:spcAft>
-                <a:spcPts val="1000"/>
-              </a:spcAft>
-            </a:pPr>
-            <a:r>
-              <a:rPr sz="2200" b="1">
-                <a:solidFill>
-                  <a:srgbClr val="DC5028"/>
-                </a:solidFill>
-                <a:latin typeface="Microsoft YaHei"/>
-              </a:rPr>
-              <a:t>规律</a:t>
-            </a:r>
-          </a:p>
-        </p:txBody>
-      </p:sp>
-      <p:sp>
-        <p:nvSpPr>
-          <p:cNvPr id="18" name="TextBox 17"/>
-          <p:cNvSpPr txBox="1"/>
-          <p:nvPr/>
-        </p:nvSpPr>
-        <p:spPr>
-          <a:xfrm>
-            <a:off x="3749039" y="4169664"/>
-            <a:ext cx="7132320" cy="685800"/>
-          </a:xfrm>
-          <a:prstGeom prst="rect">
-            <a:avLst/>
-          </a:prstGeom>
-          <a:noFill/>
-        </p:spPr>
-        <p:txBody>
-          <a:bodyPr wrap="none">
-            <a:spAutoFit/>
-          </a:bodyPr>
-          <a:lstStyle/>
-          <a:p>
-            <a:pPr algn="l">
-              <a:spcAft>
-                <a:spcPts val="1000"/>
-              </a:spcAft>
-            </a:pPr>
-            <a:r>
-              <a:rPr sz="2200" b="0">
-                <a:solidFill>
-                  <a:srgbClr val="502814"/>
-                </a:solidFill>
-                <a:latin typeface="Microsoft YaHei"/>
-              </a:rPr>
-              <a:t>孙悟空先变，二郎神随即以相克之物相对</a:t>
+              <a:t>把自己当作赛事解说员，抓住每一次变化</a:t>
             </a:r>
           </a:p>
         </p:txBody>
@@ -4912,7 +4646,7 @@
                 </a:solidFill>
                 <a:latin typeface="Microsoft YaHei"/>
               </a:rPr>
-              <a:t>人物笔记</a:t>
+              <a:t>变形追逐图</a:t>
             </a:r>
           </a:p>
         </p:txBody>
@@ -4925,7 +4659,7 @@
         </p:nvSpPr>
         <p:spPr>
           <a:xfrm>
-            <a:off x="1371600" y="1051560"/>
+            <a:off x="1371600" y="960120"/>
             <a:ext cx="9418320" cy="822960"/>
           </a:xfrm>
           <a:prstGeom prst="rect">
@@ -4951,7 +4685,7 @@
                 </a:solidFill>
                 <a:latin typeface="Microsoft YaHei"/>
               </a:rPr>
-              <a:t>人物赏析</a:t>
+              <a:t>学习任务一</a:t>
             </a:r>
           </a:p>
         </p:txBody>
@@ -4964,7 +4698,7 @@
         </p:nvSpPr>
         <p:spPr>
           <a:xfrm>
-            <a:off x="3200400" y="1691640"/>
+            <a:off x="3200400" y="1600200"/>
             <a:ext cx="5760720" cy="27432"/>
           </a:xfrm>
           <a:prstGeom prst="rect">
@@ -5007,8 +4741,8 @@
         </p:nvSpPr>
         <p:spPr>
           <a:xfrm>
-            <a:off x="1249984" y="1810512"/>
-            <a:ext cx="9692640" cy="3319272"/>
+            <a:off x="1295704" y="1645920"/>
+            <a:ext cx="9601200" cy="2240280"/>
           </a:xfrm>
           <a:prstGeom prst="roundRect">
             <a:avLst/>
@@ -5046,14 +4780,57 @@
       </p:sp>
       <p:sp>
         <p:nvSpPr>
-          <p:cNvPr id="11" name="TextBox 10"/>
+          <p:cNvPr id="11" name="Oval 10"/>
+          <p:cNvSpPr/>
+          <p:nvPr/>
+        </p:nvSpPr>
+        <p:spPr>
+          <a:xfrm>
+            <a:off x="2255824" y="1828800"/>
+            <a:ext cx="384048" cy="384048"/>
+          </a:xfrm>
+          <a:prstGeom prst="ellipse">
+            <a:avLst/>
+          </a:prstGeom>
+          <a:solidFill>
+            <a:srgbClr val="DC5028"/>
+          </a:solidFill>
+          <a:ln>
+            <a:noFill/>
+          </a:ln>
+        </p:spPr>
+        <p:style>
+          <a:lnRef idx="1">
+            <a:schemeClr val="accent1"/>
+          </a:lnRef>
+          <a:fillRef idx="3">
+            <a:schemeClr val="accent1"/>
+          </a:fillRef>
+          <a:effectRef idx="2">
+            <a:schemeClr val="accent1"/>
+          </a:effectRef>
+          <a:fontRef idx="minor">
+            <a:schemeClr val="lt1"/>
+          </a:fontRef>
+        </p:style>
+        <p:txBody>
+          <a:bodyPr rtlCol="0" anchor="ctr"/>
+          <a:lstStyle/>
+          <a:p>
+            <a:pPr algn="ctr"/>
+          </a:p>
+        </p:txBody>
+      </p:sp>
+      <p:sp>
+        <p:nvSpPr>
+          <p:cNvPr id="12" name="TextBox 11"/>
           <p:cNvSpPr txBox="1"/>
           <p:nvPr/>
         </p:nvSpPr>
         <p:spPr>
           <a:xfrm>
-            <a:off x="1463040" y="1920240"/>
-            <a:ext cx="2103120" cy="502920"/>
+            <a:off x="2255824" y="1847088"/>
+            <a:ext cx="384048" cy="365760"/>
           </a:xfrm>
           <a:prstGeom prst="rect">
             <a:avLst/>
@@ -5066,33 +4843,33 @@
           </a:bodyPr>
           <a:lstStyle/>
           <a:p>
-            <a:pPr algn="r">
+            <a:pPr algn="ctr">
               <a:spcAft>
                 <a:spcPts val="1000"/>
               </a:spcAft>
             </a:pPr>
             <a:r>
-              <a:rPr sz="2200" b="1">
+              <a:rPr sz="1600" b="1">
                 <a:solidFill>
-                  <a:srgbClr val="DC5028"/>
+                  <a:srgbClr val="FFFFFF"/>
                 </a:solidFill>
                 <a:latin typeface="Microsoft YaHei"/>
               </a:rPr>
-              <a:t>孙悟空</a:t>
-            </a:r>
-          </a:p>
-        </p:txBody>
-      </p:sp>
-      <p:sp>
-        <p:nvSpPr>
-          <p:cNvPr id="12" name="TextBox 11"/>
+              <a:t>1</a:t>
+            </a:r>
+          </a:p>
+        </p:txBody>
+      </p:sp>
+      <p:sp>
+        <p:nvSpPr>
+          <p:cNvPr id="13" name="TextBox 12"/>
           <p:cNvSpPr txBox="1"/>
           <p:nvPr/>
         </p:nvSpPr>
         <p:spPr>
           <a:xfrm>
-            <a:off x="3749039" y="1920240"/>
-            <a:ext cx="7132320" cy="685800"/>
+            <a:off x="2758744" y="1810512"/>
+            <a:ext cx="7772400" cy="502920"/>
           </a:xfrm>
           <a:prstGeom prst="rect">
             <a:avLst/>
@@ -5111,27 +4888,70 @@
               </a:spcAft>
             </a:pPr>
             <a:r>
-              <a:rPr sz="2200" b="0">
+              <a:rPr sz="2400" b="0">
                 <a:solidFill>
                   <a:srgbClr val="502814"/>
                 </a:solidFill>
                 <a:latin typeface="Microsoft YaHei"/>
               </a:rPr>
-              <a:t>机敏善变、好胜不屈，追求自由（证据：连续变化、不肯认输）</a:t>
-            </a:r>
-          </a:p>
-        </p:txBody>
-      </p:sp>
-      <p:sp>
-        <p:nvSpPr>
-          <p:cNvPr id="13" name="TextBox 12"/>
+              <a:t>默读课文，圈出每次「变作」对象，标序号</a:t>
+            </a:r>
+          </a:p>
+        </p:txBody>
+      </p:sp>
+      <p:sp>
+        <p:nvSpPr>
+          <p:cNvPr id="14" name="Oval 13"/>
+          <p:cNvSpPr/>
+          <p:nvPr/>
+        </p:nvSpPr>
+        <p:spPr>
+          <a:xfrm>
+            <a:off x="2255824" y="2395728"/>
+            <a:ext cx="384048" cy="384048"/>
+          </a:xfrm>
+          <a:prstGeom prst="ellipse">
+            <a:avLst/>
+          </a:prstGeom>
+          <a:solidFill>
+            <a:srgbClr val="DC5028"/>
+          </a:solidFill>
+          <a:ln>
+            <a:noFill/>
+          </a:ln>
+        </p:spPr>
+        <p:style>
+          <a:lnRef idx="1">
+            <a:schemeClr val="accent1"/>
+          </a:lnRef>
+          <a:fillRef idx="3">
+            <a:schemeClr val="accent1"/>
+          </a:fillRef>
+          <a:effectRef idx="2">
+            <a:schemeClr val="accent1"/>
+          </a:effectRef>
+          <a:fontRef idx="minor">
+            <a:schemeClr val="lt1"/>
+          </a:fontRef>
+        </p:style>
+        <p:txBody>
+          <a:bodyPr rtlCol="0" anchor="ctr"/>
+          <a:lstStyle/>
+          <a:p>
+            <a:pPr algn="ctr"/>
+          </a:p>
+        </p:txBody>
+      </p:sp>
+      <p:sp>
+        <p:nvSpPr>
+          <p:cNvPr id="15" name="TextBox 14"/>
           <p:cNvSpPr txBox="1"/>
           <p:nvPr/>
         </p:nvSpPr>
         <p:spPr>
           <a:xfrm>
-            <a:off x="1463040" y="2670048"/>
-            <a:ext cx="2103120" cy="502920"/>
+            <a:off x="2255824" y="2414016"/>
+            <a:ext cx="384048" cy="365760"/>
           </a:xfrm>
           <a:prstGeom prst="rect">
             <a:avLst/>
@@ -5144,33 +4964,33 @@
           </a:bodyPr>
           <a:lstStyle/>
           <a:p>
-            <a:pPr algn="r">
+            <a:pPr algn="ctr">
               <a:spcAft>
                 <a:spcPts val="1000"/>
               </a:spcAft>
             </a:pPr>
             <a:r>
-              <a:rPr sz="2200" b="1">
+              <a:rPr sz="1600" b="1">
                 <a:solidFill>
-                  <a:srgbClr val="DC5028"/>
+                  <a:srgbClr val="FFFFFF"/>
                 </a:solidFill>
                 <a:latin typeface="Microsoft YaHei"/>
               </a:rPr>
-              <a:t>二郎神</a:t>
-            </a:r>
-          </a:p>
-        </p:txBody>
-      </p:sp>
-      <p:sp>
-        <p:nvSpPr>
-          <p:cNvPr id="14" name="TextBox 13"/>
+              <a:t>2</a:t>
+            </a:r>
+          </a:p>
+        </p:txBody>
+      </p:sp>
+      <p:sp>
+        <p:nvSpPr>
+          <p:cNvPr id="16" name="TextBox 15"/>
           <p:cNvSpPr txBox="1"/>
           <p:nvPr/>
         </p:nvSpPr>
         <p:spPr>
           <a:xfrm>
-            <a:off x="3749039" y="2670048"/>
-            <a:ext cx="7132320" cy="685800"/>
+            <a:off x="2758744" y="2377440"/>
+            <a:ext cx="7772400" cy="502920"/>
           </a:xfrm>
           <a:prstGeom prst="rect">
             <a:avLst/>
@@ -5189,27 +5009,70 @@
               </a:spcAft>
             </a:pPr>
             <a:r>
-              <a:rPr sz="2200" b="0">
+              <a:rPr sz="2400" b="0">
                 <a:solidFill>
                   <a:srgbClr val="502814"/>
                 </a:solidFill>
                 <a:latin typeface="Microsoft YaHei"/>
               </a:rPr>
-              <a:t>沉着冷静、法力高强，维护天庭秩序（证据：紧追不舍、识破破绽）</a:t>
-            </a:r>
-          </a:p>
-        </p:txBody>
-      </p:sp>
-      <p:sp>
-        <p:nvSpPr>
-          <p:cNvPr id="15" name="TextBox 14"/>
+              <a:t>填写七十二变对照表（孙悟空先变—二郎神相克）</a:t>
+            </a:r>
+          </a:p>
+        </p:txBody>
+      </p:sp>
+      <p:sp>
+        <p:nvSpPr>
+          <p:cNvPr id="17" name="Oval 16"/>
+          <p:cNvSpPr/>
+          <p:nvPr/>
+        </p:nvSpPr>
+        <p:spPr>
+          <a:xfrm>
+            <a:off x="2255824" y="2962656"/>
+            <a:ext cx="384048" cy="384048"/>
+          </a:xfrm>
+          <a:prstGeom prst="ellipse">
+            <a:avLst/>
+          </a:prstGeom>
+          <a:solidFill>
+            <a:srgbClr val="DC5028"/>
+          </a:solidFill>
+          <a:ln>
+            <a:noFill/>
+          </a:ln>
+        </p:spPr>
+        <p:style>
+          <a:lnRef idx="1">
+            <a:schemeClr val="accent1"/>
+          </a:lnRef>
+          <a:fillRef idx="3">
+            <a:schemeClr val="accent1"/>
+          </a:fillRef>
+          <a:effectRef idx="2">
+            <a:schemeClr val="accent1"/>
+          </a:effectRef>
+          <a:fontRef idx="minor">
+            <a:schemeClr val="lt1"/>
+          </a:fontRef>
+        </p:style>
+        <p:txBody>
+          <a:bodyPr rtlCol="0" anchor="ctr"/>
+          <a:lstStyle/>
+          <a:p>
+            <a:pPr algn="ctr"/>
+          </a:p>
+        </p:txBody>
+      </p:sp>
+      <p:sp>
+        <p:nvSpPr>
+          <p:cNvPr id="18" name="TextBox 17"/>
           <p:cNvSpPr txBox="1"/>
           <p:nvPr/>
         </p:nvSpPr>
         <p:spPr>
           <a:xfrm>
-            <a:off x="1463040" y="3419856"/>
-            <a:ext cx="2103120" cy="502920"/>
+            <a:off x="2255824" y="2980944"/>
+            <a:ext cx="384048" cy="365760"/>
           </a:xfrm>
           <a:prstGeom prst="rect">
             <a:avLst/>
@@ -5222,33 +5085,33 @@
           </a:bodyPr>
           <a:lstStyle/>
           <a:p>
-            <a:pPr algn="r">
+            <a:pPr algn="ctr">
               <a:spcAft>
                 <a:spcPts val="1000"/>
               </a:spcAft>
             </a:pPr>
             <a:r>
-              <a:rPr sz="2200" b="1">
+              <a:rPr sz="1600" b="1">
                 <a:solidFill>
-                  <a:srgbClr val="DC5028"/>
+                  <a:srgbClr val="FFFFFF"/>
                 </a:solidFill>
                 <a:latin typeface="Microsoft YaHei"/>
               </a:rPr>
-              <a:t>分析方法</a:t>
-            </a:r>
-          </a:p>
-        </p:txBody>
-      </p:sp>
-      <p:sp>
-        <p:nvSpPr>
-          <p:cNvPr id="16" name="TextBox 15"/>
+              <a:t>3</a:t>
+            </a:r>
+          </a:p>
+        </p:txBody>
+      </p:sp>
+      <p:sp>
+        <p:nvSpPr>
+          <p:cNvPr id="19" name="TextBox 18"/>
           <p:cNvSpPr txBox="1"/>
           <p:nvPr/>
         </p:nvSpPr>
         <p:spPr>
           <a:xfrm>
-            <a:off x="3749039" y="3419856"/>
-            <a:ext cx="7132320" cy="685800"/>
+            <a:off x="2758744" y="2944368"/>
+            <a:ext cx="7772400" cy="502920"/>
           </a:xfrm>
           <a:prstGeom prst="rect">
             <a:avLst/>
@@ -5267,91 +5130,13 @@
               </a:spcAft>
             </a:pPr>
             <a:r>
-              <a:rPr sz="2200" b="0">
+              <a:rPr sz="2400" b="0">
                 <a:solidFill>
                   <a:srgbClr val="502814"/>
                 </a:solidFill>
                 <a:latin typeface="Microsoft YaHei"/>
               </a:rPr>
-              <a:t>证据—特点—作用：找细节→概括性格→联系主题</a:t>
-            </a:r>
-          </a:p>
-        </p:txBody>
-      </p:sp>
-      <p:sp>
-        <p:nvSpPr>
-          <p:cNvPr id="17" name="TextBox 16"/>
-          <p:cNvSpPr txBox="1"/>
-          <p:nvPr/>
-        </p:nvSpPr>
-        <p:spPr>
-          <a:xfrm>
-            <a:off x="1463040" y="4169664"/>
-            <a:ext cx="2103120" cy="502920"/>
-          </a:xfrm>
-          <a:prstGeom prst="rect">
-            <a:avLst/>
-          </a:prstGeom>
-          <a:noFill/>
-        </p:spPr>
-        <p:txBody>
-          <a:bodyPr wrap="none">
-            <a:spAutoFit/>
-          </a:bodyPr>
-          <a:lstStyle/>
-          <a:p>
-            <a:pPr algn="r">
-              <a:spcAft>
-                <a:spcPts val="1000"/>
-              </a:spcAft>
-            </a:pPr>
-            <a:r>
-              <a:rPr sz="2200" b="1">
-                <a:solidFill>
-                  <a:srgbClr val="DC5028"/>
-                </a:solidFill>
-                <a:latin typeface="Microsoft YaHei"/>
-              </a:rPr>
-              <a:t>变旗竿</a:t>
-            </a:r>
-          </a:p>
-        </p:txBody>
-      </p:sp>
-      <p:sp>
-        <p:nvSpPr>
-          <p:cNvPr id="18" name="TextBox 17"/>
-          <p:cNvSpPr txBox="1"/>
-          <p:nvPr/>
-        </p:nvSpPr>
-        <p:spPr>
-          <a:xfrm>
-            <a:off x="3749039" y="4169664"/>
-            <a:ext cx="7132320" cy="685800"/>
-          </a:xfrm>
-          <a:prstGeom prst="rect">
-            <a:avLst/>
-          </a:prstGeom>
-          <a:noFill/>
-        </p:spPr>
-        <p:txBody>
-          <a:bodyPr wrap="none">
-            <a:spAutoFit/>
-          </a:bodyPr>
-          <a:lstStyle/>
-          <a:p>
-            <a:pPr algn="l">
-              <a:spcAft>
-                <a:spcPts val="1000"/>
-              </a:spcAft>
-            </a:pPr>
-            <a:r>
-              <a:rPr sz="2200" b="0">
-                <a:solidFill>
-                  <a:srgbClr val="502814"/>
-                </a:solidFill>
-                <a:latin typeface="Microsoft YaHei"/>
-              </a:rPr>
-              <a:t>紧张又好笑——神通广大也有露馅之时</a:t>
+              <a:t>用「孙悟空先……，二郎神便……」复述最精彩一轮</a:t>
             </a:r>
           </a:p>
         </p:txBody>
@@ -5566,7 +5351,7 @@
                 </a:solidFill>
                 <a:latin typeface="Microsoft YaHei"/>
               </a:rPr>
-              <a:t>主题笔记</a:t>
+              <a:t>加解说词</a:t>
             </a:r>
           </a:p>
         </p:txBody>
@@ -5579,7 +5364,7 @@
         </p:nvSpPr>
         <p:spPr>
           <a:xfrm>
-            <a:off x="1371600" y="1051560"/>
+            <a:off x="1371600" y="960120"/>
             <a:ext cx="9418320" cy="822960"/>
           </a:xfrm>
           <a:prstGeom prst="rect">
@@ -5605,7 +5390,7 @@
                 </a:solidFill>
                 <a:latin typeface="Microsoft YaHei"/>
               </a:rPr>
-              <a:t>名家点评</a:t>
+              <a:t>学习任务二</a:t>
             </a:r>
           </a:p>
         </p:txBody>
@@ -5618,7 +5403,7 @@
         </p:nvSpPr>
         <p:spPr>
           <a:xfrm>
-            <a:off x="3200400" y="1691640"/>
+            <a:off x="3200400" y="1600200"/>
             <a:ext cx="5760720" cy="27432"/>
           </a:xfrm>
           <a:prstGeom prst="rect">
@@ -5661,8 +5446,8 @@
         </p:nvSpPr>
         <p:spPr>
           <a:xfrm>
-            <a:off x="1249984" y="1810512"/>
-            <a:ext cx="9692640" cy="3319272"/>
+            <a:off x="1295704" y="1645920"/>
+            <a:ext cx="9601200" cy="2240280"/>
           </a:xfrm>
           <a:prstGeom prst="roundRect">
             <a:avLst/>
@@ -5700,14 +5485,57 @@
       </p:sp>
       <p:sp>
         <p:nvSpPr>
-          <p:cNvPr id="11" name="TextBox 10"/>
+          <p:cNvPr id="11" name="Oval 10"/>
+          <p:cNvSpPr/>
+          <p:nvPr/>
+        </p:nvSpPr>
+        <p:spPr>
+          <a:xfrm>
+            <a:off x="2255824" y="1828800"/>
+            <a:ext cx="384048" cy="384048"/>
+          </a:xfrm>
+          <a:prstGeom prst="ellipse">
+            <a:avLst/>
+          </a:prstGeom>
+          <a:solidFill>
+            <a:srgbClr val="DC5028"/>
+          </a:solidFill>
+          <a:ln>
+            <a:noFill/>
+          </a:ln>
+        </p:spPr>
+        <p:style>
+          <a:lnRef idx="1">
+            <a:schemeClr val="accent1"/>
+          </a:lnRef>
+          <a:fillRef idx="3">
+            <a:schemeClr val="accent1"/>
+          </a:fillRef>
+          <a:effectRef idx="2">
+            <a:schemeClr val="accent1"/>
+          </a:effectRef>
+          <a:fontRef idx="minor">
+            <a:schemeClr val="lt1"/>
+          </a:fontRef>
+        </p:style>
+        <p:txBody>
+          <a:bodyPr rtlCol="0" anchor="ctr"/>
+          <a:lstStyle/>
+          <a:p>
+            <a:pPr algn="ctr"/>
+          </a:p>
+        </p:txBody>
+      </p:sp>
+      <p:sp>
+        <p:nvSpPr>
+          <p:cNvPr id="12" name="TextBox 11"/>
           <p:cNvSpPr txBox="1"/>
           <p:nvPr/>
         </p:nvSpPr>
         <p:spPr>
           <a:xfrm>
-            <a:off x="1463040" y="1920240"/>
-            <a:ext cx="2103120" cy="502920"/>
+            <a:off x="2255824" y="1847088"/>
+            <a:ext cx="384048" cy="365760"/>
           </a:xfrm>
           <a:prstGeom prst="rect">
             <a:avLst/>
@@ -5720,33 +5548,33 @@
           </a:bodyPr>
           <a:lstStyle/>
           <a:p>
-            <a:pPr algn="r">
+            <a:pPr algn="ctr">
               <a:spcAft>
                 <a:spcPts val="1000"/>
               </a:spcAft>
             </a:pPr>
             <a:r>
-              <a:rPr sz="2200" b="1">
+              <a:rPr sz="1600" b="1">
                 <a:solidFill>
-                  <a:srgbClr val="DC5028"/>
+                  <a:srgbClr val="FFFFFF"/>
                 </a:solidFill>
                 <a:latin typeface="Microsoft YaHei"/>
               </a:rPr>
-              <a:t>鲁迅</a:t>
-            </a:r>
-          </a:p>
-        </p:txBody>
-      </p:sp>
-      <p:sp>
-        <p:nvSpPr>
-          <p:cNvPr id="12" name="TextBox 11"/>
+              <a:t>1</a:t>
+            </a:r>
+          </a:p>
+        </p:txBody>
+      </p:sp>
+      <p:sp>
+        <p:nvSpPr>
+          <p:cNvPr id="13" name="TextBox 12"/>
           <p:cNvSpPr txBox="1"/>
           <p:nvPr/>
         </p:nvSpPr>
         <p:spPr>
           <a:xfrm>
-            <a:off x="3749039" y="1920240"/>
-            <a:ext cx="7132320" cy="685800"/>
+            <a:off x="2758744" y="1810512"/>
+            <a:ext cx="7772400" cy="502920"/>
           </a:xfrm>
           <a:prstGeom prst="rect">
             <a:avLst/>
@@ -5765,27 +5593,70 @@
               </a:spcAft>
             </a:pPr>
             <a:r>
-              <a:rPr sz="2200" b="0">
+              <a:rPr sz="2400" b="0">
                 <a:solidFill>
                   <a:srgbClr val="502814"/>
                 </a:solidFill>
                 <a:latin typeface="Microsoft YaHei"/>
               </a:rPr>
-              <a:t>「使神魔皆有人情，精魅亦通世故」——神魔也有人的情感</a:t>
-            </a:r>
-          </a:p>
-        </p:txBody>
-      </p:sp>
-      <p:sp>
-        <p:nvSpPr>
-          <p:cNvPr id="13" name="TextBox 12"/>
+              <a:t>变庙宇：尾巴为何变旗竿？写一句批注</a:t>
+            </a:r>
+          </a:p>
+        </p:txBody>
+      </p:sp>
+      <p:sp>
+        <p:nvSpPr>
+          <p:cNvPr id="14" name="Oval 13"/>
+          <p:cNvSpPr/>
+          <p:nvPr/>
+        </p:nvSpPr>
+        <p:spPr>
+          <a:xfrm>
+            <a:off x="2255824" y="2395728"/>
+            <a:ext cx="384048" cy="384048"/>
+          </a:xfrm>
+          <a:prstGeom prst="ellipse">
+            <a:avLst/>
+          </a:prstGeom>
+          <a:solidFill>
+            <a:srgbClr val="DC5028"/>
+          </a:solidFill>
+          <a:ln>
+            <a:noFill/>
+          </a:ln>
+        </p:spPr>
+        <p:style>
+          <a:lnRef idx="1">
+            <a:schemeClr val="accent1"/>
+          </a:lnRef>
+          <a:fillRef idx="3">
+            <a:schemeClr val="accent1"/>
+          </a:fillRef>
+          <a:effectRef idx="2">
+            <a:schemeClr val="accent1"/>
+          </a:effectRef>
+          <a:fontRef idx="minor">
+            <a:schemeClr val="lt1"/>
+          </a:fontRef>
+        </p:style>
+        <p:txBody>
+          <a:bodyPr rtlCol="0" anchor="ctr"/>
+          <a:lstStyle/>
+          <a:p>
+            <a:pPr algn="ctr"/>
+          </a:p>
+        </p:txBody>
+      </p:sp>
+      <p:sp>
+        <p:nvSpPr>
+          <p:cNvPr id="15" name="TextBox 14"/>
           <p:cNvSpPr txBox="1"/>
           <p:nvPr/>
         </p:nvSpPr>
         <p:spPr>
           <a:xfrm>
-            <a:off x="1463040" y="2670048"/>
-            <a:ext cx="2103120" cy="502920"/>
+            <a:off x="2255824" y="2414016"/>
+            <a:ext cx="384048" cy="365760"/>
           </a:xfrm>
           <a:prstGeom prst="rect">
             <a:avLst/>
@@ -5798,33 +5669,33 @@
           </a:bodyPr>
           <a:lstStyle/>
           <a:p>
-            <a:pPr algn="r">
+            <a:pPr algn="ctr">
               <a:spcAft>
                 <a:spcPts val="1000"/>
               </a:spcAft>
             </a:pPr>
             <a:r>
-              <a:rPr sz="2200" b="1">
+              <a:rPr sz="1600" b="1">
                 <a:solidFill>
-                  <a:srgbClr val="DC5028"/>
+                  <a:srgbClr val="FFFFFF"/>
                 </a:solidFill>
                 <a:latin typeface="Microsoft YaHei"/>
               </a:rPr>
-              <a:t>林庚</a:t>
-            </a:r>
-          </a:p>
-        </p:txBody>
-      </p:sp>
-      <p:sp>
-        <p:nvSpPr>
-          <p:cNvPr id="14" name="TextBox 13"/>
+              <a:t>2</a:t>
+            </a:r>
+          </a:p>
+        </p:txBody>
+      </p:sp>
+      <p:sp>
+        <p:nvSpPr>
+          <p:cNvPr id="16" name="TextBox 15"/>
           <p:cNvSpPr txBox="1"/>
           <p:nvPr/>
         </p:nvSpPr>
         <p:spPr>
           <a:xfrm>
-            <a:off x="3749039" y="2670048"/>
-            <a:ext cx="7132320" cy="685800"/>
+            <a:off x="2758744" y="2377440"/>
+            <a:ext cx="7772400" cy="502920"/>
           </a:xfrm>
           <a:prstGeom prst="rect">
             <a:avLst/>
@@ -5843,27 +5714,70 @@
               </a:spcAft>
             </a:pPr>
             <a:r>
-              <a:rPr sz="2200" b="0">
+              <a:rPr sz="2400" b="0">
                 <a:solidFill>
                   <a:srgbClr val="502814"/>
                 </a:solidFill>
                 <a:latin typeface="Microsoft YaHei"/>
               </a:rPr>
-              <a:t>不宜看得过于认真，应看到儿童的心理与行为</a:t>
-            </a:r>
-          </a:p>
-        </p:txBody>
-      </p:sp>
-      <p:sp>
-        <p:nvSpPr>
-          <p:cNvPr id="15" name="TextBox 14"/>
+              <a:t>完成人物档案卡（证据—特点—作用）</a:t>
+            </a:r>
+          </a:p>
+        </p:txBody>
+      </p:sp>
+      <p:sp>
+        <p:nvSpPr>
+          <p:cNvPr id="17" name="Oval 16"/>
+          <p:cNvSpPr/>
+          <p:nvPr/>
+        </p:nvSpPr>
+        <p:spPr>
+          <a:xfrm>
+            <a:off x="2255824" y="2962656"/>
+            <a:ext cx="384048" cy="384048"/>
+          </a:xfrm>
+          <a:prstGeom prst="ellipse">
+            <a:avLst/>
+          </a:prstGeom>
+          <a:solidFill>
+            <a:srgbClr val="DC5028"/>
+          </a:solidFill>
+          <a:ln>
+            <a:noFill/>
+          </a:ln>
+        </p:spPr>
+        <p:style>
+          <a:lnRef idx="1">
+            <a:schemeClr val="accent1"/>
+          </a:lnRef>
+          <a:fillRef idx="3">
+            <a:schemeClr val="accent1"/>
+          </a:fillRef>
+          <a:effectRef idx="2">
+            <a:schemeClr val="accent1"/>
+          </a:effectRef>
+          <a:fontRef idx="minor">
+            <a:schemeClr val="lt1"/>
+          </a:fontRef>
+        </p:style>
+        <p:txBody>
+          <a:bodyPr rtlCol="0" anchor="ctr"/>
+          <a:lstStyle/>
+          <a:p>
+            <a:pPr algn="ctr"/>
+          </a:p>
+        </p:txBody>
+      </p:sp>
+      <p:sp>
+        <p:nvSpPr>
+          <p:cNvPr id="18" name="TextBox 17"/>
           <p:cNvSpPr txBox="1"/>
           <p:nvPr/>
         </p:nvSpPr>
         <p:spPr>
           <a:xfrm>
-            <a:off x="1463040" y="3419856"/>
-            <a:ext cx="2103120" cy="502920"/>
+            <a:off x="2255824" y="2980944"/>
+            <a:ext cx="384048" cy="365760"/>
           </a:xfrm>
           <a:prstGeom prst="rect">
             <a:avLst/>
@@ -5876,33 +5790,33 @@
           </a:bodyPr>
           <a:lstStyle/>
           <a:p>
-            <a:pPr algn="r">
+            <a:pPr algn="ctr">
               <a:spcAft>
                 <a:spcPts val="1000"/>
               </a:spcAft>
             </a:pPr>
             <a:r>
-              <a:rPr sz="2200" b="1">
+              <a:rPr sz="1600" b="1">
                 <a:solidFill>
-                  <a:srgbClr val="DC5028"/>
+                  <a:srgbClr val="FFFFFF"/>
                 </a:solidFill>
                 <a:latin typeface="Microsoft YaHei"/>
               </a:rPr>
-              <a:t>艺术特色</a:t>
-            </a:r>
-          </a:p>
-        </p:txBody>
-      </p:sp>
-      <p:sp>
-        <p:nvSpPr>
-          <p:cNvPr id="16" name="TextBox 15"/>
+              <a:t>3</a:t>
+            </a:r>
+          </a:p>
+        </p:txBody>
+      </p:sp>
+      <p:sp>
+        <p:nvSpPr>
+          <p:cNvPr id="19" name="TextBox 18"/>
           <p:cNvSpPr txBox="1"/>
           <p:nvPr/>
         </p:nvSpPr>
         <p:spPr>
           <a:xfrm>
-            <a:off x="3749039" y="3419856"/>
-            <a:ext cx="7132320" cy="685800"/>
+            <a:off x="2758744" y="2944368"/>
+            <a:ext cx="7772400" cy="502920"/>
           </a:xfrm>
           <a:prstGeom prst="rect">
             <a:avLst/>
@@ -5921,91 +5835,13 @@
               </a:spcAft>
             </a:pPr>
             <a:r>
-              <a:rPr sz="2200" b="0">
+              <a:rPr sz="2400" b="0">
                 <a:solidFill>
                   <a:srgbClr val="502814"/>
                 </a:solidFill>
                 <a:latin typeface="Microsoft YaHei"/>
               </a:rPr>
-              <a:t>想象基于「相克」逻辑，变化链环环相扣</a:t>
-            </a:r>
-          </a:p>
-        </p:txBody>
-      </p:sp>
-      <p:sp>
-        <p:nvSpPr>
-          <p:cNvPr id="17" name="TextBox 16"/>
-          <p:cNvSpPr txBox="1"/>
-          <p:nvPr/>
-        </p:nvSpPr>
-        <p:spPr>
-          <a:xfrm>
-            <a:off x="1463040" y="4169664"/>
-            <a:ext cx="2103120" cy="502920"/>
-          </a:xfrm>
-          <a:prstGeom prst="rect">
-            <a:avLst/>
-          </a:prstGeom>
-          <a:noFill/>
-        </p:spPr>
-        <p:txBody>
-          <a:bodyPr wrap="none">
-            <a:spAutoFit/>
-          </a:bodyPr>
-          <a:lstStyle/>
-          <a:p>
-            <a:pPr algn="r">
-              <a:spcAft>
-                <a:spcPts val="1000"/>
-              </a:spcAft>
-            </a:pPr>
-            <a:r>
-              <a:rPr sz="2200" b="1">
-                <a:solidFill>
-                  <a:srgbClr val="DC5028"/>
-                </a:solidFill>
-                <a:latin typeface="Microsoft YaHei"/>
-              </a:rPr>
-              <a:t>策展主题</a:t>
-            </a:r>
-          </a:p>
-        </p:txBody>
-      </p:sp>
-      <p:sp>
-        <p:nvSpPr>
-          <p:cNvPr id="18" name="TextBox 17"/>
-          <p:cNvSpPr txBox="1"/>
-          <p:nvPr/>
-        </p:nvSpPr>
-        <p:spPr>
-          <a:xfrm>
-            <a:off x="3749039" y="4169664"/>
-            <a:ext cx="7132320" cy="685800"/>
-          </a:xfrm>
-          <a:prstGeom prst="rect">
-            <a:avLst/>
-          </a:prstGeom>
-          <a:noFill/>
-        </p:spPr>
-        <p:txBody>
-          <a:bodyPr wrap="none">
-            <a:spAutoFit/>
-          </a:bodyPr>
-          <a:lstStyle/>
-          <a:p>
-            <a:pPr algn="l">
-              <a:spcAft>
-                <a:spcPts val="1000"/>
-              </a:spcAft>
-            </a:pPr>
-            <a:r>
-              <a:rPr sz="2200" b="0">
-                <a:solidFill>
-                  <a:srgbClr val="502814"/>
-                </a:solidFill>
-                <a:latin typeface="Microsoft YaHei"/>
-              </a:rPr>
-              <a:t>自由可贵，但不可无视规则（自由与规则）</a:t>
+              <a:t>批注鲁迅、林庚的评论，找「人情」与「世故」</a:t>
             </a:r>
           </a:p>
         </p:txBody>
@@ -6151,7 +5987,7 @@
         </p:nvSpPr>
         <p:spPr>
           <a:xfrm>
-            <a:off x="4953304" y="502920"/>
+            <a:off x="4953304" y="1005840"/>
             <a:ext cx="2286000" cy="411480"/>
           </a:xfrm>
           <a:prstGeom prst="roundRect">
@@ -6194,7 +6030,7 @@
         </p:nvSpPr>
         <p:spPr>
           <a:xfrm>
-            <a:off x="4953304" y="521208"/>
+            <a:off x="4953304" y="1024128"/>
             <a:ext cx="2286000" cy="384048"/>
           </a:xfrm>
           <a:prstGeom prst="rect">
@@ -6220,7 +6056,7 @@
                 </a:solidFill>
                 <a:latin typeface="Microsoft YaHei"/>
               </a:rPr>
-              <a:t>课堂活动</a:t>
+              <a:t>想一想</a:t>
             </a:r>
           </a:p>
         </p:txBody>
@@ -6233,7 +6069,7 @@
         </p:nvSpPr>
         <p:spPr>
           <a:xfrm>
-            <a:off x="1371600" y="1051560"/>
+            <a:off x="1371600" y="1600200"/>
             <a:ext cx="9418320" cy="822960"/>
           </a:xfrm>
           <a:prstGeom prst="rect">
@@ -6253,13 +6089,14 @@
               </a:spcAft>
             </a:pPr>
             <a:r>
-              <a:rPr sz="3600" b="1">
+              <a:rPr sz="3200" b="1">
                 <a:solidFill>
                   <a:srgbClr val="DC5028"/>
                 </a:solidFill>
                 <a:latin typeface="Microsoft YaHei"/>
               </a:rPr>
-              <a:t>学习任务</a:t>
+              <a:t>「使神魔皆有人情，精魅亦通世故」
+课文哪里体现了人情与世故？</a:t>
             </a:r>
           </a:p>
         </p:txBody>
@@ -6272,7 +6109,7 @@
         </p:nvSpPr>
         <p:spPr>
           <a:xfrm>
-            <a:off x="3200400" y="1691640"/>
+            <a:off x="3200400" y="4389120"/>
             <a:ext cx="5760720" cy="27432"/>
           </a:xfrm>
           <a:prstGeom prst="rect">
@@ -6309,102 +6146,14 @@
       </p:sp>
       <p:sp>
         <p:nvSpPr>
-          <p:cNvPr id="10" name="Rounded Rectangle 9"/>
-          <p:cNvSpPr/>
-          <p:nvPr/>
-        </p:nvSpPr>
-        <p:spPr>
-          <a:xfrm>
-            <a:off x="1295704" y="1737360"/>
-            <a:ext cx="9601200" cy="2112264"/>
-          </a:xfrm>
-          <a:prstGeom prst="roundRect">
-            <a:avLst/>
-          </a:prstGeom>
-          <a:solidFill>
-            <a:srgbClr val="FFF8F0"/>
-          </a:solidFill>
-          <a:ln w="19050">
-            <a:solidFill>
-              <a:srgbClr val="FFB464"/>
-            </a:solidFill>
-          </a:ln>
-        </p:spPr>
-        <p:style>
-          <a:lnRef idx="1">
-            <a:schemeClr val="accent1"/>
-          </a:lnRef>
-          <a:fillRef idx="3">
-            <a:schemeClr val="accent1"/>
-          </a:fillRef>
-          <a:effectRef idx="2">
-            <a:schemeClr val="accent1"/>
-          </a:effectRef>
-          <a:fontRef idx="minor">
-            <a:schemeClr val="lt1"/>
-          </a:fontRef>
-        </p:style>
-        <p:txBody>
-          <a:bodyPr rtlCol="0" anchor="ctr"/>
-          <a:lstStyle/>
-          <a:p>
-            <a:pPr algn="ctr"/>
-          </a:p>
-        </p:txBody>
-      </p:sp>
-      <p:sp>
-        <p:nvSpPr>
-          <p:cNvPr id="11" name="Oval 10"/>
-          <p:cNvSpPr/>
-          <p:nvPr/>
-        </p:nvSpPr>
-        <p:spPr>
-          <a:xfrm>
-            <a:off x="2621584" y="1920240"/>
-            <a:ext cx="347472" cy="347472"/>
-          </a:xfrm>
-          <a:prstGeom prst="ellipse">
-            <a:avLst/>
-          </a:prstGeom>
-          <a:solidFill>
-            <a:srgbClr val="DC5028"/>
-          </a:solidFill>
-          <a:ln>
-            <a:noFill/>
-          </a:ln>
-        </p:spPr>
-        <p:style>
-          <a:lnRef idx="1">
-            <a:schemeClr val="accent1"/>
-          </a:lnRef>
-          <a:fillRef idx="3">
-            <a:schemeClr val="accent1"/>
-          </a:fillRef>
-          <a:effectRef idx="2">
-            <a:schemeClr val="accent1"/>
-          </a:effectRef>
-          <a:fontRef idx="minor">
-            <a:schemeClr val="lt1"/>
-          </a:fontRef>
-        </p:style>
-        <p:txBody>
-          <a:bodyPr rtlCol="0" anchor="ctr"/>
-          <a:lstStyle/>
-          <a:p>
-            <a:pPr algn="ctr"/>
-          </a:p>
-        </p:txBody>
-      </p:sp>
-      <p:sp>
-        <p:nvSpPr>
-          <p:cNvPr id="12" name="TextBox 11"/>
+          <p:cNvPr id="10" name="TextBox 9"/>
           <p:cNvSpPr txBox="1"/>
           <p:nvPr/>
         </p:nvSpPr>
         <p:spPr>
           <a:xfrm>
-            <a:off x="2621584" y="1938528"/>
-            <a:ext cx="347472" cy="329184"/>
+            <a:off x="1828800" y="4663440"/>
+            <a:ext cx="8503920" cy="914400"/>
           </a:xfrm>
           <a:prstGeom prst="rect">
             <a:avLst/>
@@ -6423,294 +6172,13 @@
               </a:spcAft>
             </a:pPr>
             <a:r>
-              <a:rPr sz="1400" b="1">
+              <a:rPr sz="2200" b="0">
                 <a:solidFill>
-                  <a:srgbClr val="FFFFFF"/>
+                  <a:srgbClr val="DC5028"/>
                 </a:solidFill>
                 <a:latin typeface="Microsoft YaHei"/>
               </a:rPr>
-              <a:t>1</a:t>
-            </a:r>
-          </a:p>
-        </p:txBody>
-      </p:sp>
-      <p:sp>
-        <p:nvSpPr>
-          <p:cNvPr id="13" name="TextBox 12"/>
-          <p:cNvSpPr txBox="1"/>
-          <p:nvPr/>
-        </p:nvSpPr>
-        <p:spPr>
-          <a:xfrm>
-            <a:off x="3078784" y="1901952"/>
-            <a:ext cx="7863840" cy="457200"/>
-          </a:xfrm>
-          <a:prstGeom prst="rect">
-            <a:avLst/>
-          </a:prstGeom>
-          <a:noFill/>
-        </p:spPr>
-        <p:txBody>
-          <a:bodyPr wrap="none">
-            <a:spAutoFit/>
-          </a:bodyPr>
-          <a:lstStyle/>
-          <a:p>
-            <a:pPr algn="l">
-              <a:spcAft>
-                <a:spcPts val="1000"/>
-              </a:spcAft>
-            </a:pPr>
-            <a:r>
-              <a:rPr sz="2400" b="0">
-                <a:solidFill>
-                  <a:srgbClr val="502814"/>
-                </a:solidFill>
-                <a:latin typeface="Microsoft YaHei"/>
-              </a:rPr>
-              <a:t>填写七十二变对照表，标出相克关系</a:t>
-            </a:r>
-          </a:p>
-        </p:txBody>
-      </p:sp>
-      <p:sp>
-        <p:nvSpPr>
-          <p:cNvPr id="14" name="Oval 13"/>
-          <p:cNvSpPr/>
-          <p:nvPr/>
-        </p:nvSpPr>
-        <p:spPr>
-          <a:xfrm>
-            <a:off x="2621584" y="2487168"/>
-            <a:ext cx="347472" cy="347472"/>
-          </a:xfrm>
-          <a:prstGeom prst="ellipse">
-            <a:avLst/>
-          </a:prstGeom>
-          <a:solidFill>
-            <a:srgbClr val="DC5028"/>
-          </a:solidFill>
-          <a:ln>
-            <a:noFill/>
-          </a:ln>
-        </p:spPr>
-        <p:style>
-          <a:lnRef idx="1">
-            <a:schemeClr val="accent1"/>
-          </a:lnRef>
-          <a:fillRef idx="3">
-            <a:schemeClr val="accent1"/>
-          </a:fillRef>
-          <a:effectRef idx="2">
-            <a:schemeClr val="accent1"/>
-          </a:effectRef>
-          <a:fontRef idx="minor">
-            <a:schemeClr val="lt1"/>
-          </a:fontRef>
-        </p:style>
-        <p:txBody>
-          <a:bodyPr rtlCol="0" anchor="ctr"/>
-          <a:lstStyle/>
-          <a:p>
-            <a:pPr algn="ctr"/>
-          </a:p>
-        </p:txBody>
-      </p:sp>
-      <p:sp>
-        <p:nvSpPr>
-          <p:cNvPr id="15" name="TextBox 14"/>
-          <p:cNvSpPr txBox="1"/>
-          <p:nvPr/>
-        </p:nvSpPr>
-        <p:spPr>
-          <a:xfrm>
-            <a:off x="2621584" y="2505456"/>
-            <a:ext cx="347472" cy="329184"/>
-          </a:xfrm>
-          <a:prstGeom prst="rect">
-            <a:avLst/>
-          </a:prstGeom>
-          <a:noFill/>
-        </p:spPr>
-        <p:txBody>
-          <a:bodyPr wrap="none">
-            <a:spAutoFit/>
-          </a:bodyPr>
-          <a:lstStyle/>
-          <a:p>
-            <a:pPr algn="ctr">
-              <a:spcAft>
-                <a:spcPts val="1000"/>
-              </a:spcAft>
-            </a:pPr>
-            <a:r>
-              <a:rPr sz="1400" b="1">
-                <a:solidFill>
-                  <a:srgbClr val="FFFFFF"/>
-                </a:solidFill>
-                <a:latin typeface="Microsoft YaHei"/>
-              </a:rPr>
-              <a:t>2</a:t>
-            </a:r>
-          </a:p>
-        </p:txBody>
-      </p:sp>
-      <p:sp>
-        <p:nvSpPr>
-          <p:cNvPr id="16" name="TextBox 15"/>
-          <p:cNvSpPr txBox="1"/>
-          <p:nvPr/>
-        </p:nvSpPr>
-        <p:spPr>
-          <a:xfrm>
-            <a:off x="3078784" y="2468880"/>
-            <a:ext cx="7863840" cy="457200"/>
-          </a:xfrm>
-          <a:prstGeom prst="rect">
-            <a:avLst/>
-          </a:prstGeom>
-          <a:noFill/>
-        </p:spPr>
-        <p:txBody>
-          <a:bodyPr wrap="none">
-            <a:spAutoFit/>
-          </a:bodyPr>
-          <a:lstStyle/>
-          <a:p>
-            <a:pPr algn="l">
-              <a:spcAft>
-                <a:spcPts val="1000"/>
-              </a:spcAft>
-            </a:pPr>
-            <a:r>
-              <a:rPr sz="2400" b="0">
-                <a:solidFill>
-                  <a:srgbClr val="502814"/>
-                </a:solidFill>
-                <a:latin typeface="Microsoft YaHei"/>
-              </a:rPr>
-              <a:t>完成人物档案卡（证据—特点—作用）</a:t>
-            </a:r>
-          </a:p>
-        </p:txBody>
-      </p:sp>
-      <p:sp>
-        <p:nvSpPr>
-          <p:cNvPr id="17" name="Oval 16"/>
-          <p:cNvSpPr/>
-          <p:nvPr/>
-        </p:nvSpPr>
-        <p:spPr>
-          <a:xfrm>
-            <a:off x="2621584" y="3054096"/>
-            <a:ext cx="347472" cy="347472"/>
-          </a:xfrm>
-          <a:prstGeom prst="ellipse">
-            <a:avLst/>
-          </a:prstGeom>
-          <a:solidFill>
-            <a:srgbClr val="DC5028"/>
-          </a:solidFill>
-          <a:ln>
-            <a:noFill/>
-          </a:ln>
-        </p:spPr>
-        <p:style>
-          <a:lnRef idx="1">
-            <a:schemeClr val="accent1"/>
-          </a:lnRef>
-          <a:fillRef idx="3">
-            <a:schemeClr val="accent1"/>
-          </a:fillRef>
-          <a:effectRef idx="2">
-            <a:schemeClr val="accent1"/>
-          </a:effectRef>
-          <a:fontRef idx="minor">
-            <a:schemeClr val="lt1"/>
-          </a:fontRef>
-        </p:style>
-        <p:txBody>
-          <a:bodyPr rtlCol="0" anchor="ctr"/>
-          <a:lstStyle/>
-          <a:p>
-            <a:pPr algn="ctr"/>
-          </a:p>
-        </p:txBody>
-      </p:sp>
-      <p:sp>
-        <p:nvSpPr>
-          <p:cNvPr id="18" name="TextBox 17"/>
-          <p:cNvSpPr txBox="1"/>
-          <p:nvPr/>
-        </p:nvSpPr>
-        <p:spPr>
-          <a:xfrm>
-            <a:off x="2621584" y="3072384"/>
-            <a:ext cx="347472" cy="329184"/>
-          </a:xfrm>
-          <a:prstGeom prst="rect">
-            <a:avLst/>
-          </a:prstGeom>
-          <a:noFill/>
-        </p:spPr>
-        <p:txBody>
-          <a:bodyPr wrap="none">
-            <a:spAutoFit/>
-          </a:bodyPr>
-          <a:lstStyle/>
-          <a:p>
-            <a:pPr algn="ctr">
-              <a:spcAft>
-                <a:spcPts val="1000"/>
-              </a:spcAft>
-            </a:pPr>
-            <a:r>
-              <a:rPr sz="1400" b="1">
-                <a:solidFill>
-                  <a:srgbClr val="FFFFFF"/>
-                </a:solidFill>
-                <a:latin typeface="Microsoft YaHei"/>
-              </a:rPr>
-              <a:t>3</a:t>
-            </a:r>
-          </a:p>
-        </p:txBody>
-      </p:sp>
-      <p:sp>
-        <p:nvSpPr>
-          <p:cNvPr id="19" name="TextBox 18"/>
-          <p:cNvSpPr txBox="1"/>
-          <p:nvPr/>
-        </p:nvSpPr>
-        <p:spPr>
-          <a:xfrm>
-            <a:off x="3078784" y="3035808"/>
-            <a:ext cx="7863840" cy="457200"/>
-          </a:xfrm>
-          <a:prstGeom prst="rect">
-            <a:avLst/>
-          </a:prstGeom>
-          <a:noFill/>
-        </p:spPr>
-        <p:txBody>
-          <a:bodyPr wrap="none">
-            <a:spAutoFit/>
-          </a:bodyPr>
-          <a:lstStyle/>
-          <a:p>
-            <a:pPr algn="l">
-              <a:spcAft>
-                <a:spcPts val="1000"/>
-              </a:spcAft>
-            </a:pPr>
-            <a:r>
-              <a:rPr sz="2400" b="0">
-                <a:solidFill>
-                  <a:srgbClr val="502814"/>
-                </a:solidFill>
-                <a:latin typeface="Microsoft YaHei"/>
-              </a:rPr>
-              <a:t>用「孙悟空先……，二郎神便……」复述最精彩一轮</a:t>
+              <a:t>林庚：不宜看得过于认真，应看到儿童心理</a:t>
             </a:r>
           </a:p>
         </p:txBody>
@@ -6925,7 +6393,7 @@
                 </a:solidFill>
                 <a:latin typeface="Microsoft YaHei"/>
               </a:rPr>
-              <a:t>回顾收获</a:t>
+              <a:t>主题探究</a:t>
             </a:r>
           </a:p>
         </p:txBody>
@@ -6938,7 +6406,7 @@
         </p:nvSpPr>
         <p:spPr>
           <a:xfrm>
-            <a:off x="1371600" y="1051560"/>
+            <a:off x="1371600" y="960120"/>
             <a:ext cx="9418320" cy="822960"/>
           </a:xfrm>
           <a:prstGeom prst="rect">
@@ -6964,7 +6432,7 @@
                 </a:solidFill>
                 <a:latin typeface="Microsoft YaHei"/>
               </a:rPr>
-              <a:t>课堂小结</a:t>
+              <a:t>学习任务三</a:t>
             </a:r>
           </a:p>
         </p:txBody>
@@ -6977,7 +6445,7 @@
         </p:nvSpPr>
         <p:spPr>
           <a:xfrm>
-            <a:off x="3200400" y="1691640"/>
+            <a:off x="3200400" y="1600200"/>
             <a:ext cx="5760720" cy="27432"/>
           </a:xfrm>
           <a:prstGeom prst="rect">
@@ -7020,8 +6488,8 @@
         </p:nvSpPr>
         <p:spPr>
           <a:xfrm>
-            <a:off x="1295704" y="1737360"/>
-            <a:ext cx="9601200" cy="1837944"/>
+            <a:off x="1295704" y="1645920"/>
+            <a:ext cx="9601200" cy="2240280"/>
           </a:xfrm>
           <a:prstGeom prst="roundRect">
             <a:avLst/>
@@ -7065,8 +6533,8 @@
         </p:nvSpPr>
         <p:spPr>
           <a:xfrm>
-            <a:off x="2621584" y="1920240"/>
-            <a:ext cx="347472" cy="347472"/>
+            <a:off x="2255824" y="1828800"/>
+            <a:ext cx="384048" cy="384048"/>
           </a:xfrm>
           <a:prstGeom prst="ellipse">
             <a:avLst/>
@@ -7108,8 +6576,8 @@
         </p:nvSpPr>
         <p:spPr>
           <a:xfrm>
-            <a:off x="2621584" y="1938528"/>
-            <a:ext cx="347472" cy="329184"/>
+            <a:off x="2255824" y="1847088"/>
+            <a:ext cx="384048" cy="365760"/>
           </a:xfrm>
           <a:prstGeom prst="rect">
             <a:avLst/>
@@ -7128,7 +6596,7 @@
               </a:spcAft>
             </a:pPr>
             <a:r>
-              <a:rPr sz="1400" b="1">
+              <a:rPr sz="1600" b="1">
                 <a:solidFill>
                   <a:srgbClr val="FFFFFF"/>
                 </a:solidFill>
@@ -7147,8 +6615,8 @@
         </p:nvSpPr>
         <p:spPr>
           <a:xfrm>
-            <a:off x="3078784" y="1901952"/>
-            <a:ext cx="7863840" cy="457200"/>
+            <a:off x="2758744" y="1810512"/>
+            <a:ext cx="7772400" cy="502920"/>
           </a:xfrm>
           <a:prstGeom prst="rect">
             <a:avLst/>
@@ -7167,13 +6635,13 @@
               </a:spcAft>
             </a:pPr>
             <a:r>
-              <a:rPr sz="2200" b="0">
+              <a:rPr sz="2400" b="0">
                 <a:solidFill>
                   <a:srgbClr val="502814"/>
                 </a:solidFill>
                 <a:latin typeface="Microsoft YaHei"/>
               </a:rPr>
-              <a:t>神魔小说：想象在「相克」中见趣味，在斗法中见人情</a:t>
+              <a:t>讨论：孙悟空为何逃？天庭为何捉他？</a:t>
             </a:r>
           </a:p>
         </p:txBody>
@@ -7186,8 +6654,8 @@
         </p:nvSpPr>
         <p:spPr>
           <a:xfrm>
-            <a:off x="2621584" y="2395728"/>
-            <a:ext cx="347472" cy="347472"/>
+            <a:off x="2255824" y="2395728"/>
+            <a:ext cx="384048" cy="384048"/>
           </a:xfrm>
           <a:prstGeom prst="ellipse">
             <a:avLst/>
@@ -7229,8 +6697,8 @@
         </p:nvSpPr>
         <p:spPr>
           <a:xfrm>
-            <a:off x="2621584" y="2414016"/>
-            <a:ext cx="347472" cy="329184"/>
+            <a:off x="2255824" y="2414016"/>
+            <a:ext cx="384048" cy="365760"/>
           </a:xfrm>
           <a:prstGeom prst="rect">
             <a:avLst/>
@@ -7249,7 +6717,7 @@
               </a:spcAft>
             </a:pPr>
             <a:r>
-              <a:rPr sz="1400" b="1">
+              <a:rPr sz="1600" b="1">
                 <a:solidFill>
                   <a:srgbClr val="FFFFFF"/>
                 </a:solidFill>
@@ -7268,8 +6736,8 @@
         </p:nvSpPr>
         <p:spPr>
           <a:xfrm>
-            <a:off x="3078784" y="2377440"/>
-            <a:ext cx="7863840" cy="457200"/>
+            <a:off x="2758744" y="2377440"/>
+            <a:ext cx="7772400" cy="502920"/>
           </a:xfrm>
           <a:prstGeom prst="rect">
             <a:avLst/>
@@ -7288,13 +6756,13 @@
               </a:spcAft>
             </a:pPr>
             <a:r>
-              <a:rPr sz="2200" b="0">
+              <a:rPr sz="2400" b="0">
                 <a:solidFill>
                   <a:srgbClr val="502814"/>
                 </a:solidFill>
                 <a:latin typeface="Microsoft YaHei"/>
               </a:rPr>
-              <a:t>变化链是因果回应，不是随意编造</a:t>
+              <a:t>联系生活：追求自由与遵守规则矛盾吗？</a:t>
             </a:r>
           </a:p>
         </p:txBody>
@@ -7307,8 +6775,8 @@
         </p:nvSpPr>
         <p:spPr>
           <a:xfrm>
-            <a:off x="2621584" y="2871216"/>
-            <a:ext cx="347472" cy="347472"/>
+            <a:off x="2255824" y="2962656"/>
+            <a:ext cx="384048" cy="384048"/>
           </a:xfrm>
           <a:prstGeom prst="ellipse">
             <a:avLst/>
@@ -7350,8 +6818,8 @@
         </p:nvSpPr>
         <p:spPr>
           <a:xfrm>
-            <a:off x="2621584" y="2889504"/>
-            <a:ext cx="347472" cy="329184"/>
+            <a:off x="2255824" y="2980944"/>
+            <a:ext cx="384048" cy="365760"/>
           </a:xfrm>
           <a:prstGeom prst="rect">
             <a:avLst/>
@@ -7370,7 +6838,7 @@
               </a:spcAft>
             </a:pPr>
             <a:r>
-              <a:rPr sz="1400" b="1">
+              <a:rPr sz="1600" b="1">
                 <a:solidFill>
                   <a:srgbClr val="FFFFFF"/>
                 </a:solidFill>
@@ -7389,8 +6857,8 @@
         </p:nvSpPr>
         <p:spPr>
           <a:xfrm>
-            <a:off x="3078784" y="2852928"/>
-            <a:ext cx="7863840" cy="457200"/>
+            <a:off x="2758744" y="2944368"/>
+            <a:ext cx="7772400" cy="502920"/>
           </a:xfrm>
           <a:prstGeom prst="rect">
             <a:avLst/>
@@ -7409,13 +6877,13 @@
               </a:spcAft>
             </a:pPr>
             <a:r>
-              <a:rPr sz="2200" b="0">
+              <a:rPr sz="2400" b="0">
                 <a:solidFill>
                   <a:srgbClr val="502814"/>
                 </a:solidFill>
                 <a:latin typeface="Microsoft YaHei"/>
               </a:rPr>
-              <a:t>策展主题一：自由与规则</a:t>
+              <a:t>策展主题一：自由可贵，但需守规则</a:t>
             </a:r>
           </a:p>
         </p:txBody>
@@ -7630,7 +7098,7 @@
                 </a:solidFill>
                 <a:latin typeface="Microsoft YaHei"/>
               </a:rPr>
-              <a:t>课后延伸</a:t>
+              <a:t>回顾收获</a:t>
             </a:r>
           </a:p>
         </p:txBody>
@@ -7643,7 +7111,7 @@
         </p:nvSpPr>
         <p:spPr>
           <a:xfrm>
-            <a:off x="1371600" y="1051560"/>
+            <a:off x="1371600" y="960120"/>
             <a:ext cx="9418320" cy="822960"/>
           </a:xfrm>
           <a:prstGeom prst="rect">
@@ -7669,7 +7137,7 @@
                 </a:solidFill>
                 <a:latin typeface="Microsoft YaHei"/>
               </a:rPr>
-              <a:t>课后作业</a:t>
+              <a:t>课堂小结</a:t>
             </a:r>
           </a:p>
         </p:txBody>
@@ -7682,7 +7150,7 @@
         </p:nvSpPr>
         <p:spPr>
           <a:xfrm>
-            <a:off x="3200400" y="1691640"/>
+            <a:off x="3200400" y="1600200"/>
             <a:ext cx="5760720" cy="27432"/>
           </a:xfrm>
           <a:prstGeom prst="rect">
@@ -7725,8 +7193,8 @@
         </p:nvSpPr>
         <p:spPr>
           <a:xfrm>
-            <a:off x="1295704" y="1737360"/>
-            <a:ext cx="9601200" cy="1545336"/>
+            <a:off x="1295704" y="1645920"/>
+            <a:ext cx="9601200" cy="2240280"/>
           </a:xfrm>
           <a:prstGeom prst="roundRect">
             <a:avLst/>
@@ -7770,8 +7238,8 @@
         </p:nvSpPr>
         <p:spPr>
           <a:xfrm>
-            <a:off x="2621584" y="1920240"/>
-            <a:ext cx="347472" cy="347472"/>
+            <a:off x="2255824" y="1828800"/>
+            <a:ext cx="384048" cy="384048"/>
           </a:xfrm>
           <a:prstGeom prst="ellipse">
             <a:avLst/>
@@ -7813,8 +7281,8 @@
         </p:nvSpPr>
         <p:spPr>
           <a:xfrm>
-            <a:off x="2621584" y="1938528"/>
-            <a:ext cx="347472" cy="329184"/>
+            <a:off x="2255824" y="1847088"/>
+            <a:ext cx="384048" cy="365760"/>
           </a:xfrm>
           <a:prstGeom prst="rect">
             <a:avLst/>
@@ -7833,7 +7301,7 @@
               </a:spcAft>
             </a:pPr>
             <a:r>
-              <a:rPr sz="1400" b="1">
+              <a:rPr sz="1600" b="1">
                 <a:solidFill>
                   <a:srgbClr val="FFFFFF"/>
                 </a:solidFill>
@@ -7852,8 +7320,713 @@
         </p:nvSpPr>
         <p:spPr>
           <a:xfrm>
-            <a:off x="3078784" y="1901952"/>
-            <a:ext cx="7863840" cy="457200"/>
+            <a:off x="2758744" y="1810512"/>
+            <a:ext cx="7772400" cy="502920"/>
+          </a:xfrm>
+          <a:prstGeom prst="rect">
+            <a:avLst/>
+          </a:prstGeom>
+          <a:noFill/>
+        </p:spPr>
+        <p:txBody>
+          <a:bodyPr wrap="none">
+            <a:spAutoFit/>
+          </a:bodyPr>
+          <a:lstStyle/>
+          <a:p>
+            <a:pPr algn="l">
+              <a:spcAft>
+                <a:spcPts val="1000"/>
+              </a:spcAft>
+            </a:pPr>
+            <a:r>
+              <a:rPr sz="2400" b="0">
+                <a:solidFill>
+                  <a:srgbClr val="502814"/>
+                </a:solidFill>
+                <a:latin typeface="Microsoft YaHei"/>
+              </a:rPr>
+              <a:t>想象精彩，来自变化中的因果回应</a:t>
+            </a:r>
+          </a:p>
+        </p:txBody>
+      </p:sp>
+      <p:sp>
+        <p:nvSpPr>
+          <p:cNvPr id="14" name="Oval 13"/>
+          <p:cNvSpPr/>
+          <p:nvPr/>
+        </p:nvSpPr>
+        <p:spPr>
+          <a:xfrm>
+            <a:off x="2255824" y="2395728"/>
+            <a:ext cx="384048" cy="384048"/>
+          </a:xfrm>
+          <a:prstGeom prst="ellipse">
+            <a:avLst/>
+          </a:prstGeom>
+          <a:solidFill>
+            <a:srgbClr val="DC5028"/>
+          </a:solidFill>
+          <a:ln>
+            <a:noFill/>
+          </a:ln>
+        </p:spPr>
+        <p:style>
+          <a:lnRef idx="1">
+            <a:schemeClr val="accent1"/>
+          </a:lnRef>
+          <a:fillRef idx="3">
+            <a:schemeClr val="accent1"/>
+          </a:fillRef>
+          <a:effectRef idx="2">
+            <a:schemeClr val="accent1"/>
+          </a:effectRef>
+          <a:fontRef idx="minor">
+            <a:schemeClr val="lt1"/>
+          </a:fontRef>
+        </p:style>
+        <p:txBody>
+          <a:bodyPr rtlCol="0" anchor="ctr"/>
+          <a:lstStyle/>
+          <a:p>
+            <a:pPr algn="ctr"/>
+          </a:p>
+        </p:txBody>
+      </p:sp>
+      <p:sp>
+        <p:nvSpPr>
+          <p:cNvPr id="15" name="TextBox 14"/>
+          <p:cNvSpPr txBox="1"/>
+          <p:nvPr/>
+        </p:nvSpPr>
+        <p:spPr>
+          <a:xfrm>
+            <a:off x="2255824" y="2414016"/>
+            <a:ext cx="384048" cy="365760"/>
+          </a:xfrm>
+          <a:prstGeom prst="rect">
+            <a:avLst/>
+          </a:prstGeom>
+          <a:noFill/>
+        </p:spPr>
+        <p:txBody>
+          <a:bodyPr wrap="none">
+            <a:spAutoFit/>
+          </a:bodyPr>
+          <a:lstStyle/>
+          <a:p>
+            <a:pPr algn="ctr">
+              <a:spcAft>
+                <a:spcPts val="1000"/>
+              </a:spcAft>
+            </a:pPr>
+            <a:r>
+              <a:rPr sz="1600" b="1">
+                <a:solidFill>
+                  <a:srgbClr val="FFFFFF"/>
+                </a:solidFill>
+                <a:latin typeface="Microsoft YaHei"/>
+              </a:rPr>
+              <a:t>2</a:t>
+            </a:r>
+          </a:p>
+        </p:txBody>
+      </p:sp>
+      <p:sp>
+        <p:nvSpPr>
+          <p:cNvPr id="16" name="TextBox 15"/>
+          <p:cNvSpPr txBox="1"/>
+          <p:nvPr/>
+        </p:nvSpPr>
+        <p:spPr>
+          <a:xfrm>
+            <a:off x="2758744" y="2377440"/>
+            <a:ext cx="7772400" cy="502920"/>
+          </a:xfrm>
+          <a:prstGeom prst="rect">
+            <a:avLst/>
+          </a:prstGeom>
+          <a:noFill/>
+        </p:spPr>
+        <p:txBody>
+          <a:bodyPr wrap="none">
+            <a:spAutoFit/>
+          </a:bodyPr>
+          <a:lstStyle/>
+          <a:p>
+            <a:pPr algn="l">
+              <a:spcAft>
+                <a:spcPts val="1000"/>
+              </a:spcAft>
+            </a:pPr>
+            <a:r>
+              <a:rPr sz="2400" b="0">
+                <a:solidFill>
+                  <a:srgbClr val="502814"/>
+                </a:solidFill>
+                <a:latin typeface="Microsoft YaHei"/>
+              </a:rPr>
+              <a:t>神魔有法力，也有机敏、急切、好胜等人情味</a:t>
+            </a:r>
+          </a:p>
+        </p:txBody>
+      </p:sp>
+      <p:sp>
+        <p:nvSpPr>
+          <p:cNvPr id="17" name="Oval 16"/>
+          <p:cNvSpPr/>
+          <p:nvPr/>
+        </p:nvSpPr>
+        <p:spPr>
+          <a:xfrm>
+            <a:off x="2255824" y="2962656"/>
+            <a:ext cx="384048" cy="384048"/>
+          </a:xfrm>
+          <a:prstGeom prst="ellipse">
+            <a:avLst/>
+          </a:prstGeom>
+          <a:solidFill>
+            <a:srgbClr val="DC5028"/>
+          </a:solidFill>
+          <a:ln>
+            <a:noFill/>
+          </a:ln>
+        </p:spPr>
+        <p:style>
+          <a:lnRef idx="1">
+            <a:schemeClr val="accent1"/>
+          </a:lnRef>
+          <a:fillRef idx="3">
+            <a:schemeClr val="accent1"/>
+          </a:fillRef>
+          <a:effectRef idx="2">
+            <a:schemeClr val="accent1"/>
+          </a:effectRef>
+          <a:fontRef idx="minor">
+            <a:schemeClr val="lt1"/>
+          </a:fontRef>
+        </p:style>
+        <p:txBody>
+          <a:bodyPr rtlCol="0" anchor="ctr"/>
+          <a:lstStyle/>
+          <a:p>
+            <a:pPr algn="ctr"/>
+          </a:p>
+        </p:txBody>
+      </p:sp>
+      <p:sp>
+        <p:nvSpPr>
+          <p:cNvPr id="18" name="TextBox 17"/>
+          <p:cNvSpPr txBox="1"/>
+          <p:nvPr/>
+        </p:nvSpPr>
+        <p:spPr>
+          <a:xfrm>
+            <a:off x="2255824" y="2980944"/>
+            <a:ext cx="384048" cy="365760"/>
+          </a:xfrm>
+          <a:prstGeom prst="rect">
+            <a:avLst/>
+          </a:prstGeom>
+          <a:noFill/>
+        </p:spPr>
+        <p:txBody>
+          <a:bodyPr wrap="none">
+            <a:spAutoFit/>
+          </a:bodyPr>
+          <a:lstStyle/>
+          <a:p>
+            <a:pPr algn="ctr">
+              <a:spcAft>
+                <a:spcPts val="1000"/>
+              </a:spcAft>
+            </a:pPr>
+            <a:r>
+              <a:rPr sz="1600" b="1">
+                <a:solidFill>
+                  <a:srgbClr val="FFFFFF"/>
+                </a:solidFill>
+                <a:latin typeface="Microsoft YaHei"/>
+              </a:rPr>
+              <a:t>3</a:t>
+            </a:r>
+          </a:p>
+        </p:txBody>
+      </p:sp>
+      <p:sp>
+        <p:nvSpPr>
+          <p:cNvPr id="19" name="TextBox 18"/>
+          <p:cNvSpPr txBox="1"/>
+          <p:nvPr/>
+        </p:nvSpPr>
+        <p:spPr>
+          <a:xfrm>
+            <a:off x="2758744" y="2944368"/>
+            <a:ext cx="7772400" cy="502920"/>
+          </a:xfrm>
+          <a:prstGeom prst="rect">
+            <a:avLst/>
+          </a:prstGeom>
+          <a:noFill/>
+        </p:spPr>
+        <p:txBody>
+          <a:bodyPr wrap="none">
+            <a:spAutoFit/>
+          </a:bodyPr>
+          <a:lstStyle/>
+          <a:p>
+            <a:pPr algn="l">
+              <a:spcAft>
+                <a:spcPts val="1000"/>
+              </a:spcAft>
+            </a:pPr>
+            <a:r>
+              <a:rPr sz="2400" b="0">
+                <a:solidFill>
+                  <a:srgbClr val="502814"/>
+                </a:solidFill>
+                <a:latin typeface="Microsoft YaHei"/>
+              </a:rPr>
+              <a:t>策展主题：自由与规则</a:t>
+            </a:r>
+          </a:p>
+        </p:txBody>
+      </p:sp>
+    </p:spTree>
+  </p:cSld>
+  <p:clrMapOvr>
+    <a:masterClrMapping/>
+  </p:clrMapOvr>
+</p:sld>
+</file>
+
+<file path=ppt/slides/slide9.xml><?xml version="1.0" encoding="utf-8"?>
+<p:sld xmlns:a="http://schemas.openxmlformats.org/drawingml/2006/main" xmlns:p="http://schemas.openxmlformats.org/presentationml/2006/main" xmlns:r="http://schemas.openxmlformats.org/officeDocument/2006/relationships">
+  <p:cSld>
+    <p:spTree>
+      <p:nvGrpSpPr>
+        <p:cNvPr id="1" name=""/>
+        <p:cNvGrpSpPr/>
+        <p:nvPr/>
+      </p:nvGrpSpPr>
+      <p:grpSpPr/>
+      <p:pic>
+        <p:nvPicPr>
+          <p:cNvPr id="2" name="Picture 1" descr="bg_wukong.png"/>
+          <p:cNvPicPr>
+            <a:picLocks noChangeAspect="1"/>
+          </p:cNvPicPr>
+          <p:nvPr/>
+        </p:nvPicPr>
+        <p:blipFill>
+          <a:blip r:embed="rId2"/>
+          <a:stretch>
+            <a:fillRect/>
+          </a:stretch>
+        </p:blipFill>
+        <p:spPr>
+          <a:xfrm>
+            <a:off x="0" y="0"/>
+            <a:ext cx="12191695" cy="6858000"/>
+          </a:xfrm>
+          <a:prstGeom prst="rect">
+            <a:avLst/>
+          </a:prstGeom>
+        </p:spPr>
+      </p:pic>
+      <p:sp>
+        <p:nvSpPr>
+          <p:cNvPr id="3" name="Rectangle 2"/>
+          <p:cNvSpPr/>
+          <p:nvPr/>
+        </p:nvSpPr>
+        <p:spPr>
+          <a:xfrm>
+            <a:off x="292608" y="274320"/>
+            <a:ext cx="11594592" cy="6300216"/>
+          </a:xfrm>
+          <a:prstGeom prst="rect">
+            <a:avLst/>
+          </a:prstGeom>
+          <a:noFill/>
+          <a:ln w="31750">
+            <a:solidFill>
+              <a:srgbClr val="C85A32"/>
+            </a:solidFill>
+          </a:ln>
+        </p:spPr>
+        <p:style>
+          <a:lnRef idx="1">
+            <a:schemeClr val="accent1"/>
+          </a:lnRef>
+          <a:fillRef idx="3">
+            <a:schemeClr val="accent1"/>
+          </a:fillRef>
+          <a:effectRef idx="2">
+            <a:schemeClr val="accent1"/>
+          </a:effectRef>
+          <a:fontRef idx="minor">
+            <a:schemeClr val="lt1"/>
+          </a:fontRef>
+        </p:style>
+        <p:txBody>
+          <a:bodyPr rtlCol="0" anchor="ctr"/>
+          <a:lstStyle/>
+          <a:p>
+            <a:pPr algn="ctr"/>
+          </a:p>
+        </p:txBody>
+      </p:sp>
+      <p:pic>
+        <p:nvPicPr>
+          <p:cNvPr id="4" name="Picture 3" descr="corner_wukong_tl.png"/>
+          <p:cNvPicPr>
+            <a:picLocks noChangeAspect="1"/>
+          </p:cNvPicPr>
+          <p:nvPr/>
+        </p:nvPicPr>
+        <p:blipFill>
+          <a:blip r:embed="rId3"/>
+          <a:stretch>
+            <a:fillRect/>
+          </a:stretch>
+        </p:blipFill>
+        <p:spPr>
+          <a:xfrm>
+            <a:off x="-45720" y="-45720"/>
+            <a:ext cx="2011680" cy="2011680"/>
+          </a:xfrm>
+          <a:prstGeom prst="rect">
+            <a:avLst/>
+          </a:prstGeom>
+        </p:spPr>
+      </p:pic>
+      <p:pic>
+        <p:nvPicPr>
+          <p:cNvPr id="5" name="Picture 4" descr="corner_wukong_tr.png"/>
+          <p:cNvPicPr>
+            <a:picLocks noChangeAspect="1"/>
+          </p:cNvPicPr>
+          <p:nvPr/>
+        </p:nvPicPr>
+        <p:blipFill>
+          <a:blip r:embed="rId4"/>
+          <a:stretch>
+            <a:fillRect/>
+          </a:stretch>
+        </p:blipFill>
+        <p:spPr>
+          <a:xfrm>
+            <a:off x="9875520" y="-45720"/>
+            <a:ext cx="2011680" cy="2011680"/>
+          </a:xfrm>
+          <a:prstGeom prst="rect">
+            <a:avLst/>
+          </a:prstGeom>
+        </p:spPr>
+      </p:pic>
+      <p:sp>
+        <p:nvSpPr>
+          <p:cNvPr id="6" name="Rounded Rectangle 5"/>
+          <p:cNvSpPr/>
+          <p:nvPr/>
+        </p:nvSpPr>
+        <p:spPr>
+          <a:xfrm>
+            <a:off x="4953304" y="502920"/>
+            <a:ext cx="2286000" cy="411480"/>
+          </a:xfrm>
+          <a:prstGeom prst="roundRect">
+            <a:avLst/>
+          </a:prstGeom>
+          <a:solidFill>
+            <a:srgbClr val="FFB464"/>
+          </a:solidFill>
+          <a:ln>
+            <a:noFill/>
+          </a:ln>
+        </p:spPr>
+        <p:style>
+          <a:lnRef idx="1">
+            <a:schemeClr val="accent1"/>
+          </a:lnRef>
+          <a:fillRef idx="3">
+            <a:schemeClr val="accent1"/>
+          </a:fillRef>
+          <a:effectRef idx="2">
+            <a:schemeClr val="accent1"/>
+          </a:effectRef>
+          <a:fontRef idx="minor">
+            <a:schemeClr val="lt1"/>
+          </a:fontRef>
+        </p:style>
+        <p:txBody>
+          <a:bodyPr rtlCol="0" anchor="ctr"/>
+          <a:lstStyle/>
+          <a:p>
+            <a:pPr algn="ctr"/>
+          </a:p>
+        </p:txBody>
+      </p:sp>
+      <p:sp>
+        <p:nvSpPr>
+          <p:cNvPr id="7" name="TextBox 6"/>
+          <p:cNvSpPr txBox="1"/>
+          <p:nvPr/>
+        </p:nvSpPr>
+        <p:spPr>
+          <a:xfrm>
+            <a:off x="4953304" y="521208"/>
+            <a:ext cx="2286000" cy="384048"/>
+          </a:xfrm>
+          <a:prstGeom prst="rect">
+            <a:avLst/>
+          </a:prstGeom>
+          <a:noFill/>
+        </p:spPr>
+        <p:txBody>
+          <a:bodyPr wrap="none">
+            <a:spAutoFit/>
+          </a:bodyPr>
+          <a:lstStyle/>
+          <a:p>
+            <a:pPr algn="ctr">
+              <a:spcAft>
+                <a:spcPts val="1000"/>
+              </a:spcAft>
+            </a:pPr>
+            <a:r>
+              <a:rPr sz="1800" b="1">
+                <a:solidFill>
+                  <a:srgbClr val="502814"/>
+                </a:solidFill>
+                <a:latin typeface="Microsoft YaHei"/>
+              </a:rPr>
+              <a:t>课后延伸</a:t>
+            </a:r>
+          </a:p>
+        </p:txBody>
+      </p:sp>
+      <p:sp>
+        <p:nvSpPr>
+          <p:cNvPr id="8" name="TextBox 7"/>
+          <p:cNvSpPr txBox="1"/>
+          <p:nvPr/>
+        </p:nvSpPr>
+        <p:spPr>
+          <a:xfrm>
+            <a:off x="1371600" y="960120"/>
+            <a:ext cx="9418320" cy="822960"/>
+          </a:xfrm>
+          <a:prstGeom prst="rect">
+            <a:avLst/>
+          </a:prstGeom>
+          <a:noFill/>
+        </p:spPr>
+        <p:txBody>
+          <a:bodyPr wrap="square">
+            <a:spAutoFit/>
+          </a:bodyPr>
+          <a:lstStyle/>
+          <a:p>
+            <a:pPr algn="ctr">
+              <a:spcAft>
+                <a:spcPts val="1000"/>
+              </a:spcAft>
+            </a:pPr>
+            <a:r>
+              <a:rPr sz="3600" b="1">
+                <a:solidFill>
+                  <a:srgbClr val="DC5028"/>
+                </a:solidFill>
+                <a:latin typeface="Microsoft YaHei"/>
+              </a:rPr>
+              <a:t>课后作业</a:t>
+            </a:r>
+          </a:p>
+        </p:txBody>
+      </p:sp>
+      <p:sp>
+        <p:nvSpPr>
+          <p:cNvPr id="9" name="Rectangle 8"/>
+          <p:cNvSpPr/>
+          <p:nvPr/>
+        </p:nvSpPr>
+        <p:spPr>
+          <a:xfrm>
+            <a:off x="3200400" y="1600200"/>
+            <a:ext cx="5760720" cy="27432"/>
+          </a:xfrm>
+          <a:prstGeom prst="rect">
+            <a:avLst/>
+          </a:prstGeom>
+          <a:solidFill>
+            <a:srgbClr val="FFB464"/>
+          </a:solidFill>
+          <a:ln>
+            <a:noFill/>
+          </a:ln>
+        </p:spPr>
+        <p:style>
+          <a:lnRef idx="1">
+            <a:schemeClr val="accent1"/>
+          </a:lnRef>
+          <a:fillRef idx="3">
+            <a:schemeClr val="accent1"/>
+          </a:fillRef>
+          <a:effectRef idx="2">
+            <a:schemeClr val="accent1"/>
+          </a:effectRef>
+          <a:fontRef idx="minor">
+            <a:schemeClr val="lt1"/>
+          </a:fontRef>
+        </p:style>
+        <p:txBody>
+          <a:bodyPr rtlCol="0" anchor="ctr"/>
+          <a:lstStyle/>
+          <a:p>
+            <a:pPr algn="ctr"/>
+          </a:p>
+        </p:txBody>
+      </p:sp>
+      <p:sp>
+        <p:nvSpPr>
+          <p:cNvPr id="10" name="Rounded Rectangle 9"/>
+          <p:cNvSpPr/>
+          <p:nvPr/>
+        </p:nvSpPr>
+        <p:spPr>
+          <a:xfrm>
+            <a:off x="1295704" y="1645920"/>
+            <a:ext cx="9601200" cy="1645920"/>
+          </a:xfrm>
+          <a:prstGeom prst="roundRect">
+            <a:avLst/>
+          </a:prstGeom>
+          <a:solidFill>
+            <a:srgbClr val="FFF8F0"/>
+          </a:solidFill>
+          <a:ln w="19050">
+            <a:solidFill>
+              <a:srgbClr val="FFB464"/>
+            </a:solidFill>
+          </a:ln>
+        </p:spPr>
+        <p:style>
+          <a:lnRef idx="1">
+            <a:schemeClr val="accent1"/>
+          </a:lnRef>
+          <a:fillRef idx="3">
+            <a:schemeClr val="accent1"/>
+          </a:fillRef>
+          <a:effectRef idx="2">
+            <a:schemeClr val="accent1"/>
+          </a:effectRef>
+          <a:fontRef idx="minor">
+            <a:schemeClr val="lt1"/>
+          </a:fontRef>
+        </p:style>
+        <p:txBody>
+          <a:bodyPr rtlCol="0" anchor="ctr"/>
+          <a:lstStyle/>
+          <a:p>
+            <a:pPr algn="ctr"/>
+          </a:p>
+        </p:txBody>
+      </p:sp>
+      <p:sp>
+        <p:nvSpPr>
+          <p:cNvPr id="11" name="Oval 10"/>
+          <p:cNvSpPr/>
+          <p:nvPr/>
+        </p:nvSpPr>
+        <p:spPr>
+          <a:xfrm>
+            <a:off x="2255824" y="1828800"/>
+            <a:ext cx="384048" cy="384048"/>
+          </a:xfrm>
+          <a:prstGeom prst="ellipse">
+            <a:avLst/>
+          </a:prstGeom>
+          <a:solidFill>
+            <a:srgbClr val="DC5028"/>
+          </a:solidFill>
+          <a:ln>
+            <a:noFill/>
+          </a:ln>
+        </p:spPr>
+        <p:style>
+          <a:lnRef idx="1">
+            <a:schemeClr val="accent1"/>
+          </a:lnRef>
+          <a:fillRef idx="3">
+            <a:schemeClr val="accent1"/>
+          </a:fillRef>
+          <a:effectRef idx="2">
+            <a:schemeClr val="accent1"/>
+          </a:effectRef>
+          <a:fontRef idx="minor">
+            <a:schemeClr val="lt1"/>
+          </a:fontRef>
+        </p:style>
+        <p:txBody>
+          <a:bodyPr rtlCol="0" anchor="ctr"/>
+          <a:lstStyle/>
+          <a:p>
+            <a:pPr algn="ctr"/>
+          </a:p>
+        </p:txBody>
+      </p:sp>
+      <p:sp>
+        <p:nvSpPr>
+          <p:cNvPr id="12" name="TextBox 11"/>
+          <p:cNvSpPr txBox="1"/>
+          <p:nvPr/>
+        </p:nvSpPr>
+        <p:spPr>
+          <a:xfrm>
+            <a:off x="2255824" y="1847088"/>
+            <a:ext cx="384048" cy="365760"/>
+          </a:xfrm>
+          <a:prstGeom prst="rect">
+            <a:avLst/>
+          </a:prstGeom>
+          <a:noFill/>
+        </p:spPr>
+        <p:txBody>
+          <a:bodyPr wrap="none">
+            <a:spAutoFit/>
+          </a:bodyPr>
+          <a:lstStyle/>
+          <a:p>
+            <a:pPr algn="ctr">
+              <a:spcAft>
+                <a:spcPts val="1000"/>
+              </a:spcAft>
+            </a:pPr>
+            <a:r>
+              <a:rPr sz="1600" b="1">
+                <a:solidFill>
+                  <a:srgbClr val="FFFFFF"/>
+                </a:solidFill>
+                <a:latin typeface="Microsoft YaHei"/>
+              </a:rPr>
+              <a:t>1</a:t>
+            </a:r>
+          </a:p>
+        </p:txBody>
+      </p:sp>
+      <p:sp>
+        <p:nvSpPr>
+          <p:cNvPr id="13" name="TextBox 12"/>
+          <p:cNvSpPr txBox="1"/>
+          <p:nvPr/>
+        </p:nvSpPr>
+        <p:spPr>
+          <a:xfrm>
+            <a:off x="2758744" y="1810512"/>
+            <a:ext cx="7772400" cy="502920"/>
           </a:xfrm>
           <a:prstGeom prst="rect">
             <a:avLst/>
@@ -7891,8 +8064,8 @@
         </p:nvSpPr>
         <p:spPr>
           <a:xfrm>
-            <a:off x="2621584" y="2487168"/>
-            <a:ext cx="347472" cy="347472"/>
+            <a:off x="2255824" y="2395728"/>
+            <a:ext cx="384048" cy="384048"/>
           </a:xfrm>
           <a:prstGeom prst="ellipse">
             <a:avLst/>
@@ -7934,8 +8107,8 @@
         </p:nvSpPr>
         <p:spPr>
           <a:xfrm>
-            <a:off x="2621584" y="2505456"/>
-            <a:ext cx="347472" cy="329184"/>
+            <a:off x="2255824" y="2414016"/>
+            <a:ext cx="384048" cy="365760"/>
           </a:xfrm>
           <a:prstGeom prst="rect">
             <a:avLst/>
@@ -7954,7 +8127,7 @@
               </a:spcAft>
             </a:pPr>
             <a:r>
-              <a:rPr sz="1400" b="1">
+              <a:rPr sz="1600" b="1">
                 <a:solidFill>
                   <a:srgbClr val="FFFFFF"/>
                 </a:solidFill>
@@ -7973,8 +8146,8 @@
         </p:nvSpPr>
         <p:spPr>
           <a:xfrm>
-            <a:off x="3078784" y="2468880"/>
-            <a:ext cx="7863840" cy="457200"/>
+            <a:off x="2758744" y="2377440"/>
+            <a:ext cx="7772400" cy="502920"/>
           </a:xfrm>
           <a:prstGeom prst="rect">
             <a:avLst/>
@@ -7999,7 +8172,7 @@
                 </a:solidFill>
                 <a:latin typeface="Microsoft YaHei"/>
               </a:rPr>
-              <a:t>积累：《西游记》作者吴承恩，成书明代；再写一个孙悟空经典情节</a:t>
+              <a:t>链接：作者吴承恩，成书明代，再写一个经典情节</a:t>
             </a:r>
           </a:p>
         </p:txBody>

--- a/unit6-lesson21-wukong.pptx
+++ b/unit6-lesson21-wukong.pptx
@@ -3305,8 +3305,8 @@
         </p:nvSpPr>
         <p:spPr>
           <a:xfrm>
-            <a:off x="1371600" y="2011680"/>
-            <a:ext cx="9418320" cy="1645920"/>
+            <a:off x="1371600" y="1828800"/>
+            <a:ext cx="9418320" cy="1828800"/>
           </a:xfrm>
           <a:prstGeom prst="rect">
             <a:avLst/>
@@ -3348,6 +3348,22 @@
                 <a:latin typeface="Microsoft YaHei"/>
               </a:rPr>
               <a:t>第21课 · 第二、三课时 · 自由与规则</a:t>
+            </a:r>
+          </a:p>
+          <a:p>
+            <a:pPr algn="ctr">
+              <a:spcAft>
+                <a:spcPts val="1000"/>
+              </a:spcAft>
+            </a:pPr>
+            <a:r>
+              <a:rPr sz="2000" b="1">
+                <a:solidFill>
+                  <a:srgbClr val="FFB464"/>
+                </a:solidFill>
+                <a:latin typeface="Microsoft YaHei"/>
+              </a:rPr>
+              <a:t>含课堂笔记 · 2026版</a:t>
             </a:r>
           </a:p>
         </p:txBody>
@@ -3536,8 +3552,342 @@
         </p:nvSpPr>
         <p:spPr>
           <a:xfrm>
-            <a:off x="4953304" y="502920"/>
-            <a:ext cx="2286000" cy="411480"/>
+            <a:off x="502920" y="384048"/>
+            <a:ext cx="2011680" cy="384048"/>
+          </a:xfrm>
+          <a:prstGeom prst="roundRect">
+            <a:avLst/>
+          </a:prstGeom>
+          <a:solidFill>
+            <a:srgbClr val="DC5028"/>
+          </a:solidFill>
+          <a:ln>
+            <a:noFill/>
+          </a:ln>
+        </p:spPr>
+        <p:style>
+          <a:lnRef idx="1">
+            <a:schemeClr val="accent1"/>
+          </a:lnRef>
+          <a:fillRef idx="3">
+            <a:schemeClr val="accent1"/>
+          </a:fillRef>
+          <a:effectRef idx="2">
+            <a:schemeClr val="accent1"/>
+          </a:effectRef>
+          <a:fontRef idx="minor">
+            <a:schemeClr val="lt1"/>
+          </a:fontRef>
+        </p:style>
+        <p:txBody>
+          <a:bodyPr rtlCol="0" anchor="ctr"/>
+          <a:lstStyle/>
+          <a:p>
+            <a:pPr algn="ctr"/>
+          </a:p>
+        </p:txBody>
+      </p:sp>
+      <p:sp>
+        <p:nvSpPr>
+          <p:cNvPr id="7" name="TextBox 6"/>
+          <p:cNvSpPr txBox="1"/>
+          <p:nvPr/>
+        </p:nvSpPr>
+        <p:spPr>
+          <a:xfrm>
+            <a:off x="502920" y="402336"/>
+            <a:ext cx="2011680" cy="347472"/>
+          </a:xfrm>
+          <a:prstGeom prst="rect">
+            <a:avLst/>
+          </a:prstGeom>
+          <a:noFill/>
+        </p:spPr>
+        <p:txBody>
+          <a:bodyPr wrap="none">
+            <a:spAutoFit/>
+          </a:bodyPr>
+          <a:lstStyle/>
+          <a:p>
+            <a:pPr algn="ctr">
+              <a:spcAft>
+                <a:spcPts val="1000"/>
+              </a:spcAft>
+            </a:pPr>
+            <a:r>
+              <a:rPr sz="1600" b="1">
+                <a:solidFill>
+                  <a:srgbClr val="FFFFFF"/>
+                </a:solidFill>
+                <a:latin typeface="Microsoft YaHei"/>
+              </a:rPr>
+              <a:t>知识要点</a:t>
+            </a:r>
+          </a:p>
+        </p:txBody>
+      </p:sp>
+      <p:sp>
+        <p:nvSpPr>
+          <p:cNvPr id="8" name="TextBox 7"/>
+          <p:cNvSpPr txBox="1"/>
+          <p:nvPr/>
+        </p:nvSpPr>
+        <p:spPr>
+          <a:xfrm>
+            <a:off x="1371600" y="384048"/>
+            <a:ext cx="9418320" cy="822960"/>
+          </a:xfrm>
+          <a:prstGeom prst="rect">
+            <a:avLst/>
+          </a:prstGeom>
+          <a:noFill/>
+        </p:spPr>
+        <p:txBody>
+          <a:bodyPr wrap="square">
+            <a:spAutoFit/>
+          </a:bodyPr>
+          <a:lstStyle/>
+          <a:p>
+            <a:pPr algn="ctr">
+              <a:spcAft>
+                <a:spcPts val="1000"/>
+              </a:spcAft>
+            </a:pPr>
+            <a:r>
+              <a:rPr sz="3400" b="1">
+                <a:solidFill>
+                  <a:srgbClr val="DC5028"/>
+                </a:solidFill>
+                <a:latin typeface="Microsoft YaHei"/>
+              </a:rPr>
+              <a:t>文学常识</a:t>
+            </a:r>
+          </a:p>
+        </p:txBody>
+      </p:sp>
+      <p:sp>
+        <p:nvSpPr>
+          <p:cNvPr id="9" name="Rounded Rectangle 8"/>
+          <p:cNvSpPr/>
+          <p:nvPr/>
+        </p:nvSpPr>
+        <p:spPr>
+          <a:xfrm>
+            <a:off x="1067104" y="1143000"/>
+            <a:ext cx="10058400" cy="3721608"/>
+          </a:xfrm>
+          <a:prstGeom prst="roundRect">
+            <a:avLst/>
+          </a:prstGeom>
+          <a:solidFill>
+            <a:srgbClr val="FFFCEB"/>
+          </a:solidFill>
+          <a:ln w="25400">
+            <a:solidFill>
+              <a:srgbClr val="C85A32"/>
+            </a:solidFill>
+          </a:ln>
+        </p:spPr>
+        <p:style>
+          <a:lnRef idx="1">
+            <a:schemeClr val="accent1"/>
+          </a:lnRef>
+          <a:fillRef idx="3">
+            <a:schemeClr val="accent1"/>
+          </a:fillRef>
+          <a:effectRef idx="2">
+            <a:schemeClr val="accent1"/>
+          </a:effectRef>
+          <a:fontRef idx="minor">
+            <a:schemeClr val="lt1"/>
+          </a:fontRef>
+        </p:style>
+        <p:txBody>
+          <a:bodyPr rtlCol="0" anchor="ctr"/>
+          <a:lstStyle/>
+          <a:p>
+            <a:pPr algn="ctr"/>
+          </a:p>
+        </p:txBody>
+      </p:sp>
+      <p:sp>
+        <p:nvSpPr>
+          <p:cNvPr id="10" name="Rectangle 9"/>
+          <p:cNvSpPr/>
+          <p:nvPr/>
+        </p:nvSpPr>
+        <p:spPr>
+          <a:xfrm>
+            <a:off x="1067104" y="1143000"/>
+            <a:ext cx="10058400" cy="384048"/>
+          </a:xfrm>
+          <a:prstGeom prst="rect">
+            <a:avLst/>
+          </a:prstGeom>
+          <a:solidFill>
+            <a:srgbClr val="DC5028"/>
+          </a:solidFill>
+          <a:ln>
+            <a:noFill/>
+          </a:ln>
+        </p:spPr>
+        <p:style>
+          <a:lnRef idx="1">
+            <a:schemeClr val="accent1"/>
+          </a:lnRef>
+          <a:fillRef idx="3">
+            <a:schemeClr val="accent1"/>
+          </a:fillRef>
+          <a:effectRef idx="2">
+            <a:schemeClr val="accent1"/>
+          </a:effectRef>
+          <a:fontRef idx="minor">
+            <a:schemeClr val="lt1"/>
+          </a:fontRef>
+        </p:style>
+        <p:txBody>
+          <a:bodyPr rtlCol="0" anchor="ctr"/>
+          <a:lstStyle/>
+          <a:p>
+            <a:pPr algn="ctr"/>
+          </a:p>
+        </p:txBody>
+      </p:sp>
+      <p:sp>
+        <p:nvSpPr>
+          <p:cNvPr id="11" name="TextBox 10"/>
+          <p:cNvSpPr txBox="1"/>
+          <p:nvPr/>
+        </p:nvSpPr>
+        <p:spPr>
+          <a:xfrm>
+            <a:off x="1067104" y="1179576"/>
+            <a:ext cx="10058400" cy="347472"/>
+          </a:xfrm>
+          <a:prstGeom prst="rect">
+            <a:avLst/>
+          </a:prstGeom>
+          <a:noFill/>
+        </p:spPr>
+        <p:txBody>
+          <a:bodyPr wrap="none">
+            <a:spAutoFit/>
+          </a:bodyPr>
+          <a:lstStyle/>
+          <a:p>
+            <a:pPr algn="ctr">
+              <a:spcAft>
+                <a:spcPts val="1000"/>
+              </a:spcAft>
+            </a:pPr>
+            <a:r>
+              <a:rPr sz="1800" b="1">
+                <a:solidFill>
+                  <a:srgbClr val="FFFFFF"/>
+                </a:solidFill>
+                <a:latin typeface="Microsoft YaHei"/>
+              </a:rPr>
+              <a:t>📝  课堂笔记  —  请摘抄要点</a:t>
+            </a:r>
+          </a:p>
+        </p:txBody>
+      </p:sp>
+      <p:sp>
+        <p:nvSpPr>
+          <p:cNvPr id="12" name="Rectangle 11"/>
+          <p:cNvSpPr/>
+          <p:nvPr/>
+        </p:nvSpPr>
+        <p:spPr>
+          <a:xfrm>
+            <a:off x="1570024" y="1527048"/>
+            <a:ext cx="27432" cy="3337560"/>
+          </a:xfrm>
+          <a:prstGeom prst="rect">
+            <a:avLst/>
+          </a:prstGeom>
+          <a:solidFill>
+            <a:srgbClr val="DC5050"/>
+          </a:solidFill>
+          <a:ln>
+            <a:noFill/>
+          </a:ln>
+        </p:spPr>
+        <p:style>
+          <a:lnRef idx="1">
+            <a:schemeClr val="accent1"/>
+          </a:lnRef>
+          <a:fillRef idx="3">
+            <a:schemeClr val="accent1"/>
+          </a:fillRef>
+          <a:effectRef idx="2">
+            <a:schemeClr val="accent1"/>
+          </a:effectRef>
+          <a:fontRef idx="minor">
+            <a:schemeClr val="lt1"/>
+          </a:fontRef>
+        </p:style>
+        <p:txBody>
+          <a:bodyPr rtlCol="0" anchor="ctr"/>
+          <a:lstStyle/>
+          <a:p>
+            <a:pPr algn="ctr"/>
+          </a:p>
+        </p:txBody>
+      </p:sp>
+      <p:sp>
+        <p:nvSpPr>
+          <p:cNvPr id="13" name="Rectangle 12"/>
+          <p:cNvSpPr/>
+          <p:nvPr/>
+        </p:nvSpPr>
+        <p:spPr>
+          <a:xfrm>
+            <a:off x="1417320" y="2276856"/>
+            <a:ext cx="9601200" cy="13716"/>
+          </a:xfrm>
+          <a:prstGeom prst="rect">
+            <a:avLst/>
+          </a:prstGeom>
+          <a:solidFill>
+            <a:srgbClr val="D2C8AF"/>
+          </a:solidFill>
+          <a:ln>
+            <a:noFill/>
+          </a:ln>
+        </p:spPr>
+        <p:style>
+          <a:lnRef idx="1">
+            <a:schemeClr val="accent1"/>
+          </a:lnRef>
+          <a:fillRef idx="3">
+            <a:schemeClr val="accent1"/>
+          </a:fillRef>
+          <a:effectRef idx="2">
+            <a:schemeClr val="accent1"/>
+          </a:effectRef>
+          <a:fontRef idx="minor">
+            <a:schemeClr val="lt1"/>
+          </a:fontRef>
+        </p:style>
+        <p:txBody>
+          <a:bodyPr rtlCol="0" anchor="ctr"/>
+          <a:lstStyle/>
+          <a:p>
+            <a:pPr algn="ctr"/>
+          </a:p>
+        </p:txBody>
+      </p:sp>
+      <p:sp>
+        <p:nvSpPr>
+          <p:cNvPr id="14" name="Rounded Rectangle 13"/>
+          <p:cNvSpPr/>
+          <p:nvPr/>
+        </p:nvSpPr>
+        <p:spPr>
+          <a:xfrm>
+            <a:off x="1600200" y="1627632"/>
+            <a:ext cx="1280160" cy="347472"/>
           </a:xfrm>
           <a:prstGeom prst="roundRect">
             <a:avLst/>
@@ -3573,14 +3923,14 @@
       </p:sp>
       <p:sp>
         <p:nvSpPr>
-          <p:cNvPr id="7" name="TextBox 6"/>
+          <p:cNvPr id="15" name="TextBox 14"/>
           <p:cNvSpPr txBox="1"/>
           <p:nvPr/>
         </p:nvSpPr>
         <p:spPr>
           <a:xfrm>
-            <a:off x="4953304" y="521208"/>
-            <a:ext cx="2286000" cy="384048"/>
+            <a:off x="1600200" y="1645920"/>
+            <a:ext cx="1280160" cy="310896"/>
           </a:xfrm>
           <a:prstGeom prst="rect">
             <a:avLst/>
@@ -3605,21 +3955,21 @@
                 </a:solidFill>
                 <a:latin typeface="Microsoft YaHei"/>
               </a:rPr>
-              <a:t>课时目标</a:t>
-            </a:r>
-          </a:p>
-        </p:txBody>
-      </p:sp>
-      <p:sp>
-        <p:nvSpPr>
-          <p:cNvPr id="8" name="TextBox 7"/>
+              <a:t>作者</a:t>
+            </a:r>
+          </a:p>
+        </p:txBody>
+      </p:sp>
+      <p:sp>
+        <p:nvSpPr>
+          <p:cNvPr id="16" name="TextBox 15"/>
           <p:cNvSpPr txBox="1"/>
           <p:nvPr/>
         </p:nvSpPr>
         <p:spPr>
           <a:xfrm>
-            <a:off x="1371600" y="960120"/>
-            <a:ext cx="9418320" cy="822960"/>
+            <a:off x="3017520" y="1627632"/>
+            <a:ext cx="7498079" cy="658368"/>
           </a:xfrm>
           <a:prstGeom prst="rect">
             <a:avLst/>
@@ -3627,40 +3977,83 @@
           <a:noFill/>
         </p:spPr>
         <p:txBody>
-          <a:bodyPr wrap="square">
+          <a:bodyPr wrap="none">
             <a:spAutoFit/>
           </a:bodyPr>
           <a:lstStyle/>
           <a:p>
-            <a:pPr algn="ctr">
+            <a:pPr algn="l">
               <a:spcAft>
                 <a:spcPts val="1000"/>
               </a:spcAft>
             </a:pPr>
             <a:r>
-              <a:rPr sz="3600" b="1">
+              <a:rPr sz="2100" b="0">
                 <a:solidFill>
-                  <a:srgbClr val="DC5028"/>
+                  <a:srgbClr val="502814"/>
                 </a:solidFill>
                 <a:latin typeface="Microsoft YaHei"/>
               </a:rPr>
-              <a:t>本课目标</a:t>
-            </a:r>
-          </a:p>
-        </p:txBody>
-      </p:sp>
-      <p:sp>
-        <p:nvSpPr>
-          <p:cNvPr id="9" name="Rectangle 8"/>
+              <a:t>吴承恩，明代小说家</a:t>
+            </a:r>
+          </a:p>
+        </p:txBody>
+      </p:sp>
+      <p:sp>
+        <p:nvSpPr>
+          <p:cNvPr id="17" name="Rectangle 16"/>
           <p:cNvSpPr/>
           <p:nvPr/>
         </p:nvSpPr>
         <p:spPr>
           <a:xfrm>
-            <a:off x="3200400" y="1600200"/>
-            <a:ext cx="5760720" cy="27432"/>
-          </a:xfrm>
-          <a:prstGeom prst="rect">
+            <a:off x="1417320" y="3081527"/>
+            <a:ext cx="9601200" cy="13716"/>
+          </a:xfrm>
+          <a:prstGeom prst="rect">
+            <a:avLst/>
+          </a:prstGeom>
+          <a:solidFill>
+            <a:srgbClr val="D2C8AF"/>
+          </a:solidFill>
+          <a:ln>
+            <a:noFill/>
+          </a:ln>
+        </p:spPr>
+        <p:style>
+          <a:lnRef idx="1">
+            <a:schemeClr val="accent1"/>
+          </a:lnRef>
+          <a:fillRef idx="3">
+            <a:schemeClr val="accent1"/>
+          </a:fillRef>
+          <a:effectRef idx="2">
+            <a:schemeClr val="accent1"/>
+          </a:effectRef>
+          <a:fontRef idx="minor">
+            <a:schemeClr val="lt1"/>
+          </a:fontRef>
+        </p:style>
+        <p:txBody>
+          <a:bodyPr rtlCol="0" anchor="ctr"/>
+          <a:lstStyle/>
+          <a:p>
+            <a:pPr algn="ctr"/>
+          </a:p>
+        </p:txBody>
+      </p:sp>
+      <p:sp>
+        <p:nvSpPr>
+          <p:cNvPr id="18" name="Rounded Rectangle 17"/>
+          <p:cNvSpPr/>
+          <p:nvPr/>
+        </p:nvSpPr>
+        <p:spPr>
+          <a:xfrm>
+            <a:off x="1600200" y="2432303"/>
+            <a:ext cx="1280160" cy="347472"/>
+          </a:xfrm>
+          <a:prstGeom prst="roundRect">
             <a:avLst/>
           </a:prstGeom>
           <a:solidFill>
@@ -3694,25 +4087,101 @@
       </p:sp>
       <p:sp>
         <p:nvSpPr>
-          <p:cNvPr id="10" name="Rounded Rectangle 9"/>
+          <p:cNvPr id="19" name="TextBox 18"/>
+          <p:cNvSpPr txBox="1"/>
+          <p:nvPr/>
+        </p:nvSpPr>
+        <p:spPr>
+          <a:xfrm>
+            <a:off x="1600200" y="2450591"/>
+            <a:ext cx="1280160" cy="310896"/>
+          </a:xfrm>
+          <a:prstGeom prst="rect">
+            <a:avLst/>
+          </a:prstGeom>
+          <a:noFill/>
+        </p:spPr>
+        <p:txBody>
+          <a:bodyPr wrap="none">
+            <a:spAutoFit/>
+          </a:bodyPr>
+          <a:lstStyle/>
+          <a:p>
+            <a:pPr algn="ctr">
+              <a:spcAft>
+                <a:spcPts val="1000"/>
+              </a:spcAft>
+            </a:pPr>
+            <a:r>
+              <a:rPr sz="1800" b="1">
+                <a:solidFill>
+                  <a:srgbClr val="502814"/>
+                </a:solidFill>
+                <a:latin typeface="Microsoft YaHei"/>
+              </a:rPr>
+              <a:t>出处</a:t>
+            </a:r>
+          </a:p>
+        </p:txBody>
+      </p:sp>
+      <p:sp>
+        <p:nvSpPr>
+          <p:cNvPr id="20" name="TextBox 19"/>
+          <p:cNvSpPr txBox="1"/>
+          <p:nvPr/>
+        </p:nvSpPr>
+        <p:spPr>
+          <a:xfrm>
+            <a:off x="3017520" y="2432303"/>
+            <a:ext cx="7498079" cy="658368"/>
+          </a:xfrm>
+          <a:prstGeom prst="rect">
+            <a:avLst/>
+          </a:prstGeom>
+          <a:noFill/>
+        </p:spPr>
+        <p:txBody>
+          <a:bodyPr wrap="none">
+            <a:spAutoFit/>
+          </a:bodyPr>
+          <a:lstStyle/>
+          <a:p>
+            <a:pPr algn="l">
+              <a:spcAft>
+                <a:spcPts val="1000"/>
+              </a:spcAft>
+            </a:pPr>
+            <a:r>
+              <a:rPr sz="2100" b="0">
+                <a:solidFill>
+                  <a:srgbClr val="502814"/>
+                </a:solidFill>
+                <a:latin typeface="Microsoft YaHei"/>
+              </a:rPr>
+              <a:t>章回体长篇小说《西游记》节选</a:t>
+            </a:r>
+          </a:p>
+        </p:txBody>
+      </p:sp>
+      <p:sp>
+        <p:nvSpPr>
+          <p:cNvPr id="21" name="Rectangle 20"/>
           <p:cNvSpPr/>
           <p:nvPr/>
         </p:nvSpPr>
         <p:spPr>
           <a:xfrm>
-            <a:off x="1295704" y="1645920"/>
-            <a:ext cx="9601200" cy="2240280"/>
-          </a:xfrm>
-          <a:prstGeom prst="roundRect">
+            <a:off x="1417320" y="3886200"/>
+            <a:ext cx="9601200" cy="13716"/>
+          </a:xfrm>
+          <a:prstGeom prst="rect">
             <a:avLst/>
           </a:prstGeom>
           <a:solidFill>
-            <a:srgbClr val="FFF8F0"/>
+            <a:srgbClr val="D2C8AF"/>
           </a:solidFill>
-          <a:ln w="19050">
-            <a:solidFill>
-              <a:srgbClr val="FFB464"/>
-            </a:solidFill>
+          <a:ln>
+            <a:noFill/>
           </a:ln>
         </p:spPr>
         <p:style>
@@ -3739,20 +4208,20 @@
       </p:sp>
       <p:sp>
         <p:nvSpPr>
-          <p:cNvPr id="11" name="Oval 10"/>
+          <p:cNvPr id="22" name="Rounded Rectangle 21"/>
           <p:cNvSpPr/>
           <p:nvPr/>
         </p:nvSpPr>
         <p:spPr>
           <a:xfrm>
-            <a:off x="2255824" y="1828800"/>
-            <a:ext cx="384048" cy="384048"/>
-          </a:xfrm>
-          <a:prstGeom prst="ellipse">
+            <a:off x="1600200" y="3236976"/>
+            <a:ext cx="1280160" cy="347472"/>
+          </a:xfrm>
+          <a:prstGeom prst="roundRect">
             <a:avLst/>
           </a:prstGeom>
           <a:solidFill>
-            <a:srgbClr val="DC5028"/>
+            <a:srgbClr val="FFB464"/>
           </a:solidFill>
           <a:ln>
             <a:noFill/>
@@ -3782,14 +4251,14 @@
       </p:sp>
       <p:sp>
         <p:nvSpPr>
-          <p:cNvPr id="12" name="TextBox 11"/>
+          <p:cNvPr id="23" name="TextBox 22"/>
           <p:cNvSpPr txBox="1"/>
           <p:nvPr/>
         </p:nvSpPr>
         <p:spPr>
           <a:xfrm>
-            <a:off x="2255824" y="1847088"/>
-            <a:ext cx="384048" cy="365760"/>
+            <a:off x="1600200" y="3255264"/>
+            <a:ext cx="1280160" cy="310896"/>
           </a:xfrm>
           <a:prstGeom prst="rect">
             <a:avLst/>
@@ -3808,27 +4277,27 @@
               </a:spcAft>
             </a:pPr>
             <a:r>
-              <a:rPr sz="1600" b="1">
+              <a:rPr sz="1800" b="1">
                 <a:solidFill>
-                  <a:srgbClr val="FFFFFF"/>
+                  <a:srgbClr val="502814"/>
                 </a:solidFill>
                 <a:latin typeface="Microsoft YaHei"/>
               </a:rPr>
-              <a:t>1</a:t>
-            </a:r>
-          </a:p>
-        </p:txBody>
-      </p:sp>
-      <p:sp>
-        <p:nvSpPr>
-          <p:cNvPr id="13" name="TextBox 12"/>
+              <a:t>文体</a:t>
+            </a:r>
+          </a:p>
+        </p:txBody>
+      </p:sp>
+      <p:sp>
+        <p:nvSpPr>
+          <p:cNvPr id="24" name="TextBox 23"/>
           <p:cNvSpPr txBox="1"/>
           <p:nvPr/>
         </p:nvSpPr>
         <p:spPr>
           <a:xfrm>
-            <a:off x="2758744" y="1810512"/>
-            <a:ext cx="7772400" cy="502920"/>
+            <a:off x="3017520" y="3236976"/>
+            <a:ext cx="7498079" cy="658368"/>
           </a:xfrm>
           <a:prstGeom prst="rect">
             <a:avLst/>
@@ -3847,33 +4316,33 @@
               </a:spcAft>
             </a:pPr>
             <a:r>
-              <a:rPr sz="2400" b="0">
+              <a:rPr sz="2100" b="0">
                 <a:solidFill>
                   <a:srgbClr val="502814"/>
                 </a:solidFill>
                 <a:latin typeface="Microsoft YaHei"/>
               </a:rPr>
-              <a:t>梳理孙悟空与二郎神的变化链，概括故事经过</a:t>
-            </a:r>
-          </a:p>
-        </p:txBody>
-      </p:sp>
-      <p:sp>
-        <p:nvSpPr>
-          <p:cNvPr id="14" name="Oval 13"/>
+              <a:t>神魔小说——以神魔斗法写人情世故</a:t>
+            </a:r>
+          </a:p>
+        </p:txBody>
+      </p:sp>
+      <p:sp>
+        <p:nvSpPr>
+          <p:cNvPr id="25" name="Rectangle 24"/>
           <p:cNvSpPr/>
           <p:nvPr/>
         </p:nvSpPr>
         <p:spPr>
           <a:xfrm>
-            <a:off x="2255824" y="2395728"/>
-            <a:ext cx="384048" cy="384048"/>
-          </a:xfrm>
-          <a:prstGeom prst="ellipse">
+            <a:off x="1417320" y="4690872"/>
+            <a:ext cx="9601200" cy="13716"/>
+          </a:xfrm>
+          <a:prstGeom prst="rect">
             <a:avLst/>
           </a:prstGeom>
           <a:solidFill>
-            <a:srgbClr val="DC5028"/>
+            <a:srgbClr val="D2C8AF"/>
           </a:solidFill>
           <a:ln>
             <a:noFill/>
@@ -3903,14 +4372,57 @@
       </p:sp>
       <p:sp>
         <p:nvSpPr>
-          <p:cNvPr id="15" name="TextBox 14"/>
+          <p:cNvPr id="26" name="Rounded Rectangle 25"/>
+          <p:cNvSpPr/>
+          <p:nvPr/>
+        </p:nvSpPr>
+        <p:spPr>
+          <a:xfrm>
+            <a:off x="1600200" y="4041648"/>
+            <a:ext cx="1444752" cy="347472"/>
+          </a:xfrm>
+          <a:prstGeom prst="roundRect">
+            <a:avLst/>
+          </a:prstGeom>
+          <a:solidFill>
+            <a:srgbClr val="FFB464"/>
+          </a:solidFill>
+          <a:ln>
+            <a:noFill/>
+          </a:ln>
+        </p:spPr>
+        <p:style>
+          <a:lnRef idx="1">
+            <a:schemeClr val="accent1"/>
+          </a:lnRef>
+          <a:fillRef idx="3">
+            <a:schemeClr val="accent1"/>
+          </a:fillRef>
+          <a:effectRef idx="2">
+            <a:schemeClr val="accent1"/>
+          </a:effectRef>
+          <a:fontRef idx="minor">
+            <a:schemeClr val="lt1"/>
+          </a:fontRef>
+        </p:style>
+        <p:txBody>
+          <a:bodyPr rtlCol="0" anchor="ctr"/>
+          <a:lstStyle/>
+          <a:p>
+            <a:pPr algn="ctr"/>
+          </a:p>
+        </p:txBody>
+      </p:sp>
+      <p:sp>
+        <p:nvSpPr>
+          <p:cNvPr id="27" name="TextBox 26"/>
           <p:cNvSpPr txBox="1"/>
           <p:nvPr/>
         </p:nvSpPr>
         <p:spPr>
           <a:xfrm>
-            <a:off x="2255824" y="2414016"/>
-            <a:ext cx="384048" cy="365760"/>
+            <a:off x="1600200" y="4059936"/>
+            <a:ext cx="1444752" cy="310896"/>
           </a:xfrm>
           <a:prstGeom prst="rect">
             <a:avLst/>
@@ -3929,27 +4441,27 @@
               </a:spcAft>
             </a:pPr>
             <a:r>
-              <a:rPr sz="1600" b="1">
+              <a:rPr sz="1800" b="1">
                 <a:solidFill>
-                  <a:srgbClr val="FFFFFF"/>
+                  <a:srgbClr val="502814"/>
                 </a:solidFill>
                 <a:latin typeface="Microsoft YaHei"/>
               </a:rPr>
-              <a:t>2</a:t>
-            </a:r>
-          </a:p>
-        </p:txBody>
-      </p:sp>
-      <p:sp>
-        <p:nvSpPr>
-          <p:cNvPr id="16" name="TextBox 15"/>
+              <a:t>本文情节</a:t>
+            </a:r>
+          </a:p>
+        </p:txBody>
+      </p:sp>
+      <p:sp>
+        <p:nvSpPr>
+          <p:cNvPr id="28" name="TextBox 27"/>
           <p:cNvSpPr txBox="1"/>
           <p:nvPr/>
         </p:nvSpPr>
         <p:spPr>
           <a:xfrm>
-            <a:off x="2758744" y="2377440"/>
-            <a:ext cx="7772400" cy="502920"/>
+            <a:off x="3182112" y="4041648"/>
+            <a:ext cx="7333488" cy="658368"/>
           </a:xfrm>
           <a:prstGeom prst="rect">
             <a:avLst/>
@@ -3968,134 +4480,13 @@
               </a:spcAft>
             </a:pPr>
             <a:r>
-              <a:rPr sz="2400" b="0">
+              <a:rPr sz="2100" b="0">
                 <a:solidFill>
                   <a:srgbClr val="502814"/>
                 </a:solidFill>
                 <a:latin typeface="Microsoft YaHei"/>
               </a:rPr>
-              <a:t>分析神魔形象及小说想象的趣味</a:t>
-            </a:r>
-          </a:p>
-        </p:txBody>
-      </p:sp>
-      <p:sp>
-        <p:nvSpPr>
-          <p:cNvPr id="17" name="Oval 16"/>
-          <p:cNvSpPr/>
-          <p:nvPr/>
-        </p:nvSpPr>
-        <p:spPr>
-          <a:xfrm>
-            <a:off x="2255824" y="2962656"/>
-            <a:ext cx="384048" cy="384048"/>
-          </a:xfrm>
-          <a:prstGeom prst="ellipse">
-            <a:avLst/>
-          </a:prstGeom>
-          <a:solidFill>
-            <a:srgbClr val="DC5028"/>
-          </a:solidFill>
-          <a:ln>
-            <a:noFill/>
-          </a:ln>
-        </p:spPr>
-        <p:style>
-          <a:lnRef idx="1">
-            <a:schemeClr val="accent1"/>
-          </a:lnRef>
-          <a:fillRef idx="3">
-            <a:schemeClr val="accent1"/>
-          </a:fillRef>
-          <a:effectRef idx="2">
-            <a:schemeClr val="accent1"/>
-          </a:effectRef>
-          <a:fontRef idx="minor">
-            <a:schemeClr val="lt1"/>
-          </a:fontRef>
-        </p:style>
-        <p:txBody>
-          <a:bodyPr rtlCol="0" anchor="ctr"/>
-          <a:lstStyle/>
-          <a:p>
-            <a:pPr algn="ctr"/>
-          </a:p>
-        </p:txBody>
-      </p:sp>
-      <p:sp>
-        <p:nvSpPr>
-          <p:cNvPr id="18" name="TextBox 17"/>
-          <p:cNvSpPr txBox="1"/>
-          <p:nvPr/>
-        </p:nvSpPr>
-        <p:spPr>
-          <a:xfrm>
-            <a:off x="2255824" y="2980944"/>
-            <a:ext cx="384048" cy="365760"/>
-          </a:xfrm>
-          <a:prstGeom prst="rect">
-            <a:avLst/>
-          </a:prstGeom>
-          <a:noFill/>
-        </p:spPr>
-        <p:txBody>
-          <a:bodyPr wrap="none">
-            <a:spAutoFit/>
-          </a:bodyPr>
-          <a:lstStyle/>
-          <a:p>
-            <a:pPr algn="ctr">
-              <a:spcAft>
-                <a:spcPts val="1000"/>
-              </a:spcAft>
-            </a:pPr>
-            <a:r>
-              <a:rPr sz="1600" b="1">
-                <a:solidFill>
-                  <a:srgbClr val="FFFFFF"/>
-                </a:solidFill>
-                <a:latin typeface="Microsoft YaHei"/>
-              </a:rPr>
-              <a:t>3</a:t>
-            </a:r>
-          </a:p>
-        </p:txBody>
-      </p:sp>
-      <p:sp>
-        <p:nvSpPr>
-          <p:cNvPr id="19" name="TextBox 18"/>
-          <p:cNvSpPr txBox="1"/>
-          <p:nvPr/>
-        </p:nvSpPr>
-        <p:spPr>
-          <a:xfrm>
-            <a:off x="2758744" y="2944368"/>
-            <a:ext cx="7772400" cy="502920"/>
-          </a:xfrm>
-          <a:prstGeom prst="rect">
-            <a:avLst/>
-          </a:prstGeom>
-          <a:noFill/>
-        </p:spPr>
-        <p:txBody>
-          <a:bodyPr wrap="none">
-            <a:spAutoFit/>
-          </a:bodyPr>
-          <a:lstStyle/>
-          <a:p>
-            <a:pPr algn="l">
-              <a:spcAft>
-                <a:spcPts val="1000"/>
-              </a:spcAft>
-            </a:pPr>
-            <a:r>
-              <a:rPr sz="2400" b="0">
-                <a:solidFill>
-                  <a:srgbClr val="502814"/>
-                </a:solidFill>
-                <a:latin typeface="Microsoft YaHei"/>
-              </a:rPr>
-              <a:t>探究「自由与规则」母题，提炼策展主题一</a:t>
+              <a:t>孙悟空大闹天宫后，二郎神奉旨捉拿，二人变化斗法</a:t>
             </a:r>
           </a:p>
         </p:txBody>
@@ -4241,8 +4632,342 @@
         </p:nvSpPr>
         <p:spPr>
           <a:xfrm>
-            <a:off x="4953304" y="1005840"/>
-            <a:ext cx="2286000" cy="411480"/>
+            <a:off x="502920" y="384048"/>
+            <a:ext cx="2011680" cy="384048"/>
+          </a:xfrm>
+          <a:prstGeom prst="roundRect">
+            <a:avLst/>
+          </a:prstGeom>
+          <a:solidFill>
+            <a:srgbClr val="DC5028"/>
+          </a:solidFill>
+          <a:ln>
+            <a:noFill/>
+          </a:ln>
+        </p:spPr>
+        <p:style>
+          <a:lnRef idx="1">
+            <a:schemeClr val="accent1"/>
+          </a:lnRef>
+          <a:fillRef idx="3">
+            <a:schemeClr val="accent1"/>
+          </a:fillRef>
+          <a:effectRef idx="2">
+            <a:schemeClr val="accent1"/>
+          </a:effectRef>
+          <a:fontRef idx="minor">
+            <a:schemeClr val="lt1"/>
+          </a:fontRef>
+        </p:style>
+        <p:txBody>
+          <a:bodyPr rtlCol="0" anchor="ctr"/>
+          <a:lstStyle/>
+          <a:p>
+            <a:pPr algn="ctr"/>
+          </a:p>
+        </p:txBody>
+      </p:sp>
+      <p:sp>
+        <p:nvSpPr>
+          <p:cNvPr id="7" name="TextBox 6"/>
+          <p:cNvSpPr txBox="1"/>
+          <p:nvPr/>
+        </p:nvSpPr>
+        <p:spPr>
+          <a:xfrm>
+            <a:off x="502920" y="402336"/>
+            <a:ext cx="2011680" cy="347472"/>
+          </a:xfrm>
+          <a:prstGeom prst="rect">
+            <a:avLst/>
+          </a:prstGeom>
+          <a:noFill/>
+        </p:spPr>
+        <p:txBody>
+          <a:bodyPr wrap="none">
+            <a:spAutoFit/>
+          </a:bodyPr>
+          <a:lstStyle/>
+          <a:p>
+            <a:pPr algn="ctr">
+              <a:spcAft>
+                <a:spcPts val="1000"/>
+              </a:spcAft>
+            </a:pPr>
+            <a:r>
+              <a:rPr sz="1600" b="1">
+                <a:solidFill>
+                  <a:srgbClr val="FFFFFF"/>
+                </a:solidFill>
+                <a:latin typeface="Microsoft YaHei"/>
+              </a:rPr>
+              <a:t>情节笔记</a:t>
+            </a:r>
+          </a:p>
+        </p:txBody>
+      </p:sp>
+      <p:sp>
+        <p:nvSpPr>
+          <p:cNvPr id="8" name="TextBox 7"/>
+          <p:cNvSpPr txBox="1"/>
+          <p:nvPr/>
+        </p:nvSpPr>
+        <p:spPr>
+          <a:xfrm>
+            <a:off x="1371600" y="384048"/>
+            <a:ext cx="9418320" cy="822960"/>
+          </a:xfrm>
+          <a:prstGeom prst="rect">
+            <a:avLst/>
+          </a:prstGeom>
+          <a:noFill/>
+        </p:spPr>
+        <p:txBody>
+          <a:bodyPr wrap="square">
+            <a:spAutoFit/>
+          </a:bodyPr>
+          <a:lstStyle/>
+          <a:p>
+            <a:pPr algn="ctr">
+              <a:spcAft>
+                <a:spcPts val="1000"/>
+              </a:spcAft>
+            </a:pPr>
+            <a:r>
+              <a:rPr sz="3400" b="1">
+                <a:solidFill>
+                  <a:srgbClr val="DC5028"/>
+                </a:solidFill>
+                <a:latin typeface="Microsoft YaHei"/>
+              </a:rPr>
+              <a:t>变化链梳理</a:t>
+            </a:r>
+          </a:p>
+        </p:txBody>
+      </p:sp>
+      <p:sp>
+        <p:nvSpPr>
+          <p:cNvPr id="9" name="Rounded Rectangle 8"/>
+          <p:cNvSpPr/>
+          <p:nvPr/>
+        </p:nvSpPr>
+        <p:spPr>
+          <a:xfrm>
+            <a:off x="1067104" y="1143000"/>
+            <a:ext cx="10058400" cy="3721608"/>
+          </a:xfrm>
+          <a:prstGeom prst="roundRect">
+            <a:avLst/>
+          </a:prstGeom>
+          <a:solidFill>
+            <a:srgbClr val="FFFCEB"/>
+          </a:solidFill>
+          <a:ln w="25400">
+            <a:solidFill>
+              <a:srgbClr val="C85A32"/>
+            </a:solidFill>
+          </a:ln>
+        </p:spPr>
+        <p:style>
+          <a:lnRef idx="1">
+            <a:schemeClr val="accent1"/>
+          </a:lnRef>
+          <a:fillRef idx="3">
+            <a:schemeClr val="accent1"/>
+          </a:fillRef>
+          <a:effectRef idx="2">
+            <a:schemeClr val="accent1"/>
+          </a:effectRef>
+          <a:fontRef idx="minor">
+            <a:schemeClr val="lt1"/>
+          </a:fontRef>
+        </p:style>
+        <p:txBody>
+          <a:bodyPr rtlCol="0" anchor="ctr"/>
+          <a:lstStyle/>
+          <a:p>
+            <a:pPr algn="ctr"/>
+          </a:p>
+        </p:txBody>
+      </p:sp>
+      <p:sp>
+        <p:nvSpPr>
+          <p:cNvPr id="10" name="Rectangle 9"/>
+          <p:cNvSpPr/>
+          <p:nvPr/>
+        </p:nvSpPr>
+        <p:spPr>
+          <a:xfrm>
+            <a:off x="1067104" y="1143000"/>
+            <a:ext cx="10058400" cy="384048"/>
+          </a:xfrm>
+          <a:prstGeom prst="rect">
+            <a:avLst/>
+          </a:prstGeom>
+          <a:solidFill>
+            <a:srgbClr val="DC5028"/>
+          </a:solidFill>
+          <a:ln>
+            <a:noFill/>
+          </a:ln>
+        </p:spPr>
+        <p:style>
+          <a:lnRef idx="1">
+            <a:schemeClr val="accent1"/>
+          </a:lnRef>
+          <a:fillRef idx="3">
+            <a:schemeClr val="accent1"/>
+          </a:fillRef>
+          <a:effectRef idx="2">
+            <a:schemeClr val="accent1"/>
+          </a:effectRef>
+          <a:fontRef idx="minor">
+            <a:schemeClr val="lt1"/>
+          </a:fontRef>
+        </p:style>
+        <p:txBody>
+          <a:bodyPr rtlCol="0" anchor="ctr"/>
+          <a:lstStyle/>
+          <a:p>
+            <a:pPr algn="ctr"/>
+          </a:p>
+        </p:txBody>
+      </p:sp>
+      <p:sp>
+        <p:nvSpPr>
+          <p:cNvPr id="11" name="TextBox 10"/>
+          <p:cNvSpPr txBox="1"/>
+          <p:nvPr/>
+        </p:nvSpPr>
+        <p:spPr>
+          <a:xfrm>
+            <a:off x="1067104" y="1179576"/>
+            <a:ext cx="10058400" cy="347472"/>
+          </a:xfrm>
+          <a:prstGeom prst="rect">
+            <a:avLst/>
+          </a:prstGeom>
+          <a:noFill/>
+        </p:spPr>
+        <p:txBody>
+          <a:bodyPr wrap="none">
+            <a:spAutoFit/>
+          </a:bodyPr>
+          <a:lstStyle/>
+          <a:p>
+            <a:pPr algn="ctr">
+              <a:spcAft>
+                <a:spcPts val="1000"/>
+              </a:spcAft>
+            </a:pPr>
+            <a:r>
+              <a:rPr sz="1800" b="1">
+                <a:solidFill>
+                  <a:srgbClr val="FFFFFF"/>
+                </a:solidFill>
+                <a:latin typeface="Microsoft YaHei"/>
+              </a:rPr>
+              <a:t>📝  课堂笔记  —  请摘抄要点</a:t>
+            </a:r>
+          </a:p>
+        </p:txBody>
+      </p:sp>
+      <p:sp>
+        <p:nvSpPr>
+          <p:cNvPr id="12" name="Rectangle 11"/>
+          <p:cNvSpPr/>
+          <p:nvPr/>
+        </p:nvSpPr>
+        <p:spPr>
+          <a:xfrm>
+            <a:off x="1570024" y="1527048"/>
+            <a:ext cx="27432" cy="3337560"/>
+          </a:xfrm>
+          <a:prstGeom prst="rect">
+            <a:avLst/>
+          </a:prstGeom>
+          <a:solidFill>
+            <a:srgbClr val="DC5050"/>
+          </a:solidFill>
+          <a:ln>
+            <a:noFill/>
+          </a:ln>
+        </p:spPr>
+        <p:style>
+          <a:lnRef idx="1">
+            <a:schemeClr val="accent1"/>
+          </a:lnRef>
+          <a:fillRef idx="3">
+            <a:schemeClr val="accent1"/>
+          </a:fillRef>
+          <a:effectRef idx="2">
+            <a:schemeClr val="accent1"/>
+          </a:effectRef>
+          <a:fontRef idx="minor">
+            <a:schemeClr val="lt1"/>
+          </a:fontRef>
+        </p:style>
+        <p:txBody>
+          <a:bodyPr rtlCol="0" anchor="ctr"/>
+          <a:lstStyle/>
+          <a:p>
+            <a:pPr algn="ctr"/>
+          </a:p>
+        </p:txBody>
+      </p:sp>
+      <p:sp>
+        <p:nvSpPr>
+          <p:cNvPr id="13" name="Rectangle 12"/>
+          <p:cNvSpPr/>
+          <p:nvPr/>
+        </p:nvSpPr>
+        <p:spPr>
+          <a:xfrm>
+            <a:off x="1417320" y="2276856"/>
+            <a:ext cx="9601200" cy="13716"/>
+          </a:xfrm>
+          <a:prstGeom prst="rect">
+            <a:avLst/>
+          </a:prstGeom>
+          <a:solidFill>
+            <a:srgbClr val="D2C8AF"/>
+          </a:solidFill>
+          <a:ln>
+            <a:noFill/>
+          </a:ln>
+        </p:spPr>
+        <p:style>
+          <a:lnRef idx="1">
+            <a:schemeClr val="accent1"/>
+          </a:lnRef>
+          <a:fillRef idx="3">
+            <a:schemeClr val="accent1"/>
+          </a:fillRef>
+          <a:effectRef idx="2">
+            <a:schemeClr val="accent1"/>
+          </a:effectRef>
+          <a:fontRef idx="minor">
+            <a:schemeClr val="lt1"/>
+          </a:fontRef>
+        </p:style>
+        <p:txBody>
+          <a:bodyPr rtlCol="0" anchor="ctr"/>
+          <a:lstStyle/>
+          <a:p>
+            <a:pPr algn="ctr"/>
+          </a:p>
+        </p:txBody>
+      </p:sp>
+      <p:sp>
+        <p:nvSpPr>
+          <p:cNvPr id="14" name="Rounded Rectangle 13"/>
+          <p:cNvSpPr/>
+          <p:nvPr/>
+        </p:nvSpPr>
+        <p:spPr>
+          <a:xfrm>
+            <a:off x="1600200" y="1627632"/>
+            <a:ext cx="1280160" cy="347472"/>
           </a:xfrm>
           <a:prstGeom prst="roundRect">
             <a:avLst/>
@@ -4278,14 +5003,14 @@
       </p:sp>
       <p:sp>
         <p:nvSpPr>
-          <p:cNvPr id="7" name="TextBox 6"/>
+          <p:cNvPr id="15" name="TextBox 14"/>
           <p:cNvSpPr txBox="1"/>
           <p:nvPr/>
         </p:nvSpPr>
         <p:spPr>
           <a:xfrm>
-            <a:off x="4953304" y="1024128"/>
-            <a:ext cx="2286000" cy="384048"/>
+            <a:off x="1600200" y="1645920"/>
+            <a:ext cx="1280160" cy="310896"/>
           </a:xfrm>
           <a:prstGeom prst="rect">
             <a:avLst/>
@@ -4310,21 +5035,21 @@
                 </a:solidFill>
                 <a:latin typeface="Microsoft YaHei"/>
               </a:rPr>
-              <a:t>想一想</a:t>
-            </a:r>
-          </a:p>
-        </p:txBody>
-      </p:sp>
-      <p:sp>
-        <p:nvSpPr>
-          <p:cNvPr id="8" name="TextBox 7"/>
+              <a:t>第1轮</a:t>
+            </a:r>
+          </a:p>
+        </p:txBody>
+      </p:sp>
+      <p:sp>
+        <p:nvSpPr>
+          <p:cNvPr id="16" name="TextBox 15"/>
           <p:cNvSpPr txBox="1"/>
           <p:nvPr/>
         </p:nvSpPr>
         <p:spPr>
           <a:xfrm>
-            <a:off x="1371600" y="1600200"/>
-            <a:ext cx="9418320" cy="822960"/>
+            <a:off x="3017520" y="1627632"/>
+            <a:ext cx="7498079" cy="658368"/>
           </a:xfrm>
           <a:prstGeom prst="rect">
             <a:avLst/>
@@ -4332,40 +5057,83 @@
           <a:noFill/>
         </p:spPr>
         <p:txBody>
-          <a:bodyPr wrap="square">
+          <a:bodyPr wrap="none">
             <a:spAutoFit/>
           </a:bodyPr>
           <a:lstStyle/>
           <a:p>
-            <a:pPr algn="ctr">
+            <a:pPr algn="l">
               <a:spcAft>
                 <a:spcPts val="1000"/>
               </a:spcAft>
             </a:pPr>
             <a:r>
-              <a:rPr sz="3200" b="1">
+              <a:rPr sz="2100" b="0">
                 <a:solidFill>
-                  <a:srgbClr val="DC5028"/>
+                  <a:srgbClr val="502814"/>
                 </a:solidFill>
                 <a:latin typeface="Microsoft YaHei"/>
               </a:rPr>
-              <a:t>高手过招，吸引人的不只是「谁赢了」</a:t>
-            </a:r>
-          </a:p>
-        </p:txBody>
-      </p:sp>
-      <p:sp>
-        <p:nvSpPr>
-          <p:cNvPr id="9" name="Rectangle 8"/>
+              <a:t>悟空变鸟→二郎变鹰；悟空变鱼→二郎变鱼鹰</a:t>
+            </a:r>
+          </a:p>
+        </p:txBody>
+      </p:sp>
+      <p:sp>
+        <p:nvSpPr>
+          <p:cNvPr id="17" name="Rectangle 16"/>
           <p:cNvSpPr/>
           <p:nvPr/>
         </p:nvSpPr>
         <p:spPr>
           <a:xfrm>
-            <a:off x="3200400" y="4389120"/>
-            <a:ext cx="5760720" cy="27432"/>
-          </a:xfrm>
-          <a:prstGeom prst="rect">
+            <a:off x="1417320" y="3081527"/>
+            <a:ext cx="9601200" cy="13716"/>
+          </a:xfrm>
+          <a:prstGeom prst="rect">
+            <a:avLst/>
+          </a:prstGeom>
+          <a:solidFill>
+            <a:srgbClr val="D2C8AF"/>
+          </a:solidFill>
+          <a:ln>
+            <a:noFill/>
+          </a:ln>
+        </p:spPr>
+        <p:style>
+          <a:lnRef idx="1">
+            <a:schemeClr val="accent1"/>
+          </a:lnRef>
+          <a:fillRef idx="3">
+            <a:schemeClr val="accent1"/>
+          </a:fillRef>
+          <a:effectRef idx="2">
+            <a:schemeClr val="accent1"/>
+          </a:effectRef>
+          <a:fontRef idx="minor">
+            <a:schemeClr val="lt1"/>
+          </a:fontRef>
+        </p:style>
+        <p:txBody>
+          <a:bodyPr rtlCol="0" anchor="ctr"/>
+          <a:lstStyle/>
+          <a:p>
+            <a:pPr algn="ctr"/>
+          </a:p>
+        </p:txBody>
+      </p:sp>
+      <p:sp>
+        <p:nvSpPr>
+          <p:cNvPr id="18" name="Rounded Rectangle 17"/>
+          <p:cNvSpPr/>
+          <p:nvPr/>
+        </p:nvSpPr>
+        <p:spPr>
+          <a:xfrm>
+            <a:off x="1600200" y="2432303"/>
+            <a:ext cx="1280160" cy="347472"/>
+          </a:xfrm>
+          <a:prstGeom prst="roundRect">
             <a:avLst/>
           </a:prstGeom>
           <a:solidFill>
@@ -4399,14 +5167,14 @@
       </p:sp>
       <p:sp>
         <p:nvSpPr>
-          <p:cNvPr id="10" name="TextBox 9"/>
+          <p:cNvPr id="19" name="TextBox 18"/>
           <p:cNvSpPr txBox="1"/>
           <p:nvPr/>
         </p:nvSpPr>
         <p:spPr>
           <a:xfrm>
-            <a:off x="1828800" y="4663440"/>
-            <a:ext cx="8503920" cy="914400"/>
+            <a:off x="1600200" y="2450591"/>
+            <a:ext cx="1280160" cy="310896"/>
           </a:xfrm>
           <a:prstGeom prst="rect">
             <a:avLst/>
@@ -4425,13 +5193,380 @@
               </a:spcAft>
             </a:pPr>
             <a:r>
-              <a:rPr sz="2200" b="0">
+              <a:rPr sz="1800" b="1">
                 <a:solidFill>
-                  <a:srgbClr val="DC5028"/>
+                  <a:srgbClr val="502814"/>
                 </a:solidFill>
                 <a:latin typeface="Microsoft YaHei"/>
               </a:rPr>
-              <a:t>把自己当作赛事解说员，抓住每一次变化</a:t>
+              <a:t>第2轮</a:t>
+            </a:r>
+          </a:p>
+        </p:txBody>
+      </p:sp>
+      <p:sp>
+        <p:nvSpPr>
+          <p:cNvPr id="20" name="TextBox 19"/>
+          <p:cNvSpPr txBox="1"/>
+          <p:nvPr/>
+        </p:nvSpPr>
+        <p:spPr>
+          <a:xfrm>
+            <a:off x="3017520" y="2432303"/>
+            <a:ext cx="7498079" cy="658368"/>
+          </a:xfrm>
+          <a:prstGeom prst="rect">
+            <a:avLst/>
+          </a:prstGeom>
+          <a:noFill/>
+        </p:spPr>
+        <p:txBody>
+          <a:bodyPr wrap="none">
+            <a:spAutoFit/>
+          </a:bodyPr>
+          <a:lstStyle/>
+          <a:p>
+            <a:pPr algn="l">
+              <a:spcAft>
+                <a:spcPts val="1000"/>
+              </a:spcAft>
+            </a:pPr>
+            <a:r>
+              <a:rPr sz="2100" b="0">
+                <a:solidFill>
+                  <a:srgbClr val="502814"/>
+                </a:solidFill>
+                <a:latin typeface="Microsoft YaHei"/>
+              </a:rPr>
+              <a:t>悟空变水蛇→二郎变灰鹤；悟空变花鸨→二郎现原身</a:t>
+            </a:r>
+          </a:p>
+        </p:txBody>
+      </p:sp>
+      <p:sp>
+        <p:nvSpPr>
+          <p:cNvPr id="21" name="Rectangle 20"/>
+          <p:cNvSpPr/>
+          <p:nvPr/>
+        </p:nvSpPr>
+        <p:spPr>
+          <a:xfrm>
+            <a:off x="1417320" y="3886200"/>
+            <a:ext cx="9601200" cy="13716"/>
+          </a:xfrm>
+          <a:prstGeom prst="rect">
+            <a:avLst/>
+          </a:prstGeom>
+          <a:solidFill>
+            <a:srgbClr val="D2C8AF"/>
+          </a:solidFill>
+          <a:ln>
+            <a:noFill/>
+          </a:ln>
+        </p:spPr>
+        <p:style>
+          <a:lnRef idx="1">
+            <a:schemeClr val="accent1"/>
+          </a:lnRef>
+          <a:fillRef idx="3">
+            <a:schemeClr val="accent1"/>
+          </a:fillRef>
+          <a:effectRef idx="2">
+            <a:schemeClr val="accent1"/>
+          </a:effectRef>
+          <a:fontRef idx="minor">
+            <a:schemeClr val="lt1"/>
+          </a:fontRef>
+        </p:style>
+        <p:txBody>
+          <a:bodyPr rtlCol="0" anchor="ctr"/>
+          <a:lstStyle/>
+          <a:p>
+            <a:pPr algn="ctr"/>
+          </a:p>
+        </p:txBody>
+      </p:sp>
+      <p:sp>
+        <p:nvSpPr>
+          <p:cNvPr id="22" name="Rounded Rectangle 21"/>
+          <p:cNvSpPr/>
+          <p:nvPr/>
+        </p:nvSpPr>
+        <p:spPr>
+          <a:xfrm>
+            <a:off x="1600200" y="3236976"/>
+            <a:ext cx="1280160" cy="347472"/>
+          </a:xfrm>
+          <a:prstGeom prst="roundRect">
+            <a:avLst/>
+          </a:prstGeom>
+          <a:solidFill>
+            <a:srgbClr val="FFB464"/>
+          </a:solidFill>
+          <a:ln>
+            <a:noFill/>
+          </a:ln>
+        </p:spPr>
+        <p:style>
+          <a:lnRef idx="1">
+            <a:schemeClr val="accent1"/>
+          </a:lnRef>
+          <a:fillRef idx="3">
+            <a:schemeClr val="accent1"/>
+          </a:fillRef>
+          <a:effectRef idx="2">
+            <a:schemeClr val="accent1"/>
+          </a:effectRef>
+          <a:fontRef idx="minor">
+            <a:schemeClr val="lt1"/>
+          </a:fontRef>
+        </p:style>
+        <p:txBody>
+          <a:bodyPr rtlCol="0" anchor="ctr"/>
+          <a:lstStyle/>
+          <a:p>
+            <a:pPr algn="ctr"/>
+          </a:p>
+        </p:txBody>
+      </p:sp>
+      <p:sp>
+        <p:nvSpPr>
+          <p:cNvPr id="23" name="TextBox 22"/>
+          <p:cNvSpPr txBox="1"/>
+          <p:nvPr/>
+        </p:nvSpPr>
+        <p:spPr>
+          <a:xfrm>
+            <a:off x="1600200" y="3255264"/>
+            <a:ext cx="1280160" cy="310896"/>
+          </a:xfrm>
+          <a:prstGeom prst="rect">
+            <a:avLst/>
+          </a:prstGeom>
+          <a:noFill/>
+        </p:spPr>
+        <p:txBody>
+          <a:bodyPr wrap="none">
+            <a:spAutoFit/>
+          </a:bodyPr>
+          <a:lstStyle/>
+          <a:p>
+            <a:pPr algn="ctr">
+              <a:spcAft>
+                <a:spcPts val="1000"/>
+              </a:spcAft>
+            </a:pPr>
+            <a:r>
+              <a:rPr sz="1800" b="1">
+                <a:solidFill>
+                  <a:srgbClr val="502814"/>
+                </a:solidFill>
+                <a:latin typeface="Microsoft YaHei"/>
+              </a:rPr>
+              <a:t>第3轮</a:t>
+            </a:r>
+          </a:p>
+        </p:txBody>
+      </p:sp>
+      <p:sp>
+        <p:nvSpPr>
+          <p:cNvPr id="24" name="TextBox 23"/>
+          <p:cNvSpPr txBox="1"/>
+          <p:nvPr/>
+        </p:nvSpPr>
+        <p:spPr>
+          <a:xfrm>
+            <a:off x="3017520" y="3236976"/>
+            <a:ext cx="7498079" cy="658368"/>
+          </a:xfrm>
+          <a:prstGeom prst="rect">
+            <a:avLst/>
+          </a:prstGeom>
+          <a:noFill/>
+        </p:spPr>
+        <p:txBody>
+          <a:bodyPr wrap="none">
+            <a:spAutoFit/>
+          </a:bodyPr>
+          <a:lstStyle/>
+          <a:p>
+            <a:pPr algn="l">
+              <a:spcAft>
+                <a:spcPts val="1000"/>
+              </a:spcAft>
+            </a:pPr>
+            <a:r>
+              <a:rPr sz="2100" b="0">
+                <a:solidFill>
+                  <a:srgbClr val="502814"/>
+                </a:solidFill>
+                <a:latin typeface="Microsoft YaHei"/>
+              </a:rPr>
+              <a:t>悟空变庙宇，尾巴变旗竿→二郎识破</a:t>
+            </a:r>
+          </a:p>
+        </p:txBody>
+      </p:sp>
+      <p:sp>
+        <p:nvSpPr>
+          <p:cNvPr id="25" name="Rectangle 24"/>
+          <p:cNvSpPr/>
+          <p:nvPr/>
+        </p:nvSpPr>
+        <p:spPr>
+          <a:xfrm>
+            <a:off x="1417320" y="4690872"/>
+            <a:ext cx="9601200" cy="13716"/>
+          </a:xfrm>
+          <a:prstGeom prst="rect">
+            <a:avLst/>
+          </a:prstGeom>
+          <a:solidFill>
+            <a:srgbClr val="D2C8AF"/>
+          </a:solidFill>
+          <a:ln>
+            <a:noFill/>
+          </a:ln>
+        </p:spPr>
+        <p:style>
+          <a:lnRef idx="1">
+            <a:schemeClr val="accent1"/>
+          </a:lnRef>
+          <a:fillRef idx="3">
+            <a:schemeClr val="accent1"/>
+          </a:fillRef>
+          <a:effectRef idx="2">
+            <a:schemeClr val="accent1"/>
+          </a:effectRef>
+          <a:fontRef idx="minor">
+            <a:schemeClr val="lt1"/>
+          </a:fontRef>
+        </p:style>
+        <p:txBody>
+          <a:bodyPr rtlCol="0" anchor="ctr"/>
+          <a:lstStyle/>
+          <a:p>
+            <a:pPr algn="ctr"/>
+          </a:p>
+        </p:txBody>
+      </p:sp>
+      <p:sp>
+        <p:nvSpPr>
+          <p:cNvPr id="26" name="Rounded Rectangle 25"/>
+          <p:cNvSpPr/>
+          <p:nvPr/>
+        </p:nvSpPr>
+        <p:spPr>
+          <a:xfrm>
+            <a:off x="1600200" y="4041648"/>
+            <a:ext cx="1280160" cy="347472"/>
+          </a:xfrm>
+          <a:prstGeom prst="roundRect">
+            <a:avLst/>
+          </a:prstGeom>
+          <a:solidFill>
+            <a:srgbClr val="FFB464"/>
+          </a:solidFill>
+          <a:ln>
+            <a:noFill/>
+          </a:ln>
+        </p:spPr>
+        <p:style>
+          <a:lnRef idx="1">
+            <a:schemeClr val="accent1"/>
+          </a:lnRef>
+          <a:fillRef idx="3">
+            <a:schemeClr val="accent1"/>
+          </a:fillRef>
+          <a:effectRef idx="2">
+            <a:schemeClr val="accent1"/>
+          </a:effectRef>
+          <a:fontRef idx="minor">
+            <a:schemeClr val="lt1"/>
+          </a:fontRef>
+        </p:style>
+        <p:txBody>
+          <a:bodyPr rtlCol="0" anchor="ctr"/>
+          <a:lstStyle/>
+          <a:p>
+            <a:pPr algn="ctr"/>
+          </a:p>
+        </p:txBody>
+      </p:sp>
+      <p:sp>
+        <p:nvSpPr>
+          <p:cNvPr id="27" name="TextBox 26"/>
+          <p:cNvSpPr txBox="1"/>
+          <p:nvPr/>
+        </p:nvSpPr>
+        <p:spPr>
+          <a:xfrm>
+            <a:off x="1600200" y="4059936"/>
+            <a:ext cx="1280160" cy="310896"/>
+          </a:xfrm>
+          <a:prstGeom prst="rect">
+            <a:avLst/>
+          </a:prstGeom>
+          <a:noFill/>
+        </p:spPr>
+        <p:txBody>
+          <a:bodyPr wrap="none">
+            <a:spAutoFit/>
+          </a:bodyPr>
+          <a:lstStyle/>
+          <a:p>
+            <a:pPr algn="ctr">
+              <a:spcAft>
+                <a:spcPts val="1000"/>
+              </a:spcAft>
+            </a:pPr>
+            <a:r>
+              <a:rPr sz="1800" b="1">
+                <a:solidFill>
+                  <a:srgbClr val="502814"/>
+                </a:solidFill>
+                <a:latin typeface="Microsoft YaHei"/>
+              </a:rPr>
+              <a:t>规律</a:t>
+            </a:r>
+          </a:p>
+        </p:txBody>
+      </p:sp>
+      <p:sp>
+        <p:nvSpPr>
+          <p:cNvPr id="28" name="TextBox 27"/>
+          <p:cNvSpPr txBox="1"/>
+          <p:nvPr/>
+        </p:nvSpPr>
+        <p:spPr>
+          <a:xfrm>
+            <a:off x="3017520" y="4041648"/>
+            <a:ext cx="7498079" cy="658368"/>
+          </a:xfrm>
+          <a:prstGeom prst="rect">
+            <a:avLst/>
+          </a:prstGeom>
+          <a:noFill/>
+        </p:spPr>
+        <p:txBody>
+          <a:bodyPr wrap="none">
+            <a:spAutoFit/>
+          </a:bodyPr>
+          <a:lstStyle/>
+          <a:p>
+            <a:pPr algn="l">
+              <a:spcAft>
+                <a:spcPts val="1000"/>
+              </a:spcAft>
+            </a:pPr>
+            <a:r>
+              <a:rPr sz="2100" b="0">
+                <a:solidFill>
+                  <a:srgbClr val="502814"/>
+                </a:solidFill>
+                <a:latin typeface="Microsoft YaHei"/>
+              </a:rPr>
+              <a:t>孙悟空先变，二郎神随即以相克之物相对</a:t>
             </a:r>
           </a:p>
         </p:txBody>
@@ -4577,8 +5712,342 @@
         </p:nvSpPr>
         <p:spPr>
           <a:xfrm>
-            <a:off x="4953304" y="502920"/>
-            <a:ext cx="2286000" cy="411480"/>
+            <a:off x="502920" y="384048"/>
+            <a:ext cx="2011680" cy="384048"/>
+          </a:xfrm>
+          <a:prstGeom prst="roundRect">
+            <a:avLst/>
+          </a:prstGeom>
+          <a:solidFill>
+            <a:srgbClr val="DC5028"/>
+          </a:solidFill>
+          <a:ln>
+            <a:noFill/>
+          </a:ln>
+        </p:spPr>
+        <p:style>
+          <a:lnRef idx="1">
+            <a:schemeClr val="accent1"/>
+          </a:lnRef>
+          <a:fillRef idx="3">
+            <a:schemeClr val="accent1"/>
+          </a:fillRef>
+          <a:effectRef idx="2">
+            <a:schemeClr val="accent1"/>
+          </a:effectRef>
+          <a:fontRef idx="minor">
+            <a:schemeClr val="lt1"/>
+          </a:fontRef>
+        </p:style>
+        <p:txBody>
+          <a:bodyPr rtlCol="0" anchor="ctr"/>
+          <a:lstStyle/>
+          <a:p>
+            <a:pPr algn="ctr"/>
+          </a:p>
+        </p:txBody>
+      </p:sp>
+      <p:sp>
+        <p:nvSpPr>
+          <p:cNvPr id="7" name="TextBox 6"/>
+          <p:cNvSpPr txBox="1"/>
+          <p:nvPr/>
+        </p:nvSpPr>
+        <p:spPr>
+          <a:xfrm>
+            <a:off x="502920" y="402336"/>
+            <a:ext cx="2011680" cy="347472"/>
+          </a:xfrm>
+          <a:prstGeom prst="rect">
+            <a:avLst/>
+          </a:prstGeom>
+          <a:noFill/>
+        </p:spPr>
+        <p:txBody>
+          <a:bodyPr wrap="none">
+            <a:spAutoFit/>
+          </a:bodyPr>
+          <a:lstStyle/>
+          <a:p>
+            <a:pPr algn="ctr">
+              <a:spcAft>
+                <a:spcPts val="1000"/>
+              </a:spcAft>
+            </a:pPr>
+            <a:r>
+              <a:rPr sz="1600" b="1">
+                <a:solidFill>
+                  <a:srgbClr val="FFFFFF"/>
+                </a:solidFill>
+                <a:latin typeface="Microsoft YaHei"/>
+              </a:rPr>
+              <a:t>人物笔记</a:t>
+            </a:r>
+          </a:p>
+        </p:txBody>
+      </p:sp>
+      <p:sp>
+        <p:nvSpPr>
+          <p:cNvPr id="8" name="TextBox 7"/>
+          <p:cNvSpPr txBox="1"/>
+          <p:nvPr/>
+        </p:nvSpPr>
+        <p:spPr>
+          <a:xfrm>
+            <a:off x="1371600" y="384048"/>
+            <a:ext cx="9418320" cy="822960"/>
+          </a:xfrm>
+          <a:prstGeom prst="rect">
+            <a:avLst/>
+          </a:prstGeom>
+          <a:noFill/>
+        </p:spPr>
+        <p:txBody>
+          <a:bodyPr wrap="square">
+            <a:spAutoFit/>
+          </a:bodyPr>
+          <a:lstStyle/>
+          <a:p>
+            <a:pPr algn="ctr">
+              <a:spcAft>
+                <a:spcPts val="1000"/>
+              </a:spcAft>
+            </a:pPr>
+            <a:r>
+              <a:rPr sz="3400" b="1">
+                <a:solidFill>
+                  <a:srgbClr val="DC5028"/>
+                </a:solidFill>
+                <a:latin typeface="Microsoft YaHei"/>
+              </a:rPr>
+              <a:t>人物赏析</a:t>
+            </a:r>
+          </a:p>
+        </p:txBody>
+      </p:sp>
+      <p:sp>
+        <p:nvSpPr>
+          <p:cNvPr id="9" name="Rounded Rectangle 8"/>
+          <p:cNvSpPr/>
+          <p:nvPr/>
+        </p:nvSpPr>
+        <p:spPr>
+          <a:xfrm>
+            <a:off x="1067104" y="1143000"/>
+            <a:ext cx="10058400" cy="3721608"/>
+          </a:xfrm>
+          <a:prstGeom prst="roundRect">
+            <a:avLst/>
+          </a:prstGeom>
+          <a:solidFill>
+            <a:srgbClr val="FFFCEB"/>
+          </a:solidFill>
+          <a:ln w="25400">
+            <a:solidFill>
+              <a:srgbClr val="C85A32"/>
+            </a:solidFill>
+          </a:ln>
+        </p:spPr>
+        <p:style>
+          <a:lnRef idx="1">
+            <a:schemeClr val="accent1"/>
+          </a:lnRef>
+          <a:fillRef idx="3">
+            <a:schemeClr val="accent1"/>
+          </a:fillRef>
+          <a:effectRef idx="2">
+            <a:schemeClr val="accent1"/>
+          </a:effectRef>
+          <a:fontRef idx="minor">
+            <a:schemeClr val="lt1"/>
+          </a:fontRef>
+        </p:style>
+        <p:txBody>
+          <a:bodyPr rtlCol="0" anchor="ctr"/>
+          <a:lstStyle/>
+          <a:p>
+            <a:pPr algn="ctr"/>
+          </a:p>
+        </p:txBody>
+      </p:sp>
+      <p:sp>
+        <p:nvSpPr>
+          <p:cNvPr id="10" name="Rectangle 9"/>
+          <p:cNvSpPr/>
+          <p:nvPr/>
+        </p:nvSpPr>
+        <p:spPr>
+          <a:xfrm>
+            <a:off x="1067104" y="1143000"/>
+            <a:ext cx="10058400" cy="384048"/>
+          </a:xfrm>
+          <a:prstGeom prst="rect">
+            <a:avLst/>
+          </a:prstGeom>
+          <a:solidFill>
+            <a:srgbClr val="DC5028"/>
+          </a:solidFill>
+          <a:ln>
+            <a:noFill/>
+          </a:ln>
+        </p:spPr>
+        <p:style>
+          <a:lnRef idx="1">
+            <a:schemeClr val="accent1"/>
+          </a:lnRef>
+          <a:fillRef idx="3">
+            <a:schemeClr val="accent1"/>
+          </a:fillRef>
+          <a:effectRef idx="2">
+            <a:schemeClr val="accent1"/>
+          </a:effectRef>
+          <a:fontRef idx="minor">
+            <a:schemeClr val="lt1"/>
+          </a:fontRef>
+        </p:style>
+        <p:txBody>
+          <a:bodyPr rtlCol="0" anchor="ctr"/>
+          <a:lstStyle/>
+          <a:p>
+            <a:pPr algn="ctr"/>
+          </a:p>
+        </p:txBody>
+      </p:sp>
+      <p:sp>
+        <p:nvSpPr>
+          <p:cNvPr id="11" name="TextBox 10"/>
+          <p:cNvSpPr txBox="1"/>
+          <p:nvPr/>
+        </p:nvSpPr>
+        <p:spPr>
+          <a:xfrm>
+            <a:off x="1067104" y="1179576"/>
+            <a:ext cx="10058400" cy="347472"/>
+          </a:xfrm>
+          <a:prstGeom prst="rect">
+            <a:avLst/>
+          </a:prstGeom>
+          <a:noFill/>
+        </p:spPr>
+        <p:txBody>
+          <a:bodyPr wrap="none">
+            <a:spAutoFit/>
+          </a:bodyPr>
+          <a:lstStyle/>
+          <a:p>
+            <a:pPr algn="ctr">
+              <a:spcAft>
+                <a:spcPts val="1000"/>
+              </a:spcAft>
+            </a:pPr>
+            <a:r>
+              <a:rPr sz="1800" b="1">
+                <a:solidFill>
+                  <a:srgbClr val="FFFFFF"/>
+                </a:solidFill>
+                <a:latin typeface="Microsoft YaHei"/>
+              </a:rPr>
+              <a:t>📝  课堂笔记  —  请摘抄要点</a:t>
+            </a:r>
+          </a:p>
+        </p:txBody>
+      </p:sp>
+      <p:sp>
+        <p:nvSpPr>
+          <p:cNvPr id="12" name="Rectangle 11"/>
+          <p:cNvSpPr/>
+          <p:nvPr/>
+        </p:nvSpPr>
+        <p:spPr>
+          <a:xfrm>
+            <a:off x="1570024" y="1527048"/>
+            <a:ext cx="27432" cy="3337560"/>
+          </a:xfrm>
+          <a:prstGeom prst="rect">
+            <a:avLst/>
+          </a:prstGeom>
+          <a:solidFill>
+            <a:srgbClr val="DC5050"/>
+          </a:solidFill>
+          <a:ln>
+            <a:noFill/>
+          </a:ln>
+        </p:spPr>
+        <p:style>
+          <a:lnRef idx="1">
+            <a:schemeClr val="accent1"/>
+          </a:lnRef>
+          <a:fillRef idx="3">
+            <a:schemeClr val="accent1"/>
+          </a:fillRef>
+          <a:effectRef idx="2">
+            <a:schemeClr val="accent1"/>
+          </a:effectRef>
+          <a:fontRef idx="minor">
+            <a:schemeClr val="lt1"/>
+          </a:fontRef>
+        </p:style>
+        <p:txBody>
+          <a:bodyPr rtlCol="0" anchor="ctr"/>
+          <a:lstStyle/>
+          <a:p>
+            <a:pPr algn="ctr"/>
+          </a:p>
+        </p:txBody>
+      </p:sp>
+      <p:sp>
+        <p:nvSpPr>
+          <p:cNvPr id="13" name="Rectangle 12"/>
+          <p:cNvSpPr/>
+          <p:nvPr/>
+        </p:nvSpPr>
+        <p:spPr>
+          <a:xfrm>
+            <a:off x="1417320" y="2276856"/>
+            <a:ext cx="9601200" cy="13716"/>
+          </a:xfrm>
+          <a:prstGeom prst="rect">
+            <a:avLst/>
+          </a:prstGeom>
+          <a:solidFill>
+            <a:srgbClr val="D2C8AF"/>
+          </a:solidFill>
+          <a:ln>
+            <a:noFill/>
+          </a:ln>
+        </p:spPr>
+        <p:style>
+          <a:lnRef idx="1">
+            <a:schemeClr val="accent1"/>
+          </a:lnRef>
+          <a:fillRef idx="3">
+            <a:schemeClr val="accent1"/>
+          </a:fillRef>
+          <a:effectRef idx="2">
+            <a:schemeClr val="accent1"/>
+          </a:effectRef>
+          <a:fontRef idx="minor">
+            <a:schemeClr val="lt1"/>
+          </a:fontRef>
+        </p:style>
+        <p:txBody>
+          <a:bodyPr rtlCol="0" anchor="ctr"/>
+          <a:lstStyle/>
+          <a:p>
+            <a:pPr algn="ctr"/>
+          </a:p>
+        </p:txBody>
+      </p:sp>
+      <p:sp>
+        <p:nvSpPr>
+          <p:cNvPr id="14" name="Rounded Rectangle 13"/>
+          <p:cNvSpPr/>
+          <p:nvPr/>
+        </p:nvSpPr>
+        <p:spPr>
+          <a:xfrm>
+            <a:off x="1600200" y="1627632"/>
+            <a:ext cx="1280160" cy="347472"/>
           </a:xfrm>
           <a:prstGeom prst="roundRect">
             <a:avLst/>
@@ -4614,14 +6083,14 @@
       </p:sp>
       <p:sp>
         <p:nvSpPr>
-          <p:cNvPr id="7" name="TextBox 6"/>
+          <p:cNvPr id="15" name="TextBox 14"/>
           <p:cNvSpPr txBox="1"/>
           <p:nvPr/>
         </p:nvSpPr>
         <p:spPr>
           <a:xfrm>
-            <a:off x="4953304" y="521208"/>
-            <a:ext cx="2286000" cy="384048"/>
+            <a:off x="1600200" y="1645920"/>
+            <a:ext cx="1280160" cy="310896"/>
           </a:xfrm>
           <a:prstGeom prst="rect">
             <a:avLst/>
@@ -4646,21 +6115,21 @@
                 </a:solidFill>
                 <a:latin typeface="Microsoft YaHei"/>
               </a:rPr>
-              <a:t>变形追逐图</a:t>
-            </a:r>
-          </a:p>
-        </p:txBody>
-      </p:sp>
-      <p:sp>
-        <p:nvSpPr>
-          <p:cNvPr id="8" name="TextBox 7"/>
+              <a:t>孙悟空</a:t>
+            </a:r>
+          </a:p>
+        </p:txBody>
+      </p:sp>
+      <p:sp>
+        <p:nvSpPr>
+          <p:cNvPr id="16" name="TextBox 15"/>
           <p:cNvSpPr txBox="1"/>
           <p:nvPr/>
         </p:nvSpPr>
         <p:spPr>
           <a:xfrm>
-            <a:off x="1371600" y="960120"/>
-            <a:ext cx="9418320" cy="822960"/>
+            <a:off x="3017520" y="1627632"/>
+            <a:ext cx="7498079" cy="658368"/>
           </a:xfrm>
           <a:prstGeom prst="rect">
             <a:avLst/>
@@ -4668,40 +6137,83 @@
           <a:noFill/>
         </p:spPr>
         <p:txBody>
-          <a:bodyPr wrap="square">
+          <a:bodyPr wrap="none">
             <a:spAutoFit/>
           </a:bodyPr>
           <a:lstStyle/>
           <a:p>
-            <a:pPr algn="ctr">
+            <a:pPr algn="l">
               <a:spcAft>
                 <a:spcPts val="1000"/>
               </a:spcAft>
             </a:pPr>
             <a:r>
-              <a:rPr sz="3600" b="1">
+              <a:rPr sz="2100" b="0">
                 <a:solidFill>
-                  <a:srgbClr val="DC5028"/>
+                  <a:srgbClr val="502814"/>
                 </a:solidFill>
                 <a:latin typeface="Microsoft YaHei"/>
               </a:rPr>
-              <a:t>学习任务一</a:t>
-            </a:r>
-          </a:p>
-        </p:txBody>
-      </p:sp>
-      <p:sp>
-        <p:nvSpPr>
-          <p:cNvPr id="9" name="Rectangle 8"/>
+              <a:t>机敏善变、好胜不屈，追求自由（证据：连续变化、不肯认输）</a:t>
+            </a:r>
+          </a:p>
+        </p:txBody>
+      </p:sp>
+      <p:sp>
+        <p:nvSpPr>
+          <p:cNvPr id="17" name="Rectangle 16"/>
           <p:cNvSpPr/>
           <p:nvPr/>
         </p:nvSpPr>
         <p:spPr>
           <a:xfrm>
-            <a:off x="3200400" y="1600200"/>
-            <a:ext cx="5760720" cy="27432"/>
-          </a:xfrm>
-          <a:prstGeom prst="rect">
+            <a:off x="1417320" y="3081527"/>
+            <a:ext cx="9601200" cy="13716"/>
+          </a:xfrm>
+          <a:prstGeom prst="rect">
+            <a:avLst/>
+          </a:prstGeom>
+          <a:solidFill>
+            <a:srgbClr val="D2C8AF"/>
+          </a:solidFill>
+          <a:ln>
+            <a:noFill/>
+          </a:ln>
+        </p:spPr>
+        <p:style>
+          <a:lnRef idx="1">
+            <a:schemeClr val="accent1"/>
+          </a:lnRef>
+          <a:fillRef idx="3">
+            <a:schemeClr val="accent1"/>
+          </a:fillRef>
+          <a:effectRef idx="2">
+            <a:schemeClr val="accent1"/>
+          </a:effectRef>
+          <a:fontRef idx="minor">
+            <a:schemeClr val="lt1"/>
+          </a:fontRef>
+        </p:style>
+        <p:txBody>
+          <a:bodyPr rtlCol="0" anchor="ctr"/>
+          <a:lstStyle/>
+          <a:p>
+            <a:pPr algn="ctr"/>
+          </a:p>
+        </p:txBody>
+      </p:sp>
+      <p:sp>
+        <p:nvSpPr>
+          <p:cNvPr id="18" name="Rounded Rectangle 17"/>
+          <p:cNvSpPr/>
+          <p:nvPr/>
+        </p:nvSpPr>
+        <p:spPr>
+          <a:xfrm>
+            <a:off x="1600200" y="2432303"/>
+            <a:ext cx="1280160" cy="347472"/>
+          </a:xfrm>
+          <a:prstGeom prst="roundRect">
             <a:avLst/>
           </a:prstGeom>
           <a:solidFill>
@@ -4735,25 +6247,101 @@
       </p:sp>
       <p:sp>
         <p:nvSpPr>
-          <p:cNvPr id="10" name="Rounded Rectangle 9"/>
+          <p:cNvPr id="19" name="TextBox 18"/>
+          <p:cNvSpPr txBox="1"/>
+          <p:nvPr/>
+        </p:nvSpPr>
+        <p:spPr>
+          <a:xfrm>
+            <a:off x="1600200" y="2450591"/>
+            <a:ext cx="1280160" cy="310896"/>
+          </a:xfrm>
+          <a:prstGeom prst="rect">
+            <a:avLst/>
+          </a:prstGeom>
+          <a:noFill/>
+        </p:spPr>
+        <p:txBody>
+          <a:bodyPr wrap="none">
+            <a:spAutoFit/>
+          </a:bodyPr>
+          <a:lstStyle/>
+          <a:p>
+            <a:pPr algn="ctr">
+              <a:spcAft>
+                <a:spcPts val="1000"/>
+              </a:spcAft>
+            </a:pPr>
+            <a:r>
+              <a:rPr sz="1800" b="1">
+                <a:solidFill>
+                  <a:srgbClr val="502814"/>
+                </a:solidFill>
+                <a:latin typeface="Microsoft YaHei"/>
+              </a:rPr>
+              <a:t>二郎神</a:t>
+            </a:r>
+          </a:p>
+        </p:txBody>
+      </p:sp>
+      <p:sp>
+        <p:nvSpPr>
+          <p:cNvPr id="20" name="TextBox 19"/>
+          <p:cNvSpPr txBox="1"/>
+          <p:nvPr/>
+        </p:nvSpPr>
+        <p:spPr>
+          <a:xfrm>
+            <a:off x="3017520" y="2432303"/>
+            <a:ext cx="7498079" cy="658368"/>
+          </a:xfrm>
+          <a:prstGeom prst="rect">
+            <a:avLst/>
+          </a:prstGeom>
+          <a:noFill/>
+        </p:spPr>
+        <p:txBody>
+          <a:bodyPr wrap="none">
+            <a:spAutoFit/>
+          </a:bodyPr>
+          <a:lstStyle/>
+          <a:p>
+            <a:pPr algn="l">
+              <a:spcAft>
+                <a:spcPts val="1000"/>
+              </a:spcAft>
+            </a:pPr>
+            <a:r>
+              <a:rPr sz="2100" b="0">
+                <a:solidFill>
+                  <a:srgbClr val="502814"/>
+                </a:solidFill>
+                <a:latin typeface="Microsoft YaHei"/>
+              </a:rPr>
+              <a:t>沉着冷静、法力高强，维护天庭秩序（证据：紧追不舍、识破破绽）</a:t>
+            </a:r>
+          </a:p>
+        </p:txBody>
+      </p:sp>
+      <p:sp>
+        <p:nvSpPr>
+          <p:cNvPr id="21" name="Rectangle 20"/>
           <p:cNvSpPr/>
           <p:nvPr/>
         </p:nvSpPr>
         <p:spPr>
           <a:xfrm>
-            <a:off x="1295704" y="1645920"/>
-            <a:ext cx="9601200" cy="2240280"/>
-          </a:xfrm>
-          <a:prstGeom prst="roundRect">
+            <a:off x="1417320" y="3886200"/>
+            <a:ext cx="9601200" cy="13716"/>
+          </a:xfrm>
+          <a:prstGeom prst="rect">
             <a:avLst/>
           </a:prstGeom>
           <a:solidFill>
-            <a:srgbClr val="FFF8F0"/>
+            <a:srgbClr val="D2C8AF"/>
           </a:solidFill>
-          <a:ln w="19050">
-            <a:solidFill>
-              <a:srgbClr val="FFB464"/>
-            </a:solidFill>
+          <a:ln>
+            <a:noFill/>
           </a:ln>
         </p:spPr>
         <p:style>
@@ -4780,20 +6368,20 @@
       </p:sp>
       <p:sp>
         <p:nvSpPr>
-          <p:cNvPr id="11" name="Oval 10"/>
+          <p:cNvPr id="22" name="Rounded Rectangle 21"/>
           <p:cNvSpPr/>
           <p:nvPr/>
         </p:nvSpPr>
         <p:spPr>
           <a:xfrm>
-            <a:off x="2255824" y="1828800"/>
-            <a:ext cx="384048" cy="384048"/>
-          </a:xfrm>
-          <a:prstGeom prst="ellipse">
+            <a:off x="1600200" y="3236976"/>
+            <a:ext cx="1444752" cy="347472"/>
+          </a:xfrm>
+          <a:prstGeom prst="roundRect">
             <a:avLst/>
           </a:prstGeom>
           <a:solidFill>
-            <a:srgbClr val="DC5028"/>
+            <a:srgbClr val="FFB464"/>
           </a:solidFill>
           <a:ln>
             <a:noFill/>
@@ -4823,14 +6411,14 @@
       </p:sp>
       <p:sp>
         <p:nvSpPr>
-          <p:cNvPr id="12" name="TextBox 11"/>
+          <p:cNvPr id="23" name="TextBox 22"/>
           <p:cNvSpPr txBox="1"/>
           <p:nvPr/>
         </p:nvSpPr>
         <p:spPr>
           <a:xfrm>
-            <a:off x="2255824" y="1847088"/>
-            <a:ext cx="384048" cy="365760"/>
+            <a:off x="1600200" y="3255264"/>
+            <a:ext cx="1444752" cy="310896"/>
           </a:xfrm>
           <a:prstGeom prst="rect">
             <a:avLst/>
@@ -4849,27 +6437,27 @@
               </a:spcAft>
             </a:pPr>
             <a:r>
-              <a:rPr sz="1600" b="1">
+              <a:rPr sz="1800" b="1">
                 <a:solidFill>
-                  <a:srgbClr val="FFFFFF"/>
+                  <a:srgbClr val="502814"/>
                 </a:solidFill>
                 <a:latin typeface="Microsoft YaHei"/>
               </a:rPr>
-              <a:t>1</a:t>
-            </a:r>
-          </a:p>
-        </p:txBody>
-      </p:sp>
-      <p:sp>
-        <p:nvSpPr>
-          <p:cNvPr id="13" name="TextBox 12"/>
+              <a:t>分析方法</a:t>
+            </a:r>
+          </a:p>
+        </p:txBody>
+      </p:sp>
+      <p:sp>
+        <p:nvSpPr>
+          <p:cNvPr id="24" name="TextBox 23"/>
           <p:cNvSpPr txBox="1"/>
           <p:nvPr/>
         </p:nvSpPr>
         <p:spPr>
           <a:xfrm>
-            <a:off x="2758744" y="1810512"/>
-            <a:ext cx="7772400" cy="502920"/>
+            <a:off x="3182112" y="3236976"/>
+            <a:ext cx="7333488" cy="658368"/>
           </a:xfrm>
           <a:prstGeom prst="rect">
             <a:avLst/>
@@ -4888,33 +6476,33 @@
               </a:spcAft>
             </a:pPr>
             <a:r>
-              <a:rPr sz="2400" b="0">
+              <a:rPr sz="2100" b="0">
                 <a:solidFill>
                   <a:srgbClr val="502814"/>
                 </a:solidFill>
                 <a:latin typeface="Microsoft YaHei"/>
               </a:rPr>
-              <a:t>默读课文，圈出每次「变作」对象，标序号</a:t>
-            </a:r>
-          </a:p>
-        </p:txBody>
-      </p:sp>
-      <p:sp>
-        <p:nvSpPr>
-          <p:cNvPr id="14" name="Oval 13"/>
+              <a:t>证据—特点—作用：找细节→概括性格→联系主题</a:t>
+            </a:r>
+          </a:p>
+        </p:txBody>
+      </p:sp>
+      <p:sp>
+        <p:nvSpPr>
+          <p:cNvPr id="25" name="Rectangle 24"/>
           <p:cNvSpPr/>
           <p:nvPr/>
         </p:nvSpPr>
         <p:spPr>
           <a:xfrm>
-            <a:off x="2255824" y="2395728"/>
-            <a:ext cx="384048" cy="384048"/>
-          </a:xfrm>
-          <a:prstGeom prst="ellipse">
+            <a:off x="1417320" y="4690872"/>
+            <a:ext cx="9601200" cy="13716"/>
+          </a:xfrm>
+          <a:prstGeom prst="rect">
             <a:avLst/>
           </a:prstGeom>
           <a:solidFill>
-            <a:srgbClr val="DC5028"/>
+            <a:srgbClr val="D2C8AF"/>
           </a:solidFill>
           <a:ln>
             <a:noFill/>
@@ -4944,14 +6532,57 @@
       </p:sp>
       <p:sp>
         <p:nvSpPr>
-          <p:cNvPr id="15" name="TextBox 14"/>
+          <p:cNvPr id="26" name="Rounded Rectangle 25"/>
+          <p:cNvSpPr/>
+          <p:nvPr/>
+        </p:nvSpPr>
+        <p:spPr>
+          <a:xfrm>
+            <a:off x="1600200" y="4041648"/>
+            <a:ext cx="1280160" cy="347472"/>
+          </a:xfrm>
+          <a:prstGeom prst="roundRect">
+            <a:avLst/>
+          </a:prstGeom>
+          <a:solidFill>
+            <a:srgbClr val="FFB464"/>
+          </a:solidFill>
+          <a:ln>
+            <a:noFill/>
+          </a:ln>
+        </p:spPr>
+        <p:style>
+          <a:lnRef idx="1">
+            <a:schemeClr val="accent1"/>
+          </a:lnRef>
+          <a:fillRef idx="3">
+            <a:schemeClr val="accent1"/>
+          </a:fillRef>
+          <a:effectRef idx="2">
+            <a:schemeClr val="accent1"/>
+          </a:effectRef>
+          <a:fontRef idx="minor">
+            <a:schemeClr val="lt1"/>
+          </a:fontRef>
+        </p:style>
+        <p:txBody>
+          <a:bodyPr rtlCol="0" anchor="ctr"/>
+          <a:lstStyle/>
+          <a:p>
+            <a:pPr algn="ctr"/>
+          </a:p>
+        </p:txBody>
+      </p:sp>
+      <p:sp>
+        <p:nvSpPr>
+          <p:cNvPr id="27" name="TextBox 26"/>
           <p:cNvSpPr txBox="1"/>
           <p:nvPr/>
         </p:nvSpPr>
         <p:spPr>
           <a:xfrm>
-            <a:off x="2255824" y="2414016"/>
-            <a:ext cx="384048" cy="365760"/>
+            <a:off x="1600200" y="4059936"/>
+            <a:ext cx="1280160" cy="310896"/>
           </a:xfrm>
           <a:prstGeom prst="rect">
             <a:avLst/>
@@ -4970,27 +6601,27 @@
               </a:spcAft>
             </a:pPr>
             <a:r>
-              <a:rPr sz="1600" b="1">
+              <a:rPr sz="1800" b="1">
                 <a:solidFill>
-                  <a:srgbClr val="FFFFFF"/>
+                  <a:srgbClr val="502814"/>
                 </a:solidFill>
                 <a:latin typeface="Microsoft YaHei"/>
               </a:rPr>
-              <a:t>2</a:t>
-            </a:r>
-          </a:p>
-        </p:txBody>
-      </p:sp>
-      <p:sp>
-        <p:nvSpPr>
-          <p:cNvPr id="16" name="TextBox 15"/>
+              <a:t>变旗竿</a:t>
+            </a:r>
+          </a:p>
+        </p:txBody>
+      </p:sp>
+      <p:sp>
+        <p:nvSpPr>
+          <p:cNvPr id="28" name="TextBox 27"/>
           <p:cNvSpPr txBox="1"/>
           <p:nvPr/>
         </p:nvSpPr>
         <p:spPr>
           <a:xfrm>
-            <a:off x="2758744" y="2377440"/>
-            <a:ext cx="7772400" cy="502920"/>
+            <a:off x="3017520" y="4041648"/>
+            <a:ext cx="7498079" cy="658368"/>
           </a:xfrm>
           <a:prstGeom prst="rect">
             <a:avLst/>
@@ -5009,134 +6640,13 @@
               </a:spcAft>
             </a:pPr>
             <a:r>
-              <a:rPr sz="2400" b="0">
+              <a:rPr sz="2100" b="0">
                 <a:solidFill>
                   <a:srgbClr val="502814"/>
                 </a:solidFill>
                 <a:latin typeface="Microsoft YaHei"/>
               </a:rPr>
-              <a:t>填写七十二变对照表（孙悟空先变—二郎神相克）</a:t>
-            </a:r>
-          </a:p>
-        </p:txBody>
-      </p:sp>
-      <p:sp>
-        <p:nvSpPr>
-          <p:cNvPr id="17" name="Oval 16"/>
-          <p:cNvSpPr/>
-          <p:nvPr/>
-        </p:nvSpPr>
-        <p:spPr>
-          <a:xfrm>
-            <a:off x="2255824" y="2962656"/>
-            <a:ext cx="384048" cy="384048"/>
-          </a:xfrm>
-          <a:prstGeom prst="ellipse">
-            <a:avLst/>
-          </a:prstGeom>
-          <a:solidFill>
-            <a:srgbClr val="DC5028"/>
-          </a:solidFill>
-          <a:ln>
-            <a:noFill/>
-          </a:ln>
-        </p:spPr>
-        <p:style>
-          <a:lnRef idx="1">
-            <a:schemeClr val="accent1"/>
-          </a:lnRef>
-          <a:fillRef idx="3">
-            <a:schemeClr val="accent1"/>
-          </a:fillRef>
-          <a:effectRef idx="2">
-            <a:schemeClr val="accent1"/>
-          </a:effectRef>
-          <a:fontRef idx="minor">
-            <a:schemeClr val="lt1"/>
-          </a:fontRef>
-        </p:style>
-        <p:txBody>
-          <a:bodyPr rtlCol="0" anchor="ctr"/>
-          <a:lstStyle/>
-          <a:p>
-            <a:pPr algn="ctr"/>
-          </a:p>
-        </p:txBody>
-      </p:sp>
-      <p:sp>
-        <p:nvSpPr>
-          <p:cNvPr id="18" name="TextBox 17"/>
-          <p:cNvSpPr txBox="1"/>
-          <p:nvPr/>
-        </p:nvSpPr>
-        <p:spPr>
-          <a:xfrm>
-            <a:off x="2255824" y="2980944"/>
-            <a:ext cx="384048" cy="365760"/>
-          </a:xfrm>
-          <a:prstGeom prst="rect">
-            <a:avLst/>
-          </a:prstGeom>
-          <a:noFill/>
-        </p:spPr>
-        <p:txBody>
-          <a:bodyPr wrap="none">
-            <a:spAutoFit/>
-          </a:bodyPr>
-          <a:lstStyle/>
-          <a:p>
-            <a:pPr algn="ctr">
-              <a:spcAft>
-                <a:spcPts val="1000"/>
-              </a:spcAft>
-            </a:pPr>
-            <a:r>
-              <a:rPr sz="1600" b="1">
-                <a:solidFill>
-                  <a:srgbClr val="FFFFFF"/>
-                </a:solidFill>
-                <a:latin typeface="Microsoft YaHei"/>
-              </a:rPr>
-              <a:t>3</a:t>
-            </a:r>
-          </a:p>
-        </p:txBody>
-      </p:sp>
-      <p:sp>
-        <p:nvSpPr>
-          <p:cNvPr id="19" name="TextBox 18"/>
-          <p:cNvSpPr txBox="1"/>
-          <p:nvPr/>
-        </p:nvSpPr>
-        <p:spPr>
-          <a:xfrm>
-            <a:off x="2758744" y="2944368"/>
-            <a:ext cx="7772400" cy="502920"/>
-          </a:xfrm>
-          <a:prstGeom prst="rect">
-            <a:avLst/>
-          </a:prstGeom>
-          <a:noFill/>
-        </p:spPr>
-        <p:txBody>
-          <a:bodyPr wrap="none">
-            <a:spAutoFit/>
-          </a:bodyPr>
-          <a:lstStyle/>
-          <a:p>
-            <a:pPr algn="l">
-              <a:spcAft>
-                <a:spcPts val="1000"/>
-              </a:spcAft>
-            </a:pPr>
-            <a:r>
-              <a:rPr sz="2400" b="0">
-                <a:solidFill>
-                  <a:srgbClr val="502814"/>
-                </a:solidFill>
-                <a:latin typeface="Microsoft YaHei"/>
-              </a:rPr>
-              <a:t>用「孙悟空先……，二郎神便……」复述最精彩一轮</a:t>
+              <a:t>紧张又好笑——神通广大也有露馅之时</a:t>
             </a:r>
           </a:p>
         </p:txBody>
@@ -5282,8 +6792,342 @@
         </p:nvSpPr>
         <p:spPr>
           <a:xfrm>
-            <a:off x="4953304" y="502920"/>
-            <a:ext cx="2286000" cy="411480"/>
+            <a:off x="502920" y="384048"/>
+            <a:ext cx="2011680" cy="384048"/>
+          </a:xfrm>
+          <a:prstGeom prst="roundRect">
+            <a:avLst/>
+          </a:prstGeom>
+          <a:solidFill>
+            <a:srgbClr val="DC5028"/>
+          </a:solidFill>
+          <a:ln>
+            <a:noFill/>
+          </a:ln>
+        </p:spPr>
+        <p:style>
+          <a:lnRef idx="1">
+            <a:schemeClr val="accent1"/>
+          </a:lnRef>
+          <a:fillRef idx="3">
+            <a:schemeClr val="accent1"/>
+          </a:fillRef>
+          <a:effectRef idx="2">
+            <a:schemeClr val="accent1"/>
+          </a:effectRef>
+          <a:fontRef idx="minor">
+            <a:schemeClr val="lt1"/>
+          </a:fontRef>
+        </p:style>
+        <p:txBody>
+          <a:bodyPr rtlCol="0" anchor="ctr"/>
+          <a:lstStyle/>
+          <a:p>
+            <a:pPr algn="ctr"/>
+          </a:p>
+        </p:txBody>
+      </p:sp>
+      <p:sp>
+        <p:nvSpPr>
+          <p:cNvPr id="7" name="TextBox 6"/>
+          <p:cNvSpPr txBox="1"/>
+          <p:nvPr/>
+        </p:nvSpPr>
+        <p:spPr>
+          <a:xfrm>
+            <a:off x="502920" y="402336"/>
+            <a:ext cx="2011680" cy="347472"/>
+          </a:xfrm>
+          <a:prstGeom prst="rect">
+            <a:avLst/>
+          </a:prstGeom>
+          <a:noFill/>
+        </p:spPr>
+        <p:txBody>
+          <a:bodyPr wrap="none">
+            <a:spAutoFit/>
+          </a:bodyPr>
+          <a:lstStyle/>
+          <a:p>
+            <a:pPr algn="ctr">
+              <a:spcAft>
+                <a:spcPts val="1000"/>
+              </a:spcAft>
+            </a:pPr>
+            <a:r>
+              <a:rPr sz="1600" b="1">
+                <a:solidFill>
+                  <a:srgbClr val="FFFFFF"/>
+                </a:solidFill>
+                <a:latin typeface="Microsoft YaHei"/>
+              </a:rPr>
+              <a:t>主题笔记</a:t>
+            </a:r>
+          </a:p>
+        </p:txBody>
+      </p:sp>
+      <p:sp>
+        <p:nvSpPr>
+          <p:cNvPr id="8" name="TextBox 7"/>
+          <p:cNvSpPr txBox="1"/>
+          <p:nvPr/>
+        </p:nvSpPr>
+        <p:spPr>
+          <a:xfrm>
+            <a:off x="1371600" y="384048"/>
+            <a:ext cx="9418320" cy="822960"/>
+          </a:xfrm>
+          <a:prstGeom prst="rect">
+            <a:avLst/>
+          </a:prstGeom>
+          <a:noFill/>
+        </p:spPr>
+        <p:txBody>
+          <a:bodyPr wrap="square">
+            <a:spAutoFit/>
+          </a:bodyPr>
+          <a:lstStyle/>
+          <a:p>
+            <a:pPr algn="ctr">
+              <a:spcAft>
+                <a:spcPts val="1000"/>
+              </a:spcAft>
+            </a:pPr>
+            <a:r>
+              <a:rPr sz="3400" b="1">
+                <a:solidFill>
+                  <a:srgbClr val="DC5028"/>
+                </a:solidFill>
+                <a:latin typeface="Microsoft YaHei"/>
+              </a:rPr>
+              <a:t>名家点评</a:t>
+            </a:r>
+          </a:p>
+        </p:txBody>
+      </p:sp>
+      <p:sp>
+        <p:nvSpPr>
+          <p:cNvPr id="9" name="Rounded Rectangle 8"/>
+          <p:cNvSpPr/>
+          <p:nvPr/>
+        </p:nvSpPr>
+        <p:spPr>
+          <a:xfrm>
+            <a:off x="1067104" y="1143000"/>
+            <a:ext cx="10058400" cy="3721608"/>
+          </a:xfrm>
+          <a:prstGeom prst="roundRect">
+            <a:avLst/>
+          </a:prstGeom>
+          <a:solidFill>
+            <a:srgbClr val="FFFCEB"/>
+          </a:solidFill>
+          <a:ln w="25400">
+            <a:solidFill>
+              <a:srgbClr val="C85A32"/>
+            </a:solidFill>
+          </a:ln>
+        </p:spPr>
+        <p:style>
+          <a:lnRef idx="1">
+            <a:schemeClr val="accent1"/>
+          </a:lnRef>
+          <a:fillRef idx="3">
+            <a:schemeClr val="accent1"/>
+          </a:fillRef>
+          <a:effectRef idx="2">
+            <a:schemeClr val="accent1"/>
+          </a:effectRef>
+          <a:fontRef idx="minor">
+            <a:schemeClr val="lt1"/>
+          </a:fontRef>
+        </p:style>
+        <p:txBody>
+          <a:bodyPr rtlCol="0" anchor="ctr"/>
+          <a:lstStyle/>
+          <a:p>
+            <a:pPr algn="ctr"/>
+          </a:p>
+        </p:txBody>
+      </p:sp>
+      <p:sp>
+        <p:nvSpPr>
+          <p:cNvPr id="10" name="Rectangle 9"/>
+          <p:cNvSpPr/>
+          <p:nvPr/>
+        </p:nvSpPr>
+        <p:spPr>
+          <a:xfrm>
+            <a:off x="1067104" y="1143000"/>
+            <a:ext cx="10058400" cy="384048"/>
+          </a:xfrm>
+          <a:prstGeom prst="rect">
+            <a:avLst/>
+          </a:prstGeom>
+          <a:solidFill>
+            <a:srgbClr val="DC5028"/>
+          </a:solidFill>
+          <a:ln>
+            <a:noFill/>
+          </a:ln>
+        </p:spPr>
+        <p:style>
+          <a:lnRef idx="1">
+            <a:schemeClr val="accent1"/>
+          </a:lnRef>
+          <a:fillRef idx="3">
+            <a:schemeClr val="accent1"/>
+          </a:fillRef>
+          <a:effectRef idx="2">
+            <a:schemeClr val="accent1"/>
+          </a:effectRef>
+          <a:fontRef idx="minor">
+            <a:schemeClr val="lt1"/>
+          </a:fontRef>
+        </p:style>
+        <p:txBody>
+          <a:bodyPr rtlCol="0" anchor="ctr"/>
+          <a:lstStyle/>
+          <a:p>
+            <a:pPr algn="ctr"/>
+          </a:p>
+        </p:txBody>
+      </p:sp>
+      <p:sp>
+        <p:nvSpPr>
+          <p:cNvPr id="11" name="TextBox 10"/>
+          <p:cNvSpPr txBox="1"/>
+          <p:nvPr/>
+        </p:nvSpPr>
+        <p:spPr>
+          <a:xfrm>
+            <a:off x="1067104" y="1179576"/>
+            <a:ext cx="10058400" cy="347472"/>
+          </a:xfrm>
+          <a:prstGeom prst="rect">
+            <a:avLst/>
+          </a:prstGeom>
+          <a:noFill/>
+        </p:spPr>
+        <p:txBody>
+          <a:bodyPr wrap="none">
+            <a:spAutoFit/>
+          </a:bodyPr>
+          <a:lstStyle/>
+          <a:p>
+            <a:pPr algn="ctr">
+              <a:spcAft>
+                <a:spcPts val="1000"/>
+              </a:spcAft>
+            </a:pPr>
+            <a:r>
+              <a:rPr sz="1800" b="1">
+                <a:solidFill>
+                  <a:srgbClr val="FFFFFF"/>
+                </a:solidFill>
+                <a:latin typeface="Microsoft YaHei"/>
+              </a:rPr>
+              <a:t>📝  课堂笔记  —  请摘抄要点</a:t>
+            </a:r>
+          </a:p>
+        </p:txBody>
+      </p:sp>
+      <p:sp>
+        <p:nvSpPr>
+          <p:cNvPr id="12" name="Rectangle 11"/>
+          <p:cNvSpPr/>
+          <p:nvPr/>
+        </p:nvSpPr>
+        <p:spPr>
+          <a:xfrm>
+            <a:off x="1570024" y="1527048"/>
+            <a:ext cx="27432" cy="3337560"/>
+          </a:xfrm>
+          <a:prstGeom prst="rect">
+            <a:avLst/>
+          </a:prstGeom>
+          <a:solidFill>
+            <a:srgbClr val="DC5050"/>
+          </a:solidFill>
+          <a:ln>
+            <a:noFill/>
+          </a:ln>
+        </p:spPr>
+        <p:style>
+          <a:lnRef idx="1">
+            <a:schemeClr val="accent1"/>
+          </a:lnRef>
+          <a:fillRef idx="3">
+            <a:schemeClr val="accent1"/>
+          </a:fillRef>
+          <a:effectRef idx="2">
+            <a:schemeClr val="accent1"/>
+          </a:effectRef>
+          <a:fontRef idx="minor">
+            <a:schemeClr val="lt1"/>
+          </a:fontRef>
+        </p:style>
+        <p:txBody>
+          <a:bodyPr rtlCol="0" anchor="ctr"/>
+          <a:lstStyle/>
+          <a:p>
+            <a:pPr algn="ctr"/>
+          </a:p>
+        </p:txBody>
+      </p:sp>
+      <p:sp>
+        <p:nvSpPr>
+          <p:cNvPr id="13" name="Rectangle 12"/>
+          <p:cNvSpPr/>
+          <p:nvPr/>
+        </p:nvSpPr>
+        <p:spPr>
+          <a:xfrm>
+            <a:off x="1417320" y="2276856"/>
+            <a:ext cx="9601200" cy="13716"/>
+          </a:xfrm>
+          <a:prstGeom prst="rect">
+            <a:avLst/>
+          </a:prstGeom>
+          <a:solidFill>
+            <a:srgbClr val="D2C8AF"/>
+          </a:solidFill>
+          <a:ln>
+            <a:noFill/>
+          </a:ln>
+        </p:spPr>
+        <p:style>
+          <a:lnRef idx="1">
+            <a:schemeClr val="accent1"/>
+          </a:lnRef>
+          <a:fillRef idx="3">
+            <a:schemeClr val="accent1"/>
+          </a:fillRef>
+          <a:effectRef idx="2">
+            <a:schemeClr val="accent1"/>
+          </a:effectRef>
+          <a:fontRef idx="minor">
+            <a:schemeClr val="lt1"/>
+          </a:fontRef>
+        </p:style>
+        <p:txBody>
+          <a:bodyPr rtlCol="0" anchor="ctr"/>
+          <a:lstStyle/>
+          <a:p>
+            <a:pPr algn="ctr"/>
+          </a:p>
+        </p:txBody>
+      </p:sp>
+      <p:sp>
+        <p:nvSpPr>
+          <p:cNvPr id="14" name="Rounded Rectangle 13"/>
+          <p:cNvSpPr/>
+          <p:nvPr/>
+        </p:nvSpPr>
+        <p:spPr>
+          <a:xfrm>
+            <a:off x="1600200" y="1627632"/>
+            <a:ext cx="1280160" cy="347472"/>
           </a:xfrm>
           <a:prstGeom prst="roundRect">
             <a:avLst/>
@@ -5319,14 +7163,14 @@
       </p:sp>
       <p:sp>
         <p:nvSpPr>
-          <p:cNvPr id="7" name="TextBox 6"/>
+          <p:cNvPr id="15" name="TextBox 14"/>
           <p:cNvSpPr txBox="1"/>
           <p:nvPr/>
         </p:nvSpPr>
         <p:spPr>
           <a:xfrm>
-            <a:off x="4953304" y="521208"/>
-            <a:ext cx="2286000" cy="384048"/>
+            <a:off x="1600200" y="1645920"/>
+            <a:ext cx="1280160" cy="310896"/>
           </a:xfrm>
           <a:prstGeom prst="rect">
             <a:avLst/>
@@ -5351,21 +7195,21 @@
                 </a:solidFill>
                 <a:latin typeface="Microsoft YaHei"/>
               </a:rPr>
-              <a:t>加解说词</a:t>
-            </a:r>
-          </a:p>
-        </p:txBody>
-      </p:sp>
-      <p:sp>
-        <p:nvSpPr>
-          <p:cNvPr id="8" name="TextBox 7"/>
+              <a:t>鲁迅</a:t>
+            </a:r>
+          </a:p>
+        </p:txBody>
+      </p:sp>
+      <p:sp>
+        <p:nvSpPr>
+          <p:cNvPr id="16" name="TextBox 15"/>
           <p:cNvSpPr txBox="1"/>
           <p:nvPr/>
         </p:nvSpPr>
         <p:spPr>
           <a:xfrm>
-            <a:off x="1371600" y="960120"/>
-            <a:ext cx="9418320" cy="822960"/>
+            <a:off x="3017520" y="1627632"/>
+            <a:ext cx="7498079" cy="658368"/>
           </a:xfrm>
           <a:prstGeom prst="rect">
             <a:avLst/>
@@ -5373,40 +7217,83 @@
           <a:noFill/>
         </p:spPr>
         <p:txBody>
-          <a:bodyPr wrap="square">
+          <a:bodyPr wrap="none">
             <a:spAutoFit/>
           </a:bodyPr>
           <a:lstStyle/>
           <a:p>
-            <a:pPr algn="ctr">
+            <a:pPr algn="l">
               <a:spcAft>
                 <a:spcPts val="1000"/>
               </a:spcAft>
             </a:pPr>
             <a:r>
-              <a:rPr sz="3600" b="1">
+              <a:rPr sz="2100" b="0">
                 <a:solidFill>
-                  <a:srgbClr val="DC5028"/>
+                  <a:srgbClr val="502814"/>
                 </a:solidFill>
                 <a:latin typeface="Microsoft YaHei"/>
               </a:rPr>
-              <a:t>学习任务二</a:t>
-            </a:r>
-          </a:p>
-        </p:txBody>
-      </p:sp>
-      <p:sp>
-        <p:nvSpPr>
-          <p:cNvPr id="9" name="Rectangle 8"/>
+              <a:t>「使神魔皆有人情，精魅亦通世故」——神魔也有人的情感</a:t>
+            </a:r>
+          </a:p>
+        </p:txBody>
+      </p:sp>
+      <p:sp>
+        <p:nvSpPr>
+          <p:cNvPr id="17" name="Rectangle 16"/>
           <p:cNvSpPr/>
           <p:nvPr/>
         </p:nvSpPr>
         <p:spPr>
           <a:xfrm>
-            <a:off x="3200400" y="1600200"/>
-            <a:ext cx="5760720" cy="27432"/>
-          </a:xfrm>
-          <a:prstGeom prst="rect">
+            <a:off x="1417320" y="3081527"/>
+            <a:ext cx="9601200" cy="13716"/>
+          </a:xfrm>
+          <a:prstGeom prst="rect">
+            <a:avLst/>
+          </a:prstGeom>
+          <a:solidFill>
+            <a:srgbClr val="D2C8AF"/>
+          </a:solidFill>
+          <a:ln>
+            <a:noFill/>
+          </a:ln>
+        </p:spPr>
+        <p:style>
+          <a:lnRef idx="1">
+            <a:schemeClr val="accent1"/>
+          </a:lnRef>
+          <a:fillRef idx="3">
+            <a:schemeClr val="accent1"/>
+          </a:fillRef>
+          <a:effectRef idx="2">
+            <a:schemeClr val="accent1"/>
+          </a:effectRef>
+          <a:fontRef idx="minor">
+            <a:schemeClr val="lt1"/>
+          </a:fontRef>
+        </p:style>
+        <p:txBody>
+          <a:bodyPr rtlCol="0" anchor="ctr"/>
+          <a:lstStyle/>
+          <a:p>
+            <a:pPr algn="ctr"/>
+          </a:p>
+        </p:txBody>
+      </p:sp>
+      <p:sp>
+        <p:nvSpPr>
+          <p:cNvPr id="18" name="Rounded Rectangle 17"/>
+          <p:cNvSpPr/>
+          <p:nvPr/>
+        </p:nvSpPr>
+        <p:spPr>
+          <a:xfrm>
+            <a:off x="1600200" y="2432303"/>
+            <a:ext cx="1280160" cy="347472"/>
+          </a:xfrm>
+          <a:prstGeom prst="roundRect">
             <a:avLst/>
           </a:prstGeom>
           <a:solidFill>
@@ -5440,25 +7327,101 @@
       </p:sp>
       <p:sp>
         <p:nvSpPr>
-          <p:cNvPr id="10" name="Rounded Rectangle 9"/>
+          <p:cNvPr id="19" name="TextBox 18"/>
+          <p:cNvSpPr txBox="1"/>
+          <p:nvPr/>
+        </p:nvSpPr>
+        <p:spPr>
+          <a:xfrm>
+            <a:off x="1600200" y="2450591"/>
+            <a:ext cx="1280160" cy="310896"/>
+          </a:xfrm>
+          <a:prstGeom prst="rect">
+            <a:avLst/>
+          </a:prstGeom>
+          <a:noFill/>
+        </p:spPr>
+        <p:txBody>
+          <a:bodyPr wrap="none">
+            <a:spAutoFit/>
+          </a:bodyPr>
+          <a:lstStyle/>
+          <a:p>
+            <a:pPr algn="ctr">
+              <a:spcAft>
+                <a:spcPts val="1000"/>
+              </a:spcAft>
+            </a:pPr>
+            <a:r>
+              <a:rPr sz="1800" b="1">
+                <a:solidFill>
+                  <a:srgbClr val="502814"/>
+                </a:solidFill>
+                <a:latin typeface="Microsoft YaHei"/>
+              </a:rPr>
+              <a:t>林庚</a:t>
+            </a:r>
+          </a:p>
+        </p:txBody>
+      </p:sp>
+      <p:sp>
+        <p:nvSpPr>
+          <p:cNvPr id="20" name="TextBox 19"/>
+          <p:cNvSpPr txBox="1"/>
+          <p:nvPr/>
+        </p:nvSpPr>
+        <p:spPr>
+          <a:xfrm>
+            <a:off x="3017520" y="2432303"/>
+            <a:ext cx="7498079" cy="658368"/>
+          </a:xfrm>
+          <a:prstGeom prst="rect">
+            <a:avLst/>
+          </a:prstGeom>
+          <a:noFill/>
+        </p:spPr>
+        <p:txBody>
+          <a:bodyPr wrap="none">
+            <a:spAutoFit/>
+          </a:bodyPr>
+          <a:lstStyle/>
+          <a:p>
+            <a:pPr algn="l">
+              <a:spcAft>
+                <a:spcPts val="1000"/>
+              </a:spcAft>
+            </a:pPr>
+            <a:r>
+              <a:rPr sz="2100" b="0">
+                <a:solidFill>
+                  <a:srgbClr val="502814"/>
+                </a:solidFill>
+                <a:latin typeface="Microsoft YaHei"/>
+              </a:rPr>
+              <a:t>不宜看得过于认真，应看到儿童的心理与行为</a:t>
+            </a:r>
+          </a:p>
+        </p:txBody>
+      </p:sp>
+      <p:sp>
+        <p:nvSpPr>
+          <p:cNvPr id="21" name="Rectangle 20"/>
           <p:cNvSpPr/>
           <p:nvPr/>
         </p:nvSpPr>
         <p:spPr>
           <a:xfrm>
-            <a:off x="1295704" y="1645920"/>
-            <a:ext cx="9601200" cy="2240280"/>
-          </a:xfrm>
-          <a:prstGeom prst="roundRect">
+            <a:off x="1417320" y="3886200"/>
+            <a:ext cx="9601200" cy="13716"/>
+          </a:xfrm>
+          <a:prstGeom prst="rect">
             <a:avLst/>
           </a:prstGeom>
           <a:solidFill>
-            <a:srgbClr val="FFF8F0"/>
+            <a:srgbClr val="D2C8AF"/>
           </a:solidFill>
-          <a:ln w="19050">
-            <a:solidFill>
-              <a:srgbClr val="FFB464"/>
-            </a:solidFill>
+          <a:ln>
+            <a:noFill/>
           </a:ln>
         </p:spPr>
         <p:style>
@@ -5485,20 +7448,20 @@
       </p:sp>
       <p:sp>
         <p:nvSpPr>
-          <p:cNvPr id="11" name="Oval 10"/>
+          <p:cNvPr id="22" name="Rounded Rectangle 21"/>
           <p:cNvSpPr/>
           <p:nvPr/>
         </p:nvSpPr>
         <p:spPr>
           <a:xfrm>
-            <a:off x="2255824" y="1828800"/>
-            <a:ext cx="384048" cy="384048"/>
-          </a:xfrm>
-          <a:prstGeom prst="ellipse">
+            <a:off x="1600200" y="3236976"/>
+            <a:ext cx="1444752" cy="347472"/>
+          </a:xfrm>
+          <a:prstGeom prst="roundRect">
             <a:avLst/>
           </a:prstGeom>
           <a:solidFill>
-            <a:srgbClr val="DC5028"/>
+            <a:srgbClr val="FFB464"/>
           </a:solidFill>
           <a:ln>
             <a:noFill/>
@@ -5528,14 +7491,14 @@
       </p:sp>
       <p:sp>
         <p:nvSpPr>
-          <p:cNvPr id="12" name="TextBox 11"/>
+          <p:cNvPr id="23" name="TextBox 22"/>
           <p:cNvSpPr txBox="1"/>
           <p:nvPr/>
         </p:nvSpPr>
         <p:spPr>
           <a:xfrm>
-            <a:off x="2255824" y="1847088"/>
-            <a:ext cx="384048" cy="365760"/>
+            <a:off x="1600200" y="3255264"/>
+            <a:ext cx="1444752" cy="310896"/>
           </a:xfrm>
           <a:prstGeom prst="rect">
             <a:avLst/>
@@ -5554,27 +7517,27 @@
               </a:spcAft>
             </a:pPr>
             <a:r>
-              <a:rPr sz="1600" b="1">
+              <a:rPr sz="1800" b="1">
                 <a:solidFill>
-                  <a:srgbClr val="FFFFFF"/>
+                  <a:srgbClr val="502814"/>
                 </a:solidFill>
                 <a:latin typeface="Microsoft YaHei"/>
               </a:rPr>
-              <a:t>1</a:t>
-            </a:r>
-          </a:p>
-        </p:txBody>
-      </p:sp>
-      <p:sp>
-        <p:nvSpPr>
-          <p:cNvPr id="13" name="TextBox 12"/>
+              <a:t>艺术特色</a:t>
+            </a:r>
+          </a:p>
+        </p:txBody>
+      </p:sp>
+      <p:sp>
+        <p:nvSpPr>
+          <p:cNvPr id="24" name="TextBox 23"/>
           <p:cNvSpPr txBox="1"/>
           <p:nvPr/>
         </p:nvSpPr>
         <p:spPr>
           <a:xfrm>
-            <a:off x="2758744" y="1810512"/>
-            <a:ext cx="7772400" cy="502920"/>
+            <a:off x="3182112" y="3236976"/>
+            <a:ext cx="7333488" cy="658368"/>
           </a:xfrm>
           <a:prstGeom prst="rect">
             <a:avLst/>
@@ -5593,33 +7556,33 @@
               </a:spcAft>
             </a:pPr>
             <a:r>
-              <a:rPr sz="2400" b="0">
+              <a:rPr sz="2100" b="0">
                 <a:solidFill>
                   <a:srgbClr val="502814"/>
                 </a:solidFill>
                 <a:latin typeface="Microsoft YaHei"/>
               </a:rPr>
-              <a:t>变庙宇：尾巴为何变旗竿？写一句批注</a:t>
-            </a:r>
-          </a:p>
-        </p:txBody>
-      </p:sp>
-      <p:sp>
-        <p:nvSpPr>
-          <p:cNvPr id="14" name="Oval 13"/>
+              <a:t>想象基于「相克」逻辑，变化链环环相扣</a:t>
+            </a:r>
+          </a:p>
+        </p:txBody>
+      </p:sp>
+      <p:sp>
+        <p:nvSpPr>
+          <p:cNvPr id="25" name="Rectangle 24"/>
           <p:cNvSpPr/>
           <p:nvPr/>
         </p:nvSpPr>
         <p:spPr>
           <a:xfrm>
-            <a:off x="2255824" y="2395728"/>
-            <a:ext cx="384048" cy="384048"/>
-          </a:xfrm>
-          <a:prstGeom prst="ellipse">
+            <a:off x="1417320" y="4690872"/>
+            <a:ext cx="9601200" cy="13716"/>
+          </a:xfrm>
+          <a:prstGeom prst="rect">
             <a:avLst/>
           </a:prstGeom>
           <a:solidFill>
-            <a:srgbClr val="DC5028"/>
+            <a:srgbClr val="D2C8AF"/>
           </a:solidFill>
           <a:ln>
             <a:noFill/>
@@ -5649,14 +7612,57 @@
       </p:sp>
       <p:sp>
         <p:nvSpPr>
-          <p:cNvPr id="15" name="TextBox 14"/>
+          <p:cNvPr id="26" name="Rounded Rectangle 25"/>
+          <p:cNvSpPr/>
+          <p:nvPr/>
+        </p:nvSpPr>
+        <p:spPr>
+          <a:xfrm>
+            <a:off x="1600200" y="4041648"/>
+            <a:ext cx="1444752" cy="347472"/>
+          </a:xfrm>
+          <a:prstGeom prst="roundRect">
+            <a:avLst/>
+          </a:prstGeom>
+          <a:solidFill>
+            <a:srgbClr val="FFB464"/>
+          </a:solidFill>
+          <a:ln>
+            <a:noFill/>
+          </a:ln>
+        </p:spPr>
+        <p:style>
+          <a:lnRef idx="1">
+            <a:schemeClr val="accent1"/>
+          </a:lnRef>
+          <a:fillRef idx="3">
+            <a:schemeClr val="accent1"/>
+          </a:fillRef>
+          <a:effectRef idx="2">
+            <a:schemeClr val="accent1"/>
+          </a:effectRef>
+          <a:fontRef idx="minor">
+            <a:schemeClr val="lt1"/>
+          </a:fontRef>
+        </p:style>
+        <p:txBody>
+          <a:bodyPr rtlCol="0" anchor="ctr"/>
+          <a:lstStyle/>
+          <a:p>
+            <a:pPr algn="ctr"/>
+          </a:p>
+        </p:txBody>
+      </p:sp>
+      <p:sp>
+        <p:nvSpPr>
+          <p:cNvPr id="27" name="TextBox 26"/>
           <p:cNvSpPr txBox="1"/>
           <p:nvPr/>
         </p:nvSpPr>
         <p:spPr>
           <a:xfrm>
-            <a:off x="2255824" y="2414016"/>
-            <a:ext cx="384048" cy="365760"/>
+            <a:off x="1600200" y="4059936"/>
+            <a:ext cx="1444752" cy="310896"/>
           </a:xfrm>
           <a:prstGeom prst="rect">
             <a:avLst/>
@@ -5675,27 +7681,27 @@
               </a:spcAft>
             </a:pPr>
             <a:r>
-              <a:rPr sz="1600" b="1">
+              <a:rPr sz="1800" b="1">
                 <a:solidFill>
-                  <a:srgbClr val="FFFFFF"/>
+                  <a:srgbClr val="502814"/>
                 </a:solidFill>
                 <a:latin typeface="Microsoft YaHei"/>
               </a:rPr>
-              <a:t>2</a:t>
-            </a:r>
-          </a:p>
-        </p:txBody>
-      </p:sp>
-      <p:sp>
-        <p:nvSpPr>
-          <p:cNvPr id="16" name="TextBox 15"/>
+              <a:t>策展主题</a:t>
+            </a:r>
+          </a:p>
+        </p:txBody>
+      </p:sp>
+      <p:sp>
+        <p:nvSpPr>
+          <p:cNvPr id="28" name="TextBox 27"/>
           <p:cNvSpPr txBox="1"/>
           <p:nvPr/>
         </p:nvSpPr>
         <p:spPr>
           <a:xfrm>
-            <a:off x="2758744" y="2377440"/>
-            <a:ext cx="7772400" cy="502920"/>
+            <a:off x="3182112" y="4041648"/>
+            <a:ext cx="7333488" cy="658368"/>
           </a:xfrm>
           <a:prstGeom prst="rect">
             <a:avLst/>
@@ -5714,134 +7720,13 @@
               </a:spcAft>
             </a:pPr>
             <a:r>
-              <a:rPr sz="2400" b="0">
+              <a:rPr sz="2100" b="0">
                 <a:solidFill>
                   <a:srgbClr val="502814"/>
                 </a:solidFill>
                 <a:latin typeface="Microsoft YaHei"/>
               </a:rPr>
-              <a:t>完成人物档案卡（证据—特点—作用）</a:t>
-            </a:r>
-          </a:p>
-        </p:txBody>
-      </p:sp>
-      <p:sp>
-        <p:nvSpPr>
-          <p:cNvPr id="17" name="Oval 16"/>
-          <p:cNvSpPr/>
-          <p:nvPr/>
-        </p:nvSpPr>
-        <p:spPr>
-          <a:xfrm>
-            <a:off x="2255824" y="2962656"/>
-            <a:ext cx="384048" cy="384048"/>
-          </a:xfrm>
-          <a:prstGeom prst="ellipse">
-            <a:avLst/>
-          </a:prstGeom>
-          <a:solidFill>
-            <a:srgbClr val="DC5028"/>
-          </a:solidFill>
-          <a:ln>
-            <a:noFill/>
-          </a:ln>
-        </p:spPr>
-        <p:style>
-          <a:lnRef idx="1">
-            <a:schemeClr val="accent1"/>
-          </a:lnRef>
-          <a:fillRef idx="3">
-            <a:schemeClr val="accent1"/>
-          </a:fillRef>
-          <a:effectRef idx="2">
-            <a:schemeClr val="accent1"/>
-          </a:effectRef>
-          <a:fontRef idx="minor">
-            <a:schemeClr val="lt1"/>
-          </a:fontRef>
-        </p:style>
-        <p:txBody>
-          <a:bodyPr rtlCol="0" anchor="ctr"/>
-          <a:lstStyle/>
-          <a:p>
-            <a:pPr algn="ctr"/>
-          </a:p>
-        </p:txBody>
-      </p:sp>
-      <p:sp>
-        <p:nvSpPr>
-          <p:cNvPr id="18" name="TextBox 17"/>
-          <p:cNvSpPr txBox="1"/>
-          <p:nvPr/>
-        </p:nvSpPr>
-        <p:spPr>
-          <a:xfrm>
-            <a:off x="2255824" y="2980944"/>
-            <a:ext cx="384048" cy="365760"/>
-          </a:xfrm>
-          <a:prstGeom prst="rect">
-            <a:avLst/>
-          </a:prstGeom>
-          <a:noFill/>
-        </p:spPr>
-        <p:txBody>
-          <a:bodyPr wrap="none">
-            <a:spAutoFit/>
-          </a:bodyPr>
-          <a:lstStyle/>
-          <a:p>
-            <a:pPr algn="ctr">
-              <a:spcAft>
-                <a:spcPts val="1000"/>
-              </a:spcAft>
-            </a:pPr>
-            <a:r>
-              <a:rPr sz="1600" b="1">
-                <a:solidFill>
-                  <a:srgbClr val="FFFFFF"/>
-                </a:solidFill>
-                <a:latin typeface="Microsoft YaHei"/>
-              </a:rPr>
-              <a:t>3</a:t>
-            </a:r>
-          </a:p>
-        </p:txBody>
-      </p:sp>
-      <p:sp>
-        <p:nvSpPr>
-          <p:cNvPr id="19" name="TextBox 18"/>
-          <p:cNvSpPr txBox="1"/>
-          <p:nvPr/>
-        </p:nvSpPr>
-        <p:spPr>
-          <a:xfrm>
-            <a:off x="2758744" y="2944368"/>
-            <a:ext cx="7772400" cy="502920"/>
-          </a:xfrm>
-          <a:prstGeom prst="rect">
-            <a:avLst/>
-          </a:prstGeom>
-          <a:noFill/>
-        </p:spPr>
-        <p:txBody>
-          <a:bodyPr wrap="none">
-            <a:spAutoFit/>
-          </a:bodyPr>
-          <a:lstStyle/>
-          <a:p>
-            <a:pPr algn="l">
-              <a:spcAft>
-                <a:spcPts val="1000"/>
-              </a:spcAft>
-            </a:pPr>
-            <a:r>
-              <a:rPr sz="2400" b="0">
-                <a:solidFill>
-                  <a:srgbClr val="502814"/>
-                </a:solidFill>
-                <a:latin typeface="Microsoft YaHei"/>
-              </a:rPr>
-              <a:t>批注鲁迅、林庚的评论，找「人情」与「世故」</a:t>
+              <a:t>自由可贵，但不可无视规则（自由与规则）</a:t>
             </a:r>
           </a:p>
         </p:txBody>
@@ -5987,7 +7872,89 @@
         </p:nvSpPr>
         <p:spPr>
           <a:xfrm>
-            <a:off x="4953304" y="1005840"/>
+            <a:off x="502920" y="384048"/>
+            <a:ext cx="2011680" cy="384048"/>
+          </a:xfrm>
+          <a:prstGeom prst="roundRect">
+            <a:avLst/>
+          </a:prstGeom>
+          <a:solidFill>
+            <a:srgbClr val="3C9664"/>
+          </a:solidFill>
+          <a:ln>
+            <a:noFill/>
+          </a:ln>
+        </p:spPr>
+        <p:style>
+          <a:lnRef idx="1">
+            <a:schemeClr val="accent1"/>
+          </a:lnRef>
+          <a:fillRef idx="3">
+            <a:schemeClr val="accent1"/>
+          </a:fillRef>
+          <a:effectRef idx="2">
+            <a:schemeClr val="accent1"/>
+          </a:effectRef>
+          <a:fontRef idx="minor">
+            <a:schemeClr val="lt1"/>
+          </a:fontRef>
+        </p:style>
+        <p:txBody>
+          <a:bodyPr rtlCol="0" anchor="ctr"/>
+          <a:lstStyle/>
+          <a:p>
+            <a:pPr algn="ctr"/>
+          </a:p>
+        </p:txBody>
+      </p:sp>
+      <p:sp>
+        <p:nvSpPr>
+          <p:cNvPr id="7" name="TextBox 6"/>
+          <p:cNvSpPr txBox="1"/>
+          <p:nvPr/>
+        </p:nvSpPr>
+        <p:spPr>
+          <a:xfrm>
+            <a:off x="502920" y="402336"/>
+            <a:ext cx="2011680" cy="347472"/>
+          </a:xfrm>
+          <a:prstGeom prst="rect">
+            <a:avLst/>
+          </a:prstGeom>
+          <a:noFill/>
+        </p:spPr>
+        <p:txBody>
+          <a:bodyPr wrap="none">
+            <a:spAutoFit/>
+          </a:bodyPr>
+          <a:lstStyle/>
+          <a:p>
+            <a:pPr algn="ctr">
+              <a:spcAft>
+                <a:spcPts val="1000"/>
+              </a:spcAft>
+            </a:pPr>
+            <a:r>
+              <a:rPr sz="1600" b="1">
+                <a:solidFill>
+                  <a:srgbClr val="FFFFFF"/>
+                </a:solidFill>
+                <a:latin typeface="Microsoft YaHei"/>
+              </a:rPr>
+              <a:t>课堂活动</a:t>
+            </a:r>
+          </a:p>
+        </p:txBody>
+      </p:sp>
+      <p:sp>
+        <p:nvSpPr>
+          <p:cNvPr id="8" name="Rounded Rectangle 7"/>
+          <p:cNvSpPr/>
+          <p:nvPr/>
+        </p:nvSpPr>
+        <p:spPr>
+          <a:xfrm>
+            <a:off x="4953304" y="502920"/>
             <a:ext cx="2286000" cy="411480"/>
           </a:xfrm>
           <a:prstGeom prst="roundRect">
@@ -6024,13 +7991,13 @@
       </p:sp>
       <p:sp>
         <p:nvSpPr>
-          <p:cNvPr id="7" name="TextBox 6"/>
+          <p:cNvPr id="9" name="TextBox 8"/>
           <p:cNvSpPr txBox="1"/>
           <p:nvPr/>
         </p:nvSpPr>
         <p:spPr>
           <a:xfrm>
-            <a:off x="4953304" y="1024128"/>
+            <a:off x="4953304" y="521208"/>
             <a:ext cx="2286000" cy="384048"/>
           </a:xfrm>
           <a:prstGeom prst="rect">
@@ -6056,20 +8023,20 @@
                 </a:solidFill>
                 <a:latin typeface="Microsoft YaHei"/>
               </a:rPr>
-              <a:t>想一想</a:t>
-            </a:r>
-          </a:p>
-        </p:txBody>
-      </p:sp>
-      <p:sp>
-        <p:nvSpPr>
-          <p:cNvPr id="8" name="TextBox 7"/>
+              <a:t>课堂活动</a:t>
+            </a:r>
+          </a:p>
+        </p:txBody>
+      </p:sp>
+      <p:sp>
+        <p:nvSpPr>
+          <p:cNvPr id="10" name="TextBox 9"/>
           <p:cNvSpPr txBox="1"/>
           <p:nvPr/>
         </p:nvSpPr>
         <p:spPr>
           <a:xfrm>
-            <a:off x="1371600" y="1600200"/>
+            <a:off x="1371600" y="960120"/>
             <a:ext cx="9418320" cy="822960"/>
           </a:xfrm>
           <a:prstGeom prst="rect">
@@ -6089,27 +8056,26 @@
               </a:spcAft>
             </a:pPr>
             <a:r>
-              <a:rPr sz="3200" b="1">
+              <a:rPr sz="3600" b="1">
                 <a:solidFill>
                   <a:srgbClr val="DC5028"/>
                 </a:solidFill>
                 <a:latin typeface="Microsoft YaHei"/>
               </a:rPr>
-              <a:t>「使神魔皆有人情，精魅亦通世故」
-课文哪里体现了人情与世故？</a:t>
-            </a:r>
-          </a:p>
-        </p:txBody>
-      </p:sp>
-      <p:sp>
-        <p:nvSpPr>
-          <p:cNvPr id="9" name="Rectangle 8"/>
+              <a:t>学习任务</a:t>
+            </a:r>
+          </a:p>
+        </p:txBody>
+      </p:sp>
+      <p:sp>
+        <p:nvSpPr>
+          <p:cNvPr id="11" name="Rectangle 10"/>
           <p:cNvSpPr/>
           <p:nvPr/>
         </p:nvSpPr>
         <p:spPr>
           <a:xfrm>
-            <a:off x="3200400" y="4389120"/>
+            <a:off x="3200400" y="1600200"/>
             <a:ext cx="5760720" cy="27432"/>
           </a:xfrm>
           <a:prstGeom prst="rect">
@@ -6146,14 +8112,102 @@
       </p:sp>
       <p:sp>
         <p:nvSpPr>
-          <p:cNvPr id="10" name="TextBox 9"/>
+          <p:cNvPr id="12" name="Rounded Rectangle 11"/>
+          <p:cNvSpPr/>
+          <p:nvPr/>
+        </p:nvSpPr>
+        <p:spPr>
+          <a:xfrm>
+            <a:off x="1295704" y="1645920"/>
+            <a:ext cx="9601200" cy="2112264"/>
+          </a:xfrm>
+          <a:prstGeom prst="roundRect">
+            <a:avLst/>
+          </a:prstGeom>
+          <a:solidFill>
+            <a:srgbClr val="FFF8F0"/>
+          </a:solidFill>
+          <a:ln w="19050">
+            <a:solidFill>
+              <a:srgbClr val="FFB464"/>
+            </a:solidFill>
+          </a:ln>
+        </p:spPr>
+        <p:style>
+          <a:lnRef idx="1">
+            <a:schemeClr val="accent1"/>
+          </a:lnRef>
+          <a:fillRef idx="3">
+            <a:schemeClr val="accent1"/>
+          </a:fillRef>
+          <a:effectRef idx="2">
+            <a:schemeClr val="accent1"/>
+          </a:effectRef>
+          <a:fontRef idx="minor">
+            <a:schemeClr val="lt1"/>
+          </a:fontRef>
+        </p:style>
+        <p:txBody>
+          <a:bodyPr rtlCol="0" anchor="ctr"/>
+          <a:lstStyle/>
+          <a:p>
+            <a:pPr algn="ctr"/>
+          </a:p>
+        </p:txBody>
+      </p:sp>
+      <p:sp>
+        <p:nvSpPr>
+          <p:cNvPr id="13" name="Oval 12"/>
+          <p:cNvSpPr/>
+          <p:nvPr/>
+        </p:nvSpPr>
+        <p:spPr>
+          <a:xfrm>
+            <a:off x="2255824" y="1828800"/>
+            <a:ext cx="347472" cy="347472"/>
+          </a:xfrm>
+          <a:prstGeom prst="ellipse">
+            <a:avLst/>
+          </a:prstGeom>
+          <a:solidFill>
+            <a:srgbClr val="DC5028"/>
+          </a:solidFill>
+          <a:ln>
+            <a:noFill/>
+          </a:ln>
+        </p:spPr>
+        <p:style>
+          <a:lnRef idx="1">
+            <a:schemeClr val="accent1"/>
+          </a:lnRef>
+          <a:fillRef idx="3">
+            <a:schemeClr val="accent1"/>
+          </a:fillRef>
+          <a:effectRef idx="2">
+            <a:schemeClr val="accent1"/>
+          </a:effectRef>
+          <a:fontRef idx="minor">
+            <a:schemeClr val="lt1"/>
+          </a:fontRef>
+        </p:style>
+        <p:txBody>
+          <a:bodyPr rtlCol="0" anchor="ctr"/>
+          <a:lstStyle/>
+          <a:p>
+            <a:pPr algn="ctr"/>
+          </a:p>
+        </p:txBody>
+      </p:sp>
+      <p:sp>
+        <p:nvSpPr>
+          <p:cNvPr id="14" name="TextBox 13"/>
           <p:cNvSpPr txBox="1"/>
           <p:nvPr/>
         </p:nvSpPr>
         <p:spPr>
           <a:xfrm>
-            <a:off x="1828800" y="4663440"/>
-            <a:ext cx="8503920" cy="914400"/>
+            <a:off x="2255824" y="1847088"/>
+            <a:ext cx="347472" cy="329184"/>
           </a:xfrm>
           <a:prstGeom prst="rect">
             <a:avLst/>
@@ -6172,13 +8226,294 @@
               </a:spcAft>
             </a:pPr>
             <a:r>
-              <a:rPr sz="2200" b="0">
+              <a:rPr sz="1400" b="1">
                 <a:solidFill>
-                  <a:srgbClr val="DC5028"/>
+                  <a:srgbClr val="FFFFFF"/>
                 </a:solidFill>
                 <a:latin typeface="Microsoft YaHei"/>
               </a:rPr>
-              <a:t>林庚：不宜看得过于认真，应看到儿童心理</a:t>
+              <a:t>1</a:t>
+            </a:r>
+          </a:p>
+        </p:txBody>
+      </p:sp>
+      <p:sp>
+        <p:nvSpPr>
+          <p:cNvPr id="15" name="TextBox 14"/>
+          <p:cNvSpPr txBox="1"/>
+          <p:nvPr/>
+        </p:nvSpPr>
+        <p:spPr>
+          <a:xfrm>
+            <a:off x="2713024" y="1810512"/>
+            <a:ext cx="7863840" cy="457200"/>
+          </a:xfrm>
+          <a:prstGeom prst="rect">
+            <a:avLst/>
+          </a:prstGeom>
+          <a:noFill/>
+        </p:spPr>
+        <p:txBody>
+          <a:bodyPr wrap="none">
+            <a:spAutoFit/>
+          </a:bodyPr>
+          <a:lstStyle/>
+          <a:p>
+            <a:pPr algn="l">
+              <a:spcAft>
+                <a:spcPts val="1000"/>
+              </a:spcAft>
+            </a:pPr>
+            <a:r>
+              <a:rPr sz="2400" b="0">
+                <a:solidFill>
+                  <a:srgbClr val="502814"/>
+                </a:solidFill>
+                <a:latin typeface="Microsoft YaHei"/>
+              </a:rPr>
+              <a:t>填写七十二变对照表，标出相克关系</a:t>
+            </a:r>
+          </a:p>
+        </p:txBody>
+      </p:sp>
+      <p:sp>
+        <p:nvSpPr>
+          <p:cNvPr id="16" name="Oval 15"/>
+          <p:cNvSpPr/>
+          <p:nvPr/>
+        </p:nvSpPr>
+        <p:spPr>
+          <a:xfrm>
+            <a:off x="2255824" y="2395728"/>
+            <a:ext cx="347472" cy="347472"/>
+          </a:xfrm>
+          <a:prstGeom prst="ellipse">
+            <a:avLst/>
+          </a:prstGeom>
+          <a:solidFill>
+            <a:srgbClr val="DC5028"/>
+          </a:solidFill>
+          <a:ln>
+            <a:noFill/>
+          </a:ln>
+        </p:spPr>
+        <p:style>
+          <a:lnRef idx="1">
+            <a:schemeClr val="accent1"/>
+          </a:lnRef>
+          <a:fillRef idx="3">
+            <a:schemeClr val="accent1"/>
+          </a:fillRef>
+          <a:effectRef idx="2">
+            <a:schemeClr val="accent1"/>
+          </a:effectRef>
+          <a:fontRef idx="minor">
+            <a:schemeClr val="lt1"/>
+          </a:fontRef>
+        </p:style>
+        <p:txBody>
+          <a:bodyPr rtlCol="0" anchor="ctr"/>
+          <a:lstStyle/>
+          <a:p>
+            <a:pPr algn="ctr"/>
+          </a:p>
+        </p:txBody>
+      </p:sp>
+      <p:sp>
+        <p:nvSpPr>
+          <p:cNvPr id="17" name="TextBox 16"/>
+          <p:cNvSpPr txBox="1"/>
+          <p:nvPr/>
+        </p:nvSpPr>
+        <p:spPr>
+          <a:xfrm>
+            <a:off x="2255824" y="2414016"/>
+            <a:ext cx="347472" cy="329184"/>
+          </a:xfrm>
+          <a:prstGeom prst="rect">
+            <a:avLst/>
+          </a:prstGeom>
+          <a:noFill/>
+        </p:spPr>
+        <p:txBody>
+          <a:bodyPr wrap="none">
+            <a:spAutoFit/>
+          </a:bodyPr>
+          <a:lstStyle/>
+          <a:p>
+            <a:pPr algn="ctr">
+              <a:spcAft>
+                <a:spcPts val="1000"/>
+              </a:spcAft>
+            </a:pPr>
+            <a:r>
+              <a:rPr sz="1400" b="1">
+                <a:solidFill>
+                  <a:srgbClr val="FFFFFF"/>
+                </a:solidFill>
+                <a:latin typeface="Microsoft YaHei"/>
+              </a:rPr>
+              <a:t>2</a:t>
+            </a:r>
+          </a:p>
+        </p:txBody>
+      </p:sp>
+      <p:sp>
+        <p:nvSpPr>
+          <p:cNvPr id="18" name="TextBox 17"/>
+          <p:cNvSpPr txBox="1"/>
+          <p:nvPr/>
+        </p:nvSpPr>
+        <p:spPr>
+          <a:xfrm>
+            <a:off x="2713024" y="2377440"/>
+            <a:ext cx="7863840" cy="457200"/>
+          </a:xfrm>
+          <a:prstGeom prst="rect">
+            <a:avLst/>
+          </a:prstGeom>
+          <a:noFill/>
+        </p:spPr>
+        <p:txBody>
+          <a:bodyPr wrap="none">
+            <a:spAutoFit/>
+          </a:bodyPr>
+          <a:lstStyle/>
+          <a:p>
+            <a:pPr algn="l">
+              <a:spcAft>
+                <a:spcPts val="1000"/>
+              </a:spcAft>
+            </a:pPr>
+            <a:r>
+              <a:rPr sz="2400" b="0">
+                <a:solidFill>
+                  <a:srgbClr val="502814"/>
+                </a:solidFill>
+                <a:latin typeface="Microsoft YaHei"/>
+              </a:rPr>
+              <a:t>完成人物档案卡（证据—特点—作用）</a:t>
+            </a:r>
+          </a:p>
+        </p:txBody>
+      </p:sp>
+      <p:sp>
+        <p:nvSpPr>
+          <p:cNvPr id="19" name="Oval 18"/>
+          <p:cNvSpPr/>
+          <p:nvPr/>
+        </p:nvSpPr>
+        <p:spPr>
+          <a:xfrm>
+            <a:off x="2255824" y="2962656"/>
+            <a:ext cx="347472" cy="347472"/>
+          </a:xfrm>
+          <a:prstGeom prst="ellipse">
+            <a:avLst/>
+          </a:prstGeom>
+          <a:solidFill>
+            <a:srgbClr val="DC5028"/>
+          </a:solidFill>
+          <a:ln>
+            <a:noFill/>
+          </a:ln>
+        </p:spPr>
+        <p:style>
+          <a:lnRef idx="1">
+            <a:schemeClr val="accent1"/>
+          </a:lnRef>
+          <a:fillRef idx="3">
+            <a:schemeClr val="accent1"/>
+          </a:fillRef>
+          <a:effectRef idx="2">
+            <a:schemeClr val="accent1"/>
+          </a:effectRef>
+          <a:fontRef idx="minor">
+            <a:schemeClr val="lt1"/>
+          </a:fontRef>
+        </p:style>
+        <p:txBody>
+          <a:bodyPr rtlCol="0" anchor="ctr"/>
+          <a:lstStyle/>
+          <a:p>
+            <a:pPr algn="ctr"/>
+          </a:p>
+        </p:txBody>
+      </p:sp>
+      <p:sp>
+        <p:nvSpPr>
+          <p:cNvPr id="20" name="TextBox 19"/>
+          <p:cNvSpPr txBox="1"/>
+          <p:nvPr/>
+        </p:nvSpPr>
+        <p:spPr>
+          <a:xfrm>
+            <a:off x="2255824" y="2980944"/>
+            <a:ext cx="347472" cy="329184"/>
+          </a:xfrm>
+          <a:prstGeom prst="rect">
+            <a:avLst/>
+          </a:prstGeom>
+          <a:noFill/>
+        </p:spPr>
+        <p:txBody>
+          <a:bodyPr wrap="none">
+            <a:spAutoFit/>
+          </a:bodyPr>
+          <a:lstStyle/>
+          <a:p>
+            <a:pPr algn="ctr">
+              <a:spcAft>
+                <a:spcPts val="1000"/>
+              </a:spcAft>
+            </a:pPr>
+            <a:r>
+              <a:rPr sz="1400" b="1">
+                <a:solidFill>
+                  <a:srgbClr val="FFFFFF"/>
+                </a:solidFill>
+                <a:latin typeface="Microsoft YaHei"/>
+              </a:rPr>
+              <a:t>3</a:t>
+            </a:r>
+          </a:p>
+        </p:txBody>
+      </p:sp>
+      <p:sp>
+        <p:nvSpPr>
+          <p:cNvPr id="21" name="TextBox 20"/>
+          <p:cNvSpPr txBox="1"/>
+          <p:nvPr/>
+        </p:nvSpPr>
+        <p:spPr>
+          <a:xfrm>
+            <a:off x="2713024" y="2944368"/>
+            <a:ext cx="7863840" cy="457200"/>
+          </a:xfrm>
+          <a:prstGeom prst="rect">
+            <a:avLst/>
+          </a:prstGeom>
+          <a:noFill/>
+        </p:spPr>
+        <p:txBody>
+          <a:bodyPr wrap="none">
+            <a:spAutoFit/>
+          </a:bodyPr>
+          <a:lstStyle/>
+          <a:p>
+            <a:pPr algn="l">
+              <a:spcAft>
+                <a:spcPts val="1000"/>
+              </a:spcAft>
+            </a:pPr>
+            <a:r>
+              <a:rPr sz="2400" b="0">
+                <a:solidFill>
+                  <a:srgbClr val="502814"/>
+                </a:solidFill>
+                <a:latin typeface="Microsoft YaHei"/>
+              </a:rPr>
+              <a:t>用「孙悟空先……，二郎神便……」复述最精彩一轮</a:t>
             </a:r>
           </a:p>
         </p:txBody>
@@ -6324,7 +8659,7 @@
         </p:nvSpPr>
         <p:spPr>
           <a:xfrm>
-            <a:off x="4953304" y="502920"/>
+            <a:off x="4953304" y="1005840"/>
             <a:ext cx="2286000" cy="411480"/>
           </a:xfrm>
           <a:prstGeom prst="roundRect">
@@ -6367,7 +8702,7 @@
         </p:nvSpPr>
         <p:spPr>
           <a:xfrm>
-            <a:off x="4953304" y="521208"/>
+            <a:off x="4953304" y="1024128"/>
             <a:ext cx="2286000" cy="384048"/>
           </a:xfrm>
           <a:prstGeom prst="rect">
@@ -6393,7 +8728,7 @@
                 </a:solidFill>
                 <a:latin typeface="Microsoft YaHei"/>
               </a:rPr>
-              <a:t>主题探究</a:t>
+              <a:t>想一想</a:t>
             </a:r>
           </a:p>
         </p:txBody>
@@ -6406,7 +8741,7 @@
         </p:nvSpPr>
         <p:spPr>
           <a:xfrm>
-            <a:off x="1371600" y="960120"/>
+            <a:off x="1371600" y="1600200"/>
             <a:ext cx="9418320" cy="822960"/>
           </a:xfrm>
           <a:prstGeom prst="rect">
@@ -6426,13 +8761,13 @@
               </a:spcAft>
             </a:pPr>
             <a:r>
-              <a:rPr sz="3600" b="1">
+              <a:rPr sz="3200" b="1">
                 <a:solidFill>
                   <a:srgbClr val="DC5028"/>
                 </a:solidFill>
                 <a:latin typeface="Microsoft YaHei"/>
               </a:rPr>
-              <a:t>学习任务三</a:t>
+              <a:t>追求自由与遵守规则矛盾吗？</a:t>
             </a:r>
           </a:p>
         </p:txBody>
@@ -6445,7 +8780,7 @@
         </p:nvSpPr>
         <p:spPr>
           <a:xfrm>
-            <a:off x="3200400" y="1600200"/>
+            <a:off x="3200400" y="4389120"/>
             <a:ext cx="5760720" cy="27432"/>
           </a:xfrm>
           <a:prstGeom prst="rect">
@@ -6482,102 +8817,14 @@
       </p:sp>
       <p:sp>
         <p:nvSpPr>
-          <p:cNvPr id="10" name="Rounded Rectangle 9"/>
-          <p:cNvSpPr/>
-          <p:nvPr/>
-        </p:nvSpPr>
-        <p:spPr>
-          <a:xfrm>
-            <a:off x="1295704" y="1645920"/>
-            <a:ext cx="9601200" cy="2240280"/>
-          </a:xfrm>
-          <a:prstGeom prst="roundRect">
-            <a:avLst/>
-          </a:prstGeom>
-          <a:solidFill>
-            <a:srgbClr val="FFF8F0"/>
-          </a:solidFill>
-          <a:ln w="19050">
-            <a:solidFill>
-              <a:srgbClr val="FFB464"/>
-            </a:solidFill>
-          </a:ln>
-        </p:spPr>
-        <p:style>
-          <a:lnRef idx="1">
-            <a:schemeClr val="accent1"/>
-          </a:lnRef>
-          <a:fillRef idx="3">
-            <a:schemeClr val="accent1"/>
-          </a:fillRef>
-          <a:effectRef idx="2">
-            <a:schemeClr val="accent1"/>
-          </a:effectRef>
-          <a:fontRef idx="minor">
-            <a:schemeClr val="lt1"/>
-          </a:fontRef>
-        </p:style>
-        <p:txBody>
-          <a:bodyPr rtlCol="0" anchor="ctr"/>
-          <a:lstStyle/>
-          <a:p>
-            <a:pPr algn="ctr"/>
-          </a:p>
-        </p:txBody>
-      </p:sp>
-      <p:sp>
-        <p:nvSpPr>
-          <p:cNvPr id="11" name="Oval 10"/>
-          <p:cNvSpPr/>
-          <p:nvPr/>
-        </p:nvSpPr>
-        <p:spPr>
-          <a:xfrm>
-            <a:off x="2255824" y="1828800"/>
-            <a:ext cx="384048" cy="384048"/>
-          </a:xfrm>
-          <a:prstGeom prst="ellipse">
-            <a:avLst/>
-          </a:prstGeom>
-          <a:solidFill>
-            <a:srgbClr val="DC5028"/>
-          </a:solidFill>
-          <a:ln>
-            <a:noFill/>
-          </a:ln>
-        </p:spPr>
-        <p:style>
-          <a:lnRef idx="1">
-            <a:schemeClr val="accent1"/>
-          </a:lnRef>
-          <a:fillRef idx="3">
-            <a:schemeClr val="accent1"/>
-          </a:fillRef>
-          <a:effectRef idx="2">
-            <a:schemeClr val="accent1"/>
-          </a:effectRef>
-          <a:fontRef idx="minor">
-            <a:schemeClr val="lt1"/>
-          </a:fontRef>
-        </p:style>
-        <p:txBody>
-          <a:bodyPr rtlCol="0" anchor="ctr"/>
-          <a:lstStyle/>
-          <a:p>
-            <a:pPr algn="ctr"/>
-          </a:p>
-        </p:txBody>
-      </p:sp>
-      <p:sp>
-        <p:nvSpPr>
-          <p:cNvPr id="12" name="TextBox 11"/>
+          <p:cNvPr id="10" name="TextBox 9"/>
           <p:cNvSpPr txBox="1"/>
           <p:nvPr/>
         </p:nvSpPr>
         <p:spPr>
           <a:xfrm>
-            <a:off x="2255824" y="1847088"/>
-            <a:ext cx="384048" cy="365760"/>
+            <a:off x="1828800" y="4663440"/>
+            <a:ext cx="8503920" cy="914400"/>
           </a:xfrm>
           <a:prstGeom prst="rect">
             <a:avLst/>
@@ -6596,294 +8843,13 @@
               </a:spcAft>
             </a:pPr>
             <a:r>
-              <a:rPr sz="1600" b="1">
+              <a:rPr sz="2200" b="0">
                 <a:solidFill>
-                  <a:srgbClr val="FFFFFF"/>
+                  <a:srgbClr val="DC5028"/>
                 </a:solidFill>
                 <a:latin typeface="Microsoft YaHei"/>
               </a:rPr>
-              <a:t>1</a:t>
-            </a:r>
-          </a:p>
-        </p:txBody>
-      </p:sp>
-      <p:sp>
-        <p:nvSpPr>
-          <p:cNvPr id="13" name="TextBox 12"/>
-          <p:cNvSpPr txBox="1"/>
-          <p:nvPr/>
-        </p:nvSpPr>
-        <p:spPr>
-          <a:xfrm>
-            <a:off x="2758744" y="1810512"/>
-            <a:ext cx="7772400" cy="502920"/>
-          </a:xfrm>
-          <a:prstGeom prst="rect">
-            <a:avLst/>
-          </a:prstGeom>
-          <a:noFill/>
-        </p:spPr>
-        <p:txBody>
-          <a:bodyPr wrap="none">
-            <a:spAutoFit/>
-          </a:bodyPr>
-          <a:lstStyle/>
-          <a:p>
-            <a:pPr algn="l">
-              <a:spcAft>
-                <a:spcPts val="1000"/>
-              </a:spcAft>
-            </a:pPr>
-            <a:r>
-              <a:rPr sz="2400" b="0">
-                <a:solidFill>
-                  <a:srgbClr val="502814"/>
-                </a:solidFill>
-                <a:latin typeface="Microsoft YaHei"/>
-              </a:rPr>
-              <a:t>讨论：孙悟空为何逃？天庭为何捉他？</a:t>
-            </a:r>
-          </a:p>
-        </p:txBody>
-      </p:sp>
-      <p:sp>
-        <p:nvSpPr>
-          <p:cNvPr id="14" name="Oval 13"/>
-          <p:cNvSpPr/>
-          <p:nvPr/>
-        </p:nvSpPr>
-        <p:spPr>
-          <a:xfrm>
-            <a:off x="2255824" y="2395728"/>
-            <a:ext cx="384048" cy="384048"/>
-          </a:xfrm>
-          <a:prstGeom prst="ellipse">
-            <a:avLst/>
-          </a:prstGeom>
-          <a:solidFill>
-            <a:srgbClr val="DC5028"/>
-          </a:solidFill>
-          <a:ln>
-            <a:noFill/>
-          </a:ln>
-        </p:spPr>
-        <p:style>
-          <a:lnRef idx="1">
-            <a:schemeClr val="accent1"/>
-          </a:lnRef>
-          <a:fillRef idx="3">
-            <a:schemeClr val="accent1"/>
-          </a:fillRef>
-          <a:effectRef idx="2">
-            <a:schemeClr val="accent1"/>
-          </a:effectRef>
-          <a:fontRef idx="minor">
-            <a:schemeClr val="lt1"/>
-          </a:fontRef>
-        </p:style>
-        <p:txBody>
-          <a:bodyPr rtlCol="0" anchor="ctr"/>
-          <a:lstStyle/>
-          <a:p>
-            <a:pPr algn="ctr"/>
-          </a:p>
-        </p:txBody>
-      </p:sp>
-      <p:sp>
-        <p:nvSpPr>
-          <p:cNvPr id="15" name="TextBox 14"/>
-          <p:cNvSpPr txBox="1"/>
-          <p:nvPr/>
-        </p:nvSpPr>
-        <p:spPr>
-          <a:xfrm>
-            <a:off x="2255824" y="2414016"/>
-            <a:ext cx="384048" cy="365760"/>
-          </a:xfrm>
-          <a:prstGeom prst="rect">
-            <a:avLst/>
-          </a:prstGeom>
-          <a:noFill/>
-        </p:spPr>
-        <p:txBody>
-          <a:bodyPr wrap="none">
-            <a:spAutoFit/>
-          </a:bodyPr>
-          <a:lstStyle/>
-          <a:p>
-            <a:pPr algn="ctr">
-              <a:spcAft>
-                <a:spcPts val="1000"/>
-              </a:spcAft>
-            </a:pPr>
-            <a:r>
-              <a:rPr sz="1600" b="1">
-                <a:solidFill>
-                  <a:srgbClr val="FFFFFF"/>
-                </a:solidFill>
-                <a:latin typeface="Microsoft YaHei"/>
-              </a:rPr>
-              <a:t>2</a:t>
-            </a:r>
-          </a:p>
-        </p:txBody>
-      </p:sp>
-      <p:sp>
-        <p:nvSpPr>
-          <p:cNvPr id="16" name="TextBox 15"/>
-          <p:cNvSpPr txBox="1"/>
-          <p:nvPr/>
-        </p:nvSpPr>
-        <p:spPr>
-          <a:xfrm>
-            <a:off x="2758744" y="2377440"/>
-            <a:ext cx="7772400" cy="502920"/>
-          </a:xfrm>
-          <a:prstGeom prst="rect">
-            <a:avLst/>
-          </a:prstGeom>
-          <a:noFill/>
-        </p:spPr>
-        <p:txBody>
-          <a:bodyPr wrap="none">
-            <a:spAutoFit/>
-          </a:bodyPr>
-          <a:lstStyle/>
-          <a:p>
-            <a:pPr algn="l">
-              <a:spcAft>
-                <a:spcPts val="1000"/>
-              </a:spcAft>
-            </a:pPr>
-            <a:r>
-              <a:rPr sz="2400" b="0">
-                <a:solidFill>
-                  <a:srgbClr val="502814"/>
-                </a:solidFill>
-                <a:latin typeface="Microsoft YaHei"/>
-              </a:rPr>
-              <a:t>联系生活：追求自由与遵守规则矛盾吗？</a:t>
-            </a:r>
-          </a:p>
-        </p:txBody>
-      </p:sp>
-      <p:sp>
-        <p:nvSpPr>
-          <p:cNvPr id="17" name="Oval 16"/>
-          <p:cNvSpPr/>
-          <p:nvPr/>
-        </p:nvSpPr>
-        <p:spPr>
-          <a:xfrm>
-            <a:off x="2255824" y="2962656"/>
-            <a:ext cx="384048" cy="384048"/>
-          </a:xfrm>
-          <a:prstGeom prst="ellipse">
-            <a:avLst/>
-          </a:prstGeom>
-          <a:solidFill>
-            <a:srgbClr val="DC5028"/>
-          </a:solidFill>
-          <a:ln>
-            <a:noFill/>
-          </a:ln>
-        </p:spPr>
-        <p:style>
-          <a:lnRef idx="1">
-            <a:schemeClr val="accent1"/>
-          </a:lnRef>
-          <a:fillRef idx="3">
-            <a:schemeClr val="accent1"/>
-          </a:fillRef>
-          <a:effectRef idx="2">
-            <a:schemeClr val="accent1"/>
-          </a:effectRef>
-          <a:fontRef idx="minor">
-            <a:schemeClr val="lt1"/>
-          </a:fontRef>
-        </p:style>
-        <p:txBody>
-          <a:bodyPr rtlCol="0" anchor="ctr"/>
-          <a:lstStyle/>
-          <a:p>
-            <a:pPr algn="ctr"/>
-          </a:p>
-        </p:txBody>
-      </p:sp>
-      <p:sp>
-        <p:nvSpPr>
-          <p:cNvPr id="18" name="TextBox 17"/>
-          <p:cNvSpPr txBox="1"/>
-          <p:nvPr/>
-        </p:nvSpPr>
-        <p:spPr>
-          <a:xfrm>
-            <a:off x="2255824" y="2980944"/>
-            <a:ext cx="384048" cy="365760"/>
-          </a:xfrm>
-          <a:prstGeom prst="rect">
-            <a:avLst/>
-          </a:prstGeom>
-          <a:noFill/>
-        </p:spPr>
-        <p:txBody>
-          <a:bodyPr wrap="none">
-            <a:spAutoFit/>
-          </a:bodyPr>
-          <a:lstStyle/>
-          <a:p>
-            <a:pPr algn="ctr">
-              <a:spcAft>
-                <a:spcPts val="1000"/>
-              </a:spcAft>
-            </a:pPr>
-            <a:r>
-              <a:rPr sz="1600" b="1">
-                <a:solidFill>
-                  <a:srgbClr val="FFFFFF"/>
-                </a:solidFill>
-                <a:latin typeface="Microsoft YaHei"/>
-              </a:rPr>
-              <a:t>3</a:t>
-            </a:r>
-          </a:p>
-        </p:txBody>
-      </p:sp>
-      <p:sp>
-        <p:nvSpPr>
-          <p:cNvPr id="19" name="TextBox 18"/>
-          <p:cNvSpPr txBox="1"/>
-          <p:nvPr/>
-        </p:nvSpPr>
-        <p:spPr>
-          <a:xfrm>
-            <a:off x="2758744" y="2944368"/>
-            <a:ext cx="7772400" cy="502920"/>
-          </a:xfrm>
-          <a:prstGeom prst="rect">
-            <a:avLst/>
-          </a:prstGeom>
-          <a:noFill/>
-        </p:spPr>
-        <p:txBody>
-          <a:bodyPr wrap="none">
-            <a:spAutoFit/>
-          </a:bodyPr>
-          <a:lstStyle/>
-          <a:p>
-            <a:pPr algn="l">
-              <a:spcAft>
-                <a:spcPts val="1000"/>
-              </a:spcAft>
-            </a:pPr>
-            <a:r>
-              <a:rPr sz="2400" b="0">
-                <a:solidFill>
-                  <a:srgbClr val="502814"/>
-                </a:solidFill>
-                <a:latin typeface="Microsoft YaHei"/>
-              </a:rPr>
-              <a:t>策展主题一：自由可贵，但需守规则</a:t>
+              <a:t>结合课文和生活各举一例说明</a:t>
             </a:r>
           </a:p>
         </p:txBody>
@@ -7029,6 +8995,88 @@
         </p:nvSpPr>
         <p:spPr>
           <a:xfrm>
+            <a:off x="502920" y="384048"/>
+            <a:ext cx="2011680" cy="384048"/>
+          </a:xfrm>
+          <a:prstGeom prst="roundRect">
+            <a:avLst/>
+          </a:prstGeom>
+          <a:solidFill>
+            <a:srgbClr val="3C9664"/>
+          </a:solidFill>
+          <a:ln>
+            <a:noFill/>
+          </a:ln>
+        </p:spPr>
+        <p:style>
+          <a:lnRef idx="1">
+            <a:schemeClr val="accent1"/>
+          </a:lnRef>
+          <a:fillRef idx="3">
+            <a:schemeClr val="accent1"/>
+          </a:fillRef>
+          <a:effectRef idx="2">
+            <a:schemeClr val="accent1"/>
+          </a:effectRef>
+          <a:fontRef idx="minor">
+            <a:schemeClr val="lt1"/>
+          </a:fontRef>
+        </p:style>
+        <p:txBody>
+          <a:bodyPr rtlCol="0" anchor="ctr"/>
+          <a:lstStyle/>
+          <a:p>
+            <a:pPr algn="ctr"/>
+          </a:p>
+        </p:txBody>
+      </p:sp>
+      <p:sp>
+        <p:nvSpPr>
+          <p:cNvPr id="7" name="TextBox 6"/>
+          <p:cNvSpPr txBox="1"/>
+          <p:nvPr/>
+        </p:nvSpPr>
+        <p:spPr>
+          <a:xfrm>
+            <a:off x="502920" y="402336"/>
+            <a:ext cx="2011680" cy="347472"/>
+          </a:xfrm>
+          <a:prstGeom prst="rect">
+            <a:avLst/>
+          </a:prstGeom>
+          <a:noFill/>
+        </p:spPr>
+        <p:txBody>
+          <a:bodyPr wrap="none">
+            <a:spAutoFit/>
+          </a:bodyPr>
+          <a:lstStyle/>
+          <a:p>
+            <a:pPr algn="ctr">
+              <a:spcAft>
+                <a:spcPts val="1000"/>
+              </a:spcAft>
+            </a:pPr>
+            <a:r>
+              <a:rPr sz="1600" b="1">
+                <a:solidFill>
+                  <a:srgbClr val="FFFFFF"/>
+                </a:solidFill>
+                <a:latin typeface="Microsoft YaHei"/>
+              </a:rPr>
+              <a:t>课堂活动</a:t>
+            </a:r>
+          </a:p>
+        </p:txBody>
+      </p:sp>
+      <p:sp>
+        <p:nvSpPr>
+          <p:cNvPr id="8" name="Rounded Rectangle 7"/>
+          <p:cNvSpPr/>
+          <p:nvPr/>
+        </p:nvSpPr>
+        <p:spPr>
+          <a:xfrm>
             <a:off x="4953304" y="502920"/>
             <a:ext cx="2286000" cy="411480"/>
           </a:xfrm>
@@ -7066,7 +9114,7 @@
       </p:sp>
       <p:sp>
         <p:nvSpPr>
-          <p:cNvPr id="7" name="TextBox 6"/>
+          <p:cNvPr id="9" name="TextBox 8"/>
           <p:cNvSpPr txBox="1"/>
           <p:nvPr/>
         </p:nvSpPr>
@@ -7105,7 +9153,7 @@
       </p:sp>
       <p:sp>
         <p:nvSpPr>
-          <p:cNvPr id="8" name="TextBox 7"/>
+          <p:cNvPr id="10" name="TextBox 9"/>
           <p:cNvSpPr txBox="1"/>
           <p:nvPr/>
         </p:nvSpPr>
@@ -7144,7 +9192,7 @@
       </p:sp>
       <p:sp>
         <p:nvSpPr>
-          <p:cNvPr id="9" name="Rectangle 8"/>
+          <p:cNvPr id="11" name="Rectangle 10"/>
           <p:cNvSpPr/>
           <p:nvPr/>
         </p:nvSpPr>
@@ -7187,14 +9235,14 @@
       </p:sp>
       <p:sp>
         <p:nvSpPr>
-          <p:cNvPr id="10" name="Rounded Rectangle 9"/>
+          <p:cNvPr id="12" name="Rounded Rectangle 11"/>
           <p:cNvSpPr/>
           <p:nvPr/>
         </p:nvSpPr>
         <p:spPr>
           <a:xfrm>
             <a:off x="1295704" y="1645920"/>
-            <a:ext cx="9601200" cy="2240280"/>
+            <a:ext cx="9601200" cy="1837944"/>
           </a:xfrm>
           <a:prstGeom prst="roundRect">
             <a:avLst/>
@@ -7232,14 +9280,14 @@
       </p:sp>
       <p:sp>
         <p:nvSpPr>
-          <p:cNvPr id="11" name="Oval 10"/>
+          <p:cNvPr id="13" name="Oval 12"/>
           <p:cNvSpPr/>
           <p:nvPr/>
         </p:nvSpPr>
         <p:spPr>
           <a:xfrm>
             <a:off x="2255824" y="1828800"/>
-            <a:ext cx="384048" cy="384048"/>
+            <a:ext cx="347472" cy="347472"/>
           </a:xfrm>
           <a:prstGeom prst="ellipse">
             <a:avLst/>
@@ -7275,14 +9323,14 @@
       </p:sp>
       <p:sp>
         <p:nvSpPr>
-          <p:cNvPr id="12" name="TextBox 11"/>
+          <p:cNvPr id="14" name="TextBox 13"/>
           <p:cNvSpPr txBox="1"/>
           <p:nvPr/>
         </p:nvSpPr>
         <p:spPr>
           <a:xfrm>
             <a:off x="2255824" y="1847088"/>
-            <a:ext cx="384048" cy="365760"/>
+            <a:ext cx="347472" cy="329184"/>
           </a:xfrm>
           <a:prstGeom prst="rect">
             <a:avLst/>
@@ -7301,7 +9349,7 @@
               </a:spcAft>
             </a:pPr>
             <a:r>
-              <a:rPr sz="1600" b="1">
+              <a:rPr sz="1400" b="1">
                 <a:solidFill>
                   <a:srgbClr val="FFFFFF"/>
                 </a:solidFill>
@@ -7314,14 +9362,14 @@
       </p:sp>
       <p:sp>
         <p:nvSpPr>
-          <p:cNvPr id="13" name="TextBox 12"/>
+          <p:cNvPr id="15" name="TextBox 14"/>
           <p:cNvSpPr txBox="1"/>
           <p:nvPr/>
         </p:nvSpPr>
         <p:spPr>
           <a:xfrm>
-            <a:off x="2758744" y="1810512"/>
-            <a:ext cx="7772400" cy="502920"/>
+            <a:off x="2713024" y="1810512"/>
+            <a:ext cx="7863840" cy="457200"/>
           </a:xfrm>
           <a:prstGeom prst="rect">
             <a:avLst/>
@@ -7340,27 +9388,27 @@
               </a:spcAft>
             </a:pPr>
             <a:r>
-              <a:rPr sz="2400" b="0">
+              <a:rPr sz="2200" b="0">
                 <a:solidFill>
                   <a:srgbClr val="502814"/>
                 </a:solidFill>
                 <a:latin typeface="Microsoft YaHei"/>
               </a:rPr>
-              <a:t>想象精彩，来自变化中的因果回应</a:t>
-            </a:r>
-          </a:p>
-        </p:txBody>
-      </p:sp>
-      <p:sp>
-        <p:nvSpPr>
-          <p:cNvPr id="14" name="Oval 13"/>
+              <a:t>神魔小说：想象在「相克」中见趣味，在斗法中见人情</a:t>
+            </a:r>
+          </a:p>
+        </p:txBody>
+      </p:sp>
+      <p:sp>
+        <p:nvSpPr>
+          <p:cNvPr id="16" name="Oval 15"/>
           <p:cNvSpPr/>
           <p:nvPr/>
         </p:nvSpPr>
         <p:spPr>
           <a:xfrm>
-            <a:off x="2255824" y="2395728"/>
-            <a:ext cx="384048" cy="384048"/>
+            <a:off x="2255824" y="2304288"/>
+            <a:ext cx="347472" cy="347472"/>
           </a:xfrm>
           <a:prstGeom prst="ellipse">
             <a:avLst/>
@@ -7396,14 +9444,14 @@
       </p:sp>
       <p:sp>
         <p:nvSpPr>
-          <p:cNvPr id="15" name="TextBox 14"/>
+          <p:cNvPr id="17" name="TextBox 16"/>
           <p:cNvSpPr txBox="1"/>
           <p:nvPr/>
         </p:nvSpPr>
         <p:spPr>
           <a:xfrm>
-            <a:off x="2255824" y="2414016"/>
-            <a:ext cx="384048" cy="365760"/>
+            <a:off x="2255824" y="2322576"/>
+            <a:ext cx="347472" cy="329184"/>
           </a:xfrm>
           <a:prstGeom prst="rect">
             <a:avLst/>
@@ -7422,7 +9470,7 @@
               </a:spcAft>
             </a:pPr>
             <a:r>
-              <a:rPr sz="1600" b="1">
+              <a:rPr sz="1400" b="1">
                 <a:solidFill>
                   <a:srgbClr val="FFFFFF"/>
                 </a:solidFill>
@@ -7435,14 +9483,14 @@
       </p:sp>
       <p:sp>
         <p:nvSpPr>
-          <p:cNvPr id="16" name="TextBox 15"/>
+          <p:cNvPr id="18" name="TextBox 17"/>
           <p:cNvSpPr txBox="1"/>
           <p:nvPr/>
         </p:nvSpPr>
         <p:spPr>
           <a:xfrm>
-            <a:off x="2758744" y="2377440"/>
-            <a:ext cx="7772400" cy="502920"/>
+            <a:off x="2713024" y="2286000"/>
+            <a:ext cx="7863840" cy="457200"/>
           </a:xfrm>
           <a:prstGeom prst="rect">
             <a:avLst/>
@@ -7461,27 +9509,27 @@
               </a:spcAft>
             </a:pPr>
             <a:r>
-              <a:rPr sz="2400" b="0">
+              <a:rPr sz="2200" b="0">
                 <a:solidFill>
                   <a:srgbClr val="502814"/>
                 </a:solidFill>
                 <a:latin typeface="Microsoft YaHei"/>
               </a:rPr>
-              <a:t>神魔有法力，也有机敏、急切、好胜等人情味</a:t>
-            </a:r>
-          </a:p>
-        </p:txBody>
-      </p:sp>
-      <p:sp>
-        <p:nvSpPr>
-          <p:cNvPr id="17" name="Oval 16"/>
+              <a:t>变化链是因果回应，不是随意编造</a:t>
+            </a:r>
+          </a:p>
+        </p:txBody>
+      </p:sp>
+      <p:sp>
+        <p:nvSpPr>
+          <p:cNvPr id="19" name="Oval 18"/>
           <p:cNvSpPr/>
           <p:nvPr/>
         </p:nvSpPr>
         <p:spPr>
           <a:xfrm>
-            <a:off x="2255824" y="2962656"/>
-            <a:ext cx="384048" cy="384048"/>
+            <a:off x="2255824" y="2779776"/>
+            <a:ext cx="347472" cy="347472"/>
           </a:xfrm>
           <a:prstGeom prst="ellipse">
             <a:avLst/>
@@ -7517,14 +9565,14 @@
       </p:sp>
       <p:sp>
         <p:nvSpPr>
-          <p:cNvPr id="18" name="TextBox 17"/>
+          <p:cNvPr id="20" name="TextBox 19"/>
           <p:cNvSpPr txBox="1"/>
           <p:nvPr/>
         </p:nvSpPr>
         <p:spPr>
           <a:xfrm>
-            <a:off x="2255824" y="2980944"/>
-            <a:ext cx="384048" cy="365760"/>
+            <a:off x="2255824" y="2798064"/>
+            <a:ext cx="347472" cy="329184"/>
           </a:xfrm>
           <a:prstGeom prst="rect">
             <a:avLst/>
@@ -7543,7 +9591,7 @@
               </a:spcAft>
             </a:pPr>
             <a:r>
-              <a:rPr sz="1600" b="1">
+              <a:rPr sz="1400" b="1">
                 <a:solidFill>
                   <a:srgbClr val="FFFFFF"/>
                 </a:solidFill>
@@ -7556,14 +9604,14 @@
       </p:sp>
       <p:sp>
         <p:nvSpPr>
-          <p:cNvPr id="19" name="TextBox 18"/>
+          <p:cNvPr id="21" name="TextBox 20"/>
           <p:cNvSpPr txBox="1"/>
           <p:nvPr/>
         </p:nvSpPr>
         <p:spPr>
           <a:xfrm>
-            <a:off x="2758744" y="2944368"/>
-            <a:ext cx="7772400" cy="502920"/>
+            <a:off x="2713024" y="2761488"/>
+            <a:ext cx="7863840" cy="457200"/>
           </a:xfrm>
           <a:prstGeom prst="rect">
             <a:avLst/>
@@ -7582,13 +9630,13 @@
               </a:spcAft>
             </a:pPr>
             <a:r>
-              <a:rPr sz="2400" b="0">
+              <a:rPr sz="2200" b="0">
                 <a:solidFill>
                   <a:srgbClr val="502814"/>
                 </a:solidFill>
                 <a:latin typeface="Microsoft YaHei"/>
               </a:rPr>
-              <a:t>策展主题：自由与规则</a:t>
+              <a:t>策展主题一：自由与规则</a:t>
             </a:r>
           </a:p>
         </p:txBody>
@@ -7734,6 +9782,88 @@
         </p:nvSpPr>
         <p:spPr>
           <a:xfrm>
+            <a:off x="502920" y="384048"/>
+            <a:ext cx="2011680" cy="384048"/>
+          </a:xfrm>
+          <a:prstGeom prst="roundRect">
+            <a:avLst/>
+          </a:prstGeom>
+          <a:solidFill>
+            <a:srgbClr val="3C9664"/>
+          </a:solidFill>
+          <a:ln>
+            <a:noFill/>
+          </a:ln>
+        </p:spPr>
+        <p:style>
+          <a:lnRef idx="1">
+            <a:schemeClr val="accent1"/>
+          </a:lnRef>
+          <a:fillRef idx="3">
+            <a:schemeClr val="accent1"/>
+          </a:fillRef>
+          <a:effectRef idx="2">
+            <a:schemeClr val="accent1"/>
+          </a:effectRef>
+          <a:fontRef idx="minor">
+            <a:schemeClr val="lt1"/>
+          </a:fontRef>
+        </p:style>
+        <p:txBody>
+          <a:bodyPr rtlCol="0" anchor="ctr"/>
+          <a:lstStyle/>
+          <a:p>
+            <a:pPr algn="ctr"/>
+          </a:p>
+        </p:txBody>
+      </p:sp>
+      <p:sp>
+        <p:nvSpPr>
+          <p:cNvPr id="7" name="TextBox 6"/>
+          <p:cNvSpPr txBox="1"/>
+          <p:nvPr/>
+        </p:nvSpPr>
+        <p:spPr>
+          <a:xfrm>
+            <a:off x="502920" y="402336"/>
+            <a:ext cx="2011680" cy="347472"/>
+          </a:xfrm>
+          <a:prstGeom prst="rect">
+            <a:avLst/>
+          </a:prstGeom>
+          <a:noFill/>
+        </p:spPr>
+        <p:txBody>
+          <a:bodyPr wrap="none">
+            <a:spAutoFit/>
+          </a:bodyPr>
+          <a:lstStyle/>
+          <a:p>
+            <a:pPr algn="ctr">
+              <a:spcAft>
+                <a:spcPts val="1000"/>
+              </a:spcAft>
+            </a:pPr>
+            <a:r>
+              <a:rPr sz="1600" b="1">
+                <a:solidFill>
+                  <a:srgbClr val="FFFFFF"/>
+                </a:solidFill>
+                <a:latin typeface="Microsoft YaHei"/>
+              </a:rPr>
+              <a:t>课堂活动</a:t>
+            </a:r>
+          </a:p>
+        </p:txBody>
+      </p:sp>
+      <p:sp>
+        <p:nvSpPr>
+          <p:cNvPr id="8" name="Rounded Rectangle 7"/>
+          <p:cNvSpPr/>
+          <p:nvPr/>
+        </p:nvSpPr>
+        <p:spPr>
+          <a:xfrm>
             <a:off x="4953304" y="502920"/>
             <a:ext cx="2286000" cy="411480"/>
           </a:xfrm>
@@ -7771,7 +9901,7 @@
       </p:sp>
       <p:sp>
         <p:nvSpPr>
-          <p:cNvPr id="7" name="TextBox 6"/>
+          <p:cNvPr id="9" name="TextBox 8"/>
           <p:cNvSpPr txBox="1"/>
           <p:nvPr/>
         </p:nvSpPr>
@@ -7810,7 +9940,7 @@
       </p:sp>
       <p:sp>
         <p:nvSpPr>
-          <p:cNvPr id="8" name="TextBox 7"/>
+          <p:cNvPr id="10" name="TextBox 9"/>
           <p:cNvSpPr txBox="1"/>
           <p:nvPr/>
         </p:nvSpPr>
@@ -7849,7 +9979,7 @@
       </p:sp>
       <p:sp>
         <p:nvSpPr>
-          <p:cNvPr id="9" name="Rectangle 8"/>
+          <p:cNvPr id="11" name="Rectangle 10"/>
           <p:cNvSpPr/>
           <p:nvPr/>
         </p:nvSpPr>
@@ -7892,14 +10022,14 @@
       </p:sp>
       <p:sp>
         <p:nvSpPr>
-          <p:cNvPr id="10" name="Rounded Rectangle 9"/>
+          <p:cNvPr id="12" name="Rounded Rectangle 11"/>
           <p:cNvSpPr/>
           <p:nvPr/>
         </p:nvSpPr>
         <p:spPr>
           <a:xfrm>
             <a:off x="1295704" y="1645920"/>
-            <a:ext cx="9601200" cy="1645920"/>
+            <a:ext cx="9601200" cy="1545336"/>
           </a:xfrm>
           <a:prstGeom prst="roundRect">
             <a:avLst/>
@@ -7937,14 +10067,14 @@
       </p:sp>
       <p:sp>
         <p:nvSpPr>
-          <p:cNvPr id="11" name="Oval 10"/>
+          <p:cNvPr id="13" name="Oval 12"/>
           <p:cNvSpPr/>
           <p:nvPr/>
         </p:nvSpPr>
         <p:spPr>
           <a:xfrm>
             <a:off x="2255824" y="1828800"/>
-            <a:ext cx="384048" cy="384048"/>
+            <a:ext cx="347472" cy="347472"/>
           </a:xfrm>
           <a:prstGeom prst="ellipse">
             <a:avLst/>
@@ -7980,14 +10110,14 @@
       </p:sp>
       <p:sp>
         <p:nvSpPr>
-          <p:cNvPr id="12" name="TextBox 11"/>
+          <p:cNvPr id="14" name="TextBox 13"/>
           <p:cNvSpPr txBox="1"/>
           <p:nvPr/>
         </p:nvSpPr>
         <p:spPr>
           <a:xfrm>
             <a:off x="2255824" y="1847088"/>
-            <a:ext cx="384048" cy="365760"/>
+            <a:ext cx="347472" cy="329184"/>
           </a:xfrm>
           <a:prstGeom prst="rect">
             <a:avLst/>
@@ -8006,7 +10136,7 @@
               </a:spcAft>
             </a:pPr>
             <a:r>
-              <a:rPr sz="1600" b="1">
+              <a:rPr sz="1400" b="1">
                 <a:solidFill>
                   <a:srgbClr val="FFFFFF"/>
                 </a:solidFill>
@@ -8019,14 +10149,14 @@
       </p:sp>
       <p:sp>
         <p:nvSpPr>
-          <p:cNvPr id="13" name="TextBox 12"/>
+          <p:cNvPr id="15" name="TextBox 14"/>
           <p:cNvSpPr txBox="1"/>
           <p:nvPr/>
         </p:nvSpPr>
         <p:spPr>
           <a:xfrm>
-            <a:off x="2758744" y="1810512"/>
-            <a:ext cx="7772400" cy="502920"/>
+            <a:off x="2713024" y="1810512"/>
+            <a:ext cx="7863840" cy="457200"/>
           </a:xfrm>
           <a:prstGeom prst="rect">
             <a:avLst/>
@@ -8058,14 +10188,14 @@
       </p:sp>
       <p:sp>
         <p:nvSpPr>
-          <p:cNvPr id="14" name="Oval 13"/>
+          <p:cNvPr id="16" name="Oval 15"/>
           <p:cNvSpPr/>
           <p:nvPr/>
         </p:nvSpPr>
         <p:spPr>
           <a:xfrm>
             <a:off x="2255824" y="2395728"/>
-            <a:ext cx="384048" cy="384048"/>
+            <a:ext cx="347472" cy="347472"/>
           </a:xfrm>
           <a:prstGeom prst="ellipse">
             <a:avLst/>
@@ -8101,14 +10231,14 @@
       </p:sp>
       <p:sp>
         <p:nvSpPr>
-          <p:cNvPr id="15" name="TextBox 14"/>
+          <p:cNvPr id="17" name="TextBox 16"/>
           <p:cNvSpPr txBox="1"/>
           <p:nvPr/>
         </p:nvSpPr>
         <p:spPr>
           <a:xfrm>
             <a:off x="2255824" y="2414016"/>
-            <a:ext cx="384048" cy="365760"/>
+            <a:ext cx="347472" cy="329184"/>
           </a:xfrm>
           <a:prstGeom prst="rect">
             <a:avLst/>
@@ -8127,7 +10257,7 @@
               </a:spcAft>
             </a:pPr>
             <a:r>
-              <a:rPr sz="1600" b="1">
+              <a:rPr sz="1400" b="1">
                 <a:solidFill>
                   <a:srgbClr val="FFFFFF"/>
                 </a:solidFill>
@@ -8140,14 +10270,14 @@
       </p:sp>
       <p:sp>
         <p:nvSpPr>
-          <p:cNvPr id="16" name="TextBox 15"/>
+          <p:cNvPr id="18" name="TextBox 17"/>
           <p:cNvSpPr txBox="1"/>
           <p:nvPr/>
         </p:nvSpPr>
         <p:spPr>
           <a:xfrm>
-            <a:off x="2758744" y="2377440"/>
-            <a:ext cx="7772400" cy="502920"/>
+            <a:off x="2713024" y="2377440"/>
+            <a:ext cx="7863840" cy="457200"/>
           </a:xfrm>
           <a:prstGeom prst="rect">
             <a:avLst/>
@@ -8172,7 +10302,7 @@
                 </a:solidFill>
                 <a:latin typeface="Microsoft YaHei"/>
               </a:rPr>
-              <a:t>链接：作者吴承恩，成书明代，再写一个经典情节</a:t>
+              <a:t>积累：《西游记》作者吴承恩，成书明代；再写一个孙悟空经典情节</a:t>
             </a:r>
           </a:p>
         </p:txBody>
